--- a/author-profile.pptx
+++ b/author-profile.pptx
@@ -512,16 +512,7 @@
           <a:bodyPr/>
           <a:lstStyle/>
           <a:p>
-            <a:r>
-              <a:rPr lang="en-US" dirty="0"/>
-              <a:t>Sources: Shivam Singh resume variants: AI PMM, AI Product, Growth Marketing, Partner GTM, AI TPM, Strategy. Acronyms defined inline: GTM = go-to-market; PMF = product-market fit; PLG = product-led growth. Slide is designed as an executive spoken answer, not a prep-note checklist.</a:t>
-            </a:r>
-          </a:p>
-          <a:p>
-            <a:r>
-              <a:rPr lang="en-US"/>
-              <a:t>Spoken answer: I turn complex AI platforms into adoption across strategy, product, growth and enterprise GTM. Mistral Studio is the logical next step: it unites fast builder self-service with trusted enterprise production.</a:t>
-            </a:r>
+            <a:endParaRPr lang="en-US" dirty="0"/>
           </a:p>
         </p:txBody>
       </p:sp>
@@ -665,10 +656,7 @@
           <a:bodyPr/>
           <a:lstStyle/>
           <a:p>
-            <a:r>
-              <a:rPr lang="en-US" dirty="0"/>
-              <a:t>Sources: AI PMM resume for research-led repositioning, metrics and Japanese localization. AI Product / AI TPM resumes for RAG, evaluations, human-in-the-loop controls and guardrails.</a:t>
-            </a:r>
+            <a:endParaRPr lang="en-US" dirty="0"/>
           </a:p>
         </p:txBody>
       </p:sp>
@@ -812,10 +800,7 @@
           <a:bodyPr/>
           <a:lstStyle/>
           <a:p>
-            <a:r>
-              <a:rPr lang="en-US" dirty="0"/>
-              <a:t>Sources: AI PMM, AI Product, Partner GTM, Strategy and Investments resumes. PMF = product-market fit. Evidence includes 70+ business units, 50K+ merchants, buy-intelligence/build-context thesis, external foundation model, PII protection, hybrid retrieval, knowledge graph, standalone chatbot discontinuation, adoption/outcomes.</a:t>
-            </a:r>
+            <a:endParaRPr lang="en-US" dirty="0"/>
           </a:p>
         </p:txBody>
       </p:sp>
@@ -959,10 +944,7 @@
           <a:bodyPr/>
           <a:lstStyle/>
           <a:p>
-            <a:r>
-              <a:rPr lang="en-US" dirty="0"/>
-              <a:t>Sources: AI PMM, AI Product and Growth Marketing resumes. Acronyms defined inline: PLG = product-led growth; NRR = net revenue retention; ASO = App Store Optimization; RICE = reach, impact, confidence, effort. Evidence includes activation +262%, NRR 102%→128%, churn 14%→6.5%, win-back 4%→22%, lifecycle telemetry, time-to-first-value, cohort analysis, propensity models and campaign channels.</a:t>
-            </a:r>
+            <a:endParaRPr lang="en-US" dirty="0"/>
           </a:p>
         </p:txBody>
       </p:sp>
@@ -1106,10 +1088,7 @@
           <a:bodyPr/>
           <a:lstStyle/>
           <a:p>
-            <a:r>
-              <a:rPr lang="en-US" dirty="0"/>
-              <a:t>Sources: Partner GTM, AI TPM and FinTech Product resumes. FHE = fully homomorphic encryption. Evidence includes regulated customer objections, compliance-as-a-feature messaging, product/engineering/legal/field alignment, FHE→confidential computing pivot, latency 14s→220ms, SOPs across 10+ customer engagements, time-to-compliance 9→3 months, zero breaches, AI ROI +61%, $5M rescue and $2M upsell.</a:t>
-            </a:r>
+            <a:endParaRPr lang="en-US" dirty="0"/>
           </a:p>
         </p:txBody>
       </p:sp>
@@ -10618,7 +10597,7 @@
               <a:defRPr/>
             </a:pPr>
             <a:r>
-              <a:rPr kumimoji="0" lang="en-US" sz="1000" b="0" i="0" u="none" strike="noStrike" kern="1200" cap="none" spc="0" normalizeH="0" baseline="0" noProof="0">
+              <a:rPr kumimoji="0" lang="en-US" sz="1000" b="0" i="0" u="none" strike="noStrike" kern="1200" cap="none" spc="0" normalizeH="0" baseline="0" noProof="0" dirty="0">
                 <a:ln>
                   <a:noFill/>
                 </a:ln>
@@ -10632,7 +10611,7 @@
                 <a:ea typeface="+mn-ea"/>
                 <a:cs typeface="+mn-cs"/>
               </a:rPr>
-              <a:t>NRR = net revenue retention; activation = meaningful first value; churn = users leaving; win-back = returning lost users.</a:t>
+              <a:t>NRR = net revenue retention; activation = meaningful first value; win-back = returning lost users; ASO = App Store Optimization</a:t>
             </a:r>
           </a:p>
         </p:txBody>

--- a/author-profile.pptx
+++ b/author-profile.pptx
@@ -512,7 +512,210 @@
           <a:bodyPr/>
           <a:lstStyle/>
           <a:p>
+            <a:r>
+              <a:rPr lang="en-US" b="1" dirty="0"/>
+              <a:t>Tell me about yourself</a:t>
+            </a:r>
+          </a:p>
+          <a:p>
+            <a:pPr marL="0" marR="0" lvl="0" indent="0" algn="l" defTabSz="914400" rtl="0" eaLnBrk="1" fontAlgn="auto" latinLnBrk="0" hangingPunct="1">
+              <a:lnSpc>
+                <a:spcPct val="100000"/>
+              </a:lnSpc>
+              <a:spcBef>
+                <a:spcPts val="0"/>
+              </a:spcBef>
+              <a:spcAft>
+                <a:spcPts val="0"/>
+              </a:spcAft>
+              <a:buClrTx/>
+              <a:buSzTx/>
+              <a:buFontTx/>
+              <a:buNone/>
+              <a:tabLst/>
+              <a:defRPr/>
+            </a:pPr>
+            <a:r>
+              <a:rPr lang="en-US" dirty="0"/>
+              <a:t>My background sits at the intersection of AI, product and go-to-market. I've spent ten years making complex, regulated technology (AI and cloud capabilities) buyable(into products customers can understand, adopt and buy). </a:t>
+            </a:r>
+          </a:p>
+          <a:p>
+            <a:pPr marL="0" marR="0" lvl="0" indent="0" algn="l" defTabSz="914400" rtl="0" eaLnBrk="1" fontAlgn="auto" latinLnBrk="0" hangingPunct="1">
+              <a:lnSpc>
+                <a:spcPct val="100000"/>
+              </a:lnSpc>
+              <a:spcBef>
+                <a:spcPts val="0"/>
+              </a:spcBef>
+              <a:spcAft>
+                <a:spcPts val="0"/>
+              </a:spcAft>
+              <a:buClrTx/>
+              <a:buSzTx/>
+              <a:buFontTx/>
+              <a:buNone/>
+              <a:tabLst/>
+              <a:defRPr/>
+            </a:pPr>
             <a:endParaRPr lang="en-US" dirty="0"/>
+          </a:p>
+          <a:p>
+            <a:pPr marL="0" marR="0" lvl="0" indent="0" algn="l" defTabSz="914400" rtl="0" eaLnBrk="1" fontAlgn="auto" latinLnBrk="0" hangingPunct="1">
+              <a:lnSpc>
+                <a:spcPct val="100000"/>
+              </a:lnSpc>
+              <a:spcBef>
+                <a:spcPts val="0"/>
+              </a:spcBef>
+              <a:spcAft>
+                <a:spcPts val="0"/>
+              </a:spcAft>
+              <a:buClrTx/>
+              <a:buSzTx/>
+              <a:buFontTx/>
+              <a:buNone/>
+              <a:tabLst/>
+              <a:defRPr/>
+            </a:pPr>
+            <a:r>
+              <a:rPr lang="en-US" dirty="0"/>
+              <a:t>Mistral Studio is exactly that problem — the models are good; the job is making enterprise builders trust them enough to ship to production. Studio's opportunity is to turn Mistral from a model developers experiment with into the AI platform enterprises build and operate on.</a:t>
+            </a:r>
+            <a:endParaRPr lang="en-US" b="1" dirty="0"/>
+          </a:p>
+          <a:p>
+            <a:endParaRPr lang="en-US" b="1" dirty="0"/>
+          </a:p>
+          <a:p>
+            <a:r>
+              <a:rPr lang="en-US" b="1" dirty="0"/>
+              <a:t>Why Mistral?</a:t>
+            </a:r>
+          </a:p>
+          <a:p>
+            <a:r>
+              <a:rPr lang="en-US" dirty="0"/>
+              <a:t>AWS has given me tremendous exposure to scaling enterprise AI, but Mistral offers something different: the opportunity to shape the category narrative, at a company where product marketing can materially influence how the market understands the product.</a:t>
+            </a:r>
+            <a:endParaRPr lang="en-US" b="1" dirty="0"/>
+          </a:p>
+          <a:p>
+            <a:endParaRPr lang="en-US" dirty="0"/>
+          </a:p>
+          <a:p>
+            <a:pPr marL="0" marR="0" lvl="0" indent="0" algn="l" defTabSz="914400" rtl="0" eaLnBrk="1" fontAlgn="auto" latinLnBrk="0" hangingPunct="1">
+              <a:lnSpc>
+                <a:spcPct val="100000"/>
+              </a:lnSpc>
+              <a:spcBef>
+                <a:spcPts val="0"/>
+              </a:spcBef>
+              <a:spcAft>
+                <a:spcPts val="0"/>
+              </a:spcAft>
+              <a:buClrTx/>
+              <a:buSzTx/>
+              <a:buFontTx/>
+              <a:buNone/>
+              <a:tabLst/>
+              <a:defRPr/>
+            </a:pPr>
+            <a:r>
+              <a:rPr lang="en-US" b="1" dirty="0"/>
+              <a:t>One:</a:t>
+            </a:r>
+            <a:r>
+              <a:rPr lang="en-US" dirty="0"/>
+              <a:t> I've spent four years watching regulated buyers want frontier AI and be unable to legally deploy it. Mistral is the only credible answer for that buyer in Europe, and I've sold to that buyer at Microsoft and AWS. </a:t>
+            </a:r>
+          </a:p>
+          <a:p>
+            <a:pPr marL="0" marR="0" lvl="0" indent="0" algn="l" defTabSz="914400" rtl="0" eaLnBrk="1" fontAlgn="auto" latinLnBrk="0" hangingPunct="1">
+              <a:lnSpc>
+                <a:spcPct val="100000"/>
+              </a:lnSpc>
+              <a:spcBef>
+                <a:spcPts val="0"/>
+              </a:spcBef>
+              <a:spcAft>
+                <a:spcPts val="0"/>
+              </a:spcAft>
+              <a:buClrTx/>
+              <a:buSzTx/>
+              <a:buFontTx/>
+              <a:buNone/>
+              <a:tabLst/>
+              <a:defRPr/>
+            </a:pPr>
+            <a:r>
+              <a:rPr lang="en-US" b="1" dirty="0"/>
+              <a:t>Two:</a:t>
+            </a:r>
+            <a:r>
+              <a:rPr lang="en-US" dirty="0"/>
+              <a:t> the open-weight bet is about to be decided — the next 18 months determine whether enterprises standardize on rented APIs or owned models. </a:t>
+            </a:r>
+            <a:r>
+              <a:rPr lang="en-US" b="1" dirty="0"/>
+              <a:t>I'd rather be the person arguing the second case than the tenth PMM at a company arguing the first.</a:t>
+            </a:r>
+            <a:endParaRPr lang="en-US" dirty="0"/>
+          </a:p>
+          <a:p>
+            <a:endParaRPr lang="en-US" dirty="0"/>
+          </a:p>
+          <a:p>
+            <a:pPr marL="0" marR="0" lvl="0" indent="0" algn="l" defTabSz="914400" rtl="0" eaLnBrk="1" fontAlgn="auto" latinLnBrk="0" hangingPunct="1">
+              <a:lnSpc>
+                <a:spcPct val="100000"/>
+              </a:lnSpc>
+              <a:spcBef>
+                <a:spcPts val="0"/>
+              </a:spcBef>
+              <a:spcAft>
+                <a:spcPts val="0"/>
+              </a:spcAft>
+              <a:buClrTx/>
+              <a:buSzTx/>
+              <a:buFontTx/>
+              <a:buNone/>
+              <a:tabLst/>
+              <a:defRPr/>
+            </a:pPr>
+            <a:r>
+              <a:rPr lang="en-US" dirty="0"/>
+              <a:t>Mistral’s differentiation is bigger than model benchmarks. Mistral can offer enterprises much more control over how they build and deploy AI — particularly around sovereignty, deployment choice and open models. The PMM opportunity is to turn those technical advantages into a much simpler customer story: </a:t>
+            </a:r>
+            <a:r>
+              <a:rPr lang="en-US" b="1" dirty="0"/>
+              <a:t>why should an enterprise build and run production AI on Mistral rather than just consume another model API? </a:t>
+            </a:r>
+            <a:r>
+              <a:rPr lang="en-US" dirty="0"/>
+              <a:t>The interesting challenge with Studio is connecting the entire journey from developer experimentation to enterprise production. </a:t>
+            </a:r>
+          </a:p>
+          <a:p>
+            <a:endParaRPr lang="en-US" dirty="0"/>
+          </a:p>
+          <a:p>
+            <a:r>
+              <a:rPr lang="en-US" b="1" dirty="0"/>
+              <a:t>Questions</a:t>
+            </a:r>
+          </a:p>
+          <a:p>
+            <a:r>
+              <a:rPr lang="en-US" dirty="0"/>
+              <a:t>How is ownership divided between Studio product marketing, Developer Relations, solutions PMM and the GTM organization?</a:t>
+            </a:r>
+          </a:p>
+          <a:p>
+            <a:r>
+              <a:rPr lang="en-US" dirty="0"/>
+              <a:t>What is the biggest outcome Mistral wants this person to change — Studio's positioning, developer adoption, enterprise pipeline, or competitive win rate?</a:t>
+            </a:r>
           </a:p>
         </p:txBody>
       </p:sp>
@@ -656,7 +859,353 @@
           <a:bodyPr/>
           <a:lstStyle/>
           <a:p>
+            <a:pPr marL="0" marR="0" lvl="0" indent="0" algn="l" defTabSz="914400" rtl="0" eaLnBrk="1" fontAlgn="auto" latinLnBrk="0" hangingPunct="1">
+              <a:lnSpc>
+                <a:spcPct val="100000"/>
+              </a:lnSpc>
+              <a:spcBef>
+                <a:spcPts val="0"/>
+              </a:spcBef>
+              <a:spcAft>
+                <a:spcPts val="0"/>
+              </a:spcAft>
+              <a:buClrTx/>
+              <a:buSzTx/>
+              <a:buFontTx/>
+              <a:buNone/>
+              <a:tabLst/>
+              <a:defRPr/>
+            </a:pPr>
+            <a:r>
+              <a:rPr lang="en-US" b="1" dirty="0"/>
+              <a:t>Developer/platform PMM</a:t>
+            </a:r>
+            <a:r>
+              <a:rPr lang="en-US" dirty="0"/>
+              <a:t> — I ran positioning for a managed agent platform at AWS connecting foundation models to private enterprise data (access controls, audit traces, approvals, cost-quality routing). Where I use customer research and product telemetry to sharpen the positioning, build the launch and adoption strategy, and helped drive adoption while improving brand favorability. </a:t>
+            </a:r>
+          </a:p>
+          <a:p>
+            <a:pPr marL="0" marR="0" lvl="0" indent="0" algn="l" defTabSz="914400" rtl="0" eaLnBrk="1" fontAlgn="auto" latinLnBrk="0" hangingPunct="1">
+              <a:lnSpc>
+                <a:spcPct val="100000"/>
+              </a:lnSpc>
+              <a:spcBef>
+                <a:spcPts val="0"/>
+              </a:spcBef>
+              <a:spcAft>
+                <a:spcPts val="0"/>
+              </a:spcAft>
+              <a:buClrTx/>
+              <a:buSzTx/>
+              <a:buFontTx/>
+              <a:buNone/>
+              <a:tabLst/>
+              <a:defRPr/>
+            </a:pPr>
+            <a:endParaRPr lang="en-US" b="0" dirty="0"/>
+          </a:p>
+          <a:p>
+            <a:pPr marL="0" marR="0" lvl="0" indent="0" algn="l" defTabSz="914400" rtl="0" eaLnBrk="1" fontAlgn="auto" latinLnBrk="0" hangingPunct="1">
+              <a:lnSpc>
+                <a:spcPct val="100000"/>
+              </a:lnSpc>
+              <a:spcBef>
+                <a:spcPts val="0"/>
+              </a:spcBef>
+              <a:spcAft>
+                <a:spcPts val="0"/>
+              </a:spcAft>
+              <a:buClrTx/>
+              <a:buSzTx/>
+              <a:buFontTx/>
+              <a:buNone/>
+              <a:tabLst/>
+              <a:defRPr/>
+            </a:pPr>
+            <a:r>
+              <a:rPr lang="en-US" b="1" dirty="0"/>
+              <a:t>How do you market a technical product without hype?</a:t>
+            </a:r>
+            <a:br>
+              <a:rPr lang="en-US" dirty="0"/>
+            </a:br>
+            <a:r>
+              <a:rPr lang="en-US" dirty="0"/>
+              <a:t>At AWS I repositioned an AI shopping experience away from open-ended conversation toward decision support — that came from behavioral telemetry, not a brand workshop. I replace claims with </a:t>
+            </a:r>
+            <a:r>
+              <a:rPr lang="en-US" b="1" dirty="0"/>
+              <a:t>evidence artifacts</a:t>
+            </a:r>
+            <a:r>
+              <a:rPr lang="en-US" dirty="0"/>
+              <a:t>.</a:t>
+            </a:r>
+            <a:endParaRPr lang="en-US" b="0" dirty="0"/>
+          </a:p>
+          <a:p>
+            <a:pPr marL="0" marR="0" lvl="0" indent="0" algn="l" defTabSz="914400" rtl="0" eaLnBrk="1" fontAlgn="auto" latinLnBrk="0" hangingPunct="1">
+              <a:lnSpc>
+                <a:spcPct val="100000"/>
+              </a:lnSpc>
+              <a:spcBef>
+                <a:spcPts val="0"/>
+              </a:spcBef>
+              <a:spcAft>
+                <a:spcPts val="0"/>
+              </a:spcAft>
+              <a:buClrTx/>
+              <a:buSzTx/>
+              <a:buFontTx/>
+              <a:buNone/>
+              <a:tabLst/>
+              <a:defRPr/>
+            </a:pPr>
             <a:endParaRPr lang="en-US" dirty="0"/>
+          </a:p>
+          <a:p>
+            <a:pPr rtl="0"/>
+            <a:r>
+              <a:rPr lang="en-US" b="1" dirty="0"/>
+              <a:t>How do you measure PMM success?</a:t>
+            </a:r>
+            <a:br>
+              <a:rPr lang="en-US" dirty="0"/>
+            </a:br>
+            <a:r>
+              <a:rPr lang="en-US" dirty="0"/>
+              <a:t>Not MQLs. Three tiers:</a:t>
+            </a:r>
+          </a:p>
+          <a:p>
+            <a:pPr lvl="0" rtl="0"/>
+            <a:r>
+              <a:rPr lang="en-US" b="1" dirty="0"/>
+              <a:t>Leading:</a:t>
+            </a:r>
+            <a:r>
+              <a:rPr lang="en-US" dirty="0"/>
+              <a:t> message resonance in win/loss, docs-to-first-call conversion, sales objection frequency.</a:t>
+            </a:r>
+          </a:p>
+          <a:p>
+            <a:pPr lvl="0" rtl="0"/>
+            <a:r>
+              <a:rPr lang="en-US" b="1" dirty="0"/>
+              <a:t>Activation:</a:t>
+            </a:r>
+            <a:r>
+              <a:rPr lang="en-US" dirty="0"/>
+              <a:t> signup → </a:t>
+            </a:r>
+            <a:r>
+              <a:rPr lang="en-US" b="1" dirty="0"/>
+              <a:t>first production workload</a:t>
+            </a:r>
+            <a:r>
+              <a:rPr lang="en-US" dirty="0"/>
+              <a:t> (the number that actually matters for a dev platform).</a:t>
+            </a:r>
+          </a:p>
+          <a:p>
+            <a:pPr lvl="0" rtl="0"/>
+            <a:r>
+              <a:rPr lang="en-US" b="1" dirty="0"/>
+              <a:t>Commercial:</a:t>
+            </a:r>
+            <a:r>
+              <a:rPr lang="en-US" dirty="0"/>
+              <a:t> win rate vs named competitors, ACV mix, gross margin.</a:t>
+            </a:r>
+          </a:p>
+          <a:p>
+            <a:pPr lvl="0" rtl="0"/>
+            <a:br>
+              <a:rPr lang="en-US" dirty="0"/>
+            </a:br>
+            <a:r>
+              <a:rPr lang="en-US" dirty="0"/>
+              <a:t>At AWS I tied launch funding to milestone gates on adoption, trust, and unit economics — same discipline. </a:t>
+            </a:r>
+            <a:r>
+              <a:rPr lang="en-US" b="1" dirty="0"/>
+              <a:t>If I can't name the gate, I don't ship the launch.</a:t>
+            </a:r>
+            <a:endParaRPr lang="en-US" dirty="0"/>
+          </a:p>
+          <a:p>
+            <a:pPr marL="0" marR="0" lvl="0" indent="0" algn="l" defTabSz="914400" rtl="0" eaLnBrk="1" fontAlgn="auto" latinLnBrk="0" hangingPunct="1">
+              <a:lnSpc>
+                <a:spcPct val="100000"/>
+              </a:lnSpc>
+              <a:spcBef>
+                <a:spcPts val="0"/>
+              </a:spcBef>
+              <a:spcAft>
+                <a:spcPts val="0"/>
+              </a:spcAft>
+              <a:buClrTx/>
+              <a:buSzTx/>
+              <a:buFontTx/>
+              <a:buNone/>
+              <a:tabLst/>
+              <a:defRPr/>
+            </a:pPr>
+            <a:endParaRPr lang="en-US" dirty="0"/>
+          </a:p>
+          <a:p>
+            <a:pPr marL="0" marR="0" lvl="0" indent="0" algn="l" defTabSz="914400" rtl="0" eaLnBrk="1" fontAlgn="auto" latinLnBrk="0" hangingPunct="1">
+              <a:lnSpc>
+                <a:spcPct val="100000"/>
+              </a:lnSpc>
+              <a:spcBef>
+                <a:spcPts val="0"/>
+              </a:spcBef>
+              <a:spcAft>
+                <a:spcPts val="0"/>
+              </a:spcAft>
+              <a:buClrTx/>
+              <a:buSzTx/>
+              <a:buFontTx/>
+              <a:buNone/>
+              <a:tabLst/>
+              <a:defRPr/>
+            </a:pPr>
+            <a:r>
+              <a:rPr lang="en-US" b="1" dirty="0"/>
+              <a:t>How do you work with engineering/DevRel?</a:t>
+            </a:r>
+            <a:br>
+              <a:rPr lang="en-US" dirty="0"/>
+            </a:br>
+            <a:r>
+              <a:rPr lang="en-US" dirty="0"/>
+              <a:t>I bring the </a:t>
+            </a:r>
+            <a:r>
+              <a:rPr lang="en-US" b="1" dirty="0"/>
+              <a:t>launch-readiness bar</a:t>
+            </a:r>
+            <a:r>
+              <a:rPr lang="en-US" dirty="0"/>
+              <a:t>, they bring capability. I define gates — eval thresholds, guardrails, docs quality — so "launch" is a decision, not a vibe. That's how I got hallucinations to 2.8% before shipping.</a:t>
+            </a:r>
+          </a:p>
+          <a:p>
+            <a:pPr marL="0" marR="0" lvl="0" indent="0" algn="l" defTabSz="914400" rtl="0" eaLnBrk="1" fontAlgn="auto" latinLnBrk="0" hangingPunct="1">
+              <a:lnSpc>
+                <a:spcPct val="100000"/>
+              </a:lnSpc>
+              <a:spcBef>
+                <a:spcPts val="0"/>
+              </a:spcBef>
+              <a:spcAft>
+                <a:spcPts val="0"/>
+              </a:spcAft>
+              <a:buClrTx/>
+              <a:buSzTx/>
+              <a:buFontTx/>
+              <a:buNone/>
+              <a:tabLst/>
+              <a:defRPr/>
+            </a:pPr>
+            <a:r>
+              <a:rPr lang="en-US" dirty="0"/>
+              <a:t>What I'd carry over: </a:t>
+            </a:r>
+            <a:r>
+              <a:rPr lang="en-US" b="1" dirty="0"/>
+              <a:t>the launch-gate discipline.</a:t>
+            </a:r>
+            <a:r>
+              <a:rPr lang="en-US" dirty="0"/>
+              <a:t> Startups under-invest in it and it's the cheapest quality mechanism there is.</a:t>
+            </a:r>
+          </a:p>
+          <a:p>
+            <a:pPr marL="0" marR="0" lvl="0" indent="0" algn="l" defTabSz="914400" rtl="0" eaLnBrk="1" fontAlgn="auto" latinLnBrk="0" hangingPunct="1">
+              <a:lnSpc>
+                <a:spcPct val="100000"/>
+              </a:lnSpc>
+              <a:spcBef>
+                <a:spcPts val="0"/>
+              </a:spcBef>
+              <a:spcAft>
+                <a:spcPts val="0"/>
+              </a:spcAft>
+              <a:buClrTx/>
+              <a:buSzTx/>
+              <a:buFontTx/>
+              <a:buNone/>
+              <a:tabLst/>
+              <a:defRPr/>
+            </a:pPr>
+            <a:endParaRPr lang="en-US" dirty="0"/>
+          </a:p>
+          <a:p>
+            <a:pPr marL="0" marR="0" lvl="0" indent="0" algn="l" defTabSz="914400" rtl="0" eaLnBrk="1" fontAlgn="auto" latinLnBrk="0" hangingPunct="1">
+              <a:lnSpc>
+                <a:spcPct val="100000"/>
+              </a:lnSpc>
+              <a:spcBef>
+                <a:spcPts val="0"/>
+              </a:spcBef>
+              <a:spcAft>
+                <a:spcPts val="0"/>
+              </a:spcAft>
+              <a:buClrTx/>
+              <a:buSzTx/>
+              <a:buFontTx/>
+              <a:buNone/>
+              <a:tabLst/>
+              <a:defRPr/>
+            </a:pPr>
+            <a:r>
+              <a:rPr lang="en-US" b="1" dirty="0"/>
+              <a:t>Hardest launch you've run.</a:t>
+            </a:r>
+            <a:br>
+              <a:rPr lang="en-US" dirty="0"/>
+            </a:br>
+            <a:r>
+              <a:rPr lang="en-US" dirty="0"/>
+              <a:t>Japan localization at AWS. Not translation — tone, tokenization, honorifics, interaction design. I turned it into a </a:t>
+            </a:r>
+            <a:r>
+              <a:rPr lang="en-US" b="1" dirty="0"/>
+              <a:t>reusable internationalization template</a:t>
+            </a:r>
+            <a:r>
+              <a:rPr lang="en-US" dirty="0"/>
+              <a:t>, which is what Mistral needs going market by market across the EU and beyond.</a:t>
+            </a:r>
+          </a:p>
+          <a:p>
+            <a:pPr marL="0" marR="0" lvl="0" indent="0" algn="l" defTabSz="914400" rtl="0" eaLnBrk="1" fontAlgn="auto" latinLnBrk="0" hangingPunct="1">
+              <a:lnSpc>
+                <a:spcPct val="100000"/>
+              </a:lnSpc>
+              <a:spcBef>
+                <a:spcPts val="0"/>
+              </a:spcBef>
+              <a:spcAft>
+                <a:spcPts val="0"/>
+              </a:spcAft>
+              <a:buClrTx/>
+              <a:buSzTx/>
+              <a:buFontTx/>
+              <a:buNone/>
+              <a:tabLst/>
+              <a:defRPr/>
+            </a:pPr>
+            <a:endParaRPr lang="en-US" dirty="0"/>
+          </a:p>
+          <a:p>
+            <a:r>
+              <a:rPr lang="en-US" dirty="0"/>
+              <a:t>Customer problem → insight → positioning/GTM decision → measurable result.</a:t>
+            </a:r>
           </a:p>
         </p:txBody>
       </p:sp>
@@ -800,6 +1349,178 @@
           <a:bodyPr/>
           <a:lstStyle/>
           <a:p>
+            <a:pPr marL="0" marR="0" lvl="0" indent="0" algn="l" defTabSz="914400" rtl="0" eaLnBrk="1" fontAlgn="auto" latinLnBrk="0" hangingPunct="1">
+              <a:lnSpc>
+                <a:spcPct val="100000"/>
+              </a:lnSpc>
+              <a:spcBef>
+                <a:spcPts val="0"/>
+              </a:spcBef>
+              <a:spcAft>
+                <a:spcPts val="0"/>
+              </a:spcAft>
+              <a:buClrTx/>
+              <a:buSzTx/>
+              <a:buFontTx/>
+              <a:buNone/>
+              <a:tabLst/>
+              <a:defRPr/>
+            </a:pPr>
+            <a:r>
+              <a:rPr lang="en-US" dirty="0"/>
+              <a:t>Before that, at Rakuten I worked on an AI platform serving 50,000 merchants, where I increased conversion by Driving adoption and PMF</a:t>
+            </a:r>
+          </a:p>
+          <a:p>
+            <a:pPr marL="0" marR="0" lvl="0" indent="0" algn="l" defTabSz="914400" rtl="0" eaLnBrk="1" fontAlgn="auto" latinLnBrk="0" hangingPunct="1">
+              <a:lnSpc>
+                <a:spcPct val="100000"/>
+              </a:lnSpc>
+              <a:spcBef>
+                <a:spcPts val="0"/>
+              </a:spcBef>
+              <a:spcAft>
+                <a:spcPts val="0"/>
+              </a:spcAft>
+              <a:buClrTx/>
+              <a:buSzTx/>
+              <a:buFontTx/>
+              <a:buNone/>
+              <a:tabLst/>
+              <a:defRPr/>
+            </a:pPr>
+            <a:endParaRPr lang="en-US" dirty="0"/>
+          </a:p>
+          <a:p>
+            <a:pPr marL="0" marR="0" lvl="0" indent="0" algn="l" defTabSz="914400" rtl="0" eaLnBrk="1" fontAlgn="auto" latinLnBrk="0" hangingPunct="1">
+              <a:lnSpc>
+                <a:spcPct val="100000"/>
+              </a:lnSpc>
+              <a:spcBef>
+                <a:spcPts val="0"/>
+              </a:spcBef>
+              <a:spcAft>
+                <a:spcPts val="0"/>
+              </a:spcAft>
+              <a:buClrTx/>
+              <a:buSzTx/>
+              <a:buFontTx/>
+              <a:buNone/>
+              <a:tabLst/>
+              <a:defRPr/>
+            </a:pPr>
+            <a:r>
+              <a:rPr lang="en-US" b="1" dirty="0"/>
+              <a:t>Walk me through a piece of messaging you wrote that failed.</a:t>
+            </a:r>
+            <a:br>
+              <a:rPr lang="en-US" dirty="0"/>
+            </a:br>
+            <a:r>
+              <a:rPr lang="en-US" dirty="0"/>
+              <a:t>Framework: </a:t>
+            </a:r>
+            <a:r>
+              <a:rPr lang="en-US" b="1" dirty="0"/>
+              <a:t>Claim → Evidence gap → Rewrite.</a:t>
+            </a:r>
+            <a:r>
+              <a:rPr lang="en-US" dirty="0"/>
+              <a:t> </a:t>
+            </a:r>
+          </a:p>
+          <a:p>
+            <a:pPr marL="0" marR="0" lvl="0" indent="0" algn="l" defTabSz="914400" rtl="0" eaLnBrk="1" fontAlgn="auto" latinLnBrk="0" hangingPunct="1">
+              <a:lnSpc>
+                <a:spcPct val="100000"/>
+              </a:lnSpc>
+              <a:spcBef>
+                <a:spcPts val="0"/>
+              </a:spcBef>
+              <a:spcAft>
+                <a:spcPts val="0"/>
+              </a:spcAft>
+              <a:buClrTx/>
+              <a:buSzTx/>
+              <a:buFontTx/>
+              <a:buNone/>
+              <a:tabLst/>
+              <a:defRPr/>
+            </a:pPr>
+            <a:r>
+              <a:rPr lang="en-US" dirty="0"/>
+              <a:t>At Rakuten I launched a standalone merchant chatbot positioned on "AI assistant for your store." Adoption stalled — the message promised a companion, the product solved one task. </a:t>
+            </a:r>
+          </a:p>
+          <a:p>
+            <a:pPr marL="0" marR="0" lvl="0" indent="0" algn="l" defTabSz="914400" rtl="0" eaLnBrk="1" fontAlgn="auto" latinLnBrk="0" hangingPunct="1">
+              <a:lnSpc>
+                <a:spcPct val="100000"/>
+              </a:lnSpc>
+              <a:spcBef>
+                <a:spcPts val="0"/>
+              </a:spcBef>
+              <a:spcAft>
+                <a:spcPts val="0"/>
+              </a:spcAft>
+              <a:buClrTx/>
+              <a:buSzTx/>
+              <a:buFontTx/>
+              <a:buNone/>
+              <a:tabLst/>
+              <a:defRPr/>
+            </a:pPr>
+            <a:r>
+              <a:rPr lang="en-US" dirty="0"/>
+              <a:t>I killed it, re-anchored on </a:t>
+            </a:r>
+            <a:r>
+              <a:rPr lang="en-US" b="1" dirty="0"/>
+              <a:t>"list a product in 12 minutes instead of 45,"</a:t>
+            </a:r>
+            <a:r>
+              <a:rPr lang="en-US" dirty="0"/>
+              <a:t> and embedded AI into the existing workflow. Hit </a:t>
+            </a:r>
+            <a:r>
+              <a:rPr lang="en-US" b="1" dirty="0"/>
+              <a:t>40% adoption in six months, +15% conversion</a:t>
+            </a:r>
+            <a:r>
+              <a:rPr lang="en-US" dirty="0"/>
+              <a:t>. </a:t>
+            </a:r>
+          </a:p>
+          <a:p>
+            <a:pPr marL="0" marR="0" lvl="0" indent="0" algn="l" defTabSz="914400" rtl="0" eaLnBrk="1" fontAlgn="auto" latinLnBrk="0" hangingPunct="1">
+              <a:lnSpc>
+                <a:spcPct val="100000"/>
+              </a:lnSpc>
+              <a:spcBef>
+                <a:spcPts val="0"/>
+              </a:spcBef>
+              <a:spcAft>
+                <a:spcPts val="0"/>
+              </a:spcAft>
+              <a:buClrTx/>
+              <a:buSzTx/>
+              <a:buFontTx/>
+              <a:buNone/>
+              <a:tabLst/>
+              <a:defRPr/>
+            </a:pPr>
+            <a:r>
+              <a:rPr lang="en-US" dirty="0"/>
+              <a:t>Lesson: </a:t>
+            </a:r>
+            <a:r>
+              <a:rPr lang="en-US" b="1" dirty="0"/>
+              <a:t>positioning fails when the promise is broader than the </a:t>
+            </a:r>
+            <a:r>
+              <a:rPr lang="en-US" b="1"/>
+              <a:t>proof.</a:t>
+            </a:r>
             <a:endParaRPr lang="en-US" dirty="0"/>
           </a:p>
         </p:txBody>
@@ -944,7 +1665,36 @@
           <a:bodyPr/>
           <a:lstStyle/>
           <a:p>
+            <a:pPr marL="0" marR="0" lvl="0" indent="0" algn="l" defTabSz="914400" rtl="0" eaLnBrk="1" fontAlgn="auto" latinLnBrk="0" hangingPunct="1">
+              <a:lnSpc>
+                <a:spcPct val="100000"/>
+              </a:lnSpc>
+              <a:spcBef>
+                <a:spcPts val="0"/>
+              </a:spcBef>
+              <a:spcAft>
+                <a:spcPts val="0"/>
+              </a:spcAft>
+              <a:buClrTx/>
+              <a:buSzTx/>
+              <a:buFontTx/>
+              <a:buNone/>
+              <a:tabLst/>
+              <a:defRPr/>
+            </a:pPr>
+            <a:r>
+              <a:rPr lang="en-US" dirty="0"/>
+              <a:t>And at Microsoft, I worked on enterprise GTM and segmentation along with lifecycle growth.</a:t>
+            </a:r>
+          </a:p>
+          <a:p>
             <a:endParaRPr lang="en-US" dirty="0"/>
+          </a:p>
+          <a:p>
+            <a:r>
+              <a:rPr lang="en-US" dirty="0"/>
+              <a:t>Customer problem → insight → positioning/GTM decision → measurable result.</a:t>
+            </a:r>
           </a:p>
         </p:txBody>
       </p:sp>
@@ -1088,6 +1838,96 @@
           <a:bodyPr/>
           <a:lstStyle/>
           <a:p>
+            <a:pPr marL="0" marR="0" lvl="0" indent="0" algn="l" defTabSz="914400" rtl="0" eaLnBrk="1" fontAlgn="auto" latinLnBrk="0" hangingPunct="1">
+              <a:lnSpc>
+                <a:spcPct val="100000"/>
+              </a:lnSpc>
+              <a:spcBef>
+                <a:spcPts val="0"/>
+              </a:spcBef>
+              <a:spcAft>
+                <a:spcPts val="0"/>
+              </a:spcAft>
+              <a:buClrTx/>
+              <a:buSzTx/>
+              <a:buFontTx/>
+              <a:buNone/>
+              <a:tabLst/>
+              <a:defRPr/>
+            </a:pPr>
+            <a:r>
+              <a:rPr lang="en-US" b="1" dirty="0"/>
+              <a:t>Sovereignty is my wedge</a:t>
+            </a:r>
+            <a:r>
+              <a:rPr lang="en-US" dirty="0"/>
+              <a:t> — Mistral's differentiator is EU/on-prem control. I've sold that exact story: regulated-cloud deployment patterns across 10 markets, data residency, in-country key management, compliance-as-a-feature.</a:t>
+            </a:r>
+          </a:p>
+          <a:p>
+            <a:endParaRPr lang="en-US" dirty="0"/>
+          </a:p>
+          <a:p>
+            <a:r>
+              <a:rPr lang="en-US" b="1" dirty="0"/>
+              <a:t>How do you enable a sales team you don't manage?</a:t>
+            </a:r>
+            <a:endParaRPr lang="en-US" dirty="0"/>
+          </a:p>
+          <a:p>
+            <a:r>
+              <a:rPr lang="en-US" b="1" dirty="0"/>
+              <a:t>Three artifacts, in this order:</a:t>
+            </a:r>
+            <a:r>
+              <a:rPr lang="en-US" dirty="0"/>
+              <a:t> (a) the </a:t>
+            </a:r>
+            <a:r>
+              <a:rPr lang="en-US" b="1" dirty="0"/>
+              <a:t>objection map</a:t>
+            </a:r>
+            <a:r>
+              <a:rPr lang="en-US" dirty="0"/>
+              <a:t> — top 10 real objections from call recordings, each with a one-line answer and a proof link; (b) the </a:t>
+            </a:r>
+            <a:r>
+              <a:rPr lang="en-US" b="1" dirty="0"/>
+              <a:t>discovery question set</a:t>
+            </a:r>
+            <a:r>
+              <a:rPr lang="en-US" dirty="0"/>
+              <a:t> that qualifies for sovereignty need in the first call; (c) </a:t>
+            </a:r>
+            <a:r>
+              <a:rPr lang="en-US" b="1" dirty="0"/>
+              <a:t>one demo narrative</a:t>
+            </a:r>
+            <a:r>
+              <a:rPr lang="en-US" dirty="0"/>
+              <a:t>, not five. Then I measure </a:t>
+            </a:r>
+            <a:r>
+              <a:rPr lang="en-US" b="1" dirty="0"/>
+              <a:t>objection frequency over time</a:t>
+            </a:r>
+            <a:r>
+              <a:rPr lang="en-US" dirty="0"/>
+              <a:t> — if the same blocker keeps surfacing, my enablement failed, not the rep. </a:t>
+            </a:r>
+          </a:p>
+          <a:p>
+            <a:endParaRPr lang="en-US" dirty="0"/>
+          </a:p>
+          <a:p>
+            <a:r>
+              <a:rPr lang="en-US" dirty="0"/>
+              <a:t>At Microsoft this is how compliance-as-a-feature went from a blocker to the reason we </a:t>
+            </a:r>
+            <a:r>
+              <a:rPr lang="en-US" b="1" dirty="0"/>
+              <a:t>recovered a $5M account and won a $2M upsell.</a:t>
+            </a:r>
             <a:endParaRPr lang="en-US" dirty="0"/>
           </a:p>
         </p:txBody>

--- a/author-profile.pptx
+++ b/author-profile.pptx
@@ -5,7 +5,7 @@
     <p:sldMasterId id="2147483660" r:id="rId1"/>
   </p:sldMasterIdLst>
   <p:notesMasterIdLst>
-    <p:notesMasterId r:id="rId7"/>
+    <p:notesMasterId r:id="rId8"/>
   </p:notesMasterIdLst>
   <p:sldIdLst>
     <p:sldId id="257" r:id="rId2"/>
@@ -13,6 +13,7 @@
     <p:sldId id="259" r:id="rId4"/>
     <p:sldId id="260" r:id="rId5"/>
     <p:sldId id="261" r:id="rId6"/>
+    <p:sldId id="262" r:id="rId7"/>
   </p:sldIdLst>
   <p:sldSz cx="12192000" cy="6858000"/>
   <p:notesSz cx="6858000" cy="9144000"/>
@@ -496,6 +497,13 @@
           </p:nvPr>
         </p:nvSpPr>
         <p:spPr/>
+        <p:txBody>
+          <a:bodyPr/>
+          <a:lstStyle/>
+          <a:p>
+            <a:endParaRPr lang="en-US"/>
+          </a:p>
+        </p:txBody>
       </p:sp>
       <p:sp>
         <p:nvSpPr>
@@ -537,7 +545,70 @@
             </a:pPr>
             <a:r>
               <a:rPr lang="en-US" dirty="0"/>
-              <a:t>My background sits at the intersection of AI, product and go-to-market. I've spent ten years making complex, regulated technology (AI and cloud capabilities) buyable(into products customers can understand, adopt and buy). </a:t>
+              <a:t>I sit at the intersection of technical AI products and commercialization. My strongest work has been taking complex AI or data capabilities, finding the buyer/user problem that matters, simplifying the narrative, and then using launches, adoption data and field feedback to turn that story into measurable usage and revenue. I've spent ten years making complex, regulated technology (AI and cloud capabilities) buyable(into products customers can understand, adopt and buy). </a:t>
+            </a:r>
+          </a:p>
+          <a:p>
+            <a:pPr marL="0" marR="0" lvl="0" indent="0" algn="l" defTabSz="914400" rtl="0" eaLnBrk="1" fontAlgn="auto" latinLnBrk="0" hangingPunct="1">
+              <a:lnSpc>
+                <a:spcPct val="100000"/>
+              </a:lnSpc>
+              <a:spcBef>
+                <a:spcPts val="0"/>
+              </a:spcBef>
+              <a:spcAft>
+                <a:spcPts val="0"/>
+              </a:spcAft>
+              <a:buClrTx/>
+              <a:buSzTx/>
+              <a:buFontTx/>
+              <a:buNone/>
+              <a:tabLst/>
+              <a:defRPr/>
+            </a:pPr>
+            <a:endParaRPr lang="en-US" dirty="0"/>
+          </a:p>
+          <a:p>
+            <a:pPr marL="0" marR="0" lvl="0" indent="0" algn="l" defTabSz="914400" rtl="0" eaLnBrk="1" fontAlgn="auto" latinLnBrk="0" hangingPunct="1">
+              <a:lnSpc>
+                <a:spcPct val="100000"/>
+              </a:lnSpc>
+              <a:spcBef>
+                <a:spcPts val="0"/>
+              </a:spcBef>
+              <a:spcAft>
+                <a:spcPts val="0"/>
+              </a:spcAft>
+              <a:buClrTx/>
+              <a:buSzTx/>
+              <a:buFontTx/>
+              <a:buNone/>
+              <a:tabLst/>
+              <a:defRPr/>
+            </a:pPr>
+            <a:r>
+              <a:rPr lang="en-US" dirty="0"/>
+              <a:t>Mistral needs a senior product marketer who can connect two adoption motions in one role: </a:t>
+            </a:r>
+            <a:r>
+              <a:rPr lang="en-US" b="1" dirty="0">
+                <a:effectLst/>
+              </a:rPr>
+              <a:t>self-service/prosumer evaluation</a:t>
+            </a:r>
+            <a:r>
+              <a:rPr lang="en-US" dirty="0"/>
+              <a:t> and </a:t>
+            </a:r>
+            <a:r>
+              <a:rPr lang="en-US" b="1" dirty="0">
+                <a:effectLst/>
+              </a:rPr>
+              <a:t>enterprise production adoption</a:t>
+            </a:r>
+            <a:r>
+              <a:rPr lang="en-US" dirty="0"/>
+              <a:t>. I have worked across that full journey—from customer insight and AI positioning, through product-led adoption, to enterprise workflow integration and field enablement.</a:t>
             </a:r>
           </a:p>
           <a:p>
@@ -582,7 +653,61 @@
               <a:rPr lang="en-US" dirty="0"/>
               <a:t>Mistral Studio is exactly that problem — the models are good; the job is making enterprise builders trust them enough to ship to production. Studio's opportunity is to turn Mistral from a model developers experiment with into the AI platform enterprises build and operate on.</a:t>
             </a:r>
-            <a:endParaRPr lang="en-US" b="1" dirty="0"/>
+          </a:p>
+          <a:p>
+            <a:pPr marL="0" marR="0" lvl="0" indent="0" algn="l" defTabSz="914400" rtl="0" eaLnBrk="1" fontAlgn="auto" latinLnBrk="0" hangingPunct="1">
+              <a:lnSpc>
+                <a:spcPct val="100000"/>
+              </a:lnSpc>
+              <a:spcBef>
+                <a:spcPts val="0"/>
+              </a:spcBef>
+              <a:spcAft>
+                <a:spcPts val="0"/>
+              </a:spcAft>
+              <a:buClrTx/>
+              <a:buSzTx/>
+              <a:buFontTx/>
+              <a:buNone/>
+              <a:tabLst/>
+              <a:defRPr/>
+            </a:pPr>
+            <a:endParaRPr lang="en-US" dirty="0"/>
+          </a:p>
+          <a:p>
+            <a:r>
+              <a:rPr lang="en-US" b="1" dirty="0"/>
+              <a:t>What technical or developer products have you marketed?</a:t>
+            </a:r>
+            <a:br>
+              <a:rPr lang="en-US" dirty="0"/>
+            </a:br>
+            <a:r>
+              <a:rPr lang="en-US" dirty="0"/>
+              <a:t>My experience spans GenAI platforms, cloud products, AI workflows, data infrastructure, and regulated enterprise software. Most recently, I’ve worked on agentic AI products at AWS, including an AI shopping assistant and an enterprise agent platform connecting foundation models to private data, controls, approvals, and business systems. I’ve also worked on AI platforms at Rakuten and developer-focused cloud products at Microsoft. </a:t>
+            </a:r>
+          </a:p>
+          <a:p>
+            <a:endParaRPr lang="en-US" dirty="0"/>
+          </a:p>
+          <a:p>
+            <a:r>
+              <a:rPr lang="en-US" b="1" dirty="0"/>
+              <a:t>Have you worked across enterprise and self-serve/prosumer motions?</a:t>
+            </a:r>
+            <a:br>
+              <a:rPr lang="en-US" dirty="0"/>
+            </a:br>
+            <a:r>
+              <a:rPr lang="en-US" dirty="0"/>
+              <a:t>I’ve worked across consumer AI, self-serve cloud products, developers, merchants, and large enterprises, so I’m comfortable with both product-led adoption and enterprise sales motions.</a:t>
+            </a:r>
+          </a:p>
+          <a:p>
+            <a:r>
+              <a:rPr lang="en-US" dirty="0"/>
+              <a:t>At AWS, I’ve worked on consumer-facing AI experiences as well as enterprise AI platforms for security-conscious and regulated customers. That taught me how to keep one core product story while changing the proof points and buying journey for each audience. </a:t>
+            </a:r>
           </a:p>
           <a:p>
             <a:endParaRPr lang="en-US" b="1" dirty="0"/>
@@ -843,6 +968,13 @@
           </p:nvPr>
         </p:nvSpPr>
         <p:spPr/>
+        <p:txBody>
+          <a:bodyPr/>
+          <a:lstStyle/>
+          <a:p>
+            <a:endParaRPr lang="en-US"/>
+          </a:p>
+        </p:txBody>
       </p:sp>
       <p:sp>
         <p:nvSpPr>
@@ -859,353 +991,324 @@
           <a:bodyPr/>
           <a:lstStyle/>
           <a:p>
-            <a:pPr marL="0" marR="0" lvl="0" indent="0" algn="l" defTabSz="914400" rtl="0" eaLnBrk="1" fontAlgn="auto" latinLnBrk="0" hangingPunct="1">
-              <a:lnSpc>
-                <a:spcPct val="100000"/>
-              </a:lnSpc>
-              <a:spcBef>
-                <a:spcPts val="0"/>
-              </a:spcBef>
-              <a:spcAft>
-                <a:spcPts val="0"/>
-              </a:spcAft>
-              <a:buClrTx/>
-              <a:buSzTx/>
-              <a:buFontTx/>
-              <a:buNone/>
-              <a:tabLst/>
-              <a:defRPr/>
-            </a:pPr>
+            <a:r>
+              <a:rPr lang="en-US" dirty="0"/>
+              <a:t>My approach to technical PMM is: </a:t>
+            </a:r>
             <a:r>
               <a:rPr lang="en-US" b="1" dirty="0"/>
-              <a:t>Developer/platform PMM</a:t>
-            </a:r>
+              <a:t>start with the customer job, prove the value in the product, and measure whether users reach real value.</a:t>
+            </a:r>
+          </a:p>
+          <a:p>
+            <a:endParaRPr lang="en-US" dirty="0"/>
+          </a:p>
+          <a:p>
             <a:r>
               <a:rPr lang="en-US" dirty="0"/>
-              <a:t> — I ran positioning for a managed agent platform at AWS connecting foundation models to private enterprise data (access controls, audit traces, approvals, cost-quality routing). Where I use customer research and product telemetry to sharpen the positioning, build the launch and adoption strategy, and helped drive adoption while improving brand favorability. </a:t>
-            </a:r>
-          </a:p>
-          <a:p>
-            <a:pPr marL="0" marR="0" lvl="0" indent="0" algn="l" defTabSz="914400" rtl="0" eaLnBrk="1" fontAlgn="auto" latinLnBrk="0" hangingPunct="1">
-              <a:lnSpc>
-                <a:spcPct val="100000"/>
-              </a:lnSpc>
-              <a:spcBef>
-                <a:spcPts val="0"/>
-              </a:spcBef>
-              <a:spcAft>
-                <a:spcPts val="0"/>
-              </a:spcAft>
-              <a:buClrTx/>
-              <a:buSzTx/>
-              <a:buFontTx/>
-              <a:buNone/>
-              <a:tabLst/>
-              <a:defRPr/>
-            </a:pPr>
-            <a:endParaRPr lang="en-US" b="0" dirty="0"/>
-          </a:p>
-          <a:p>
-            <a:pPr marL="0" marR="0" lvl="0" indent="0" algn="l" defTabSz="914400" rtl="0" eaLnBrk="1" fontAlgn="auto" latinLnBrk="0" hangingPunct="1">
-              <a:lnSpc>
-                <a:spcPct val="100000"/>
-              </a:lnSpc>
-              <a:spcBef>
-                <a:spcPts val="0"/>
-              </a:spcBef>
-              <a:spcAft>
-                <a:spcPts val="0"/>
-              </a:spcAft>
-              <a:buClrTx/>
-              <a:buSzTx/>
-              <a:buFontTx/>
-              <a:buNone/>
-              <a:tabLst/>
-              <a:defRPr/>
-            </a:pPr>
+              <a:t>At Amazon, I worked on </a:t>
+            </a:r>
             <a:r>
               <a:rPr lang="en-US" b="1" dirty="0"/>
-              <a:t>How do you market a technical product without hype?</a:t>
+              <a:t>Rufus, the GenAI shopping assistant</a:t>
+            </a:r>
+            <a:r>
+              <a:rPr lang="en-US" dirty="0"/>
+              <a:t>, shifting the experience from open-ended conversation toward </a:t>
+            </a:r>
+            <a:r>
+              <a:rPr lang="en-US" b="1" dirty="0"/>
+              <a:t>decision support and purchase completion</a:t>
+            </a:r>
+            <a:r>
+              <a:rPr lang="en-US" dirty="0"/>
+              <a:t>. Behavioral telemetry showed that conversation itself wasn’t the job-to-be-done. The real job was helping customers </a:t>
+            </a:r>
+            <a:r>
+              <a:rPr lang="en-US" b="1" dirty="0"/>
+              <a:t>research, compare, and make confident purchase decisions</a:t>
+            </a:r>
+            <a:r>
+              <a:rPr lang="en-US" dirty="0"/>
+              <a:t>.</a:t>
+            </a:r>
+          </a:p>
+          <a:p>
+            <a:endParaRPr lang="en-US" dirty="0"/>
+          </a:p>
+          <a:p>
+            <a:r>
+              <a:rPr lang="en-US" dirty="0"/>
+              <a:t>Through prompt, retrieval, and product experimentation, we drove </a:t>
+            </a:r>
+            <a:r>
+              <a:rPr lang="en-US" b="1" dirty="0"/>
+              <a:t>25% adoption among eligible users</a:t>
+            </a:r>
+            <a:r>
+              <a:rPr lang="en-US" dirty="0"/>
+              <a:t>, improved </a:t>
+            </a:r>
+            <a:r>
+              <a:rPr lang="en-US" b="1" dirty="0"/>
+              <a:t>favorability among exposed users from 55% → 70%</a:t>
+            </a:r>
+            <a:r>
+              <a:rPr lang="en-US" dirty="0"/>
+              <a:t>, increased </a:t>
+            </a:r>
+            <a:r>
+              <a:rPr lang="en-US" b="1" dirty="0"/>
+              <a:t>session depth 15%</a:t>
+            </a:r>
+            <a:r>
+              <a:rPr lang="en-US" dirty="0"/>
+              <a:t>, and reduced the </a:t>
+            </a:r>
+            <a:r>
+              <a:rPr lang="en-US" b="1" dirty="0"/>
+              <a:t>evaluated hallucination rate to 2.8% on our internal eval set</a:t>
+            </a:r>
+            <a:r>
+              <a:rPr lang="en-US" dirty="0"/>
+              <a:t>.</a:t>
+            </a:r>
+          </a:p>
+          <a:p>
+            <a:endParaRPr lang="en-US" b="1" dirty="0"/>
+          </a:p>
+          <a:p>
+            <a:r>
+              <a:rPr lang="en-US" b="1" dirty="0"/>
+              <a:t>Positioning</a:t>
+            </a:r>
+          </a:p>
+          <a:p>
+            <a:r>
+              <a:rPr lang="en-US" b="1" dirty="0"/>
+              <a:t>Customer job → message shift → proof → result</a:t>
+            </a:r>
+            <a:endParaRPr lang="en-US" dirty="0"/>
+          </a:p>
+          <a:p>
+            <a:r>
+              <a:rPr lang="en-US" dirty="0"/>
+              <a:t>The shift was: </a:t>
+            </a:r>
+            <a:r>
+              <a:rPr lang="en-US" b="1" dirty="0"/>
+              <a:t>“Chat with AI” → “Make better purchase decisions.” </a:t>
+            </a:r>
+            <a:r>
+              <a:rPr lang="en-US" dirty="0"/>
+              <a:t>I market technical products by replacing claims with </a:t>
+            </a:r>
+            <a:r>
+              <a:rPr lang="en-US" b="1" dirty="0"/>
+              <a:t>evidence artifacts</a:t>
+            </a:r>
+            <a:r>
+              <a:rPr lang="en-US" dirty="0"/>
+              <a:t>: customer behavior, product capability, evals, and measurable outcomes.</a:t>
+            </a:r>
+          </a:p>
+          <a:p>
+            <a:endParaRPr lang="en-US" dirty="0"/>
+          </a:p>
+          <a:p>
+            <a:r>
+              <a:rPr lang="en-US" b="1" dirty="0"/>
+              <a:t>Launch + measurement</a:t>
+            </a:r>
+          </a:p>
+          <a:p>
+            <a:r>
+              <a:rPr lang="en-US" dirty="0"/>
+              <a:t>I define launch gates across </a:t>
+            </a:r>
+            <a:r>
+              <a:rPr lang="en-US" b="1" dirty="0"/>
+              <a:t>response quality, retrieval, guardrails, adoption, and economics</a:t>
+            </a:r>
+            <a:r>
+              <a:rPr lang="en-US" dirty="0"/>
+              <a:t>. </a:t>
+            </a:r>
+            <a:r>
+              <a:rPr lang="en-US" b="1" dirty="0"/>
+              <a:t>If I can’t name the gate, I don’t ship the launch.</a:t>
+            </a:r>
+            <a:endParaRPr lang="en-US" dirty="0"/>
+          </a:p>
+          <a:p>
+            <a:r>
+              <a:rPr lang="en-US" dirty="0"/>
+              <a:t>For Rufus, I measured:</a:t>
+            </a:r>
+          </a:p>
+          <a:p>
+            <a:pPr lvl="0"/>
+            <a:r>
+              <a:rPr lang="en-US" b="1" dirty="0"/>
+              <a:t>Leading:</a:t>
+            </a:r>
+            <a:r>
+              <a:rPr lang="en-US" dirty="0"/>
+              <a:t> trust, response quality, message resonance</a:t>
+            </a:r>
+          </a:p>
+          <a:p>
+            <a:pPr lvl="0"/>
+            <a:r>
+              <a:rPr lang="en-US" b="1" dirty="0"/>
+              <a:t>Activation:</a:t>
+            </a:r>
+            <a:r>
+              <a:rPr lang="en-US" dirty="0"/>
+              <a:t> first meaningful shopping-assistant use</a:t>
+            </a:r>
+          </a:p>
+          <a:p>
+            <a:pPr lvl="0"/>
+            <a:r>
+              <a:rPr lang="en-US" b="1" dirty="0"/>
+              <a:t>Engagement:</a:t>
+            </a:r>
+            <a:r>
+              <a:rPr lang="en-US" dirty="0"/>
+              <a:t> repeat usage, session depth</a:t>
+            </a:r>
+          </a:p>
+          <a:p>
+            <a:pPr lvl="0"/>
+            <a:r>
+              <a:rPr lang="en-US" b="1" dirty="0"/>
+              <a:t>Commercial:</a:t>
+            </a:r>
+            <a:r>
+              <a:rPr lang="en-US" dirty="0"/>
+              <a:t> conversion and purchase completion</a:t>
+            </a:r>
+          </a:p>
+          <a:p>
+            <a:endParaRPr lang="en-US" b="1" dirty="0"/>
+          </a:p>
+          <a:p>
+            <a:r>
+              <a:rPr lang="en-US" b="1" dirty="0"/>
+              <a:t>Internationalization</a:t>
+            </a:r>
+          </a:p>
+          <a:p>
+            <a:r>
+              <a:rPr lang="en-US" dirty="0"/>
+              <a:t>For </a:t>
+            </a:r>
+            <a:r>
+              <a:rPr lang="en-US" b="1" dirty="0"/>
+              <a:t>Rufus in Japan</a:t>
+            </a:r>
+            <a:r>
+              <a:rPr lang="en-US" dirty="0"/>
+              <a:t>, localization meant more than translation: </a:t>
+            </a:r>
+            <a:r>
+              <a:rPr lang="en-US" b="1" dirty="0"/>
+              <a:t>tone, tokenization, honorifics, and interaction design</a:t>
+            </a:r>
+            <a:r>
+              <a:rPr lang="en-US" dirty="0"/>
+              <a:t>. I turned that work into a </a:t>
+            </a:r>
+            <a:r>
+              <a:rPr lang="en-US" b="1" dirty="0"/>
+              <a:t>reusable internationalization template</a:t>
+            </a:r>
+            <a:r>
+              <a:rPr lang="en-US" dirty="0"/>
+              <a:t> for future markets.</a:t>
+            </a:r>
+          </a:p>
+          <a:p>
+            <a:endParaRPr lang="en-US" dirty="0"/>
+          </a:p>
+          <a:p>
+            <a:r>
+              <a:rPr lang="en-US" b="1" dirty="0"/>
+              <a:t>External validation</a:t>
+            </a:r>
+          </a:p>
+          <a:p>
+            <a:r>
+              <a:rPr lang="en-US" dirty="0"/>
+              <a:t>The broader thesis was later validated at scale: Amazon publicly reported that Rufus users were </a:t>
+            </a:r>
+            <a:r>
+              <a:rPr lang="en-US" b="1" dirty="0"/>
+              <a:t>60%+ more likely to purchase</a:t>
+            </a:r>
+            <a:r>
+              <a:rPr lang="en-US" dirty="0"/>
+              <a:t>, and the product eventually reached </a:t>
+            </a:r>
+            <a:r>
+              <a:rPr lang="en-US" b="1" dirty="0"/>
+              <a:t>300M+ customers</a:t>
+            </a:r>
+            <a:r>
+              <a:rPr lang="en-US" dirty="0"/>
+              <a:t> and nearly </a:t>
+            </a:r>
+            <a:r>
+              <a:rPr lang="en-US" b="1" dirty="0"/>
+              <a:t>$12B in incremental annualized sales</a:t>
+            </a:r>
+            <a:r>
+              <a:rPr lang="en-US" dirty="0"/>
+              <a:t>.</a:t>
+            </a:r>
+          </a:p>
+          <a:p>
+            <a:endParaRPr lang="en-US" dirty="0"/>
+          </a:p>
+          <a:p>
+            <a:r>
+              <a:rPr lang="en-US" b="1" dirty="0">
+                <a:effectLst/>
+              </a:rPr>
+              <a:t>My role:</a:t>
+            </a:r>
+            <a:r>
+              <a:rPr lang="en-US" dirty="0"/>
+              <a:t> diagnosed the customer job → reframed the product promise → aligned product/science/GTM around proof of that promise → measured adoption and trust → created a reusable localization pattern. </a:t>
+            </a:r>
+            <a:r>
+              <a:rPr lang="en-US" b="1" dirty="0">
+                <a:effectLst/>
+              </a:rPr>
+              <a:t>AI positioning should begin with the job the customer should trust the product to do. The product, evaluation framework, and launch criteria then need to prove that same promise.</a:t>
+            </a:r>
+          </a:p>
+          <a:p>
+            <a:endParaRPr lang="en-US" b="1" dirty="0">
+              <a:effectLst/>
+            </a:endParaRPr>
+          </a:p>
+          <a:p>
+            <a:r>
+              <a:rPr lang="en-US" b="1" dirty="0"/>
+              <a:t>Amazon Rufus — positioning, adoption, purchase impact</a:t>
             </a:r>
             <a:br>
               <a:rPr lang="en-US" dirty="0"/>
             </a:br>
             <a:r>
-              <a:rPr lang="en-US" dirty="0"/>
-              <a:t>At AWS I repositioned an AI shopping experience away from open-ended conversation toward decision support — that came from behavioral telemetry, not a brand workshop. I replace claims with </a:t>
-            </a:r>
-            <a:r>
-              <a:rPr lang="en-US" b="1" dirty="0"/>
-              <a:t>evidence artifacts</a:t>
-            </a:r>
-            <a:r>
-              <a:rPr lang="en-US" dirty="0"/>
-              <a:t>.</a:t>
-            </a:r>
-            <a:endParaRPr lang="en-US" b="0" dirty="0"/>
-          </a:p>
-          <a:p>
-            <a:pPr marL="0" marR="0" lvl="0" indent="0" algn="l" defTabSz="914400" rtl="0" eaLnBrk="1" fontAlgn="auto" latinLnBrk="0" hangingPunct="1">
-              <a:lnSpc>
-                <a:spcPct val="100000"/>
-              </a:lnSpc>
-              <a:spcBef>
-                <a:spcPts val="0"/>
-              </a:spcBef>
-              <a:spcAft>
-                <a:spcPts val="0"/>
-              </a:spcAft>
-              <a:buClrTx/>
-              <a:buSzTx/>
-              <a:buFontTx/>
-              <a:buNone/>
-              <a:tabLst/>
-              <a:defRPr/>
-            </a:pPr>
+              <a:rPr lang="en-US" dirty="0">
+                <a:hlinkClick r:id="rId3"/>
+              </a:rPr>
+              <a:t>https://www.aboutamazon.com/news/retail/amazon-agentic-ai-gen-ai-shopping</a:t>
+            </a:r>
             <a:endParaRPr lang="en-US" dirty="0"/>
-          </a:p>
-          <a:p>
-            <a:pPr rtl="0"/>
-            <a:r>
-              <a:rPr lang="en-US" b="1" dirty="0"/>
-              <a:t>How do you measure PMM success?</a:t>
-            </a:r>
-            <a:br>
-              <a:rPr lang="en-US" dirty="0"/>
-            </a:br>
-            <a:r>
-              <a:rPr lang="en-US" dirty="0"/>
-              <a:t>Not MQLs. Three tiers:</a:t>
-            </a:r>
-          </a:p>
-          <a:p>
-            <a:pPr lvl="0" rtl="0"/>
-            <a:r>
-              <a:rPr lang="en-US" b="1" dirty="0"/>
-              <a:t>Leading:</a:t>
-            </a:r>
-            <a:r>
-              <a:rPr lang="en-US" dirty="0"/>
-              <a:t> message resonance in win/loss, docs-to-first-call conversion, sales objection frequency.</a:t>
-            </a:r>
-          </a:p>
-          <a:p>
-            <a:pPr lvl="0" rtl="0"/>
-            <a:r>
-              <a:rPr lang="en-US" b="1" dirty="0"/>
-              <a:t>Activation:</a:t>
-            </a:r>
-            <a:r>
-              <a:rPr lang="en-US" dirty="0"/>
-              <a:t> signup → </a:t>
-            </a:r>
-            <a:r>
-              <a:rPr lang="en-US" b="1" dirty="0"/>
-              <a:t>first production workload</a:t>
-            </a:r>
-            <a:r>
-              <a:rPr lang="en-US" dirty="0"/>
-              <a:t> (the number that actually matters for a dev platform).</a:t>
-            </a:r>
-          </a:p>
-          <a:p>
-            <a:pPr lvl="0" rtl="0"/>
-            <a:r>
-              <a:rPr lang="en-US" b="1" dirty="0"/>
-              <a:t>Commercial:</a:t>
-            </a:r>
-            <a:r>
-              <a:rPr lang="en-US" dirty="0"/>
-              <a:t> win rate vs named competitors, ACV mix, gross margin.</a:t>
-            </a:r>
-          </a:p>
-          <a:p>
-            <a:pPr lvl="0" rtl="0"/>
-            <a:br>
-              <a:rPr lang="en-US" dirty="0"/>
-            </a:br>
-            <a:r>
-              <a:rPr lang="en-US" dirty="0"/>
-              <a:t>At AWS I tied launch funding to milestone gates on adoption, trust, and unit economics — same discipline. </a:t>
-            </a:r>
-            <a:r>
-              <a:rPr lang="en-US" b="1" dirty="0"/>
-              <a:t>If I can't name the gate, I don't ship the launch.</a:t>
-            </a:r>
-            <a:endParaRPr lang="en-US" dirty="0"/>
-          </a:p>
-          <a:p>
-            <a:pPr marL="0" marR="0" lvl="0" indent="0" algn="l" defTabSz="914400" rtl="0" eaLnBrk="1" fontAlgn="auto" latinLnBrk="0" hangingPunct="1">
-              <a:lnSpc>
-                <a:spcPct val="100000"/>
-              </a:lnSpc>
-              <a:spcBef>
-                <a:spcPts val="0"/>
-              </a:spcBef>
-              <a:spcAft>
-                <a:spcPts val="0"/>
-              </a:spcAft>
-              <a:buClrTx/>
-              <a:buSzTx/>
-              <a:buFontTx/>
-              <a:buNone/>
-              <a:tabLst/>
-              <a:defRPr/>
-            </a:pPr>
-            <a:endParaRPr lang="en-US" dirty="0"/>
-          </a:p>
-          <a:p>
-            <a:pPr marL="0" marR="0" lvl="0" indent="0" algn="l" defTabSz="914400" rtl="0" eaLnBrk="1" fontAlgn="auto" latinLnBrk="0" hangingPunct="1">
-              <a:lnSpc>
-                <a:spcPct val="100000"/>
-              </a:lnSpc>
-              <a:spcBef>
-                <a:spcPts val="0"/>
-              </a:spcBef>
-              <a:spcAft>
-                <a:spcPts val="0"/>
-              </a:spcAft>
-              <a:buClrTx/>
-              <a:buSzTx/>
-              <a:buFontTx/>
-              <a:buNone/>
-              <a:tabLst/>
-              <a:defRPr/>
-            </a:pPr>
-            <a:r>
-              <a:rPr lang="en-US" b="1" dirty="0"/>
-              <a:t>How do you work with engineering/DevRel?</a:t>
-            </a:r>
-            <a:br>
-              <a:rPr lang="en-US" dirty="0"/>
-            </a:br>
-            <a:r>
-              <a:rPr lang="en-US" dirty="0"/>
-              <a:t>I bring the </a:t>
-            </a:r>
-            <a:r>
-              <a:rPr lang="en-US" b="1" dirty="0"/>
-              <a:t>launch-readiness bar</a:t>
-            </a:r>
-            <a:r>
-              <a:rPr lang="en-US" dirty="0"/>
-              <a:t>, they bring capability. I define gates — eval thresholds, guardrails, docs quality — so "launch" is a decision, not a vibe. That's how I got hallucinations to 2.8% before shipping.</a:t>
-            </a:r>
-          </a:p>
-          <a:p>
-            <a:pPr marL="0" marR="0" lvl="0" indent="0" algn="l" defTabSz="914400" rtl="0" eaLnBrk="1" fontAlgn="auto" latinLnBrk="0" hangingPunct="1">
-              <a:lnSpc>
-                <a:spcPct val="100000"/>
-              </a:lnSpc>
-              <a:spcBef>
-                <a:spcPts val="0"/>
-              </a:spcBef>
-              <a:spcAft>
-                <a:spcPts val="0"/>
-              </a:spcAft>
-              <a:buClrTx/>
-              <a:buSzTx/>
-              <a:buFontTx/>
-              <a:buNone/>
-              <a:tabLst/>
-              <a:defRPr/>
-            </a:pPr>
-            <a:r>
-              <a:rPr lang="en-US" dirty="0"/>
-              <a:t>What I'd carry over: </a:t>
-            </a:r>
-            <a:r>
-              <a:rPr lang="en-US" b="1" dirty="0"/>
-              <a:t>the launch-gate discipline.</a:t>
-            </a:r>
-            <a:r>
-              <a:rPr lang="en-US" dirty="0"/>
-              <a:t> Startups under-invest in it and it's the cheapest quality mechanism there is.</a:t>
-            </a:r>
-          </a:p>
-          <a:p>
-            <a:pPr marL="0" marR="0" lvl="0" indent="0" algn="l" defTabSz="914400" rtl="0" eaLnBrk="1" fontAlgn="auto" latinLnBrk="0" hangingPunct="1">
-              <a:lnSpc>
-                <a:spcPct val="100000"/>
-              </a:lnSpc>
-              <a:spcBef>
-                <a:spcPts val="0"/>
-              </a:spcBef>
-              <a:spcAft>
-                <a:spcPts val="0"/>
-              </a:spcAft>
-              <a:buClrTx/>
-              <a:buSzTx/>
-              <a:buFontTx/>
-              <a:buNone/>
-              <a:tabLst/>
-              <a:defRPr/>
-            </a:pPr>
-            <a:endParaRPr lang="en-US" dirty="0"/>
-          </a:p>
-          <a:p>
-            <a:pPr marL="0" marR="0" lvl="0" indent="0" algn="l" defTabSz="914400" rtl="0" eaLnBrk="1" fontAlgn="auto" latinLnBrk="0" hangingPunct="1">
-              <a:lnSpc>
-                <a:spcPct val="100000"/>
-              </a:lnSpc>
-              <a:spcBef>
-                <a:spcPts val="0"/>
-              </a:spcBef>
-              <a:spcAft>
-                <a:spcPts val="0"/>
-              </a:spcAft>
-              <a:buClrTx/>
-              <a:buSzTx/>
-              <a:buFontTx/>
-              <a:buNone/>
-              <a:tabLst/>
-              <a:defRPr/>
-            </a:pPr>
-            <a:r>
-              <a:rPr lang="en-US" b="1" dirty="0"/>
-              <a:t>Hardest launch you've run.</a:t>
-            </a:r>
-            <a:br>
-              <a:rPr lang="en-US" dirty="0"/>
-            </a:br>
-            <a:r>
-              <a:rPr lang="en-US" dirty="0"/>
-              <a:t>Japan localization at AWS. Not translation — tone, tokenization, honorifics, interaction design. I turned it into a </a:t>
-            </a:r>
-            <a:r>
-              <a:rPr lang="en-US" b="1" dirty="0"/>
-              <a:t>reusable internationalization template</a:t>
-            </a:r>
-            <a:r>
-              <a:rPr lang="en-US" dirty="0"/>
-              <a:t>, which is what Mistral needs going market by market across the EU and beyond.</a:t>
-            </a:r>
-          </a:p>
-          <a:p>
-            <a:pPr marL="0" marR="0" lvl="0" indent="0" algn="l" defTabSz="914400" rtl="0" eaLnBrk="1" fontAlgn="auto" latinLnBrk="0" hangingPunct="1">
-              <a:lnSpc>
-                <a:spcPct val="100000"/>
-              </a:lnSpc>
-              <a:spcBef>
-                <a:spcPts val="0"/>
-              </a:spcBef>
-              <a:spcAft>
-                <a:spcPts val="0"/>
-              </a:spcAft>
-              <a:buClrTx/>
-              <a:buSzTx/>
-              <a:buFontTx/>
-              <a:buNone/>
-              <a:tabLst/>
-              <a:defRPr/>
-            </a:pPr>
-            <a:endParaRPr lang="en-US" dirty="0"/>
-          </a:p>
-          <a:p>
-            <a:r>
-              <a:rPr lang="en-US" dirty="0"/>
-              <a:t>Customer problem → insight → positioning/GTM decision → measurable result.</a:t>
-            </a:r>
           </a:p>
         </p:txBody>
       </p:sp>
@@ -1333,6 +1436,13 @@
           </p:nvPr>
         </p:nvSpPr>
         <p:spPr/>
+        <p:txBody>
+          <a:bodyPr/>
+          <a:lstStyle/>
+          <a:p>
+            <a:endParaRPr lang="en-US"/>
+          </a:p>
+        </p:txBody>
       </p:sp>
       <p:sp>
         <p:nvSpPr>
@@ -1349,177 +1459,216 @@
           <a:bodyPr/>
           <a:lstStyle/>
           <a:p>
-            <a:pPr marL="0" marR="0" lvl="0" indent="0" algn="l" defTabSz="914400" rtl="0" eaLnBrk="1" fontAlgn="auto" latinLnBrk="0" hangingPunct="1">
-              <a:lnSpc>
-                <a:spcPct val="100000"/>
-              </a:lnSpc>
-              <a:spcBef>
-                <a:spcPts val="0"/>
-              </a:spcBef>
-              <a:spcAft>
-                <a:spcPts val="0"/>
-              </a:spcAft>
-              <a:buClrTx/>
-              <a:buSzTx/>
-              <a:buFontTx/>
-              <a:buNone/>
-              <a:tabLst/>
-              <a:defRPr/>
-            </a:pPr>
             <a:r>
               <a:rPr lang="en-US" dirty="0"/>
-              <a:t>Before that, at Rakuten I worked on an AI platform serving 50,000 merchants, where I increased conversion by Driving adoption and PMF</a:t>
-            </a:r>
-          </a:p>
-          <a:p>
-            <a:pPr marL="0" marR="0" lvl="0" indent="0" algn="l" defTabSz="914400" rtl="0" eaLnBrk="1" fontAlgn="auto" latinLnBrk="0" hangingPunct="1">
-              <a:lnSpc>
-                <a:spcPct val="100000"/>
-              </a:lnSpc>
-              <a:spcBef>
-                <a:spcPts val="0"/>
-              </a:spcBef>
-              <a:spcAft>
-                <a:spcPts val="0"/>
-              </a:spcAft>
-              <a:buClrTx/>
-              <a:buSzTx/>
-              <a:buFontTx/>
-              <a:buNone/>
-              <a:tabLst/>
-              <a:defRPr/>
-            </a:pPr>
+              <a:t>At Rakuten, I worked on the </a:t>
+            </a:r>
+            <a:r>
+              <a:rPr lang="en-US" b="1" dirty="0"/>
+              <a:t>merchant GenAI platform that later became part of RMS AI Assistant</a:t>
+            </a:r>
+            <a:r>
+              <a:rPr lang="en-US" dirty="0"/>
+              <a:t>, serving </a:t>
+            </a:r>
+            <a:r>
+              <a:rPr lang="en-US" b="1" dirty="0"/>
+              <a:t>50K+ Rakuten </a:t>
+            </a:r>
+            <a:r>
+              <a:rPr lang="en-US" b="1" dirty="0" err="1"/>
+              <a:t>Ichiba</a:t>
+            </a:r>
+            <a:r>
+              <a:rPr lang="en-US" b="1" dirty="0"/>
+              <a:t> merchants</a:t>
+            </a:r>
+            <a:r>
+              <a:rPr lang="en-US" dirty="0"/>
+              <a:t>, alongside a broader AI strategy spanning </a:t>
+            </a:r>
+            <a:r>
+              <a:rPr lang="en-US" b="1" dirty="0"/>
+              <a:t>70+ Rakuten services</a:t>
+            </a:r>
+            <a:r>
+              <a:rPr lang="en-US" dirty="0"/>
+              <a:t>.</a:t>
+            </a:r>
+          </a:p>
+          <a:p>
             <a:endParaRPr lang="en-US" dirty="0"/>
           </a:p>
           <a:p>
-            <a:pPr marL="0" marR="0" lvl="0" indent="0" algn="l" defTabSz="914400" rtl="0" eaLnBrk="1" fontAlgn="auto" latinLnBrk="0" hangingPunct="1">
-              <a:lnSpc>
-                <a:spcPct val="100000"/>
-              </a:lnSpc>
-              <a:spcBef>
-                <a:spcPts val="0"/>
-              </a:spcBef>
-              <a:spcAft>
-                <a:spcPts val="0"/>
-              </a:spcAft>
-              <a:buClrTx/>
-              <a:buSzTx/>
-              <a:buFontTx/>
-              <a:buNone/>
-              <a:tabLst/>
-              <a:defRPr/>
-            </a:pPr>
+            <a:r>
+              <a:rPr lang="en-US" dirty="0"/>
+              <a:t>My focus was </a:t>
+            </a:r>
             <a:r>
               <a:rPr lang="en-US" b="1" dirty="0"/>
-              <a:t>Walk me through a piece of messaging you wrote that failed.</a:t>
+              <a:t>market intelligence, differentiation, adoption, and product-market fit</a:t>
+            </a:r>
+            <a:r>
+              <a:rPr lang="en-US" dirty="0"/>
+              <a:t>.</a:t>
+            </a:r>
+          </a:p>
+          <a:p>
+            <a:r>
+              <a:rPr lang="en-US" b="1" dirty="0"/>
+              <a:t>Market signal → merchant workflow → positioning → roadmap → adoption</a:t>
+            </a:r>
+            <a:endParaRPr lang="en-US" dirty="0"/>
+          </a:p>
+          <a:p>
+            <a:endParaRPr lang="en-US" b="1" dirty="0"/>
+          </a:p>
+          <a:p>
+            <a:r>
+              <a:rPr lang="en-US" b="1" dirty="0"/>
+              <a:t>Differentiation</a:t>
+            </a:r>
+          </a:p>
+          <a:p>
+            <a:r>
+              <a:rPr lang="en-US" dirty="0"/>
+              <a:t>In AI, model capabilities converge quickly. The durable advantage was: </a:t>
+            </a:r>
+            <a:r>
+              <a:rPr lang="en-US" b="1" dirty="0"/>
+              <a:t>Model → proprietary context → workflow → economics → distribution</a:t>
+            </a:r>
+            <a:endParaRPr lang="en-US" dirty="0"/>
+          </a:p>
+          <a:p>
+            <a:r>
+              <a:rPr lang="en-US" dirty="0"/>
+              <a:t>The thesis was: </a:t>
+            </a:r>
+            <a:r>
+              <a:rPr lang="en-US" b="1" dirty="0"/>
+              <a:t>“Buy intelligence; build context.”</a:t>
+            </a:r>
+            <a:endParaRPr lang="en-US" dirty="0"/>
+          </a:p>
+          <a:p>
+            <a:r>
+              <a:rPr lang="en-US" dirty="0"/>
+              <a:t>Rather than compete on the model itself, we focused on Rakuten’s proprietary merchant context, distribution, and high-frequency workflows inside RMS.</a:t>
+            </a:r>
+          </a:p>
+          <a:p>
+            <a:endParaRPr lang="en-US" b="1" dirty="0"/>
+          </a:p>
+          <a:p>
+            <a:r>
+              <a:rPr lang="en-US" b="1" dirty="0"/>
+              <a:t>Messaging + roadmap pivot</a:t>
+            </a:r>
+          </a:p>
+          <a:p>
+            <a:r>
+              <a:rPr lang="en-US" dirty="0"/>
+              <a:t>We initially explored a standalone merchant chatbot positioned as </a:t>
+            </a:r>
+            <a:r>
+              <a:rPr lang="en-US" b="1" dirty="0"/>
+              <a:t>“an AI assistant for your store.”</a:t>
+            </a:r>
+            <a:r>
+              <a:rPr lang="en-US" dirty="0"/>
+              <a:t> Adoption lagged because the promise was broader than the value users experienced.</a:t>
+            </a:r>
+          </a:p>
+          <a:p>
+            <a:endParaRPr lang="en-US" dirty="0"/>
+          </a:p>
+          <a:p>
+            <a:r>
+              <a:rPr lang="en-US" dirty="0"/>
+              <a:t>I helped </a:t>
+            </a:r>
+            <a:r>
+              <a:rPr lang="en-US" b="1" dirty="0"/>
+              <a:t>deprioritize the standalone chatbot as the primary experience</a:t>
+            </a:r>
+            <a:r>
+              <a:rPr lang="en-US" dirty="0"/>
+              <a:t> and shift investment toward embedded workflows such as </a:t>
+            </a:r>
+            <a:r>
+              <a:rPr lang="en-US" b="1" dirty="0"/>
+              <a:t>product listing, customer support, and sales analysis</a:t>
+            </a:r>
+            <a:r>
+              <a:rPr lang="en-US" dirty="0"/>
+              <a:t>.</a:t>
+            </a:r>
+          </a:p>
+          <a:p>
+            <a:endParaRPr lang="en-US" dirty="0"/>
+          </a:p>
+          <a:p>
+            <a:r>
+              <a:rPr lang="en-US" dirty="0"/>
+              <a:t>The sharper value proposition became: </a:t>
+            </a:r>
+            <a:r>
+              <a:rPr lang="en-US" b="1" dirty="0"/>
+              <a:t>“List a product in 12 minutes instead of 45.” </a:t>
+            </a:r>
+            <a:r>
+              <a:rPr lang="en-US" dirty="0"/>
+              <a:t>That shift improved product-market fit and, internally, drove </a:t>
+            </a:r>
+            <a:r>
+              <a:rPr lang="en-US" b="1" dirty="0"/>
+              <a:t>~40% adoption and +15% conversion</a:t>
+            </a:r>
+            <a:r>
+              <a:rPr lang="en-US" dirty="0"/>
+              <a:t>.</a:t>
+            </a:r>
+          </a:p>
+          <a:p>
+            <a:endParaRPr lang="en-US" dirty="0"/>
+          </a:p>
+          <a:p>
+            <a:r>
+              <a:rPr lang="en-US" b="1" dirty="0">
+                <a:effectLst/>
+              </a:rPr>
+              <a:t>My role:</a:t>
+            </a:r>
+            <a:r>
+              <a:rPr lang="en-US" dirty="0"/>
+              <a:t> evaluated where AI could create defensible value → defined the “buy intelligence, build context” thesis → used product and economic evidence to redirect the roadmap → embedded AI into high-value merchant workflows → measured adoption and business impact. </a:t>
+            </a:r>
+            <a:r>
+              <a:rPr lang="en-US" b="1" dirty="0">
+                <a:effectLst/>
+              </a:rPr>
+              <a:t>In enterprise AI, the model is often not the durable moat. Proprietary context, integration into an important workflow, distribution, and measurable economics are more defensible.</a:t>
+            </a:r>
+          </a:p>
+          <a:p>
+            <a:endParaRPr lang="en-US" b="1" dirty="0">
+              <a:effectLst/>
+            </a:endParaRPr>
+          </a:p>
+          <a:p>
+            <a:r>
+              <a:rPr lang="en-US" b="1" dirty="0"/>
+              <a:t>Rakuten RMS AI Assistant — exact product, merchant scale, workflows</a:t>
             </a:r>
             <a:br>
               <a:rPr lang="en-US" dirty="0"/>
             </a:br>
             <a:r>
-              <a:rPr lang="en-US" dirty="0"/>
-              <a:t>Framework: </a:t>
-            </a:r>
-            <a:r>
-              <a:rPr lang="en-US" b="1" dirty="0"/>
-              <a:t>Claim → Evidence gap → Rewrite.</a:t>
-            </a:r>
-            <a:r>
-              <a:rPr lang="en-US" dirty="0"/>
-              <a:t> </a:t>
-            </a:r>
-          </a:p>
-          <a:p>
-            <a:pPr marL="0" marR="0" lvl="0" indent="0" algn="l" defTabSz="914400" rtl="0" eaLnBrk="1" fontAlgn="auto" latinLnBrk="0" hangingPunct="1">
-              <a:lnSpc>
-                <a:spcPct val="100000"/>
-              </a:lnSpc>
-              <a:spcBef>
-                <a:spcPts val="0"/>
-              </a:spcBef>
-              <a:spcAft>
-                <a:spcPts val="0"/>
-              </a:spcAft>
-              <a:buClrTx/>
-              <a:buSzTx/>
-              <a:buFontTx/>
-              <a:buNone/>
-              <a:tabLst/>
-              <a:defRPr/>
-            </a:pPr>
-            <a:r>
-              <a:rPr lang="en-US" dirty="0"/>
-              <a:t>At Rakuten I launched a standalone merchant chatbot positioned on "AI assistant for your store." Adoption stalled — the message promised a companion, the product solved one task. </a:t>
-            </a:r>
-          </a:p>
-          <a:p>
-            <a:pPr marL="0" marR="0" lvl="0" indent="0" algn="l" defTabSz="914400" rtl="0" eaLnBrk="1" fontAlgn="auto" latinLnBrk="0" hangingPunct="1">
-              <a:lnSpc>
-                <a:spcPct val="100000"/>
-              </a:lnSpc>
-              <a:spcBef>
-                <a:spcPts val="0"/>
-              </a:spcBef>
-              <a:spcAft>
-                <a:spcPts val="0"/>
-              </a:spcAft>
-              <a:buClrTx/>
-              <a:buSzTx/>
-              <a:buFontTx/>
-              <a:buNone/>
-              <a:tabLst/>
-              <a:defRPr/>
-            </a:pPr>
-            <a:r>
-              <a:rPr lang="en-US" dirty="0"/>
-              <a:t>I killed it, re-anchored on </a:t>
-            </a:r>
-            <a:r>
-              <a:rPr lang="en-US" b="1" dirty="0"/>
-              <a:t>"list a product in 12 minutes instead of 45,"</a:t>
-            </a:r>
-            <a:r>
-              <a:rPr lang="en-US" dirty="0"/>
-              <a:t> and embedded AI into the existing workflow. Hit </a:t>
-            </a:r>
-            <a:r>
-              <a:rPr lang="en-US" b="1" dirty="0"/>
-              <a:t>40% adoption in six months, +15% conversion</a:t>
-            </a:r>
-            <a:r>
-              <a:rPr lang="en-US" dirty="0"/>
-              <a:t>. </a:t>
-            </a:r>
-          </a:p>
-          <a:p>
-            <a:pPr marL="0" marR="0" lvl="0" indent="0" algn="l" defTabSz="914400" rtl="0" eaLnBrk="1" fontAlgn="auto" latinLnBrk="0" hangingPunct="1">
-              <a:lnSpc>
-                <a:spcPct val="100000"/>
-              </a:lnSpc>
-              <a:spcBef>
-                <a:spcPts val="0"/>
-              </a:spcBef>
-              <a:spcAft>
-                <a:spcPts val="0"/>
-              </a:spcAft>
-              <a:buClrTx/>
-              <a:buSzTx/>
-              <a:buFontTx/>
-              <a:buNone/>
-              <a:tabLst/>
-              <a:defRPr/>
-            </a:pPr>
-            <a:r>
-              <a:rPr lang="en-US" dirty="0"/>
-              <a:t>Lesson: </a:t>
-            </a:r>
-            <a:r>
-              <a:rPr lang="en-US" b="1" dirty="0"/>
-              <a:t>positioning fails when the promise is broader than the </a:t>
-            </a:r>
-            <a:r>
-              <a:rPr lang="en-US" b="1"/>
-              <a:t>proof.</a:t>
+              <a:rPr lang="en-US" dirty="0">
+                <a:hlinkClick r:id="rId3"/>
+              </a:rPr>
+              <a:t>https://global.rakuten.com/corp/news/press/2024/0430_01.html</a:t>
             </a:r>
             <a:endParaRPr lang="en-US" dirty="0"/>
           </a:p>
@@ -1649,6 +1798,13 @@
           </p:nvPr>
         </p:nvSpPr>
         <p:spPr/>
+        <p:txBody>
+          <a:bodyPr/>
+          <a:lstStyle/>
+          <a:p>
+            <a:endParaRPr lang="en-US"/>
+          </a:p>
+        </p:txBody>
       </p:sp>
       <p:sp>
         <p:nvSpPr>
@@ -1665,26 +1821,25 @@
           <a:bodyPr/>
           <a:lstStyle/>
           <a:p>
-            <a:pPr marL="0" marR="0" lvl="0" indent="0" algn="l" defTabSz="914400" rtl="0" eaLnBrk="1" fontAlgn="auto" latinLnBrk="0" hangingPunct="1">
-              <a:lnSpc>
-                <a:spcPct val="100000"/>
-              </a:lnSpc>
-              <a:spcBef>
-                <a:spcPts val="0"/>
-              </a:spcBef>
-              <a:spcAft>
-                <a:spcPts val="0"/>
-              </a:spcAft>
-              <a:buClrTx/>
-              <a:buSzTx/>
-              <a:buFontTx/>
-              <a:buNone/>
-              <a:tabLst/>
-              <a:defRPr/>
-            </a:pPr>
             <a:r>
               <a:rPr lang="en-US" dirty="0"/>
-              <a:t>And at Microsoft, I worked on enterprise GTM and segmentation along with lifecycle growth.</a:t>
+              <a:t>At Microsoft, I worked on </a:t>
+            </a:r>
+            <a:r>
+              <a:rPr lang="en-US" b="1" dirty="0"/>
+              <a:t>Azure AI platform growth and enterprise GTM</a:t>
+            </a:r>
+            <a:r>
+              <a:rPr lang="en-US" dirty="0"/>
+              <a:t>, across the developer lifecycle that would later become central to </a:t>
+            </a:r>
+            <a:r>
+              <a:rPr lang="en-US" b="1" dirty="0"/>
+              <a:t>Azure AI Studio and Foundry</a:t>
+            </a:r>
+            <a:r>
+              <a:rPr lang="en-US" dirty="0"/>
+              <a:t>.</a:t>
             </a:r>
           </a:p>
           <a:p>
@@ -1693,8 +1848,187 @@
           <a:p>
             <a:r>
               <a:rPr lang="en-US" dirty="0"/>
-              <a:t>Customer problem → insight → positioning/GTM decision → measurable result.</a:t>
-            </a:r>
+              <a:t>The journey was: </a:t>
+            </a:r>
+            <a:r>
+              <a:rPr lang="en-US" b="1" dirty="0"/>
+              <a:t>Discover → evaluate → deploy → production → expand</a:t>
+            </a:r>
+            <a:endParaRPr lang="en-US" dirty="0"/>
+          </a:p>
+          <a:p>
+            <a:endParaRPr lang="en-US" dirty="0"/>
+          </a:p>
+          <a:p>
+            <a:r>
+              <a:rPr lang="en-US" dirty="0"/>
+              <a:t>I focused on onboarding, activation, retention, expansion, and win-back. Internally, that work drove </a:t>
+            </a:r>
+            <a:r>
+              <a:rPr lang="en-US" b="1" dirty="0"/>
+              <a:t>activation +262%</a:t>
+            </a:r>
+            <a:r>
+              <a:rPr lang="en-US" dirty="0"/>
+              <a:t>, increased </a:t>
+            </a:r>
+            <a:r>
+              <a:rPr lang="en-US" b="1" dirty="0"/>
+              <a:t>NRR from 102% → 128%</a:t>
+            </a:r>
+            <a:r>
+              <a:rPr lang="en-US" dirty="0"/>
+              <a:t>, reduced </a:t>
+            </a:r>
+            <a:r>
+              <a:rPr lang="en-US" b="1" dirty="0"/>
+              <a:t>churn from 14% → 6.5%</a:t>
+            </a:r>
+            <a:r>
+              <a:rPr lang="en-US" dirty="0"/>
+              <a:t>, and improved </a:t>
+            </a:r>
+            <a:r>
+              <a:rPr lang="en-US" b="1" dirty="0"/>
+              <a:t>win-back from 4% → 22%</a:t>
+            </a:r>
+            <a:r>
+              <a:rPr lang="en-US" dirty="0"/>
+              <a:t>.</a:t>
+            </a:r>
+          </a:p>
+          <a:p>
+            <a:endParaRPr lang="en-US" b="1" dirty="0"/>
+          </a:p>
+          <a:p>
+            <a:r>
+              <a:rPr lang="en-US" b="1" dirty="0"/>
+              <a:t>Self-service adoption</a:t>
+            </a:r>
+          </a:p>
+          <a:p>
+            <a:r>
+              <a:rPr lang="en-US" dirty="0"/>
+              <a:t>I focused on </a:t>
+            </a:r>
+            <a:r>
+              <a:rPr lang="en-US" b="1" dirty="0"/>
+              <a:t>time-to-first-value</a:t>
+            </a:r>
+            <a:r>
+              <a:rPr lang="en-US" dirty="0"/>
+              <a:t>: how quickly developers moved from evaluating AI capabilities to deploying a meaningful workload. I used </a:t>
+            </a:r>
+            <a:r>
+              <a:rPr lang="en-US" b="1" dirty="0"/>
+              <a:t>cohort and propensity analysis</a:t>
+            </a:r>
+            <a:r>
+              <a:rPr lang="en-US" dirty="0"/>
+              <a:t> to identify where developers stalled, prioritize lifecycle interventions, and measure impact across activation, retention, and expansion. The goal wasn’t more signups. It was moving developers from </a:t>
+            </a:r>
+            <a:r>
+              <a:rPr lang="en-US" b="1" dirty="0"/>
+              <a:t>experimentation to sustained production usage</a:t>
+            </a:r>
+            <a:r>
+              <a:rPr lang="en-US" dirty="0"/>
+              <a:t>.</a:t>
+            </a:r>
+          </a:p>
+          <a:p>
+            <a:endParaRPr lang="en-US" b="1" dirty="0"/>
+          </a:p>
+          <a:p>
+            <a:r>
+              <a:rPr lang="en-US" b="1" dirty="0"/>
+              <a:t>Foundry Operating Model</a:t>
+            </a:r>
+          </a:p>
+          <a:p>
+            <a:r>
+              <a:rPr lang="en-US" dirty="0"/>
+              <a:t>That lifecycle is the same one Microsoft later made more explicit in </a:t>
+            </a:r>
+            <a:r>
+              <a:rPr lang="en-US" b="1" dirty="0"/>
+              <a:t>Azure AI Studio and Azure AI Foundry</a:t>
+            </a:r>
+            <a:r>
+              <a:rPr lang="en-US" dirty="0"/>
+              <a:t>:</a:t>
+            </a:r>
+          </a:p>
+          <a:p>
+            <a:r>
+              <a:rPr lang="en-US" b="1" dirty="0"/>
+              <a:t>Discover models → evaluate → deploy → production → expand</a:t>
+            </a:r>
+            <a:endParaRPr lang="en-US" dirty="0"/>
+          </a:p>
+          <a:p>
+            <a:r>
+              <a:rPr lang="en-US" dirty="0"/>
+              <a:t>The operating model maps directly to how Foundry drives developer adoption today.</a:t>
+            </a:r>
+          </a:p>
+          <a:p>
+            <a:endParaRPr lang="en-US" dirty="0"/>
+          </a:p>
+          <a:p>
+            <a:r>
+              <a:rPr lang="en-US" b="1" dirty="0">
+                <a:effectLst/>
+              </a:rPr>
+              <a:t>My role:</a:t>
+            </a:r>
+            <a:r>
+              <a:rPr lang="en-US" dirty="0"/>
+              <a:t> mapped the lifecycle → identified time-to-first-value and retention bottlenecks → segmented users with behavioral and propensity signals → prioritized interventions → redesigned onboarding and lifecycle mechanics → measured durable adoption. </a:t>
+            </a:r>
+            <a:r>
+              <a:rPr lang="en-US" b="1" dirty="0">
+                <a:effectLst/>
+              </a:rPr>
+              <a:t>For self-service SaaS, acquisition is only the beginning. Reduce time-to-first-value, make the first successful use case obvious, and use behavioral evidence to personalize retention and expansion.</a:t>
+            </a:r>
+          </a:p>
+          <a:p>
+            <a:endParaRPr lang="en-US" b="1" dirty="0">
+              <a:effectLst/>
+            </a:endParaRPr>
+          </a:p>
+          <a:p>
+            <a:r>
+              <a:rPr lang="en-US" b="1" dirty="0"/>
+              <a:t>How have you driven adoption after launch?</a:t>
+            </a:r>
+            <a:br>
+              <a:rPr lang="en-US" dirty="0"/>
+            </a:br>
+            <a:r>
+              <a:rPr lang="en-US" dirty="0"/>
+              <a:t>I start by finding where users drop off, then improve onboarding, messaging, and the product experience around that point. At Microsoft, that approach increased activation 262%, improved NRR from 102% to 128%, and reduced churn from 14% to 6.5%.</a:t>
+            </a:r>
+          </a:p>
+          <a:p>
+            <a:endParaRPr lang="en-US" dirty="0"/>
+          </a:p>
+          <a:p>
+            <a:r>
+              <a:rPr lang="en-US" b="1" dirty="0"/>
+              <a:t>Microsoft Azure AI platform / Foundry — product-name timeline</a:t>
+            </a:r>
+            <a:br>
+              <a:rPr lang="en-US" dirty="0"/>
+            </a:br>
+            <a:r>
+              <a:rPr lang="en-US" dirty="0">
+                <a:hlinkClick r:id="rId3"/>
+              </a:rPr>
+              <a:t>https://azure.microsoft.com/en-us/blog/the-next-wave-of-azure-innovation-azure-ai-foundry-intelligent-data-and-more/</a:t>
+            </a:r>
+            <a:endParaRPr lang="en-US" dirty="0"/>
           </a:p>
         </p:txBody>
       </p:sp>
@@ -1822,6 +2156,13 @@
           </p:nvPr>
         </p:nvSpPr>
         <p:spPr/>
+        <p:txBody>
+          <a:bodyPr/>
+          <a:lstStyle/>
+          <a:p>
+            <a:endParaRPr lang="en-US"/>
+          </a:p>
+        </p:txBody>
       </p:sp>
       <p:sp>
         <p:nvSpPr>
@@ -1838,74 +2179,141 @@
           <a:bodyPr/>
           <a:lstStyle/>
           <a:p>
-            <a:pPr marL="0" marR="0" lvl="0" indent="0" algn="l" defTabSz="914400" rtl="0" eaLnBrk="1" fontAlgn="auto" latinLnBrk="0" hangingPunct="1">
-              <a:lnSpc>
-                <a:spcPct val="100000"/>
-              </a:lnSpc>
-              <a:spcBef>
-                <a:spcPts val="0"/>
-              </a:spcBef>
-              <a:spcAft>
-                <a:spcPts val="0"/>
-              </a:spcAft>
-              <a:buClrTx/>
-              <a:buSzTx/>
-              <a:buFontTx/>
-              <a:buNone/>
-              <a:tabLst/>
-              <a:defRPr/>
-            </a:pPr>
             <a:r>
               <a:rPr lang="en-US" b="1" dirty="0"/>
-              <a:t>Sovereignty is my wedge</a:t>
+              <a:t>Sovereignty is my wedge.</a:t>
             </a:r>
             <a:r>
               <a:rPr lang="en-US" dirty="0"/>
-              <a:t> — Mistral's differentiator is EU/on-prem control. I've sold that exact story: regulated-cloud deployment patterns across 10 markets, data residency, in-country key management, compliance-as-a-feature.</a:t>
-            </a:r>
-          </a:p>
-          <a:p>
+              <a:t> At Microsoft, I worked on regulated-cloud and data-sovereignty patterns for </a:t>
+            </a:r>
+            <a:r>
+              <a:rPr lang="en-US" b="1" dirty="0"/>
+              <a:t>Microsoft Cloud for Financial Services on Azure</a:t>
+            </a:r>
+            <a:r>
+              <a:rPr lang="en-US" dirty="0"/>
+              <a:t>, across </a:t>
+            </a:r>
+            <a:r>
+              <a:rPr lang="en-US" b="1" dirty="0"/>
+              <a:t>10 customer markets</a:t>
+            </a:r>
+            <a:r>
+              <a:rPr lang="en-US" dirty="0"/>
+              <a:t>.</a:t>
+            </a:r>
+          </a:p>
+          <a:p>
+            <a:r>
+              <a:rPr lang="en-US" dirty="0"/>
+              <a:t>The focus was </a:t>
+            </a:r>
+            <a:r>
+              <a:rPr lang="en-US" b="1" dirty="0"/>
+              <a:t>data residency, customer-controlled key management, and compliance-by-design</a:t>
+            </a:r>
+            <a:r>
+              <a:rPr lang="en-US" dirty="0"/>
+              <a:t> — turning regulatory complexity into a credible path to production.</a:t>
+            </a:r>
+          </a:p>
+          <a:p>
+            <a:endParaRPr lang="en-US" b="1" dirty="0"/>
+          </a:p>
+          <a:p>
+            <a:r>
+              <a:rPr lang="en-US" b="1" dirty="0"/>
+              <a:t>Positioning</a:t>
+            </a:r>
+          </a:p>
+          <a:p>
+            <a:r>
+              <a:rPr lang="en-US" b="1" dirty="0"/>
+              <a:t>Objection → requirement → technical pattern → proof → reusable field narrative</a:t>
+            </a:r>
             <a:endParaRPr lang="en-US" dirty="0"/>
           </a:p>
           <a:p>
             <a:r>
+              <a:rPr lang="en-US" dirty="0"/>
+              <a:t>I translated complex compliance and deployment architecture into a simpler customer proposition: </a:t>
+            </a:r>
+            <a:r>
               <a:rPr lang="en-US" b="1" dirty="0"/>
-              <a:t>How do you enable a sales team you don't manage?</a:t>
+              <a:t>A credible path from regulatory constraint to production.</a:t>
             </a:r>
             <a:endParaRPr lang="en-US" dirty="0"/>
           </a:p>
           <a:p>
+            <a:endParaRPr lang="en-US" b="1" dirty="0"/>
+          </a:p>
+          <a:p>
             <a:r>
               <a:rPr lang="en-US" b="1" dirty="0"/>
-              <a:t>Three artifacts, in this order:</a:t>
-            </a:r>
+              <a:t>Sales enablement</a:t>
+            </a:r>
+          </a:p>
+          <a:p>
             <a:r>
               <a:rPr lang="en-US" dirty="0"/>
-              <a:t> (a) the </a:t>
+              <a:t>My principle is: </a:t>
             </a:r>
             <a:r>
               <a:rPr lang="en-US" b="1" dirty="0"/>
-              <a:t>objection map</a:t>
-            </a:r>
+              <a:t>If sales and engineering solve the same objection from scratch on every account, it should be productized.</a:t>
+            </a:r>
+            <a:endParaRPr lang="en-US" dirty="0"/>
+          </a:p>
+          <a:p>
+            <a:endParaRPr lang="en-US" dirty="0"/>
+          </a:p>
+          <a:p>
             <a:r>
               <a:rPr lang="en-US" dirty="0"/>
-              <a:t> — top 10 real objections from call recordings, each with a one-line answer and a proof link; (b) the </a:t>
-            </a:r>
+              <a:t>I used three core artifacts:</a:t>
+            </a:r>
+          </a:p>
+          <a:p>
+            <a:pPr lvl="0"/>
             <a:r>
               <a:rPr lang="en-US" b="1" dirty="0"/>
-              <a:t>discovery question set</a:t>
+              <a:t>Objection map</a:t>
             </a:r>
             <a:r>
               <a:rPr lang="en-US" dirty="0"/>
-              <a:t> that qualifies for sovereignty need in the first call; (c) </a:t>
-            </a:r>
+              <a:t> — top blockers, answer, proof</a:t>
+            </a:r>
+          </a:p>
+          <a:p>
+            <a:pPr lvl="0"/>
             <a:r>
               <a:rPr lang="en-US" b="1" dirty="0"/>
-              <a:t>one demo narrative</a:t>
+              <a:t>Discovery questions</a:t>
             </a:r>
             <a:r>
               <a:rPr lang="en-US" dirty="0"/>
-              <a:t>, not five. Then I measure </a:t>
+              <a:t> — qualify sovereignty needs early</a:t>
+            </a:r>
+          </a:p>
+          <a:p>
+            <a:pPr lvl="0"/>
+            <a:r>
+              <a:rPr lang="en-US" b="1" dirty="0"/>
+              <a:t>One deployment narrative</a:t>
+            </a:r>
+            <a:r>
+              <a:rPr lang="en-US" dirty="0"/>
+              <a:t> — a consistent field story</a:t>
+            </a:r>
+          </a:p>
+          <a:p>
+            <a:endParaRPr lang="en-US" dirty="0"/>
+          </a:p>
+          <a:p>
+            <a:r>
+              <a:rPr lang="en-US" dirty="0"/>
+              <a:t>Then I tracked </a:t>
             </a:r>
             <a:r>
               <a:rPr lang="en-US" b="1" dirty="0"/>
@@ -1913,7 +2321,15 @@
             </a:r>
             <a:r>
               <a:rPr lang="en-US" dirty="0"/>
-              <a:t> — if the same blocker keeps surfacing, my enablement failed, not the rep. </a:t>
+              <a:t> to see whether the enablement was actually working. Internally, this helped </a:t>
+            </a:r>
+            <a:r>
+              <a:rPr lang="en-US" b="1" dirty="0"/>
+              <a:t>rescue a $5M at-risk contract and support a $2M expansion</a:t>
+            </a:r>
+            <a:r>
+              <a:rPr lang="en-US" dirty="0"/>
+              <a:t>.</a:t>
             </a:r>
           </a:p>
           <a:p>
@@ -1922,11 +2338,53 @@
           <a:p>
             <a:r>
               <a:rPr lang="en-US" dirty="0"/>
-              <a:t>At Microsoft this is how compliance-as-a-feature went from a blocker to the reason we </a:t>
+              <a:t>The same playbook applies to Mistral: </a:t>
             </a:r>
             <a:r>
               <a:rPr lang="en-US" b="1" dirty="0"/>
-              <a:t>recovered a $5M account and won a $2M upsell.</a:t>
+              <a:t>Turn sovereignty from a compliance objection into a production and buying advantage.</a:t>
+            </a:r>
+            <a:endParaRPr lang="en-US" dirty="0"/>
+          </a:p>
+          <a:p>
+            <a:endParaRPr lang="en-US" dirty="0"/>
+          </a:p>
+          <a:p>
+            <a:r>
+              <a:rPr lang="en-US" b="1" dirty="0">
+                <a:effectLst/>
+              </a:rPr>
+              <a:t>My role:</a:t>
+            </a:r>
+            <a:r>
+              <a:rPr lang="en-US" dirty="0"/>
+              <a:t> captured recurring enterprise blockers → translated them into product and technical requirements → aligned engineering, product, legal, and field teams → codified reusable deployment patterns and SOPs → scaled the solution across engagements and commercial outcomes. </a:t>
+            </a:r>
+            <a:r>
+              <a:rPr lang="en-US" b="1" dirty="0">
+                <a:effectLst/>
+              </a:rPr>
+              <a:t>The best enterprise field enablement finds the objection that keeps recurring, solves the root problem once with product and engineering, and gives the field a repeatable way to diagnose, explain, and prove the answer.</a:t>
+            </a:r>
+          </a:p>
+          <a:p>
+            <a:endParaRPr lang="en-US" b="1" dirty="0">
+              <a:effectLst/>
+            </a:endParaRPr>
+          </a:p>
+          <a:p>
+            <a:r>
+              <a:rPr lang="en-US" b="1" dirty="0"/>
+              <a:t>Microsoft sovereignty / Financial Services — regulated-cloud positioning</a:t>
+            </a:r>
+            <a:br>
+              <a:rPr lang="en-US" dirty="0"/>
+            </a:br>
+            <a:r>
+              <a:rPr lang="en-US" dirty="0">
+                <a:hlinkClick r:id="rId3"/>
+              </a:rPr>
+              <a:t>https://www.microsoft.com/en-us/microsoft-cloud/blog/financial-services/2021/02/24/announcing-microsoft-cloud-for-financial-services/</a:t>
             </a:r>
             <a:endParaRPr lang="en-US" dirty="0"/>
           </a:p>
@@ -2019,6 +2477,199 @@
     <p:extLst>
       <p:ext uri="{BB962C8B-B14F-4D97-AF65-F5344CB8AC3E}">
         <p14:creationId xmlns:p14="http://schemas.microsoft.com/office/powerpoint/2010/main" val="1024086991"/>
+      </p:ext>
+    </p:extLst>
+  </p:cSld>
+  <p:clrMapOvr>
+    <a:masterClrMapping/>
+  </p:clrMapOvr>
+</p:notes>
+</file>
+
+<file path=ppt/notesSlides/notesSlide6.xml><?xml version="1.0" encoding="utf-8"?>
+<p:notes xmlns:a="http://schemas.openxmlformats.org/drawingml/2006/main" xmlns:r="http://schemas.openxmlformats.org/officeDocument/2006/relationships" xmlns:p="http://schemas.openxmlformats.org/presentationml/2006/main">
+  <p:cSld>
+    <p:spTree>
+      <p:nvGrpSpPr>
+        <p:cNvPr id="1" name=""/>
+        <p:cNvGrpSpPr/>
+        <p:nvPr/>
+      </p:nvGrpSpPr>
+      <p:grpSpPr>
+        <a:xfrm>
+          <a:off x="0" y="0"/>
+          <a:ext cx="0" cy="0"/>
+          <a:chOff x="0" y="0"/>
+          <a:chExt cx="0" cy="0"/>
+        </a:xfrm>
+      </p:grpSpPr>
+      <p:sp>
+        <p:nvSpPr>
+          <p:cNvPr id="2" name="Slide Image Placeholder 1"/>
+          <p:cNvSpPr>
+            <a:spLocks noGrp="1" noRot="1" noChangeAspect="1"/>
+          </p:cNvSpPr>
+          <p:nvPr>
+            <p:ph type="sldImg"/>
+          </p:nvPr>
+        </p:nvSpPr>
+        <p:spPr/>
+        <p:txBody>
+          <a:bodyPr/>
+          <a:lstStyle/>
+          <a:p>
+            <a:endParaRPr lang="en-US"/>
+          </a:p>
+        </p:txBody>
+      </p:sp>
+      <p:sp>
+        <p:nvSpPr>
+          <p:cNvPr id="3" name="Notes Placeholder 2"/>
+          <p:cNvSpPr>
+            <a:spLocks noGrp="1"/>
+          </p:cNvSpPr>
+          <p:nvPr>
+            <p:ph type="body" idx="1"/>
+          </p:nvPr>
+        </p:nvSpPr>
+        <p:spPr/>
+        <p:txBody>
+          <a:bodyPr/>
+          <a:lstStyle/>
+          <a:p>
+            <a:r>
+              <a:rPr lang="en-US" dirty="0"/>
+              <a:t>At AWS, I ran positioning for </a:t>
+            </a:r>
+            <a:r>
+              <a:rPr lang="en-US" b="1" dirty="0"/>
+              <a:t>Amazon Bedrock AgentCore</a:t>
+            </a:r>
+            <a:r>
+              <a:rPr lang="en-US" dirty="0"/>
+              <a:t>, a managed platform for moving enterprise agents from </a:t>
+            </a:r>
+            <a:r>
+              <a:rPr lang="en-US" b="1" dirty="0"/>
+              <a:t>prototype to secure production</a:t>
+            </a:r>
+            <a:r>
+              <a:rPr lang="en-US" dirty="0"/>
+              <a:t>. I translated capabilities like </a:t>
+            </a:r>
+            <a:r>
+              <a:rPr lang="en-US" b="1" dirty="0"/>
+              <a:t>enterprise connectivity, identity, access controls, execution traces, policy enforcement, and managed runtime</a:t>
+            </a:r>
+            <a:r>
+              <a:rPr lang="en-US" dirty="0"/>
+              <a:t> into a clear narrative for security-conscious and regulated buyers.</a:t>
+            </a:r>
+          </a:p>
+          <a:p>
+            <a:endParaRPr lang="en-US" dirty="0"/>
+          </a:p>
+          <a:p>
+            <a:r>
+              <a:rPr lang="en-US" b="1" dirty="0"/>
+              <a:t>Prototype → connect → secure → govern → production</a:t>
+            </a:r>
+            <a:endParaRPr lang="en-US" dirty="0"/>
+          </a:p>
+          <a:p>
+            <a:endParaRPr lang="en-US" dirty="0"/>
+          </a:p>
+          <a:p>
+            <a:r>
+              <a:rPr lang="en-US" dirty="0"/>
+              <a:t>The core value proposition was: </a:t>
+            </a:r>
+            <a:r>
+              <a:rPr lang="en-US" b="1" dirty="0"/>
+              <a:t>“Get an agent into production without rebuilding the enterprise security and operational layer yourself.”</a:t>
+            </a:r>
+          </a:p>
+          <a:p>
+            <a:endParaRPr lang="en-US" dirty="0"/>
+          </a:p>
+          <a:p>
+            <a:r>
+              <a:rPr lang="en-US" dirty="0"/>
+              <a:t>I used customer research and product telemetry to sharpen positioning, launch, and adoption strategy, while pairing AgentCore with broader Bedrock capabilities like </a:t>
+            </a:r>
+            <a:r>
+              <a:rPr lang="en-US" b="1" dirty="0"/>
+              <a:t>retrieval, guardrails, evaluations, and cost-quality routing</a:t>
+            </a:r>
+            <a:r>
+              <a:rPr lang="en-US" dirty="0"/>
+              <a:t>.</a:t>
+            </a:r>
+          </a:p>
+          <a:p>
+            <a:endParaRPr lang="en-US" dirty="0"/>
+          </a:p>
+          <a:p>
+            <a:r>
+              <a:rPr lang="en-US" dirty="0"/>
+              <a:t>The AgentCore SDK later surpassed </a:t>
+            </a:r>
+            <a:r>
+              <a:rPr lang="en-US" b="1" dirty="0"/>
+              <a:t>2M downloads within five months of preview</a:t>
+            </a:r>
+            <a:r>
+              <a:rPr lang="en-US" dirty="0"/>
+              <a:t>.</a:t>
+            </a:r>
+          </a:p>
+          <a:p>
+            <a:endParaRPr lang="en-US" dirty="0"/>
+          </a:p>
+          <a:p>
+            <a:r>
+              <a:rPr lang="en-US" dirty="0"/>
+              <a:t>AWS’s original AgentCore launch announcement:</a:t>
+            </a:r>
+          </a:p>
+          <a:p>
+            <a:r>
+              <a:rPr lang="en-US" dirty="0">
+                <a:hlinkClick r:id="rId3"/>
+              </a:rPr>
+              <a:t>https://aws.amazon.com/blogs/aws/introducing-amazon-bedrock-agentcore-securely-deploy-and-operate-ai-agents-at-any-scale/</a:t>
+            </a:r>
+            <a:endParaRPr lang="en-US" dirty="0"/>
+          </a:p>
+        </p:txBody>
+      </p:sp>
+      <p:sp>
+        <p:nvSpPr>
+          <p:cNvPr id="4" name="Slide Number Placeholder 3"/>
+          <p:cNvSpPr>
+            <a:spLocks noGrp="1"/>
+          </p:cNvSpPr>
+          <p:nvPr>
+            <p:ph type="sldNum" sz="quarter" idx="5"/>
+          </p:nvPr>
+        </p:nvSpPr>
+        <p:spPr/>
+        <p:txBody>
+          <a:bodyPr/>
+          <a:lstStyle/>
+          <a:p>
+            <a:fld id="{4A7E2B38-EC44-4B44-8575-CA30B2FCCCF1}" type="slidenum">
+              <a:rPr lang="en-US" smtClean="0"/>
+              <a:t>6</a:t>
+            </a:fld>
+            <a:endParaRPr lang="en-US"/>
+          </a:p>
+        </p:txBody>
+      </p:sp>
+    </p:spTree>
+    <p:extLst>
+      <p:ext uri="{BB962C8B-B14F-4D97-AF65-F5344CB8AC3E}">
+        <p14:creationId xmlns:p14="http://schemas.microsoft.com/office/powerpoint/2010/main" val="2766837450"/>
       </p:ext>
     </p:extLst>
   </p:cSld>
@@ -2689,7 +3340,7 @@
                 <a:ea typeface="+mn-ea"/>
                 <a:cs typeface="+mn-cs"/>
               </a:rPr>
-              <a:t>Translate complex AI platforms into clear customer value.</a:t>
+              <a:t>Ten years making complex, regulated AI and cloud technology buyable.</a:t>
             </a:r>
           </a:p>
         </p:txBody>
@@ -2937,7 +3588,7 @@
         <p:spPr>
           <a:xfrm>
             <a:off x="960120" y="3264408"/>
-            <a:ext cx="3154680" cy="274320"/>
+            <a:ext cx="3154680" cy="215444"/>
           </a:xfrm>
           <a:prstGeom prst="rect">
             <a:avLst/>
@@ -2982,7 +3633,7 @@
                 <a:ea typeface="+mn-ea"/>
                 <a:cs typeface="+mn-cs"/>
               </a:rPr>
-              <a:t>STRATEGY → SYSTEMS</a:t>
+              <a:t>REGULATED SYSTEMS</a:t>
             </a:r>
           </a:p>
         </p:txBody>
@@ -2998,7 +3649,7 @@
         <p:spPr>
           <a:xfrm>
             <a:off x="960120" y="3584448"/>
-            <a:ext cx="3063240" cy="658368"/>
+            <a:ext cx="3063240" cy="523220"/>
           </a:xfrm>
           <a:prstGeom prst="rect">
             <a:avLst/>
@@ -3043,7 +3694,7 @@
                 <a:ea typeface="+mn-ea"/>
                 <a:cs typeface="+mn-cs"/>
               </a:rPr>
-              <a:t>Regulated systems and lifecycle growth</a:t>
+              <a:t>Complex AI and cloud made buyable in regulated markets</a:t>
             </a:r>
           </a:p>
         </p:txBody>
@@ -3254,7 +3905,7 @@
         <p:spPr>
           <a:xfrm>
             <a:off x="4617720" y="3584448"/>
-            <a:ext cx="3063240" cy="658368"/>
+            <a:ext cx="3063240" cy="784830"/>
           </a:xfrm>
           <a:prstGeom prst="rect">
             <a:avLst/>
@@ -3285,7 +3936,7 @@
               <a:defRPr/>
             </a:pPr>
             <a:r>
-              <a:rPr kumimoji="0" sz="1700" b="1" i="0" u="none" strike="noStrike" kern="1200" cap="none" spc="0" normalizeH="0" baseline="0" noProof="0">
+              <a:rPr kumimoji="0" lang="en-US" sz="1700" b="1" i="0" u="none" strike="noStrike" kern="1200" cap="none" spc="0" normalizeH="0" baseline="0" noProof="0">
                 <a:ln>
                   <a:noFill/>
                 </a:ln>
@@ -3299,8 +3950,22 @@
                 <a:ea typeface="+mn-ea"/>
                 <a:cs typeface="+mn-cs"/>
               </a:rPr>
-              <a:t>Positioning, launch readiness and localization at AWS</a:t>
-            </a:r>
+              <a:t>Customer insight, AI positioning and launch readiness at AWS</a:t>
+            </a:r>
+            <a:endParaRPr kumimoji="0" sz="1700" b="1" i="0" u="none" strike="noStrike" kern="1200" cap="none" spc="0" normalizeH="0" baseline="0" noProof="0">
+              <a:ln>
+                <a:noFill/>
+              </a:ln>
+              <a:solidFill>
+                <a:srgbClr val="121212"/>
+              </a:solidFill>
+              <a:effectLst/>
+              <a:uLnTx/>
+              <a:uFillTx/>
+              <a:latin typeface="Arial"/>
+              <a:ea typeface="+mn-ea"/>
+              <a:cs typeface="+mn-cs"/>
+            </a:endParaRPr>
           </a:p>
         </p:txBody>
       </p:sp>
@@ -3451,7 +4116,7 @@
         <p:spPr>
           <a:xfrm>
             <a:off x="8458200" y="3264408"/>
-            <a:ext cx="3154680" cy="274320"/>
+            <a:ext cx="3154680" cy="215444"/>
           </a:xfrm>
           <a:prstGeom prst="rect">
             <a:avLst/>
@@ -3496,7 +4161,7 @@
                 <a:ea typeface="+mn-ea"/>
                 <a:cs typeface="+mn-cs"/>
               </a:rPr>
-              <a:t>COMMERCIALIZATION</a:t>
+              <a:t>TWO ADOPTION MOTIONS</a:t>
             </a:r>
           </a:p>
         </p:txBody>
@@ -3512,7 +4177,7 @@
         <p:spPr>
           <a:xfrm>
             <a:off x="8458200" y="3584448"/>
-            <a:ext cx="3063240" cy="658368"/>
+            <a:ext cx="3063240" cy="784830"/>
           </a:xfrm>
           <a:prstGeom prst="rect">
             <a:avLst/>
@@ -3557,7 +4222,7 @@
                 <a:ea typeface="+mn-ea"/>
                 <a:cs typeface="+mn-cs"/>
               </a:rPr>
-              <a:t>From builder clarity to enterprise adoption at scale</a:t>
+              <a:t>Self-serve evaluation through enterprise production adoption</a:t>
             </a:r>
           </a:p>
         </p:txBody>
@@ -3754,7 +4419,7 @@
                 <a:ea typeface="+mn-ea"/>
                 <a:cs typeface="+mn-cs"/>
               </a:rPr>
-              <a:t>Teams prototype quickly, but struggle to turn demos into governed workflows users adopt and enterprises trust.</a:t>
+              <a:t>Models are good. The hard part is making enterprise builders trust them enough to ship to production.</a:t>
             </a:r>
           </a:p>
         </p:txBody>
@@ -4597,7 +5262,7 @@
         <p:spPr>
           <a:xfrm>
             <a:off x="658368" y="3099816"/>
-            <a:ext cx="2651760" cy="430887"/>
+            <a:ext cx="2651760" cy="646331"/>
           </a:xfrm>
           <a:prstGeom prst="rect">
             <a:avLst/>
@@ -4642,7 +5307,7 @@
                 <a:ea typeface="+mn-ea"/>
                 <a:cs typeface="+mn-cs"/>
               </a:rPr>
-              <a:t>Broad and hard to trust at purchase.</a:t>
+              <a:t>Conversation was not the job. Broad and hard to trust at purchase.</a:t>
             </a:r>
           </a:p>
         </p:txBody>
@@ -4874,7 +5539,7 @@
                 <a:ea typeface="+mn-ea"/>
                 <a:cs typeface="+mn-cs"/>
               </a:rPr>
-              <a:t>Retrieval quality + task evaluations + human review + guardrails</a:t>
+              <a:t>Launch gates on retrieval quality, evals, human review and guardrails</a:t>
             </a:r>
           </a:p>
         </p:txBody>
@@ -5092,7 +5757,7 @@
                 <a:ea typeface="+mn-ea"/>
                 <a:cs typeface="+mn-cs"/>
               </a:rPr>
-              <a:t>Focused and actionable at the point of choice.</a:t>
+              <a:t>Research, compare and decide with confidence at the point of choice.</a:t>
             </a:r>
           </a:p>
         </p:txBody>
@@ -6413,6 +7078,43 @@
           </a:prstGeom>
         </p:spPr>
       </p:pic>
+      <p:sp>
+        <p:nvSpPr>
+          <p:cNvPr id="300" name="Source Footnote"/>
+          <p:cNvSpPr txBox="1"/>
+          <p:nvPr/>
+        </p:nvSpPr>
+        <p:spPr>
+          <a:xfrm>
+            <a:off x="566928" y="6172200"/>
+            <a:ext cx="10469880" cy="123000"/>
+          </a:xfrm>
+          <a:prstGeom prst="rect">
+            <a:avLst/>
+          </a:prstGeom>
+          <a:noFill/>
+        </p:spPr>
+        <p:txBody>
+          <a:bodyPr wrap="square" lIns="0" tIns="0" rIns="0" bIns="0" anchor="ctr">
+            <a:spAutoFit/>
+          </a:bodyPr>
+          <a:lstStyle/>
+          <a:p>
+            <a:pPr marL="0" indent="0" algn="l">
+              <a:buNone/>
+            </a:pPr>
+            <a:r>
+              <a:rPr lang="en-US" sz="800" b="0" i="0" u="none" kern="1200">
+                <a:solidFill>
+                  <a:srgbClr val="8A857E"/>
+                </a:solidFill>
+                <a:latin typeface="Arial"/>
+              </a:rPr>
+              <a:t>Source: https://www.aboutamazon.com/news/retail/amazon-agentic-ai-gen-ai-shopping</a:t>
+            </a:r>
+          </a:p>
+        </p:txBody>
+      </p:sp>
     </p:spTree>
   </p:cSld>
   <p:clrMapOvr>
@@ -7048,7 +7750,7 @@
         <p:spPr>
           <a:xfrm>
             <a:off x="676656" y="2450592"/>
-            <a:ext cx="2377440" cy="457200"/>
+            <a:ext cx="2377440" cy="430887"/>
           </a:xfrm>
           <a:prstGeom prst="rect">
             <a:avLst/>
@@ -7093,7 +7795,7 @@
                 <a:ea typeface="+mn-ea"/>
                 <a:cs typeface="+mn-cs"/>
               </a:rPr>
-              <a:t>Buy the model. Build the workflow.</a:t>
+              <a:t>Buy intelligence. Build context.</a:t>
             </a:r>
           </a:p>
         </p:txBody>
@@ -7170,7 +7872,7 @@
         <p:spPr>
           <a:xfrm>
             <a:off x="566928" y="3364992"/>
-            <a:ext cx="2496312" cy="646331"/>
+            <a:ext cx="2496312" cy="861774"/>
           </a:xfrm>
           <a:prstGeom prst="rect">
             <a:avLst/>
@@ -7215,7 +7917,7 @@
                 <a:ea typeface="+mn-ea"/>
                 <a:cs typeface="+mn-cs"/>
               </a:rPr>
-              <a:t>Easy to launch, but weakly differentiated as model capability became buyable.</a:t>
+              <a:t>A standalone merchant chatbot promised more than users experienced, and adoption lagged.</a:t>
             </a:r>
           </a:p>
         </p:txBody>
@@ -7652,7 +8354,7 @@
         </p:nvSpPr>
         <p:spPr>
           <a:xfrm>
-            <a:off x="6181344" y="2432304"/>
+            <a:off x="6181344" y="4032504"/>
             <a:ext cx="1965960" cy="438912"/>
           </a:xfrm>
           <a:prstGeom prst="rect">
@@ -7698,8 +8400,43 @@
                 <a:ea typeface="+mn-ea"/>
                 <a:cs typeface="+mn-cs"/>
               </a:rPr>
-              <a:t>HIGH CONTEXT
-LOW WORKFLOW</a:t>
+              <a:t>LOW CONTEXT</a:t>
+            </a:r>
+          </a:p>
+          <a:p>
+            <a:pPr marL="0" marR="0" lvl="0" indent="0" algn="l" defTabSz="914400" rtl="0" eaLnBrk="1" fontAlgn="auto" latinLnBrk="0" hangingPunct="1">
+              <a:lnSpc>
+                <a:spcPct val="100000"/>
+              </a:lnSpc>
+              <a:spcBef>
+                <a:spcPts val="0"/>
+              </a:spcBef>
+              <a:spcAft>
+                <a:spcPts val="0"/>
+              </a:spcAft>
+              <a:buClrTx/>
+              <a:buSzTx/>
+              <a:buFontTx/>
+              <a:buNone/>
+              <a:tabLst/>
+              <a:defRPr/>
+            </a:pPr>
+            <a:r>
+              <a:rPr kumimoji="0" lang="en-US" sz="1400" b="1" i="0" u="none" strike="noStrike" kern="1200" cap="none" spc="0" normalizeH="0" baseline="0" noProof="0">
+                <a:ln>
+                  <a:noFill/>
+                </a:ln>
+                <a:solidFill>
+                  <a:srgbClr val="55504A"/>
+                </a:solidFill>
+                <a:effectLst/>
+                <a:uLnTx/>
+                <a:uFillTx/>
+                <a:latin typeface="Arial"/>
+                <a:ea typeface="+mn-ea"/>
+                <a:cs typeface="+mn-cs"/>
+              </a:rPr>
+              <a:t>HIGH WORKFLOW</a:t>
             </a:r>
           </a:p>
         </p:txBody>
@@ -7714,7 +8451,7 @@
         </p:nvSpPr>
         <p:spPr>
           <a:xfrm>
-            <a:off x="6217920" y="4032504"/>
+            <a:off x="6217920" y="2432304"/>
             <a:ext cx="1051560" cy="210312"/>
           </a:xfrm>
           <a:prstGeom prst="rect">
@@ -7775,7 +8512,7 @@
         </p:nvSpPr>
         <p:spPr>
           <a:xfrm>
-            <a:off x="6217920" y="4315968"/>
+            <a:off x="6217920" y="2715768"/>
             <a:ext cx="1874519" cy="530352"/>
           </a:xfrm>
           <a:prstGeom prst="rect">
@@ -7837,8 +8574,8 @@
         </p:nvSpPr>
         <p:spPr>
           <a:xfrm>
-            <a:off x="6217920" y="4919472"/>
-            <a:ext cx="1874519" cy="184666"/>
+            <a:off x="6217920" y="3319272"/>
+            <a:ext cx="1874519" cy="369332"/>
           </a:xfrm>
           <a:prstGeom prst="rect">
             <a:avLst/>
@@ -7883,7 +8620,7 @@
                 <a:ea typeface="+mn-ea"/>
                 <a:cs typeface="+mn-cs"/>
               </a:rPr>
-              <a:t>Recurring merchant tasks</a:t>
+              <a:t>Listing, support and sales analysis</a:t>
             </a:r>
           </a:p>
         </p:txBody>
@@ -9099,7 +9836,7 @@
                 <a:ea typeface="+mn-ea"/>
                 <a:cs typeface="+mn-cs"/>
               </a:rPr>
-              <a:t>Architecture: external model + PII protection + hybrid retrieval + unified knowledge graph.</a:t>
+              <a:t>Moat stack: model → proprietary context → workflow depth → economics → distribution.</a:t>
             </a:r>
           </a:p>
         </p:txBody>
@@ -9271,6 +10008,43 @@
           </a:prstGeom>
         </p:spPr>
       </p:pic>
+      <p:sp>
+        <p:nvSpPr>
+          <p:cNvPr id="300" name="Source Footnote"/>
+          <p:cNvSpPr txBox="1"/>
+          <p:nvPr/>
+        </p:nvSpPr>
+        <p:spPr>
+          <a:xfrm>
+            <a:off x="566928" y="6172200"/>
+            <a:ext cx="10469880" cy="123000"/>
+          </a:xfrm>
+          <a:prstGeom prst="rect">
+            <a:avLst/>
+          </a:prstGeom>
+          <a:noFill/>
+        </p:spPr>
+        <p:txBody>
+          <a:bodyPr wrap="square" lIns="0" tIns="0" rIns="0" bIns="0" anchor="ctr">
+            <a:spAutoFit/>
+          </a:bodyPr>
+          <a:lstStyle/>
+          <a:p>
+            <a:pPr marL="0" indent="0" algn="l">
+              <a:buNone/>
+            </a:pPr>
+            <a:r>
+              <a:rPr lang="en-US" sz="800" b="0" i="0" u="none" kern="1200">
+                <a:solidFill>
+                  <a:srgbClr val="8A857E"/>
+                </a:solidFill>
+                <a:latin typeface="Arial"/>
+              </a:rPr>
+              <a:t>Source: https://global.rakuten.com/corp/news/press/2024/0430_01.html</a:t>
+            </a:r>
+          </a:p>
+        </p:txBody>
+      </p:sp>
     </p:spTree>
   </p:cSld>
   <p:clrMapOvr>
@@ -10274,8 +11048,43 @@
                 <a:ea typeface="+mn-ea"/>
                 <a:cs typeface="+mn-cs"/>
               </a:rPr>
-              <a:t>First run: understand
-the promise</a:t>
+              <a:t>First run: time to</a:t>
+            </a:r>
+          </a:p>
+          <a:p>
+            <a:pPr marL="0" marR="0" lvl="0" indent="0" algn="ctr" defTabSz="914400" rtl="0" eaLnBrk="1" fontAlgn="auto" latinLnBrk="0" hangingPunct="1">
+              <a:lnSpc>
+                <a:spcPct val="100000"/>
+              </a:lnSpc>
+              <a:spcBef>
+                <a:spcPts val="0"/>
+              </a:spcBef>
+              <a:spcAft>
+                <a:spcPts val="0"/>
+              </a:spcAft>
+              <a:buClrTx/>
+              <a:buSzTx/>
+              <a:buFontTx/>
+              <a:buNone/>
+              <a:tabLst/>
+              <a:defRPr/>
+            </a:pPr>
+            <a:r>
+              <a:rPr kumimoji="0" lang="en-US" sz="1400" b="0" i="0" u="none" strike="noStrike" kern="1200" cap="none" spc="0" normalizeH="0" baseline="0" noProof="0">
+                <a:ln>
+                  <a:noFill/>
+                </a:ln>
+                <a:solidFill>
+                  <a:srgbClr val="121212"/>
+                </a:solidFill>
+                <a:effectLst/>
+                <a:uLnTx/>
+                <a:uFillTx/>
+                <a:latin typeface="Arial"/>
+                <a:ea typeface="+mn-ea"/>
+                <a:cs typeface="+mn-cs"/>
+              </a:rPr>
+              <a:t>first value</a:t>
             </a:r>
           </a:p>
         </p:txBody>
@@ -10568,8 +11377,43 @@
                 <a:ea typeface="+mn-ea"/>
                 <a:cs typeface="+mn-cs"/>
               </a:rPr>
-              <a:t>Complete a
-meaningful task</a:t>
+              <a:t>Deploy a meaningful</a:t>
+            </a:r>
+          </a:p>
+          <a:p>
+            <a:pPr marL="0" marR="0" lvl="0" indent="0" algn="ctr" defTabSz="914400" rtl="0" eaLnBrk="1" fontAlgn="auto" latinLnBrk="0" hangingPunct="1">
+              <a:lnSpc>
+                <a:spcPct val="100000"/>
+              </a:lnSpc>
+              <a:spcBef>
+                <a:spcPts val="0"/>
+              </a:spcBef>
+              <a:spcAft>
+                <a:spcPts val="0"/>
+              </a:spcAft>
+              <a:buClrTx/>
+              <a:buSzTx/>
+              <a:buFontTx/>
+              <a:buNone/>
+              <a:tabLst/>
+              <a:defRPr/>
+            </a:pPr>
+            <a:r>
+              <a:rPr kumimoji="0" lang="en-US" sz="1400" b="0" i="0" u="none" strike="noStrike" kern="1200" cap="none" spc="0" normalizeH="0" baseline="0" noProof="0">
+                <a:ln>
+                  <a:noFill/>
+                </a:ln>
+                <a:solidFill>
+                  <a:srgbClr val="121212"/>
+                </a:solidFill>
+                <a:effectLst/>
+                <a:uLnTx/>
+                <a:uFillTx/>
+                <a:latin typeface="Arial"/>
+                <a:ea typeface="+mn-ea"/>
+                <a:cs typeface="+mn-cs"/>
+              </a:rPr>
+              <a:t>workload</a:t>
             </a:r>
           </a:p>
         </p:txBody>
@@ -10817,7 +11661,7 @@
         <p:spPr>
           <a:xfrm>
             <a:off x="7406640" y="3246120"/>
-            <a:ext cx="1737360" cy="646331"/>
+            <a:ext cx="1737360" cy="430887"/>
           </a:xfrm>
           <a:prstGeom prst="rect">
             <a:avLst/>
@@ -10862,8 +11706,43 @@
                 <a:ea typeface="+mn-ea"/>
                 <a:cs typeface="+mn-cs"/>
               </a:rPr>
-              <a:t>Cohort loops + lifecycle
-interventions</a:t>
+              <a:t>Cohort and lifecycle</a:t>
+            </a:r>
+          </a:p>
+          <a:p>
+            <a:pPr marL="0" marR="0" lvl="0" indent="0" algn="ctr" defTabSz="914400" rtl="0" eaLnBrk="1" fontAlgn="auto" latinLnBrk="0" hangingPunct="1">
+              <a:lnSpc>
+                <a:spcPct val="100000"/>
+              </a:lnSpc>
+              <a:spcBef>
+                <a:spcPts val="0"/>
+              </a:spcBef>
+              <a:spcAft>
+                <a:spcPts val="0"/>
+              </a:spcAft>
+              <a:buClrTx/>
+              <a:buSzTx/>
+              <a:buFontTx/>
+              <a:buNone/>
+              <a:tabLst/>
+              <a:defRPr/>
+            </a:pPr>
+            <a:r>
+              <a:rPr kumimoji="0" lang="en-US" sz="1400" b="0" i="0" u="none" strike="noStrike" kern="1200" cap="none" spc="0" normalizeH="0" baseline="0" noProof="0">
+                <a:ln>
+                  <a:noFill/>
+                </a:ln>
+                <a:solidFill>
+                  <a:srgbClr val="121212"/>
+                </a:solidFill>
+                <a:effectLst/>
+                <a:uLnTx/>
+                <a:uFillTx/>
+                <a:latin typeface="Arial"/>
+                <a:ea typeface="+mn-ea"/>
+                <a:cs typeface="+mn-cs"/>
+              </a:rPr>
+              <a:t>interventions</a:t>
             </a:r>
           </a:p>
         </p:txBody>
@@ -11390,7 +12269,7 @@
                 <a:ea typeface="+mn-ea"/>
                 <a:cs typeface="+mn-cs"/>
               </a:rPr>
-              <a:t>Demand creates the visit. Product experience earns activation, retention and expansion.</a:t>
+              <a:t>Acquisition is only the beginning: cut time-to-first-value, then earn retention and expansion.</a:t>
             </a:r>
           </a:p>
         </p:txBody>
@@ -11800,6 +12679,43 @@
           </a:prstGeom>
         </p:spPr>
       </p:pic>
+      <p:sp>
+        <p:nvSpPr>
+          <p:cNvPr id="300" name="Source Footnote"/>
+          <p:cNvSpPr txBox="1"/>
+          <p:nvPr/>
+        </p:nvSpPr>
+        <p:spPr>
+          <a:xfrm>
+            <a:off x="566928" y="6172200"/>
+            <a:ext cx="10469880" cy="123000"/>
+          </a:xfrm>
+          <a:prstGeom prst="rect">
+            <a:avLst/>
+          </a:prstGeom>
+          <a:noFill/>
+        </p:spPr>
+        <p:txBody>
+          <a:bodyPr wrap="square" lIns="0" tIns="0" rIns="0" bIns="0" anchor="ctr">
+            <a:spAutoFit/>
+          </a:bodyPr>
+          <a:lstStyle/>
+          <a:p>
+            <a:pPr marL="0" indent="0" algn="l">
+              <a:buNone/>
+            </a:pPr>
+            <a:r>
+              <a:rPr lang="en-US" sz="800" b="0" i="0" u="none" kern="1200">
+                <a:solidFill>
+                  <a:srgbClr val="8A857E"/>
+                </a:solidFill>
+                <a:latin typeface="Arial"/>
+              </a:rPr>
+              <a:t>Source: https://azure.microsoft.com/en-us/blog/the-next-wave-of-azure-innovation-azure-ai-foundry-intelligent-data-and-more/</a:t>
+            </a:r>
+          </a:p>
+        </p:txBody>
+      </p:sp>
     </p:spTree>
   </p:cSld>
   <p:clrMapOvr>
@@ -12530,7 +13446,7 @@
                 <a:ea typeface="+mn-ea"/>
                 <a:cs typeface="+mn-cs"/>
               </a:rPr>
-              <a:t>Regulated financial-services buyers asked:</a:t>
+              <a:t>Sovereignty was the wedge. Buyers asked:</a:t>
             </a:r>
           </a:p>
         </p:txBody>
@@ -13257,7 +14173,7 @@
                 <a:ea typeface="+mn-ea"/>
                 <a:cs typeface="+mn-cs"/>
               </a:rPr>
-              <a:t>Cross-functional playbook: deployment patterns, partner requirements, technical gates and SOPs aligned product, engineering, legal and field.</a:t>
+              <a:t>Cross-functional playbook across product, engineering, legal and field: data residency, customer-controlled keys and compliance by design.</a:t>
             </a:r>
           </a:p>
         </p:txBody>
@@ -14761,7 +15677,3933 @@
           </a:prstGeom>
         </p:spPr>
       </p:pic>
+      <p:sp>
+        <p:nvSpPr>
+          <p:cNvPr id="300" name="Source Footnote"/>
+          <p:cNvSpPr txBox="1"/>
+          <p:nvPr/>
+        </p:nvSpPr>
+        <p:spPr>
+          <a:xfrm>
+            <a:off x="566928" y="6172200"/>
+            <a:ext cx="10469880" cy="123000"/>
+          </a:xfrm>
+          <a:prstGeom prst="rect">
+            <a:avLst/>
+          </a:prstGeom>
+          <a:noFill/>
+        </p:spPr>
+        <p:txBody>
+          <a:bodyPr wrap="square" lIns="0" tIns="0" rIns="0" bIns="0" anchor="ctr">
+            <a:spAutoFit/>
+          </a:bodyPr>
+          <a:lstStyle/>
+          <a:p>
+            <a:pPr marL="0" indent="0" algn="l">
+              <a:buNone/>
+            </a:pPr>
+            <a:r>
+              <a:rPr lang="en-US" sz="800" b="0" i="0" u="none" kern="1200">
+                <a:solidFill>
+                  <a:srgbClr val="8A857E"/>
+                </a:solidFill>
+                <a:latin typeface="Arial"/>
+              </a:rPr>
+              <a:t>Source: https://www.microsoft.com/en-us/microsoft-cloud/blog/financial-services/2021/02/24/announcing-microsoft-cloud-for-financial-services/</a:t>
+            </a:r>
+          </a:p>
+        </p:txBody>
+      </p:sp>
     </p:spTree>
+  </p:cSld>
+  <p:clrMapOvr>
+    <a:masterClrMapping/>
+  </p:clrMapOvr>
+</p:sld>
+</file>
+
+<file path=ppt/slides/slide6.xml><?xml version="1.0" encoding="utf-8"?>
+<p:sld xmlns:a="http://schemas.openxmlformats.org/drawingml/2006/main" xmlns:r="http://schemas.openxmlformats.org/officeDocument/2006/relationships" xmlns:p="http://schemas.openxmlformats.org/presentationml/2006/main">
+  <p:cSld>
+    <p:bg>
+      <p:bgPr>
+        <a:solidFill>
+          <a:srgbClr val="F7F2E8"/>
+        </a:solidFill>
+        <a:effectLst/>
+      </p:bgPr>
+    </p:bg>
+    <p:spTree>
+      <p:nvGrpSpPr>
+        <p:cNvPr id="1" name=""/>
+        <p:cNvGrpSpPr/>
+        <p:nvPr/>
+      </p:nvGrpSpPr>
+      <p:grpSpPr>
+        <a:xfrm>
+          <a:off x="0" y="0"/>
+          <a:ext cx="0" cy="0"/>
+          <a:chOff x="0" y="0"/>
+          <a:chExt cx="0" cy="0"/>
+        </a:xfrm>
+      </p:grpSpPr>
+      <p:sp>
+        <p:nvSpPr>
+          <p:cNvPr id="11" name="TextBox 10"/>
+          <p:cNvSpPr txBox="1">
+            <a:spLocks/>
+          </p:cNvSpPr>
+          <p:nvPr/>
+        </p:nvSpPr>
+        <p:spPr>
+          <a:xfrm>
+            <a:off x="621792" y="201168"/>
+            <a:ext cx="9326880" cy="256032"/>
+          </a:xfrm>
+          <a:prstGeom prst="rect">
+            <a:avLst/>
+          </a:prstGeom>
+          <a:noFill/>
+        </p:spPr>
+        <p:txBody>
+          <a:bodyPr wrap="square" lIns="0" tIns="0" rIns="0" bIns="0" anchor="ctr">
+            <a:spAutoFit/>
+          </a:bodyPr>
+          <a:lstStyle/>
+          <a:p>
+            <a:pPr marL="0" marR="0" lvl="0" indent="0" algn="l" defTabSz="914400" rtl="0" eaLnBrk="1" fontAlgn="auto" latinLnBrk="0" hangingPunct="1">
+              <a:lnSpc>
+                <a:spcPct val="100000"/>
+              </a:lnSpc>
+              <a:spcBef>
+                <a:spcPts val="0"/>
+              </a:spcBef>
+              <a:spcAft>
+                <a:spcPts val="0"/>
+              </a:spcAft>
+              <a:buClrTx/>
+              <a:buSzTx/>
+              <a:buFontTx/>
+              <a:buNone/>
+              <a:tabLst/>
+              <a:defRPr/>
+            </a:pPr>
+            <a:r>
+              <a:rPr kumimoji="0" lang="en-US" sz="1400" b="1" i="0" u="none" strike="noStrike" kern="1200" cap="none" spc="0" normalizeH="0" baseline="0" noProof="0">
+                <a:ln>
+                  <a:noFill/>
+                </a:ln>
+                <a:solidFill>
+                  <a:srgbClr val="FF4B00"/>
+                </a:solidFill>
+                <a:effectLst/>
+                <a:uLnTx/>
+                <a:uFillTx/>
+                <a:latin typeface="Arial"/>
+                <a:ea typeface="+mn-ea"/>
+                <a:cs typeface="+mn-cs"/>
+              </a:rPr>
+              <a:t>AWS BEDROCK AGENTCORE · ENTERPRISE AGENT PLATFORM POSITIONING</a:t>
+            </a:r>
+          </a:p>
+        </p:txBody>
+      </p:sp>
+      <p:sp>
+        <p:nvSpPr>
+          <p:cNvPr id="15" name="TextBox 14"/>
+          <p:cNvSpPr txBox="1">
+            <a:spLocks/>
+          </p:cNvSpPr>
+          <p:nvPr/>
+        </p:nvSpPr>
+        <p:spPr>
+          <a:xfrm>
+            <a:off x="11137392" y="6400800"/>
+            <a:ext cx="292608" cy="153619"/>
+          </a:xfrm>
+          <a:prstGeom prst="rect">
+            <a:avLst/>
+          </a:prstGeom>
+          <a:noFill/>
+        </p:spPr>
+        <p:txBody>
+          <a:bodyPr wrap="square" lIns="0" tIns="0" rIns="0" bIns="0" anchor="ctr">
+            <a:spAutoFit/>
+          </a:bodyPr>
+          <a:lstStyle/>
+          <a:p>
+            <a:pPr marL="0" marR="0" lvl="0" indent="0" algn="r" defTabSz="914400" rtl="0" eaLnBrk="1" fontAlgn="auto" latinLnBrk="0" hangingPunct="1">
+              <a:lnSpc>
+                <a:spcPct val="100000"/>
+              </a:lnSpc>
+              <a:spcBef>
+                <a:spcPts val="0"/>
+              </a:spcBef>
+              <a:spcAft>
+                <a:spcPts val="0"/>
+              </a:spcAft>
+              <a:buClrTx/>
+              <a:buSzTx/>
+              <a:buFontTx/>
+              <a:buNone/>
+              <a:tabLst/>
+              <a:defRPr/>
+            </a:pPr>
+            <a:r>
+              <a:rPr kumimoji="0" lang="en-US" sz="1000" b="0" i="0" u="none" strike="noStrike" kern="1200" cap="none" spc="0" normalizeH="0" baseline="0" noProof="0">
+                <a:ln>
+                  <a:noFill/>
+                </a:ln>
+                <a:solidFill>
+                  <a:srgbClr val="55504A"/>
+                </a:solidFill>
+                <a:effectLst/>
+                <a:uLnTx/>
+                <a:uFillTx/>
+                <a:latin typeface="Arial"/>
+                <a:ea typeface="+mn-ea"/>
+                <a:cs typeface="+mn-cs"/>
+              </a:rPr>
+              <a:t>6</a:t>
+            </a:r>
+          </a:p>
+        </p:txBody>
+      </p:sp>
+      <p:sp>
+        <p:nvSpPr>
+          <p:cNvPr id="16" name="TextBox 15"/>
+          <p:cNvSpPr txBox="1">
+            <a:spLocks/>
+          </p:cNvSpPr>
+          <p:nvPr/>
+        </p:nvSpPr>
+        <p:spPr>
+          <a:xfrm>
+            <a:off x="502920" y="576072"/>
+            <a:ext cx="11155680" cy="538609"/>
+          </a:xfrm>
+          <a:prstGeom prst="rect">
+            <a:avLst/>
+          </a:prstGeom>
+          <a:noFill/>
+        </p:spPr>
+        <p:txBody>
+          <a:bodyPr wrap="square" lIns="0" tIns="0" rIns="0" bIns="0" anchor="t">
+            <a:spAutoFit/>
+          </a:bodyPr>
+          <a:lstStyle/>
+          <a:p>
+            <a:pPr marL="0" marR="0" lvl="0" indent="0" algn="l" defTabSz="914400" rtl="0" eaLnBrk="1" fontAlgn="auto" latinLnBrk="0" hangingPunct="1">
+              <a:lnSpc>
+                <a:spcPct val="100000"/>
+              </a:lnSpc>
+              <a:spcBef>
+                <a:spcPts val="0"/>
+              </a:spcBef>
+              <a:spcAft>
+                <a:spcPts val="0"/>
+              </a:spcAft>
+              <a:buClrTx/>
+              <a:buSzTx/>
+              <a:buFontTx/>
+              <a:buNone/>
+              <a:tabLst/>
+              <a:defRPr/>
+            </a:pPr>
+            <a:r>
+              <a:rPr kumimoji="0" lang="en-US" sz="3500" b="1" i="0" u="none" strike="noStrike" kern="1200" cap="none" spc="0" normalizeH="0" baseline="0" noProof="0">
+                <a:ln>
+                  <a:noFill/>
+                </a:ln>
+                <a:solidFill>
+                  <a:srgbClr val="121212"/>
+                </a:solidFill>
+                <a:effectLst/>
+                <a:uLnTx/>
+                <a:uFillTx/>
+                <a:latin typeface="Arial"/>
+                <a:ea typeface="+mn-ea"/>
+                <a:cs typeface="+mn-cs"/>
+              </a:rPr>
+              <a:t>5. AgentCore: prototype to secure production</a:t>
+            </a:r>
+          </a:p>
+        </p:txBody>
+      </p:sp>
+      <p:sp>
+        <p:nvSpPr>
+          <p:cNvPr id="17" name="Rectangle 16"/>
+          <p:cNvSpPr/>
+          <p:nvPr/>
+        </p:nvSpPr>
+        <p:spPr>
+          <a:xfrm>
+            <a:off x="502920" y="1207008"/>
+            <a:ext cx="68580" cy="347472"/>
+          </a:xfrm>
+          <a:prstGeom prst="rect">
+            <a:avLst/>
+          </a:prstGeom>
+          <a:solidFill>
+            <a:srgbClr val="FF4B00"/>
+          </a:solidFill>
+          <a:ln w="12700">
+            <a:solidFill>
+              <a:srgbClr val="FF4B00"/>
+            </a:solidFill>
+          </a:ln>
+        </p:spPr>
+        <p:style>
+          <a:lnRef idx="1">
+            <a:schemeClr val="accent1"/>
+          </a:lnRef>
+          <a:fillRef idx="3">
+            <a:schemeClr val="accent1"/>
+          </a:fillRef>
+          <a:effectRef idx="2">
+            <a:schemeClr val="accent1"/>
+          </a:effectRef>
+          <a:fontRef idx="minor">
+            <a:schemeClr val="lt1"/>
+          </a:fontRef>
+        </p:style>
+        <p:txBody>
+          <a:bodyPr rtlCol="0" anchor="ctr"/>
+          <a:lstStyle/>
+          <a:p>
+            <a:pPr marL="0" marR="0" lvl="0" indent="0" algn="ctr" defTabSz="914400" rtl="0" eaLnBrk="1" fontAlgn="auto" latinLnBrk="0" hangingPunct="1">
+              <a:lnSpc>
+                <a:spcPct val="100000"/>
+              </a:lnSpc>
+              <a:spcBef>
+                <a:spcPts val="0"/>
+              </a:spcBef>
+              <a:spcAft>
+                <a:spcPts val="0"/>
+              </a:spcAft>
+              <a:buClrTx/>
+              <a:buSzTx/>
+              <a:buFontTx/>
+              <a:buNone/>
+              <a:tabLst/>
+              <a:defRPr/>
+            </a:pPr>
+            <a:endParaRPr kumimoji="0" lang="en-US" sz="1800" b="0" i="0" u="none" strike="noStrike" kern="1200" cap="none" spc="0" normalizeH="0" baseline="0" noProof="0">
+              <a:ln>
+                <a:noFill/>
+              </a:ln>
+              <a:solidFill>
+                <a:prstClr val="white"/>
+              </a:solidFill>
+              <a:effectLst/>
+              <a:uLnTx/>
+              <a:uFillTx/>
+              <a:latin typeface="Arial"/>
+              <a:ea typeface="+mn-ea"/>
+              <a:cs typeface="+mn-cs"/>
+            </a:endParaRPr>
+          </a:p>
+        </p:txBody>
+      </p:sp>
+      <p:sp>
+        <p:nvSpPr>
+          <p:cNvPr id="18" name="TextBox 17"/>
+          <p:cNvSpPr txBox="1">
+            <a:spLocks/>
+          </p:cNvSpPr>
+          <p:nvPr/>
+        </p:nvSpPr>
+        <p:spPr>
+          <a:xfrm>
+            <a:off x="658368" y="1225296"/>
+            <a:ext cx="10881360" cy="310896"/>
+          </a:xfrm>
+          <a:prstGeom prst="rect">
+            <a:avLst/>
+          </a:prstGeom>
+          <a:noFill/>
+        </p:spPr>
+        <p:txBody>
+          <a:bodyPr wrap="square" lIns="0" tIns="0" rIns="0" bIns="0" anchor="ctr">
+            <a:spAutoFit/>
+          </a:bodyPr>
+          <a:lstStyle/>
+          <a:p>
+            <a:pPr marL="0" marR="0" lvl="0" indent="0" algn="l" defTabSz="914400" rtl="0" eaLnBrk="1" fontAlgn="auto" latinLnBrk="0" hangingPunct="1">
+              <a:lnSpc>
+                <a:spcPct val="100000"/>
+              </a:lnSpc>
+              <a:spcBef>
+                <a:spcPts val="0"/>
+              </a:spcBef>
+              <a:spcAft>
+                <a:spcPts val="0"/>
+              </a:spcAft>
+              <a:buClrTx/>
+              <a:buSzTx/>
+              <a:buFontTx/>
+              <a:buNone/>
+              <a:tabLst/>
+              <a:defRPr/>
+            </a:pPr>
+            <a:r>
+              <a:rPr kumimoji="0" lang="en-US" sz="1400" b="1" i="0" u="none" strike="noStrike" kern="1200" cap="none" spc="0" normalizeH="0" baseline="0" noProof="0">
+                <a:ln>
+                  <a:noFill/>
+                </a:ln>
+                <a:solidFill>
+                  <a:srgbClr val="FF4B00"/>
+                </a:solidFill>
+                <a:effectLst/>
+                <a:uLnTx/>
+                <a:uFillTx/>
+                <a:latin typeface="Arial"/>
+                <a:ea typeface="+mn-ea"/>
+                <a:cs typeface="+mn-cs"/>
+              </a:rPr>
+              <a:t>MY ROLE  </a:t>
+            </a:r>
+            <a:r>
+              <a:rPr kumimoji="0" lang="en-US" sz="1400" b="0" i="0" u="none" strike="noStrike" kern="1200" cap="none" spc="0" normalizeH="0" baseline="0" noProof="0">
+                <a:ln>
+                  <a:noFill/>
+                </a:ln>
+                <a:solidFill>
+                  <a:srgbClr val="121212"/>
+                </a:solidFill>
+                <a:effectLst/>
+                <a:uLnTx/>
+                <a:uFillTx/>
+                <a:latin typeface="Arial"/>
+                <a:ea typeface="+mn-ea"/>
+                <a:cs typeface="+mn-cs"/>
+              </a:rPr>
+              <a:t>positioning, launch and adoption for Amazon Bedrock AgentCore at AWS</a:t>
+            </a:r>
+          </a:p>
+        </p:txBody>
+      </p:sp>
+      <p:cxnSp>
+        <p:nvCxnSpPr>
+          <p:cNvPr id="19" name="Connector 18"/>
+          <p:cNvCxnSpPr/>
+          <p:nvPr/>
+        </p:nvCxnSpPr>
+        <p:spPr>
+          <a:xfrm>
+            <a:off x="502920" y="1627632"/>
+            <a:ext cx="11155680" cy="0"/>
+          </a:xfrm>
+          <a:prstGeom prst="line">
+            <a:avLst/>
+          </a:prstGeom>
+          <a:ln w="12700">
+            <a:solidFill>
+              <a:srgbClr val="E5DCCD"/>
+            </a:solidFill>
+          </a:ln>
+        </p:spPr>
+        <p:style>
+          <a:lnRef idx="2">
+            <a:schemeClr val="accent1"/>
+          </a:lnRef>
+          <a:fillRef idx="0">
+            <a:schemeClr val="accent1"/>
+          </a:fillRef>
+          <a:effectRef idx="1">
+            <a:schemeClr val="accent1"/>
+          </a:effectRef>
+          <a:fontRef idx="minor">
+            <a:schemeClr val="tx1"/>
+          </a:fontRef>
+        </p:style>
+      </p:cxnSp>
+      <p:sp>
+        <p:nvSpPr>
+          <p:cNvPr id="20" name="TextBox 19"/>
+          <p:cNvSpPr txBox="1">
+            <a:spLocks/>
+          </p:cNvSpPr>
+          <p:nvPr/>
+        </p:nvSpPr>
+        <p:spPr>
+          <a:xfrm>
+            <a:off x="502920" y="1677365"/>
+            <a:ext cx="11155680" cy="430887"/>
+          </a:xfrm>
+          <a:prstGeom prst="rect">
+            <a:avLst/>
+          </a:prstGeom>
+          <a:noFill/>
+        </p:spPr>
+        <p:txBody>
+          <a:bodyPr wrap="square" lIns="0" tIns="0" rIns="0" bIns="0" anchor="ctr">
+            <a:spAutoFit/>
+          </a:bodyPr>
+          <a:lstStyle/>
+          <a:p>
+            <a:pPr marL="0" marR="0" lvl="0" indent="0" algn="l" defTabSz="914400" rtl="0" eaLnBrk="1" fontAlgn="auto" latinLnBrk="0" hangingPunct="1">
+              <a:lnSpc>
+                <a:spcPct val="100000"/>
+              </a:lnSpc>
+              <a:spcBef>
+                <a:spcPts val="0"/>
+              </a:spcBef>
+              <a:spcAft>
+                <a:spcPts val="0"/>
+              </a:spcAft>
+              <a:buClrTx/>
+              <a:buSzTx/>
+              <a:buFontTx/>
+              <a:buNone/>
+              <a:tabLst/>
+              <a:defRPr/>
+            </a:pPr>
+            <a:r>
+              <a:rPr kumimoji="0" lang="en-US" sz="1400" b="1" i="0" u="none" strike="noStrike" kern="1200" cap="none" spc="0" normalizeH="0" baseline="0" noProof="0">
+                <a:ln>
+                  <a:noFill/>
+                </a:ln>
+                <a:solidFill>
+                  <a:srgbClr val="FFC400"/>
+                </a:solidFill>
+                <a:effectLst/>
+                <a:uLnTx/>
+                <a:uFillTx/>
+                <a:latin typeface="Arial"/>
+                <a:ea typeface="+mn-ea"/>
+                <a:cs typeface="+mn-cs"/>
+              </a:rPr>
+              <a:t>TAKEAWAY  </a:t>
+            </a:r>
+            <a:r>
+              <a:rPr kumimoji="0" lang="en-US" sz="1400" b="1" i="0" u="none" strike="noStrike" kern="1200" cap="none" spc="0" normalizeH="0" baseline="0" noProof="0">
+                <a:ln>
+                  <a:noFill/>
+                </a:ln>
+                <a:solidFill>
+                  <a:srgbClr val="121212"/>
+                </a:solidFill>
+                <a:effectLst/>
+                <a:uLnTx/>
+                <a:uFillTx/>
+                <a:latin typeface="Arial"/>
+                <a:ea typeface="+mn-ea"/>
+                <a:cs typeface="+mn-cs"/>
+              </a:rPr>
+              <a:t>“Get an agent into production without rebuilding the enterprise security and operational layer yourself.”</a:t>
+            </a:r>
+          </a:p>
+        </p:txBody>
+      </p:sp>
+      <p:sp>
+        <p:nvSpPr>
+          <p:cNvPr id="200" name="Icon Stage Flow"/>
+          <p:cNvSpPr/>
+          <p:nvPr/>
+        </p:nvSpPr>
+        <p:spPr>
+          <a:xfrm>
+            <a:off x="502920" y="2135000"/>
+            <a:ext cx="228600" cy="228600"/>
+          </a:xfrm>
+          <a:prstGeom prst="chevron">
+            <a:avLst/>
+          </a:prstGeom>
+          <a:solidFill>
+            <a:srgbClr val="FF4B00"/>
+          </a:solidFill>
+          <a:ln>
+            <a:noFill/>
+          </a:ln>
+        </p:spPr>
+        <p:txBody>
+          <a:bodyPr/>
+          <a:lstStyle/>
+          <a:p>
+            <a:pPr marL="0" marR="0" lvl="0" indent="0" algn="l" defTabSz="914400" rtl="0" eaLnBrk="1" fontAlgn="auto" latinLnBrk="0" hangingPunct="1">
+              <a:lnSpc>
+                <a:spcPct val="100000"/>
+              </a:lnSpc>
+              <a:spcBef>
+                <a:spcPts val="0"/>
+              </a:spcBef>
+              <a:spcAft>
+                <a:spcPts val="0"/>
+              </a:spcAft>
+              <a:buClrTx/>
+              <a:buSzTx/>
+              <a:buFontTx/>
+              <a:buNone/>
+              <a:tabLst/>
+              <a:defRPr/>
+            </a:pPr>
+            <a:endParaRPr kumimoji="0" lang="en-US" sz="1800" b="0" i="0" u="none" strike="noStrike" kern="1200" cap="none" spc="0" normalizeH="0" baseline="0" noProof="0">
+              <a:ln>
+                <a:noFill/>
+              </a:ln>
+              <a:solidFill>
+                <a:prstClr val="black"/>
+              </a:solidFill>
+              <a:effectLst/>
+              <a:uLnTx/>
+              <a:uFillTx/>
+              <a:latin typeface="Arial"/>
+              <a:ea typeface="+mn-ea"/>
+              <a:cs typeface="+mn-cs"/>
+            </a:endParaRPr>
+          </a:p>
+        </p:txBody>
+      </p:sp>
+      <p:sp>
+        <p:nvSpPr>
+          <p:cNvPr id="23" name="TextBox 22"/>
+          <p:cNvSpPr txBox="1">
+            <a:spLocks/>
+          </p:cNvSpPr>
+          <p:nvPr/>
+        </p:nvSpPr>
+        <p:spPr>
+          <a:xfrm>
+            <a:off x="502920" y="2400000"/>
+            <a:ext cx="457200" cy="201168"/>
+          </a:xfrm>
+          <a:prstGeom prst="rect">
+            <a:avLst/>
+          </a:prstGeom>
+          <a:noFill/>
+        </p:spPr>
+        <p:txBody>
+          <a:bodyPr wrap="square" lIns="0" tIns="0" rIns="0" bIns="0" anchor="t">
+            <a:normAutofit/>
+          </a:bodyPr>
+          <a:lstStyle/>
+          <a:p>
+            <a:pPr marL="0" marR="0" lvl="0" indent="0" algn="l" defTabSz="914400" rtl="0" eaLnBrk="1" fontAlgn="auto" latinLnBrk="0" hangingPunct="1">
+              <a:lnSpc>
+                <a:spcPct val="100000"/>
+              </a:lnSpc>
+              <a:spcBef>
+                <a:spcPts val="0"/>
+              </a:spcBef>
+              <a:spcAft>
+                <a:spcPts val="0"/>
+              </a:spcAft>
+              <a:buClrTx/>
+              <a:buSzTx/>
+              <a:buFontTx/>
+              <a:buNone/>
+              <a:tabLst/>
+              <a:defRPr/>
+            </a:pPr>
+            <a:r>
+              <a:rPr kumimoji="0" lang="en-US" sz="1200" b="1" i="0" u="none" strike="noStrike" kern="1200" cap="none" spc="0" normalizeH="0" baseline="0" noProof="0">
+                <a:ln>
+                  <a:noFill/>
+                </a:ln>
+                <a:solidFill>
+                  <a:srgbClr val="FF4B00"/>
+                </a:solidFill>
+                <a:effectLst/>
+                <a:uLnTx/>
+                <a:uFillTx/>
+                <a:latin typeface="Arial"/>
+                <a:ea typeface="+mn-ea"/>
+                <a:cs typeface="+mn-cs"/>
+              </a:rPr>
+              <a:t>01</a:t>
+            </a:r>
+          </a:p>
+        </p:txBody>
+      </p:sp>
+      <p:sp>
+        <p:nvSpPr>
+          <p:cNvPr id="24" name="TextBox 23"/>
+          <p:cNvSpPr txBox="1">
+            <a:spLocks/>
+          </p:cNvSpPr>
+          <p:nvPr/>
+        </p:nvSpPr>
+        <p:spPr>
+          <a:xfrm>
+            <a:off x="502920" y="2620000"/>
+            <a:ext cx="3200400" cy="274320"/>
+          </a:xfrm>
+          <a:prstGeom prst="rect">
+            <a:avLst/>
+          </a:prstGeom>
+          <a:noFill/>
+        </p:spPr>
+        <p:txBody>
+          <a:bodyPr wrap="square" lIns="0" tIns="0" rIns="0" bIns="0" anchor="t">
+            <a:spAutoFit/>
+          </a:bodyPr>
+          <a:lstStyle/>
+          <a:p>
+            <a:pPr marL="0" marR="0" lvl="0" indent="0" algn="l" defTabSz="914400" rtl="0" eaLnBrk="1" fontAlgn="auto" latinLnBrk="0" hangingPunct="1">
+              <a:lnSpc>
+                <a:spcPct val="100000"/>
+              </a:lnSpc>
+              <a:spcBef>
+                <a:spcPts val="0"/>
+              </a:spcBef>
+              <a:spcAft>
+                <a:spcPts val="0"/>
+              </a:spcAft>
+              <a:buClrTx/>
+              <a:buSzTx/>
+              <a:buFontTx/>
+              <a:buNone/>
+              <a:tabLst/>
+              <a:defRPr/>
+            </a:pPr>
+            <a:r>
+              <a:rPr kumimoji="0" lang="en-US" sz="1400" b="1" i="0" u="none" strike="noStrike" kern="1200" cap="none" spc="0" normalizeH="0" baseline="0" noProof="0">
+                <a:ln>
+                  <a:noFill/>
+                </a:ln>
+                <a:solidFill>
+                  <a:srgbClr val="FF4B00"/>
+                </a:solidFill>
+                <a:effectLst/>
+                <a:uLnTx/>
+                <a:uFillTx/>
+                <a:latin typeface="Arial"/>
+                <a:ea typeface="+mn-ea"/>
+                <a:cs typeface="+mn-cs"/>
+              </a:rPr>
+              <a:t>PLATFORM STAGE FLOW</a:t>
+            </a:r>
+          </a:p>
+        </p:txBody>
+      </p:sp>
+      <p:sp>
+        <p:nvSpPr>
+          <p:cNvPr id="100" name="Stage Marker 1"/>
+          <p:cNvSpPr/>
+          <p:nvPr/>
+        </p:nvSpPr>
+        <p:spPr>
+          <a:xfrm>
+            <a:off x="502920" y="2950000"/>
+            <a:ext cx="91440" cy="91440"/>
+          </a:xfrm>
+          <a:prstGeom prst="rect">
+            <a:avLst/>
+          </a:prstGeom>
+          <a:solidFill>
+            <a:srgbClr val="FF4B00"/>
+          </a:solidFill>
+          <a:ln w="12700">
+            <a:solidFill>
+              <a:srgbClr val="FF4B00"/>
+            </a:solidFill>
+          </a:ln>
+        </p:spPr>
+        <p:style>
+          <a:lnRef idx="1">
+            <a:schemeClr val="accent1"/>
+          </a:lnRef>
+          <a:fillRef idx="3">
+            <a:schemeClr val="accent1"/>
+          </a:fillRef>
+          <a:effectRef idx="2">
+            <a:schemeClr val="accent1"/>
+          </a:effectRef>
+          <a:fontRef idx="minor">
+            <a:schemeClr val="lt1"/>
+          </a:fontRef>
+        </p:style>
+        <p:txBody>
+          <a:bodyPr rtlCol="0" anchor="ctr"/>
+          <a:lstStyle/>
+          <a:p>
+            <a:pPr marL="0" marR="0" lvl="0" indent="0" algn="ctr" defTabSz="914400" rtl="0" eaLnBrk="1" fontAlgn="auto" latinLnBrk="0" hangingPunct="1">
+              <a:lnSpc>
+                <a:spcPct val="100000"/>
+              </a:lnSpc>
+              <a:spcBef>
+                <a:spcPts val="0"/>
+              </a:spcBef>
+              <a:spcAft>
+                <a:spcPts val="0"/>
+              </a:spcAft>
+              <a:buClrTx/>
+              <a:buSzTx/>
+              <a:buFontTx/>
+              <a:buNone/>
+              <a:tabLst/>
+              <a:defRPr/>
+            </a:pPr>
+            <a:endParaRPr kumimoji="0" lang="en-US" sz="1800" b="0" i="0" u="none" strike="noStrike" kern="1200" cap="none" spc="0" normalizeH="0" baseline="0" noProof="0">
+              <a:ln>
+                <a:noFill/>
+              </a:ln>
+              <a:solidFill>
+                <a:prstClr val="white"/>
+              </a:solidFill>
+              <a:effectLst/>
+              <a:uLnTx/>
+              <a:uFillTx/>
+              <a:latin typeface="Arial"/>
+              <a:ea typeface="+mn-ea"/>
+              <a:cs typeface="+mn-cs"/>
+            </a:endParaRPr>
+          </a:p>
+        </p:txBody>
+      </p:sp>
+      <p:sp>
+        <p:nvSpPr>
+          <p:cNvPr id="101" name="Stage Label 1"/>
+          <p:cNvSpPr txBox="1">
+            <a:spLocks/>
+          </p:cNvSpPr>
+          <p:nvPr/>
+        </p:nvSpPr>
+        <p:spPr>
+          <a:xfrm>
+            <a:off x="502920" y="3090000"/>
+            <a:ext cx="1950000" cy="276999"/>
+          </a:xfrm>
+          <a:prstGeom prst="rect">
+            <a:avLst/>
+          </a:prstGeom>
+          <a:noFill/>
+        </p:spPr>
+        <p:txBody>
+          <a:bodyPr wrap="square" lIns="0" tIns="0" rIns="0" bIns="0" anchor="t">
+            <a:spAutoFit/>
+          </a:bodyPr>
+          <a:lstStyle/>
+          <a:p>
+            <a:pPr marL="0" marR="0" lvl="0" indent="0" algn="l" defTabSz="914400" rtl="0" eaLnBrk="1" fontAlgn="auto" latinLnBrk="0" hangingPunct="1">
+              <a:lnSpc>
+                <a:spcPct val="100000"/>
+              </a:lnSpc>
+              <a:spcBef>
+                <a:spcPts val="0"/>
+              </a:spcBef>
+              <a:spcAft>
+                <a:spcPts val="0"/>
+              </a:spcAft>
+              <a:buClrTx/>
+              <a:buSzTx/>
+              <a:buFontTx/>
+              <a:buNone/>
+              <a:tabLst/>
+              <a:defRPr/>
+            </a:pPr>
+            <a:r>
+              <a:rPr kumimoji="0" lang="en-US" sz="1600" b="1" i="0" u="none" strike="noStrike" kern="1200" cap="none" spc="0" normalizeH="0" baseline="0" noProof="0">
+                <a:ln>
+                  <a:noFill/>
+                </a:ln>
+                <a:solidFill>
+                  <a:srgbClr val="121212"/>
+                </a:solidFill>
+                <a:effectLst/>
+                <a:uLnTx/>
+                <a:uFillTx/>
+                <a:latin typeface="Arial"/>
+                <a:ea typeface="+mn-ea"/>
+                <a:cs typeface="+mn-cs"/>
+              </a:rPr>
+              <a:t>Prototype</a:t>
+            </a:r>
+          </a:p>
+        </p:txBody>
+      </p:sp>
+      <p:sp>
+        <p:nvSpPr>
+          <p:cNvPr id="102" name="Flow Arrow 1"/>
+          <p:cNvSpPr txBox="1">
+            <a:spLocks/>
+          </p:cNvSpPr>
+          <p:nvPr/>
+        </p:nvSpPr>
+        <p:spPr>
+          <a:xfrm>
+            <a:off x="2452920" y="3090000"/>
+            <a:ext cx="351420" cy="276999"/>
+          </a:xfrm>
+          <a:prstGeom prst="rect">
+            <a:avLst/>
+          </a:prstGeom>
+          <a:noFill/>
+        </p:spPr>
+        <p:txBody>
+          <a:bodyPr wrap="square" lIns="0" tIns="0" rIns="0" bIns="0" anchor="t">
+            <a:normAutofit/>
+          </a:bodyPr>
+          <a:lstStyle/>
+          <a:p>
+            <a:pPr marL="0" marR="0" lvl="0" indent="0" algn="ctr" defTabSz="914400" rtl="0" eaLnBrk="1" fontAlgn="auto" latinLnBrk="0" hangingPunct="1">
+              <a:lnSpc>
+                <a:spcPct val="100000"/>
+              </a:lnSpc>
+              <a:spcBef>
+                <a:spcPts val="0"/>
+              </a:spcBef>
+              <a:spcAft>
+                <a:spcPts val="0"/>
+              </a:spcAft>
+              <a:buClrTx/>
+              <a:buSzTx/>
+              <a:buFontTx/>
+              <a:buNone/>
+              <a:tabLst/>
+              <a:defRPr/>
+            </a:pPr>
+            <a:r>
+              <a:rPr kumimoji="0" lang="en-US" sz="1600" b="1" i="0" u="none" strike="noStrike" kern="1200" cap="none" spc="0" normalizeH="0" baseline="0" noProof="0">
+                <a:ln>
+                  <a:noFill/>
+                </a:ln>
+                <a:solidFill>
+                  <a:srgbClr val="FF4B00"/>
+                </a:solidFill>
+                <a:effectLst/>
+                <a:uLnTx/>
+                <a:uFillTx/>
+                <a:latin typeface="Arial"/>
+                <a:ea typeface="+mn-ea"/>
+                <a:cs typeface="+mn-cs"/>
+              </a:rPr>
+              <a:t>→</a:t>
+            </a:r>
+          </a:p>
+        </p:txBody>
+      </p:sp>
+      <p:sp>
+        <p:nvSpPr>
+          <p:cNvPr id="103" name="Stage Marker 2"/>
+          <p:cNvSpPr/>
+          <p:nvPr/>
+        </p:nvSpPr>
+        <p:spPr>
+          <a:xfrm>
+            <a:off x="2804340" y="2950000"/>
+            <a:ext cx="91440" cy="91440"/>
+          </a:xfrm>
+          <a:prstGeom prst="rect">
+            <a:avLst/>
+          </a:prstGeom>
+          <a:solidFill>
+            <a:srgbClr val="FF4B00"/>
+          </a:solidFill>
+          <a:ln w="12700">
+            <a:solidFill>
+              <a:srgbClr val="FF4B00"/>
+            </a:solidFill>
+          </a:ln>
+        </p:spPr>
+        <p:style>
+          <a:lnRef idx="1">
+            <a:schemeClr val="accent1"/>
+          </a:lnRef>
+          <a:fillRef idx="3">
+            <a:schemeClr val="accent1"/>
+          </a:fillRef>
+          <a:effectRef idx="2">
+            <a:schemeClr val="accent1"/>
+          </a:effectRef>
+          <a:fontRef idx="minor">
+            <a:schemeClr val="lt1"/>
+          </a:fontRef>
+        </p:style>
+        <p:txBody>
+          <a:bodyPr rtlCol="0" anchor="ctr"/>
+          <a:lstStyle/>
+          <a:p>
+            <a:pPr marL="0" marR="0" lvl="0" indent="0" algn="ctr" defTabSz="914400" rtl="0" eaLnBrk="1" fontAlgn="auto" latinLnBrk="0" hangingPunct="1">
+              <a:lnSpc>
+                <a:spcPct val="100000"/>
+              </a:lnSpc>
+              <a:spcBef>
+                <a:spcPts val="0"/>
+              </a:spcBef>
+              <a:spcAft>
+                <a:spcPts val="0"/>
+              </a:spcAft>
+              <a:buClrTx/>
+              <a:buSzTx/>
+              <a:buFontTx/>
+              <a:buNone/>
+              <a:tabLst/>
+              <a:defRPr/>
+            </a:pPr>
+            <a:endParaRPr kumimoji="0" lang="en-US" sz="1800" b="0" i="0" u="none" strike="noStrike" kern="1200" cap="none" spc="0" normalizeH="0" baseline="0" noProof="0">
+              <a:ln>
+                <a:noFill/>
+              </a:ln>
+              <a:solidFill>
+                <a:prstClr val="white"/>
+              </a:solidFill>
+              <a:effectLst/>
+              <a:uLnTx/>
+              <a:uFillTx/>
+              <a:latin typeface="Arial"/>
+              <a:ea typeface="+mn-ea"/>
+              <a:cs typeface="+mn-cs"/>
+            </a:endParaRPr>
+          </a:p>
+        </p:txBody>
+      </p:sp>
+      <p:sp>
+        <p:nvSpPr>
+          <p:cNvPr id="104" name="Stage Label 2"/>
+          <p:cNvSpPr txBox="1">
+            <a:spLocks/>
+          </p:cNvSpPr>
+          <p:nvPr/>
+        </p:nvSpPr>
+        <p:spPr>
+          <a:xfrm>
+            <a:off x="2804340" y="3090000"/>
+            <a:ext cx="1950000" cy="276999"/>
+          </a:xfrm>
+          <a:prstGeom prst="rect">
+            <a:avLst/>
+          </a:prstGeom>
+          <a:noFill/>
+        </p:spPr>
+        <p:txBody>
+          <a:bodyPr wrap="square" lIns="0" tIns="0" rIns="0" bIns="0" anchor="t">
+            <a:spAutoFit/>
+          </a:bodyPr>
+          <a:lstStyle/>
+          <a:p>
+            <a:pPr marL="0" marR="0" lvl="0" indent="0" algn="l" defTabSz="914400" rtl="0" eaLnBrk="1" fontAlgn="auto" latinLnBrk="0" hangingPunct="1">
+              <a:lnSpc>
+                <a:spcPct val="100000"/>
+              </a:lnSpc>
+              <a:spcBef>
+                <a:spcPts val="0"/>
+              </a:spcBef>
+              <a:spcAft>
+                <a:spcPts val="0"/>
+              </a:spcAft>
+              <a:buClrTx/>
+              <a:buSzTx/>
+              <a:buFontTx/>
+              <a:buNone/>
+              <a:tabLst/>
+              <a:defRPr/>
+            </a:pPr>
+            <a:r>
+              <a:rPr kumimoji="0" lang="en-US" sz="1600" b="1" i="0" u="none" strike="noStrike" kern="1200" cap="none" spc="0" normalizeH="0" baseline="0" noProof="0">
+                <a:ln>
+                  <a:noFill/>
+                </a:ln>
+                <a:solidFill>
+                  <a:srgbClr val="121212"/>
+                </a:solidFill>
+                <a:effectLst/>
+                <a:uLnTx/>
+                <a:uFillTx/>
+                <a:latin typeface="Arial"/>
+                <a:ea typeface="+mn-ea"/>
+                <a:cs typeface="+mn-cs"/>
+              </a:rPr>
+              <a:t>Connect</a:t>
+            </a:r>
+          </a:p>
+        </p:txBody>
+      </p:sp>
+      <p:sp>
+        <p:nvSpPr>
+          <p:cNvPr id="105" name="Flow Arrow 2"/>
+          <p:cNvSpPr txBox="1">
+            <a:spLocks/>
+          </p:cNvSpPr>
+          <p:nvPr/>
+        </p:nvSpPr>
+        <p:spPr>
+          <a:xfrm>
+            <a:off x="4754340" y="3090000"/>
+            <a:ext cx="351420" cy="276999"/>
+          </a:xfrm>
+          <a:prstGeom prst="rect">
+            <a:avLst/>
+          </a:prstGeom>
+          <a:noFill/>
+        </p:spPr>
+        <p:txBody>
+          <a:bodyPr wrap="square" lIns="0" tIns="0" rIns="0" bIns="0" anchor="t">
+            <a:normAutofit/>
+          </a:bodyPr>
+          <a:lstStyle/>
+          <a:p>
+            <a:pPr marL="0" marR="0" lvl="0" indent="0" algn="ctr" defTabSz="914400" rtl="0" eaLnBrk="1" fontAlgn="auto" latinLnBrk="0" hangingPunct="1">
+              <a:lnSpc>
+                <a:spcPct val="100000"/>
+              </a:lnSpc>
+              <a:spcBef>
+                <a:spcPts val="0"/>
+              </a:spcBef>
+              <a:spcAft>
+                <a:spcPts val="0"/>
+              </a:spcAft>
+              <a:buClrTx/>
+              <a:buSzTx/>
+              <a:buFontTx/>
+              <a:buNone/>
+              <a:tabLst/>
+              <a:defRPr/>
+            </a:pPr>
+            <a:r>
+              <a:rPr kumimoji="0" lang="en-US" sz="1600" b="1" i="0" u="none" strike="noStrike" kern="1200" cap="none" spc="0" normalizeH="0" baseline="0" noProof="0">
+                <a:ln>
+                  <a:noFill/>
+                </a:ln>
+                <a:solidFill>
+                  <a:srgbClr val="FF4B00"/>
+                </a:solidFill>
+                <a:effectLst/>
+                <a:uLnTx/>
+                <a:uFillTx/>
+                <a:latin typeface="Arial"/>
+                <a:ea typeface="+mn-ea"/>
+                <a:cs typeface="+mn-cs"/>
+              </a:rPr>
+              <a:t>→</a:t>
+            </a:r>
+          </a:p>
+        </p:txBody>
+      </p:sp>
+      <p:sp>
+        <p:nvSpPr>
+          <p:cNvPr id="106" name="Stage Marker 3"/>
+          <p:cNvSpPr/>
+          <p:nvPr/>
+        </p:nvSpPr>
+        <p:spPr>
+          <a:xfrm>
+            <a:off x="5105760" y="2950000"/>
+            <a:ext cx="91440" cy="91440"/>
+          </a:xfrm>
+          <a:prstGeom prst="rect">
+            <a:avLst/>
+          </a:prstGeom>
+          <a:solidFill>
+            <a:srgbClr val="FF4B00"/>
+          </a:solidFill>
+          <a:ln w="12700">
+            <a:solidFill>
+              <a:srgbClr val="FF4B00"/>
+            </a:solidFill>
+          </a:ln>
+        </p:spPr>
+        <p:style>
+          <a:lnRef idx="1">
+            <a:schemeClr val="accent1"/>
+          </a:lnRef>
+          <a:fillRef idx="3">
+            <a:schemeClr val="accent1"/>
+          </a:fillRef>
+          <a:effectRef idx="2">
+            <a:schemeClr val="accent1"/>
+          </a:effectRef>
+          <a:fontRef idx="minor">
+            <a:schemeClr val="lt1"/>
+          </a:fontRef>
+        </p:style>
+        <p:txBody>
+          <a:bodyPr rtlCol="0" anchor="ctr"/>
+          <a:lstStyle/>
+          <a:p>
+            <a:pPr marL="0" marR="0" lvl="0" indent="0" algn="ctr" defTabSz="914400" rtl="0" eaLnBrk="1" fontAlgn="auto" latinLnBrk="0" hangingPunct="1">
+              <a:lnSpc>
+                <a:spcPct val="100000"/>
+              </a:lnSpc>
+              <a:spcBef>
+                <a:spcPts val="0"/>
+              </a:spcBef>
+              <a:spcAft>
+                <a:spcPts val="0"/>
+              </a:spcAft>
+              <a:buClrTx/>
+              <a:buSzTx/>
+              <a:buFontTx/>
+              <a:buNone/>
+              <a:tabLst/>
+              <a:defRPr/>
+            </a:pPr>
+            <a:endParaRPr kumimoji="0" lang="en-US" sz="1800" b="0" i="0" u="none" strike="noStrike" kern="1200" cap="none" spc="0" normalizeH="0" baseline="0" noProof="0">
+              <a:ln>
+                <a:noFill/>
+              </a:ln>
+              <a:solidFill>
+                <a:prstClr val="white"/>
+              </a:solidFill>
+              <a:effectLst/>
+              <a:uLnTx/>
+              <a:uFillTx/>
+              <a:latin typeface="Arial"/>
+              <a:ea typeface="+mn-ea"/>
+              <a:cs typeface="+mn-cs"/>
+            </a:endParaRPr>
+          </a:p>
+        </p:txBody>
+      </p:sp>
+      <p:sp>
+        <p:nvSpPr>
+          <p:cNvPr id="107" name="Stage Label 3"/>
+          <p:cNvSpPr txBox="1">
+            <a:spLocks/>
+          </p:cNvSpPr>
+          <p:nvPr/>
+        </p:nvSpPr>
+        <p:spPr>
+          <a:xfrm>
+            <a:off x="5105760" y="3090000"/>
+            <a:ext cx="1950000" cy="276999"/>
+          </a:xfrm>
+          <a:prstGeom prst="rect">
+            <a:avLst/>
+          </a:prstGeom>
+          <a:noFill/>
+        </p:spPr>
+        <p:txBody>
+          <a:bodyPr wrap="square" lIns="0" tIns="0" rIns="0" bIns="0" anchor="t">
+            <a:spAutoFit/>
+          </a:bodyPr>
+          <a:lstStyle/>
+          <a:p>
+            <a:pPr marL="0" marR="0" lvl="0" indent="0" algn="l" defTabSz="914400" rtl="0" eaLnBrk="1" fontAlgn="auto" latinLnBrk="0" hangingPunct="1">
+              <a:lnSpc>
+                <a:spcPct val="100000"/>
+              </a:lnSpc>
+              <a:spcBef>
+                <a:spcPts val="0"/>
+              </a:spcBef>
+              <a:spcAft>
+                <a:spcPts val="0"/>
+              </a:spcAft>
+              <a:buClrTx/>
+              <a:buSzTx/>
+              <a:buFontTx/>
+              <a:buNone/>
+              <a:tabLst/>
+              <a:defRPr/>
+            </a:pPr>
+            <a:r>
+              <a:rPr kumimoji="0" lang="en-US" sz="1600" b="1" i="0" u="none" strike="noStrike" kern="1200" cap="none" spc="0" normalizeH="0" baseline="0" noProof="0">
+                <a:ln>
+                  <a:noFill/>
+                </a:ln>
+                <a:solidFill>
+                  <a:srgbClr val="121212"/>
+                </a:solidFill>
+                <a:effectLst/>
+                <a:uLnTx/>
+                <a:uFillTx/>
+                <a:latin typeface="Arial"/>
+                <a:ea typeface="+mn-ea"/>
+                <a:cs typeface="+mn-cs"/>
+              </a:rPr>
+              <a:t>Secure</a:t>
+            </a:r>
+          </a:p>
+        </p:txBody>
+      </p:sp>
+      <p:sp>
+        <p:nvSpPr>
+          <p:cNvPr id="108" name="Flow Arrow 3"/>
+          <p:cNvSpPr txBox="1">
+            <a:spLocks/>
+          </p:cNvSpPr>
+          <p:nvPr/>
+        </p:nvSpPr>
+        <p:spPr>
+          <a:xfrm>
+            <a:off x="7055760" y="3090000"/>
+            <a:ext cx="351420" cy="276999"/>
+          </a:xfrm>
+          <a:prstGeom prst="rect">
+            <a:avLst/>
+          </a:prstGeom>
+          <a:noFill/>
+        </p:spPr>
+        <p:txBody>
+          <a:bodyPr wrap="square" lIns="0" tIns="0" rIns="0" bIns="0" anchor="t">
+            <a:normAutofit/>
+          </a:bodyPr>
+          <a:lstStyle/>
+          <a:p>
+            <a:pPr marL="0" marR="0" lvl="0" indent="0" algn="ctr" defTabSz="914400" rtl="0" eaLnBrk="1" fontAlgn="auto" latinLnBrk="0" hangingPunct="1">
+              <a:lnSpc>
+                <a:spcPct val="100000"/>
+              </a:lnSpc>
+              <a:spcBef>
+                <a:spcPts val="0"/>
+              </a:spcBef>
+              <a:spcAft>
+                <a:spcPts val="0"/>
+              </a:spcAft>
+              <a:buClrTx/>
+              <a:buSzTx/>
+              <a:buFontTx/>
+              <a:buNone/>
+              <a:tabLst/>
+              <a:defRPr/>
+            </a:pPr>
+            <a:r>
+              <a:rPr kumimoji="0" lang="en-US" sz="1600" b="1" i="0" u="none" strike="noStrike" kern="1200" cap="none" spc="0" normalizeH="0" baseline="0" noProof="0">
+                <a:ln>
+                  <a:noFill/>
+                </a:ln>
+                <a:solidFill>
+                  <a:srgbClr val="FF4B00"/>
+                </a:solidFill>
+                <a:effectLst/>
+                <a:uLnTx/>
+                <a:uFillTx/>
+                <a:latin typeface="Arial"/>
+                <a:ea typeface="+mn-ea"/>
+                <a:cs typeface="+mn-cs"/>
+              </a:rPr>
+              <a:t>→</a:t>
+            </a:r>
+          </a:p>
+        </p:txBody>
+      </p:sp>
+      <p:sp>
+        <p:nvSpPr>
+          <p:cNvPr id="109" name="Stage Marker 4"/>
+          <p:cNvSpPr/>
+          <p:nvPr/>
+        </p:nvSpPr>
+        <p:spPr>
+          <a:xfrm>
+            <a:off x="7407180" y="2950000"/>
+            <a:ext cx="91440" cy="91440"/>
+          </a:xfrm>
+          <a:prstGeom prst="rect">
+            <a:avLst/>
+          </a:prstGeom>
+          <a:solidFill>
+            <a:srgbClr val="FF4B00"/>
+          </a:solidFill>
+          <a:ln w="12700">
+            <a:solidFill>
+              <a:srgbClr val="FF4B00"/>
+            </a:solidFill>
+          </a:ln>
+        </p:spPr>
+        <p:style>
+          <a:lnRef idx="1">
+            <a:schemeClr val="accent1"/>
+          </a:lnRef>
+          <a:fillRef idx="3">
+            <a:schemeClr val="accent1"/>
+          </a:fillRef>
+          <a:effectRef idx="2">
+            <a:schemeClr val="accent1"/>
+          </a:effectRef>
+          <a:fontRef idx="minor">
+            <a:schemeClr val="lt1"/>
+          </a:fontRef>
+        </p:style>
+        <p:txBody>
+          <a:bodyPr rtlCol="0" anchor="ctr"/>
+          <a:lstStyle/>
+          <a:p>
+            <a:pPr marL="0" marR="0" lvl="0" indent="0" algn="ctr" defTabSz="914400" rtl="0" eaLnBrk="1" fontAlgn="auto" latinLnBrk="0" hangingPunct="1">
+              <a:lnSpc>
+                <a:spcPct val="100000"/>
+              </a:lnSpc>
+              <a:spcBef>
+                <a:spcPts val="0"/>
+              </a:spcBef>
+              <a:spcAft>
+                <a:spcPts val="0"/>
+              </a:spcAft>
+              <a:buClrTx/>
+              <a:buSzTx/>
+              <a:buFontTx/>
+              <a:buNone/>
+              <a:tabLst/>
+              <a:defRPr/>
+            </a:pPr>
+            <a:endParaRPr kumimoji="0" lang="en-US" sz="1800" b="0" i="0" u="none" strike="noStrike" kern="1200" cap="none" spc="0" normalizeH="0" baseline="0" noProof="0">
+              <a:ln>
+                <a:noFill/>
+              </a:ln>
+              <a:solidFill>
+                <a:prstClr val="white"/>
+              </a:solidFill>
+              <a:effectLst/>
+              <a:uLnTx/>
+              <a:uFillTx/>
+              <a:latin typeface="Arial"/>
+              <a:ea typeface="+mn-ea"/>
+              <a:cs typeface="+mn-cs"/>
+            </a:endParaRPr>
+          </a:p>
+        </p:txBody>
+      </p:sp>
+      <p:sp>
+        <p:nvSpPr>
+          <p:cNvPr id="110" name="Stage Label 4"/>
+          <p:cNvSpPr txBox="1">
+            <a:spLocks/>
+          </p:cNvSpPr>
+          <p:nvPr/>
+        </p:nvSpPr>
+        <p:spPr>
+          <a:xfrm>
+            <a:off x="7407180" y="3090000"/>
+            <a:ext cx="1950000" cy="276999"/>
+          </a:xfrm>
+          <a:prstGeom prst="rect">
+            <a:avLst/>
+          </a:prstGeom>
+          <a:noFill/>
+        </p:spPr>
+        <p:txBody>
+          <a:bodyPr wrap="square" lIns="0" tIns="0" rIns="0" bIns="0" anchor="t">
+            <a:spAutoFit/>
+          </a:bodyPr>
+          <a:lstStyle/>
+          <a:p>
+            <a:pPr marL="0" marR="0" lvl="0" indent="0" algn="l" defTabSz="914400" rtl="0" eaLnBrk="1" fontAlgn="auto" latinLnBrk="0" hangingPunct="1">
+              <a:lnSpc>
+                <a:spcPct val="100000"/>
+              </a:lnSpc>
+              <a:spcBef>
+                <a:spcPts val="0"/>
+              </a:spcBef>
+              <a:spcAft>
+                <a:spcPts val="0"/>
+              </a:spcAft>
+              <a:buClrTx/>
+              <a:buSzTx/>
+              <a:buFontTx/>
+              <a:buNone/>
+              <a:tabLst/>
+              <a:defRPr/>
+            </a:pPr>
+            <a:r>
+              <a:rPr kumimoji="0" lang="en-US" sz="1600" b="1" i="0" u="none" strike="noStrike" kern="1200" cap="none" spc="0" normalizeH="0" baseline="0" noProof="0">
+                <a:ln>
+                  <a:noFill/>
+                </a:ln>
+                <a:solidFill>
+                  <a:srgbClr val="121212"/>
+                </a:solidFill>
+                <a:effectLst/>
+                <a:uLnTx/>
+                <a:uFillTx/>
+                <a:latin typeface="Arial"/>
+                <a:ea typeface="+mn-ea"/>
+                <a:cs typeface="+mn-cs"/>
+              </a:rPr>
+              <a:t>Govern</a:t>
+            </a:r>
+          </a:p>
+        </p:txBody>
+      </p:sp>
+      <p:sp>
+        <p:nvSpPr>
+          <p:cNvPr id="111" name="Flow Arrow 4"/>
+          <p:cNvSpPr txBox="1">
+            <a:spLocks/>
+          </p:cNvSpPr>
+          <p:nvPr/>
+        </p:nvSpPr>
+        <p:spPr>
+          <a:xfrm>
+            <a:off x="9357180" y="3090000"/>
+            <a:ext cx="351420" cy="276999"/>
+          </a:xfrm>
+          <a:prstGeom prst="rect">
+            <a:avLst/>
+          </a:prstGeom>
+          <a:noFill/>
+        </p:spPr>
+        <p:txBody>
+          <a:bodyPr wrap="square" lIns="0" tIns="0" rIns="0" bIns="0" anchor="t">
+            <a:normAutofit/>
+          </a:bodyPr>
+          <a:lstStyle/>
+          <a:p>
+            <a:pPr marL="0" marR="0" lvl="0" indent="0" algn="ctr" defTabSz="914400" rtl="0" eaLnBrk="1" fontAlgn="auto" latinLnBrk="0" hangingPunct="1">
+              <a:lnSpc>
+                <a:spcPct val="100000"/>
+              </a:lnSpc>
+              <a:spcBef>
+                <a:spcPts val="0"/>
+              </a:spcBef>
+              <a:spcAft>
+                <a:spcPts val="0"/>
+              </a:spcAft>
+              <a:buClrTx/>
+              <a:buSzTx/>
+              <a:buFontTx/>
+              <a:buNone/>
+              <a:tabLst/>
+              <a:defRPr/>
+            </a:pPr>
+            <a:r>
+              <a:rPr kumimoji="0" lang="en-US" sz="1600" b="1" i="0" u="none" strike="noStrike" kern="1200" cap="none" spc="0" normalizeH="0" baseline="0" noProof="0">
+                <a:ln>
+                  <a:noFill/>
+                </a:ln>
+                <a:solidFill>
+                  <a:srgbClr val="FF4B00"/>
+                </a:solidFill>
+                <a:effectLst/>
+                <a:uLnTx/>
+                <a:uFillTx/>
+                <a:latin typeface="Arial"/>
+                <a:ea typeface="+mn-ea"/>
+                <a:cs typeface="+mn-cs"/>
+              </a:rPr>
+              <a:t>→</a:t>
+            </a:r>
+          </a:p>
+        </p:txBody>
+      </p:sp>
+      <p:sp>
+        <p:nvSpPr>
+          <p:cNvPr id="112" name="Stage Marker 5"/>
+          <p:cNvSpPr/>
+          <p:nvPr/>
+        </p:nvSpPr>
+        <p:spPr>
+          <a:xfrm>
+            <a:off x="9708600" y="2950000"/>
+            <a:ext cx="91440" cy="91440"/>
+          </a:xfrm>
+          <a:prstGeom prst="rect">
+            <a:avLst/>
+          </a:prstGeom>
+          <a:solidFill>
+            <a:srgbClr val="FF4B00"/>
+          </a:solidFill>
+          <a:ln w="12700">
+            <a:solidFill>
+              <a:srgbClr val="FF4B00"/>
+            </a:solidFill>
+          </a:ln>
+        </p:spPr>
+        <p:style>
+          <a:lnRef idx="1">
+            <a:schemeClr val="accent1"/>
+          </a:lnRef>
+          <a:fillRef idx="3">
+            <a:schemeClr val="accent1"/>
+          </a:fillRef>
+          <a:effectRef idx="2">
+            <a:schemeClr val="accent1"/>
+          </a:effectRef>
+          <a:fontRef idx="minor">
+            <a:schemeClr val="lt1"/>
+          </a:fontRef>
+        </p:style>
+        <p:txBody>
+          <a:bodyPr rtlCol="0" anchor="ctr"/>
+          <a:lstStyle/>
+          <a:p>
+            <a:pPr marL="0" marR="0" lvl="0" indent="0" algn="ctr" defTabSz="914400" rtl="0" eaLnBrk="1" fontAlgn="auto" latinLnBrk="0" hangingPunct="1">
+              <a:lnSpc>
+                <a:spcPct val="100000"/>
+              </a:lnSpc>
+              <a:spcBef>
+                <a:spcPts val="0"/>
+              </a:spcBef>
+              <a:spcAft>
+                <a:spcPts val="0"/>
+              </a:spcAft>
+              <a:buClrTx/>
+              <a:buSzTx/>
+              <a:buFontTx/>
+              <a:buNone/>
+              <a:tabLst/>
+              <a:defRPr/>
+            </a:pPr>
+            <a:endParaRPr kumimoji="0" lang="en-US" sz="1800" b="0" i="0" u="none" strike="noStrike" kern="1200" cap="none" spc="0" normalizeH="0" baseline="0" noProof="0">
+              <a:ln>
+                <a:noFill/>
+              </a:ln>
+              <a:solidFill>
+                <a:prstClr val="white"/>
+              </a:solidFill>
+              <a:effectLst/>
+              <a:uLnTx/>
+              <a:uFillTx/>
+              <a:latin typeface="Arial"/>
+              <a:ea typeface="+mn-ea"/>
+              <a:cs typeface="+mn-cs"/>
+            </a:endParaRPr>
+          </a:p>
+        </p:txBody>
+      </p:sp>
+      <p:sp>
+        <p:nvSpPr>
+          <p:cNvPr id="113" name="Stage Label 5"/>
+          <p:cNvSpPr txBox="1">
+            <a:spLocks/>
+          </p:cNvSpPr>
+          <p:nvPr/>
+        </p:nvSpPr>
+        <p:spPr>
+          <a:xfrm>
+            <a:off x="9708600" y="3090000"/>
+            <a:ext cx="1950000" cy="276999"/>
+          </a:xfrm>
+          <a:prstGeom prst="rect">
+            <a:avLst/>
+          </a:prstGeom>
+          <a:noFill/>
+        </p:spPr>
+        <p:txBody>
+          <a:bodyPr wrap="square" lIns="0" tIns="0" rIns="0" bIns="0" anchor="t">
+            <a:spAutoFit/>
+          </a:bodyPr>
+          <a:lstStyle/>
+          <a:p>
+            <a:pPr marL="0" marR="0" lvl="0" indent="0" algn="l" defTabSz="914400" rtl="0" eaLnBrk="1" fontAlgn="auto" latinLnBrk="0" hangingPunct="1">
+              <a:lnSpc>
+                <a:spcPct val="100000"/>
+              </a:lnSpc>
+              <a:spcBef>
+                <a:spcPts val="0"/>
+              </a:spcBef>
+              <a:spcAft>
+                <a:spcPts val="0"/>
+              </a:spcAft>
+              <a:buClrTx/>
+              <a:buSzTx/>
+              <a:buFontTx/>
+              <a:buNone/>
+              <a:tabLst/>
+              <a:defRPr/>
+            </a:pPr>
+            <a:r>
+              <a:rPr kumimoji="0" lang="en-US" sz="1600" b="1" i="0" u="none" strike="noStrike" kern="1200" cap="none" spc="0" normalizeH="0" baseline="0" noProof="0">
+                <a:ln>
+                  <a:noFill/>
+                </a:ln>
+                <a:solidFill>
+                  <a:srgbClr val="121212"/>
+                </a:solidFill>
+                <a:effectLst/>
+                <a:uLnTx/>
+                <a:uFillTx/>
+                <a:latin typeface="Arial"/>
+                <a:ea typeface="+mn-ea"/>
+                <a:cs typeface="+mn-cs"/>
+              </a:rPr>
+              <a:t>Production</a:t>
+            </a:r>
+          </a:p>
+        </p:txBody>
+      </p:sp>
+      <p:cxnSp>
+        <p:nvCxnSpPr>
+          <p:cNvPr id="21" name="Connector 20"/>
+          <p:cNvCxnSpPr/>
+          <p:nvPr/>
+        </p:nvCxnSpPr>
+        <p:spPr>
+          <a:xfrm>
+            <a:off x="502920" y="3450000"/>
+            <a:ext cx="11155680" cy="0"/>
+          </a:xfrm>
+          <a:prstGeom prst="line">
+            <a:avLst/>
+          </a:prstGeom>
+          <a:ln w="12700">
+            <a:solidFill>
+              <a:srgbClr val="E5DCCD"/>
+            </a:solidFill>
+          </a:ln>
+        </p:spPr>
+        <p:style>
+          <a:lnRef idx="2">
+            <a:schemeClr val="accent1"/>
+          </a:lnRef>
+          <a:fillRef idx="0">
+            <a:schemeClr val="accent1"/>
+          </a:fillRef>
+          <a:effectRef idx="1">
+            <a:schemeClr val="accent1"/>
+          </a:effectRef>
+          <a:fontRef idx="minor">
+            <a:schemeClr val="tx1"/>
+          </a:fontRef>
+        </p:style>
+      </p:cxnSp>
+      <p:cxnSp>
+        <p:nvCxnSpPr>
+          <p:cNvPr id="22" name="Connector 21"/>
+          <p:cNvCxnSpPr/>
+          <p:nvPr/>
+        </p:nvCxnSpPr>
+        <p:spPr>
+          <a:xfrm>
+            <a:off x="3767328" y="3560000"/>
+            <a:ext cx="0" cy="2400000"/>
+          </a:xfrm>
+          <a:prstGeom prst="line">
+            <a:avLst/>
+          </a:prstGeom>
+          <a:ln w="12700">
+            <a:solidFill>
+              <a:srgbClr val="E5DCCD"/>
+            </a:solidFill>
+          </a:ln>
+        </p:spPr>
+        <p:style>
+          <a:lnRef idx="2">
+            <a:schemeClr val="accent1"/>
+          </a:lnRef>
+          <a:fillRef idx="0">
+            <a:schemeClr val="accent1"/>
+          </a:fillRef>
+          <a:effectRef idx="1">
+            <a:schemeClr val="accent1"/>
+          </a:effectRef>
+          <a:fontRef idx="minor">
+            <a:schemeClr val="tx1"/>
+          </a:fontRef>
+        </p:style>
+      </p:cxnSp>
+      <p:cxnSp>
+        <p:nvCxnSpPr>
+          <p:cNvPr id="30" name="Connector 29"/>
+          <p:cNvCxnSpPr/>
+          <p:nvPr/>
+        </p:nvCxnSpPr>
+        <p:spPr>
+          <a:xfrm>
+            <a:off x="7818120" y="3560000"/>
+            <a:ext cx="0" cy="2400000"/>
+          </a:xfrm>
+          <a:prstGeom prst="line">
+            <a:avLst/>
+          </a:prstGeom>
+          <a:ln w="12700">
+            <a:solidFill>
+              <a:srgbClr val="E5DCCD"/>
+            </a:solidFill>
+          </a:ln>
+        </p:spPr>
+        <p:style>
+          <a:lnRef idx="2">
+            <a:schemeClr val="accent1"/>
+          </a:lnRef>
+          <a:fillRef idx="0">
+            <a:schemeClr val="accent1"/>
+          </a:fillRef>
+          <a:effectRef idx="1">
+            <a:schemeClr val="accent1"/>
+          </a:effectRef>
+          <a:fontRef idx="minor">
+            <a:schemeClr val="tx1"/>
+          </a:fontRef>
+        </p:style>
+      </p:cxnSp>
+      <p:sp>
+        <p:nvSpPr>
+          <p:cNvPr id="201" name="Icon Capabilities"/>
+          <p:cNvSpPr/>
+          <p:nvPr/>
+        </p:nvSpPr>
+        <p:spPr>
+          <a:xfrm>
+            <a:off x="502920" y="3500000"/>
+            <a:ext cx="228600" cy="228600"/>
+          </a:xfrm>
+          <a:prstGeom prst="gear6">
+            <a:avLst/>
+          </a:prstGeom>
+          <a:solidFill>
+            <a:srgbClr val="FF4B00"/>
+          </a:solidFill>
+          <a:ln>
+            <a:noFill/>
+          </a:ln>
+        </p:spPr>
+        <p:txBody>
+          <a:bodyPr/>
+          <a:lstStyle/>
+          <a:p>
+            <a:pPr marL="0" marR="0" lvl="0" indent="0" algn="l" defTabSz="914400" rtl="0" eaLnBrk="1" fontAlgn="auto" latinLnBrk="0" hangingPunct="1">
+              <a:lnSpc>
+                <a:spcPct val="100000"/>
+              </a:lnSpc>
+              <a:spcBef>
+                <a:spcPts val="0"/>
+              </a:spcBef>
+              <a:spcAft>
+                <a:spcPts val="0"/>
+              </a:spcAft>
+              <a:buClrTx/>
+              <a:buSzTx/>
+              <a:buFontTx/>
+              <a:buNone/>
+              <a:tabLst/>
+              <a:defRPr/>
+            </a:pPr>
+            <a:endParaRPr kumimoji="0" lang="en-US" sz="1800" b="0" i="0" u="none" strike="noStrike" kern="1200" cap="none" spc="0" normalizeH="0" baseline="0" noProof="0">
+              <a:ln>
+                <a:noFill/>
+              </a:ln>
+              <a:solidFill>
+                <a:prstClr val="black"/>
+              </a:solidFill>
+              <a:effectLst/>
+              <a:uLnTx/>
+              <a:uFillTx/>
+              <a:latin typeface="Arial"/>
+              <a:ea typeface="+mn-ea"/>
+              <a:cs typeface="+mn-cs"/>
+            </a:endParaRPr>
+          </a:p>
+        </p:txBody>
+      </p:sp>
+      <p:sp>
+        <p:nvSpPr>
+          <p:cNvPr id="31" name="TextBox 30"/>
+          <p:cNvSpPr txBox="1">
+            <a:spLocks/>
+          </p:cNvSpPr>
+          <p:nvPr/>
+        </p:nvSpPr>
+        <p:spPr>
+          <a:xfrm>
+            <a:off x="502920" y="3790000"/>
+            <a:ext cx="457200" cy="201168"/>
+          </a:xfrm>
+          <a:prstGeom prst="rect">
+            <a:avLst/>
+          </a:prstGeom>
+          <a:noFill/>
+        </p:spPr>
+        <p:txBody>
+          <a:bodyPr wrap="square" lIns="0" tIns="0" rIns="0" bIns="0" anchor="t">
+            <a:normAutofit/>
+          </a:bodyPr>
+          <a:lstStyle/>
+          <a:p>
+            <a:pPr marL="0" marR="0" lvl="0" indent="0" algn="l" defTabSz="914400" rtl="0" eaLnBrk="1" fontAlgn="auto" latinLnBrk="0" hangingPunct="1">
+              <a:lnSpc>
+                <a:spcPct val="100000"/>
+              </a:lnSpc>
+              <a:spcBef>
+                <a:spcPts val="0"/>
+              </a:spcBef>
+              <a:spcAft>
+                <a:spcPts val="0"/>
+              </a:spcAft>
+              <a:buClrTx/>
+              <a:buSzTx/>
+              <a:buFontTx/>
+              <a:buNone/>
+              <a:tabLst/>
+              <a:defRPr/>
+            </a:pPr>
+            <a:r>
+              <a:rPr kumimoji="0" lang="en-US" sz="1200" b="1" i="0" u="none" strike="noStrike" kern="1200" cap="none" spc="0" normalizeH="0" baseline="0" noProof="0">
+                <a:ln>
+                  <a:noFill/>
+                </a:ln>
+                <a:solidFill>
+                  <a:srgbClr val="FF4B00"/>
+                </a:solidFill>
+                <a:effectLst/>
+                <a:uLnTx/>
+                <a:uFillTx/>
+                <a:latin typeface="Arial"/>
+                <a:ea typeface="+mn-ea"/>
+                <a:cs typeface="+mn-cs"/>
+              </a:rPr>
+              <a:t>02</a:t>
+            </a:r>
+          </a:p>
+        </p:txBody>
+      </p:sp>
+      <p:sp>
+        <p:nvSpPr>
+          <p:cNvPr id="32" name="TextBox 31"/>
+          <p:cNvSpPr txBox="1">
+            <a:spLocks/>
+          </p:cNvSpPr>
+          <p:nvPr/>
+        </p:nvSpPr>
+        <p:spPr>
+          <a:xfrm>
+            <a:off x="502920" y="4010000"/>
+            <a:ext cx="2900000" cy="274320"/>
+          </a:xfrm>
+          <a:prstGeom prst="rect">
+            <a:avLst/>
+          </a:prstGeom>
+          <a:noFill/>
+        </p:spPr>
+        <p:txBody>
+          <a:bodyPr wrap="square" lIns="0" tIns="0" rIns="0" bIns="0" anchor="t">
+            <a:spAutoFit/>
+          </a:bodyPr>
+          <a:lstStyle/>
+          <a:p>
+            <a:pPr marL="0" marR="0" lvl="0" indent="0" algn="l" defTabSz="914400" rtl="0" eaLnBrk="1" fontAlgn="auto" latinLnBrk="0" hangingPunct="1">
+              <a:lnSpc>
+                <a:spcPct val="100000"/>
+              </a:lnSpc>
+              <a:spcBef>
+                <a:spcPts val="0"/>
+              </a:spcBef>
+              <a:spcAft>
+                <a:spcPts val="0"/>
+              </a:spcAft>
+              <a:buClrTx/>
+              <a:buSzTx/>
+              <a:buFontTx/>
+              <a:buNone/>
+              <a:tabLst/>
+              <a:defRPr/>
+            </a:pPr>
+            <a:r>
+              <a:rPr kumimoji="0" lang="en-US" sz="1400" b="1" i="0" u="none" strike="noStrike" kern="1200" cap="none" spc="0" normalizeH="0" baseline="0" noProof="0">
+                <a:ln>
+                  <a:noFill/>
+                </a:ln>
+                <a:solidFill>
+                  <a:srgbClr val="FF4B00"/>
+                </a:solidFill>
+                <a:effectLst/>
+                <a:uLnTx/>
+                <a:uFillTx/>
+                <a:latin typeface="Arial"/>
+                <a:ea typeface="+mn-ea"/>
+                <a:cs typeface="+mn-cs"/>
+              </a:rPr>
+              <a:t>PLATFORM CAPABILITIES</a:t>
+            </a:r>
+          </a:p>
+        </p:txBody>
+      </p:sp>
+      <p:sp>
+        <p:nvSpPr>
+          <p:cNvPr id="114" name="Cap Marker 1"/>
+          <p:cNvSpPr/>
+          <p:nvPr/>
+        </p:nvSpPr>
+        <p:spPr>
+          <a:xfrm>
+            <a:off x="502920" y="4350000"/>
+            <a:ext cx="91440" cy="91440"/>
+          </a:xfrm>
+          <a:prstGeom prst="rect">
+            <a:avLst/>
+          </a:prstGeom>
+          <a:solidFill>
+            <a:srgbClr val="FF4B00"/>
+          </a:solidFill>
+          <a:ln w="12700">
+            <a:solidFill>
+              <a:srgbClr val="FF4B00"/>
+            </a:solidFill>
+          </a:ln>
+        </p:spPr>
+        <p:style>
+          <a:lnRef idx="1">
+            <a:schemeClr val="accent1"/>
+          </a:lnRef>
+          <a:fillRef idx="3">
+            <a:schemeClr val="accent1"/>
+          </a:fillRef>
+          <a:effectRef idx="2">
+            <a:schemeClr val="accent1"/>
+          </a:effectRef>
+          <a:fontRef idx="minor">
+            <a:schemeClr val="lt1"/>
+          </a:fontRef>
+        </p:style>
+        <p:txBody>
+          <a:bodyPr rtlCol="0" anchor="ctr"/>
+          <a:lstStyle/>
+          <a:p>
+            <a:pPr marL="0" marR="0" lvl="0" indent="0" algn="ctr" defTabSz="914400" rtl="0" eaLnBrk="1" fontAlgn="auto" latinLnBrk="0" hangingPunct="1">
+              <a:lnSpc>
+                <a:spcPct val="100000"/>
+              </a:lnSpc>
+              <a:spcBef>
+                <a:spcPts val="0"/>
+              </a:spcBef>
+              <a:spcAft>
+                <a:spcPts val="0"/>
+              </a:spcAft>
+              <a:buClrTx/>
+              <a:buSzTx/>
+              <a:buFontTx/>
+              <a:buNone/>
+              <a:tabLst/>
+              <a:defRPr/>
+            </a:pPr>
+            <a:endParaRPr kumimoji="0" lang="en-US" sz="1800" b="0" i="0" u="none" strike="noStrike" kern="1200" cap="none" spc="0" normalizeH="0" baseline="0" noProof="0">
+              <a:ln>
+                <a:noFill/>
+              </a:ln>
+              <a:solidFill>
+                <a:prstClr val="white"/>
+              </a:solidFill>
+              <a:effectLst/>
+              <a:uLnTx/>
+              <a:uFillTx/>
+              <a:latin typeface="Arial"/>
+              <a:ea typeface="+mn-ea"/>
+              <a:cs typeface="+mn-cs"/>
+            </a:endParaRPr>
+          </a:p>
+        </p:txBody>
+      </p:sp>
+      <p:sp>
+        <p:nvSpPr>
+          <p:cNvPr id="115" name="Cap Label 1"/>
+          <p:cNvSpPr txBox="1">
+            <a:spLocks/>
+          </p:cNvSpPr>
+          <p:nvPr/>
+        </p:nvSpPr>
+        <p:spPr>
+          <a:xfrm>
+            <a:off x="658368" y="4300000"/>
+            <a:ext cx="2900000" cy="215444"/>
+          </a:xfrm>
+          <a:prstGeom prst="rect">
+            <a:avLst/>
+          </a:prstGeom>
+          <a:noFill/>
+        </p:spPr>
+        <p:txBody>
+          <a:bodyPr wrap="square" lIns="0" tIns="0" rIns="0" bIns="0" anchor="t">
+            <a:spAutoFit/>
+          </a:bodyPr>
+          <a:lstStyle/>
+          <a:p>
+            <a:pPr marL="0" marR="0" lvl="0" indent="0" algn="l" defTabSz="914400" rtl="0" eaLnBrk="1" fontAlgn="auto" latinLnBrk="0" hangingPunct="1">
+              <a:lnSpc>
+                <a:spcPct val="100000"/>
+              </a:lnSpc>
+              <a:spcBef>
+                <a:spcPts val="0"/>
+              </a:spcBef>
+              <a:spcAft>
+                <a:spcPts val="0"/>
+              </a:spcAft>
+              <a:buClrTx/>
+              <a:buSzTx/>
+              <a:buFontTx/>
+              <a:buNone/>
+              <a:tabLst/>
+              <a:defRPr/>
+            </a:pPr>
+            <a:r>
+              <a:rPr kumimoji="0" lang="en-US" sz="1200" b="0" i="0" u="none" strike="noStrike" kern="1200" cap="none" spc="0" normalizeH="0" baseline="0" noProof="0">
+                <a:ln>
+                  <a:noFill/>
+                </a:ln>
+                <a:solidFill>
+                  <a:srgbClr val="121212"/>
+                </a:solidFill>
+                <a:effectLst/>
+                <a:uLnTx/>
+                <a:uFillTx/>
+                <a:latin typeface="Arial"/>
+                <a:ea typeface="+mn-ea"/>
+                <a:cs typeface="+mn-cs"/>
+              </a:rPr>
+              <a:t>Enterprise connectivity</a:t>
+            </a:r>
+          </a:p>
+        </p:txBody>
+      </p:sp>
+      <p:sp>
+        <p:nvSpPr>
+          <p:cNvPr id="116" name="Cap Marker 2"/>
+          <p:cNvSpPr/>
+          <p:nvPr/>
+        </p:nvSpPr>
+        <p:spPr>
+          <a:xfrm>
+            <a:off x="502920" y="4650000"/>
+            <a:ext cx="91440" cy="91440"/>
+          </a:xfrm>
+          <a:prstGeom prst="rect">
+            <a:avLst/>
+          </a:prstGeom>
+          <a:solidFill>
+            <a:srgbClr val="FF4B00"/>
+          </a:solidFill>
+          <a:ln w="12700">
+            <a:solidFill>
+              <a:srgbClr val="FF4B00"/>
+            </a:solidFill>
+          </a:ln>
+        </p:spPr>
+        <p:style>
+          <a:lnRef idx="1">
+            <a:schemeClr val="accent1"/>
+          </a:lnRef>
+          <a:fillRef idx="3">
+            <a:schemeClr val="accent1"/>
+          </a:fillRef>
+          <a:effectRef idx="2">
+            <a:schemeClr val="accent1"/>
+          </a:effectRef>
+          <a:fontRef idx="minor">
+            <a:schemeClr val="lt1"/>
+          </a:fontRef>
+        </p:style>
+        <p:txBody>
+          <a:bodyPr rtlCol="0" anchor="ctr"/>
+          <a:lstStyle/>
+          <a:p>
+            <a:pPr marL="0" marR="0" lvl="0" indent="0" algn="ctr" defTabSz="914400" rtl="0" eaLnBrk="1" fontAlgn="auto" latinLnBrk="0" hangingPunct="1">
+              <a:lnSpc>
+                <a:spcPct val="100000"/>
+              </a:lnSpc>
+              <a:spcBef>
+                <a:spcPts val="0"/>
+              </a:spcBef>
+              <a:spcAft>
+                <a:spcPts val="0"/>
+              </a:spcAft>
+              <a:buClrTx/>
+              <a:buSzTx/>
+              <a:buFontTx/>
+              <a:buNone/>
+              <a:tabLst/>
+              <a:defRPr/>
+            </a:pPr>
+            <a:endParaRPr kumimoji="0" lang="en-US" sz="1800" b="0" i="0" u="none" strike="noStrike" kern="1200" cap="none" spc="0" normalizeH="0" baseline="0" noProof="0">
+              <a:ln>
+                <a:noFill/>
+              </a:ln>
+              <a:solidFill>
+                <a:prstClr val="white"/>
+              </a:solidFill>
+              <a:effectLst/>
+              <a:uLnTx/>
+              <a:uFillTx/>
+              <a:latin typeface="Arial"/>
+              <a:ea typeface="+mn-ea"/>
+              <a:cs typeface="+mn-cs"/>
+            </a:endParaRPr>
+          </a:p>
+        </p:txBody>
+      </p:sp>
+      <p:sp>
+        <p:nvSpPr>
+          <p:cNvPr id="117" name="Cap Label 2"/>
+          <p:cNvSpPr txBox="1">
+            <a:spLocks/>
+          </p:cNvSpPr>
+          <p:nvPr/>
+        </p:nvSpPr>
+        <p:spPr>
+          <a:xfrm>
+            <a:off x="658368" y="4600000"/>
+            <a:ext cx="2900000" cy="215444"/>
+          </a:xfrm>
+          <a:prstGeom prst="rect">
+            <a:avLst/>
+          </a:prstGeom>
+          <a:noFill/>
+        </p:spPr>
+        <p:txBody>
+          <a:bodyPr wrap="square" lIns="0" tIns="0" rIns="0" bIns="0" anchor="t">
+            <a:spAutoFit/>
+          </a:bodyPr>
+          <a:lstStyle/>
+          <a:p>
+            <a:pPr marL="0" marR="0" lvl="0" indent="0" algn="l" defTabSz="914400" rtl="0" eaLnBrk="1" fontAlgn="auto" latinLnBrk="0" hangingPunct="1">
+              <a:lnSpc>
+                <a:spcPct val="100000"/>
+              </a:lnSpc>
+              <a:spcBef>
+                <a:spcPts val="0"/>
+              </a:spcBef>
+              <a:spcAft>
+                <a:spcPts val="0"/>
+              </a:spcAft>
+              <a:buClrTx/>
+              <a:buSzTx/>
+              <a:buFontTx/>
+              <a:buNone/>
+              <a:tabLst/>
+              <a:defRPr/>
+            </a:pPr>
+            <a:r>
+              <a:rPr kumimoji="0" lang="en-US" sz="1200" b="0" i="0" u="none" strike="noStrike" kern="1200" cap="none" spc="0" normalizeH="0" baseline="0" noProof="0">
+                <a:ln>
+                  <a:noFill/>
+                </a:ln>
+                <a:solidFill>
+                  <a:srgbClr val="121212"/>
+                </a:solidFill>
+                <a:effectLst/>
+                <a:uLnTx/>
+                <a:uFillTx/>
+                <a:latin typeface="Arial"/>
+                <a:ea typeface="+mn-ea"/>
+                <a:cs typeface="+mn-cs"/>
+              </a:rPr>
+              <a:t>Identity &amp; access controls</a:t>
+            </a:r>
+          </a:p>
+        </p:txBody>
+      </p:sp>
+      <p:sp>
+        <p:nvSpPr>
+          <p:cNvPr id="118" name="Cap Marker 3"/>
+          <p:cNvSpPr/>
+          <p:nvPr/>
+        </p:nvSpPr>
+        <p:spPr>
+          <a:xfrm>
+            <a:off x="502920" y="4950000"/>
+            <a:ext cx="91440" cy="91440"/>
+          </a:xfrm>
+          <a:prstGeom prst="rect">
+            <a:avLst/>
+          </a:prstGeom>
+          <a:solidFill>
+            <a:srgbClr val="FF4B00"/>
+          </a:solidFill>
+          <a:ln w="12700">
+            <a:solidFill>
+              <a:srgbClr val="FF4B00"/>
+            </a:solidFill>
+          </a:ln>
+        </p:spPr>
+        <p:style>
+          <a:lnRef idx="1">
+            <a:schemeClr val="accent1"/>
+          </a:lnRef>
+          <a:fillRef idx="3">
+            <a:schemeClr val="accent1"/>
+          </a:fillRef>
+          <a:effectRef idx="2">
+            <a:schemeClr val="accent1"/>
+          </a:effectRef>
+          <a:fontRef idx="minor">
+            <a:schemeClr val="lt1"/>
+          </a:fontRef>
+        </p:style>
+        <p:txBody>
+          <a:bodyPr rtlCol="0" anchor="ctr"/>
+          <a:lstStyle/>
+          <a:p>
+            <a:pPr marL="0" marR="0" lvl="0" indent="0" algn="ctr" defTabSz="914400" rtl="0" eaLnBrk="1" fontAlgn="auto" latinLnBrk="0" hangingPunct="1">
+              <a:lnSpc>
+                <a:spcPct val="100000"/>
+              </a:lnSpc>
+              <a:spcBef>
+                <a:spcPts val="0"/>
+              </a:spcBef>
+              <a:spcAft>
+                <a:spcPts val="0"/>
+              </a:spcAft>
+              <a:buClrTx/>
+              <a:buSzTx/>
+              <a:buFontTx/>
+              <a:buNone/>
+              <a:tabLst/>
+              <a:defRPr/>
+            </a:pPr>
+            <a:endParaRPr kumimoji="0" lang="en-US" sz="1800" b="0" i="0" u="none" strike="noStrike" kern="1200" cap="none" spc="0" normalizeH="0" baseline="0" noProof="0">
+              <a:ln>
+                <a:noFill/>
+              </a:ln>
+              <a:solidFill>
+                <a:prstClr val="white"/>
+              </a:solidFill>
+              <a:effectLst/>
+              <a:uLnTx/>
+              <a:uFillTx/>
+              <a:latin typeface="Arial"/>
+              <a:ea typeface="+mn-ea"/>
+              <a:cs typeface="+mn-cs"/>
+            </a:endParaRPr>
+          </a:p>
+        </p:txBody>
+      </p:sp>
+      <p:sp>
+        <p:nvSpPr>
+          <p:cNvPr id="119" name="Cap Label 3"/>
+          <p:cNvSpPr txBox="1">
+            <a:spLocks/>
+          </p:cNvSpPr>
+          <p:nvPr/>
+        </p:nvSpPr>
+        <p:spPr>
+          <a:xfrm>
+            <a:off x="658368" y="4900000"/>
+            <a:ext cx="2900000" cy="215444"/>
+          </a:xfrm>
+          <a:prstGeom prst="rect">
+            <a:avLst/>
+          </a:prstGeom>
+          <a:noFill/>
+        </p:spPr>
+        <p:txBody>
+          <a:bodyPr wrap="square" lIns="0" tIns="0" rIns="0" bIns="0" anchor="t">
+            <a:spAutoFit/>
+          </a:bodyPr>
+          <a:lstStyle/>
+          <a:p>
+            <a:pPr marL="0" marR="0" lvl="0" indent="0" algn="l" defTabSz="914400" rtl="0" eaLnBrk="1" fontAlgn="auto" latinLnBrk="0" hangingPunct="1">
+              <a:lnSpc>
+                <a:spcPct val="100000"/>
+              </a:lnSpc>
+              <a:spcBef>
+                <a:spcPts val="0"/>
+              </a:spcBef>
+              <a:spcAft>
+                <a:spcPts val="0"/>
+              </a:spcAft>
+              <a:buClrTx/>
+              <a:buSzTx/>
+              <a:buFontTx/>
+              <a:buNone/>
+              <a:tabLst/>
+              <a:defRPr/>
+            </a:pPr>
+            <a:r>
+              <a:rPr kumimoji="0" lang="en-US" sz="1200" b="0" i="0" u="none" strike="noStrike" kern="1200" cap="none" spc="0" normalizeH="0" baseline="0" noProof="0">
+                <a:ln>
+                  <a:noFill/>
+                </a:ln>
+                <a:solidFill>
+                  <a:srgbClr val="121212"/>
+                </a:solidFill>
+                <a:effectLst/>
+                <a:uLnTx/>
+                <a:uFillTx/>
+                <a:latin typeface="Arial"/>
+                <a:ea typeface="+mn-ea"/>
+                <a:cs typeface="+mn-cs"/>
+              </a:rPr>
+              <a:t>Execution traces</a:t>
+            </a:r>
+          </a:p>
+        </p:txBody>
+      </p:sp>
+      <p:sp>
+        <p:nvSpPr>
+          <p:cNvPr id="120" name="Cap Marker 4"/>
+          <p:cNvSpPr/>
+          <p:nvPr/>
+        </p:nvSpPr>
+        <p:spPr>
+          <a:xfrm>
+            <a:off x="502920" y="5250000"/>
+            <a:ext cx="91440" cy="91440"/>
+          </a:xfrm>
+          <a:prstGeom prst="rect">
+            <a:avLst/>
+          </a:prstGeom>
+          <a:solidFill>
+            <a:srgbClr val="FF4B00"/>
+          </a:solidFill>
+          <a:ln w="12700">
+            <a:solidFill>
+              <a:srgbClr val="FF4B00"/>
+            </a:solidFill>
+          </a:ln>
+        </p:spPr>
+        <p:style>
+          <a:lnRef idx="1">
+            <a:schemeClr val="accent1"/>
+          </a:lnRef>
+          <a:fillRef idx="3">
+            <a:schemeClr val="accent1"/>
+          </a:fillRef>
+          <a:effectRef idx="2">
+            <a:schemeClr val="accent1"/>
+          </a:effectRef>
+          <a:fontRef idx="minor">
+            <a:schemeClr val="lt1"/>
+          </a:fontRef>
+        </p:style>
+        <p:txBody>
+          <a:bodyPr rtlCol="0" anchor="ctr"/>
+          <a:lstStyle/>
+          <a:p>
+            <a:pPr marL="0" marR="0" lvl="0" indent="0" algn="ctr" defTabSz="914400" rtl="0" eaLnBrk="1" fontAlgn="auto" latinLnBrk="0" hangingPunct="1">
+              <a:lnSpc>
+                <a:spcPct val="100000"/>
+              </a:lnSpc>
+              <a:spcBef>
+                <a:spcPts val="0"/>
+              </a:spcBef>
+              <a:spcAft>
+                <a:spcPts val="0"/>
+              </a:spcAft>
+              <a:buClrTx/>
+              <a:buSzTx/>
+              <a:buFontTx/>
+              <a:buNone/>
+              <a:tabLst/>
+              <a:defRPr/>
+            </a:pPr>
+            <a:endParaRPr kumimoji="0" lang="en-US" sz="1800" b="0" i="0" u="none" strike="noStrike" kern="1200" cap="none" spc="0" normalizeH="0" baseline="0" noProof="0">
+              <a:ln>
+                <a:noFill/>
+              </a:ln>
+              <a:solidFill>
+                <a:prstClr val="white"/>
+              </a:solidFill>
+              <a:effectLst/>
+              <a:uLnTx/>
+              <a:uFillTx/>
+              <a:latin typeface="Arial"/>
+              <a:ea typeface="+mn-ea"/>
+              <a:cs typeface="+mn-cs"/>
+            </a:endParaRPr>
+          </a:p>
+        </p:txBody>
+      </p:sp>
+      <p:sp>
+        <p:nvSpPr>
+          <p:cNvPr id="121" name="Cap Label 4"/>
+          <p:cNvSpPr txBox="1">
+            <a:spLocks/>
+          </p:cNvSpPr>
+          <p:nvPr/>
+        </p:nvSpPr>
+        <p:spPr>
+          <a:xfrm>
+            <a:off x="658368" y="5200000"/>
+            <a:ext cx="2900000" cy="215444"/>
+          </a:xfrm>
+          <a:prstGeom prst="rect">
+            <a:avLst/>
+          </a:prstGeom>
+          <a:noFill/>
+        </p:spPr>
+        <p:txBody>
+          <a:bodyPr wrap="square" lIns="0" tIns="0" rIns="0" bIns="0" anchor="t">
+            <a:spAutoFit/>
+          </a:bodyPr>
+          <a:lstStyle/>
+          <a:p>
+            <a:pPr marL="0" marR="0" lvl="0" indent="0" algn="l" defTabSz="914400" rtl="0" eaLnBrk="1" fontAlgn="auto" latinLnBrk="0" hangingPunct="1">
+              <a:lnSpc>
+                <a:spcPct val="100000"/>
+              </a:lnSpc>
+              <a:spcBef>
+                <a:spcPts val="0"/>
+              </a:spcBef>
+              <a:spcAft>
+                <a:spcPts val="0"/>
+              </a:spcAft>
+              <a:buClrTx/>
+              <a:buSzTx/>
+              <a:buFontTx/>
+              <a:buNone/>
+              <a:tabLst/>
+              <a:defRPr/>
+            </a:pPr>
+            <a:r>
+              <a:rPr kumimoji="0" lang="en-US" sz="1200" b="0" i="0" u="none" strike="noStrike" kern="1200" cap="none" spc="0" normalizeH="0" baseline="0" noProof="0">
+                <a:ln>
+                  <a:noFill/>
+                </a:ln>
+                <a:solidFill>
+                  <a:srgbClr val="121212"/>
+                </a:solidFill>
+                <a:effectLst/>
+                <a:uLnTx/>
+                <a:uFillTx/>
+                <a:latin typeface="Arial"/>
+                <a:ea typeface="+mn-ea"/>
+                <a:cs typeface="+mn-cs"/>
+              </a:rPr>
+              <a:t>Policy enforcement</a:t>
+            </a:r>
+          </a:p>
+        </p:txBody>
+      </p:sp>
+      <p:sp>
+        <p:nvSpPr>
+          <p:cNvPr id="122" name="Cap Marker 5"/>
+          <p:cNvSpPr/>
+          <p:nvPr/>
+        </p:nvSpPr>
+        <p:spPr>
+          <a:xfrm>
+            <a:off x="502920" y="5550000"/>
+            <a:ext cx="91440" cy="91440"/>
+          </a:xfrm>
+          <a:prstGeom prst="rect">
+            <a:avLst/>
+          </a:prstGeom>
+          <a:solidFill>
+            <a:srgbClr val="FF4B00"/>
+          </a:solidFill>
+          <a:ln w="12700">
+            <a:solidFill>
+              <a:srgbClr val="FF4B00"/>
+            </a:solidFill>
+          </a:ln>
+        </p:spPr>
+        <p:style>
+          <a:lnRef idx="1">
+            <a:schemeClr val="accent1"/>
+          </a:lnRef>
+          <a:fillRef idx="3">
+            <a:schemeClr val="accent1"/>
+          </a:fillRef>
+          <a:effectRef idx="2">
+            <a:schemeClr val="accent1"/>
+          </a:effectRef>
+          <a:fontRef idx="minor">
+            <a:schemeClr val="lt1"/>
+          </a:fontRef>
+        </p:style>
+        <p:txBody>
+          <a:bodyPr rtlCol="0" anchor="ctr"/>
+          <a:lstStyle/>
+          <a:p>
+            <a:pPr marL="0" marR="0" lvl="0" indent="0" algn="ctr" defTabSz="914400" rtl="0" eaLnBrk="1" fontAlgn="auto" latinLnBrk="0" hangingPunct="1">
+              <a:lnSpc>
+                <a:spcPct val="100000"/>
+              </a:lnSpc>
+              <a:spcBef>
+                <a:spcPts val="0"/>
+              </a:spcBef>
+              <a:spcAft>
+                <a:spcPts val="0"/>
+              </a:spcAft>
+              <a:buClrTx/>
+              <a:buSzTx/>
+              <a:buFontTx/>
+              <a:buNone/>
+              <a:tabLst/>
+              <a:defRPr/>
+            </a:pPr>
+            <a:endParaRPr kumimoji="0" lang="en-US" sz="1800" b="0" i="0" u="none" strike="noStrike" kern="1200" cap="none" spc="0" normalizeH="0" baseline="0" noProof="0">
+              <a:ln>
+                <a:noFill/>
+              </a:ln>
+              <a:solidFill>
+                <a:prstClr val="white"/>
+              </a:solidFill>
+              <a:effectLst/>
+              <a:uLnTx/>
+              <a:uFillTx/>
+              <a:latin typeface="Arial"/>
+              <a:ea typeface="+mn-ea"/>
+              <a:cs typeface="+mn-cs"/>
+            </a:endParaRPr>
+          </a:p>
+        </p:txBody>
+      </p:sp>
+      <p:sp>
+        <p:nvSpPr>
+          <p:cNvPr id="123" name="Cap Label 5"/>
+          <p:cNvSpPr txBox="1">
+            <a:spLocks/>
+          </p:cNvSpPr>
+          <p:nvPr/>
+        </p:nvSpPr>
+        <p:spPr>
+          <a:xfrm>
+            <a:off x="658368" y="5500000"/>
+            <a:ext cx="2900000" cy="215444"/>
+          </a:xfrm>
+          <a:prstGeom prst="rect">
+            <a:avLst/>
+          </a:prstGeom>
+          <a:noFill/>
+        </p:spPr>
+        <p:txBody>
+          <a:bodyPr wrap="square" lIns="0" tIns="0" rIns="0" bIns="0" anchor="t">
+            <a:spAutoFit/>
+          </a:bodyPr>
+          <a:lstStyle/>
+          <a:p>
+            <a:pPr marL="0" marR="0" lvl="0" indent="0" algn="l" defTabSz="914400" rtl="0" eaLnBrk="1" fontAlgn="auto" latinLnBrk="0" hangingPunct="1">
+              <a:lnSpc>
+                <a:spcPct val="100000"/>
+              </a:lnSpc>
+              <a:spcBef>
+                <a:spcPts val="0"/>
+              </a:spcBef>
+              <a:spcAft>
+                <a:spcPts val="0"/>
+              </a:spcAft>
+              <a:buClrTx/>
+              <a:buSzTx/>
+              <a:buFontTx/>
+              <a:buNone/>
+              <a:tabLst/>
+              <a:defRPr/>
+            </a:pPr>
+            <a:r>
+              <a:rPr kumimoji="0" lang="en-US" sz="1200" b="0" i="0" u="none" strike="noStrike" kern="1200" cap="none" spc="0" normalizeH="0" baseline="0" noProof="0">
+                <a:ln>
+                  <a:noFill/>
+                </a:ln>
+                <a:solidFill>
+                  <a:srgbClr val="121212"/>
+                </a:solidFill>
+                <a:effectLst/>
+                <a:uLnTx/>
+                <a:uFillTx/>
+                <a:latin typeface="Arial"/>
+                <a:ea typeface="+mn-ea"/>
+                <a:cs typeface="+mn-cs"/>
+              </a:rPr>
+              <a:t>Managed runtime</a:t>
+            </a:r>
+          </a:p>
+        </p:txBody>
+      </p:sp>
+      <p:sp>
+        <p:nvSpPr>
+          <p:cNvPr id="202" name="Icon Paired"/>
+          <p:cNvSpPr/>
+          <p:nvPr/>
+        </p:nvSpPr>
+        <p:spPr>
+          <a:xfrm>
+            <a:off x="4114800" y="3500000"/>
+            <a:ext cx="228600" cy="228600"/>
+          </a:xfrm>
+          <a:prstGeom prst="mathPlus">
+            <a:avLst/>
+          </a:prstGeom>
+          <a:solidFill>
+            <a:srgbClr val="FF4B00"/>
+          </a:solidFill>
+          <a:ln>
+            <a:noFill/>
+          </a:ln>
+        </p:spPr>
+        <p:txBody>
+          <a:bodyPr/>
+          <a:lstStyle/>
+          <a:p>
+            <a:pPr marL="0" marR="0" lvl="0" indent="0" algn="l" defTabSz="914400" rtl="0" eaLnBrk="1" fontAlgn="auto" latinLnBrk="0" hangingPunct="1">
+              <a:lnSpc>
+                <a:spcPct val="100000"/>
+              </a:lnSpc>
+              <a:spcBef>
+                <a:spcPts val="0"/>
+              </a:spcBef>
+              <a:spcAft>
+                <a:spcPts val="0"/>
+              </a:spcAft>
+              <a:buClrTx/>
+              <a:buSzTx/>
+              <a:buFontTx/>
+              <a:buNone/>
+              <a:tabLst/>
+              <a:defRPr/>
+            </a:pPr>
+            <a:endParaRPr kumimoji="0" lang="en-US" sz="1800" b="0" i="0" u="none" strike="noStrike" kern="1200" cap="none" spc="0" normalizeH="0" baseline="0" noProof="0">
+              <a:ln>
+                <a:noFill/>
+              </a:ln>
+              <a:solidFill>
+                <a:prstClr val="black"/>
+              </a:solidFill>
+              <a:effectLst/>
+              <a:uLnTx/>
+              <a:uFillTx/>
+              <a:latin typeface="Arial"/>
+              <a:ea typeface="+mn-ea"/>
+              <a:cs typeface="+mn-cs"/>
+            </a:endParaRPr>
+          </a:p>
+        </p:txBody>
+      </p:sp>
+      <p:sp>
+        <p:nvSpPr>
+          <p:cNvPr id="33" name="TextBox 32"/>
+          <p:cNvSpPr txBox="1">
+            <a:spLocks/>
+          </p:cNvSpPr>
+          <p:nvPr/>
+        </p:nvSpPr>
+        <p:spPr>
+          <a:xfrm>
+            <a:off x="4114800" y="3790000"/>
+            <a:ext cx="457200" cy="201168"/>
+          </a:xfrm>
+          <a:prstGeom prst="rect">
+            <a:avLst/>
+          </a:prstGeom>
+          <a:noFill/>
+        </p:spPr>
+        <p:txBody>
+          <a:bodyPr wrap="square" lIns="0" tIns="0" rIns="0" bIns="0" anchor="t">
+            <a:normAutofit/>
+          </a:bodyPr>
+          <a:lstStyle/>
+          <a:p>
+            <a:pPr marL="0" marR="0" lvl="0" indent="0" algn="l" defTabSz="914400" rtl="0" eaLnBrk="1" fontAlgn="auto" latinLnBrk="0" hangingPunct="1">
+              <a:lnSpc>
+                <a:spcPct val="100000"/>
+              </a:lnSpc>
+              <a:spcBef>
+                <a:spcPts val="0"/>
+              </a:spcBef>
+              <a:spcAft>
+                <a:spcPts val="0"/>
+              </a:spcAft>
+              <a:buClrTx/>
+              <a:buSzTx/>
+              <a:buFontTx/>
+              <a:buNone/>
+              <a:tabLst/>
+              <a:defRPr/>
+            </a:pPr>
+            <a:r>
+              <a:rPr kumimoji="0" lang="en-US" sz="1200" b="1" i="0" u="none" strike="noStrike" kern="1200" cap="none" spc="0" normalizeH="0" baseline="0" noProof="0">
+                <a:ln>
+                  <a:noFill/>
+                </a:ln>
+                <a:solidFill>
+                  <a:srgbClr val="FF4B00"/>
+                </a:solidFill>
+                <a:effectLst/>
+                <a:uLnTx/>
+                <a:uFillTx/>
+                <a:latin typeface="Arial"/>
+                <a:ea typeface="+mn-ea"/>
+                <a:cs typeface="+mn-cs"/>
+              </a:rPr>
+              <a:t>03</a:t>
+            </a:r>
+          </a:p>
+        </p:txBody>
+      </p:sp>
+      <p:sp>
+        <p:nvSpPr>
+          <p:cNvPr id="34" name="TextBox 33"/>
+          <p:cNvSpPr txBox="1">
+            <a:spLocks/>
+          </p:cNvSpPr>
+          <p:nvPr/>
+        </p:nvSpPr>
+        <p:spPr>
+          <a:xfrm>
+            <a:off x="4114800" y="4010000"/>
+            <a:ext cx="3100000" cy="274320"/>
+          </a:xfrm>
+          <a:prstGeom prst="rect">
+            <a:avLst/>
+          </a:prstGeom>
+          <a:noFill/>
+        </p:spPr>
+        <p:txBody>
+          <a:bodyPr wrap="square" lIns="0" tIns="0" rIns="0" bIns="0" anchor="t">
+            <a:spAutoFit/>
+          </a:bodyPr>
+          <a:lstStyle/>
+          <a:p>
+            <a:pPr marL="0" marR="0" lvl="0" indent="0" algn="l" defTabSz="914400" rtl="0" eaLnBrk="1" fontAlgn="auto" latinLnBrk="0" hangingPunct="1">
+              <a:lnSpc>
+                <a:spcPct val="100000"/>
+              </a:lnSpc>
+              <a:spcBef>
+                <a:spcPts val="0"/>
+              </a:spcBef>
+              <a:spcAft>
+                <a:spcPts val="0"/>
+              </a:spcAft>
+              <a:buClrTx/>
+              <a:buSzTx/>
+              <a:buFontTx/>
+              <a:buNone/>
+              <a:tabLst/>
+              <a:defRPr/>
+            </a:pPr>
+            <a:r>
+              <a:rPr kumimoji="0" lang="en-US" sz="1400" b="1" i="0" u="none" strike="noStrike" kern="1200" cap="none" spc="0" normalizeH="0" baseline="0" noProof="0">
+                <a:ln>
+                  <a:noFill/>
+                </a:ln>
+                <a:solidFill>
+                  <a:srgbClr val="FF4B00"/>
+                </a:solidFill>
+                <a:effectLst/>
+                <a:uLnTx/>
+                <a:uFillTx/>
+                <a:latin typeface="Arial"/>
+                <a:ea typeface="+mn-ea"/>
+                <a:cs typeface="+mn-cs"/>
+              </a:rPr>
+              <a:t>PAIRED WITH BEDROCK</a:t>
+            </a:r>
+          </a:p>
+        </p:txBody>
+      </p:sp>
+      <p:sp>
+        <p:nvSpPr>
+          <p:cNvPr id="124" name="Pair Marker 1"/>
+          <p:cNvSpPr/>
+          <p:nvPr/>
+        </p:nvSpPr>
+        <p:spPr>
+          <a:xfrm>
+            <a:off x="4114800" y="4350000"/>
+            <a:ext cx="91440" cy="91440"/>
+          </a:xfrm>
+          <a:prstGeom prst="rect">
+            <a:avLst/>
+          </a:prstGeom>
+          <a:solidFill>
+            <a:srgbClr val="FF4B00"/>
+          </a:solidFill>
+          <a:ln w="12700">
+            <a:solidFill>
+              <a:srgbClr val="FF4B00"/>
+            </a:solidFill>
+          </a:ln>
+        </p:spPr>
+        <p:style>
+          <a:lnRef idx="1">
+            <a:schemeClr val="accent1"/>
+          </a:lnRef>
+          <a:fillRef idx="3">
+            <a:schemeClr val="accent1"/>
+          </a:fillRef>
+          <a:effectRef idx="2">
+            <a:schemeClr val="accent1"/>
+          </a:effectRef>
+          <a:fontRef idx="minor">
+            <a:schemeClr val="lt1"/>
+          </a:fontRef>
+        </p:style>
+        <p:txBody>
+          <a:bodyPr rtlCol="0" anchor="ctr"/>
+          <a:lstStyle/>
+          <a:p>
+            <a:pPr marL="0" marR="0" lvl="0" indent="0" algn="ctr" defTabSz="914400" rtl="0" eaLnBrk="1" fontAlgn="auto" latinLnBrk="0" hangingPunct="1">
+              <a:lnSpc>
+                <a:spcPct val="100000"/>
+              </a:lnSpc>
+              <a:spcBef>
+                <a:spcPts val="0"/>
+              </a:spcBef>
+              <a:spcAft>
+                <a:spcPts val="0"/>
+              </a:spcAft>
+              <a:buClrTx/>
+              <a:buSzTx/>
+              <a:buFontTx/>
+              <a:buNone/>
+              <a:tabLst/>
+              <a:defRPr/>
+            </a:pPr>
+            <a:endParaRPr kumimoji="0" lang="en-US" sz="1800" b="0" i="0" u="none" strike="noStrike" kern="1200" cap="none" spc="0" normalizeH="0" baseline="0" noProof="0">
+              <a:ln>
+                <a:noFill/>
+              </a:ln>
+              <a:solidFill>
+                <a:prstClr val="white"/>
+              </a:solidFill>
+              <a:effectLst/>
+              <a:uLnTx/>
+              <a:uFillTx/>
+              <a:latin typeface="Arial"/>
+              <a:ea typeface="+mn-ea"/>
+              <a:cs typeface="+mn-cs"/>
+            </a:endParaRPr>
+          </a:p>
+        </p:txBody>
+      </p:sp>
+      <p:sp>
+        <p:nvSpPr>
+          <p:cNvPr id="125" name="Pair Label 1"/>
+          <p:cNvSpPr txBox="1">
+            <a:spLocks/>
+          </p:cNvSpPr>
+          <p:nvPr/>
+        </p:nvSpPr>
+        <p:spPr>
+          <a:xfrm>
+            <a:off x="4270248" y="4300000"/>
+            <a:ext cx="3100000" cy="215444"/>
+          </a:xfrm>
+          <a:prstGeom prst="rect">
+            <a:avLst/>
+          </a:prstGeom>
+          <a:noFill/>
+        </p:spPr>
+        <p:txBody>
+          <a:bodyPr wrap="square" lIns="0" tIns="0" rIns="0" bIns="0" anchor="t">
+            <a:spAutoFit/>
+          </a:bodyPr>
+          <a:lstStyle/>
+          <a:p>
+            <a:pPr marL="0" marR="0" lvl="0" indent="0" algn="l" defTabSz="914400" rtl="0" eaLnBrk="1" fontAlgn="auto" latinLnBrk="0" hangingPunct="1">
+              <a:lnSpc>
+                <a:spcPct val="100000"/>
+              </a:lnSpc>
+              <a:spcBef>
+                <a:spcPts val="0"/>
+              </a:spcBef>
+              <a:spcAft>
+                <a:spcPts val="0"/>
+              </a:spcAft>
+              <a:buClrTx/>
+              <a:buSzTx/>
+              <a:buFontTx/>
+              <a:buNone/>
+              <a:tabLst/>
+              <a:defRPr/>
+            </a:pPr>
+            <a:r>
+              <a:rPr kumimoji="0" lang="en-US" sz="1200" b="0" i="0" u="none" strike="noStrike" kern="1200" cap="none" spc="0" normalizeH="0" baseline="0" noProof="0">
+                <a:ln>
+                  <a:noFill/>
+                </a:ln>
+                <a:solidFill>
+                  <a:srgbClr val="121212"/>
+                </a:solidFill>
+                <a:effectLst/>
+                <a:uLnTx/>
+                <a:uFillTx/>
+                <a:latin typeface="Arial"/>
+                <a:ea typeface="+mn-ea"/>
+                <a:cs typeface="+mn-cs"/>
+              </a:rPr>
+              <a:t>Retrieval</a:t>
+            </a:r>
+          </a:p>
+        </p:txBody>
+      </p:sp>
+      <p:sp>
+        <p:nvSpPr>
+          <p:cNvPr id="126" name="Pair Marker 2"/>
+          <p:cNvSpPr/>
+          <p:nvPr/>
+        </p:nvSpPr>
+        <p:spPr>
+          <a:xfrm>
+            <a:off x="4114800" y="4650000"/>
+            <a:ext cx="91440" cy="91440"/>
+          </a:xfrm>
+          <a:prstGeom prst="rect">
+            <a:avLst/>
+          </a:prstGeom>
+          <a:solidFill>
+            <a:srgbClr val="FF4B00"/>
+          </a:solidFill>
+          <a:ln w="12700">
+            <a:solidFill>
+              <a:srgbClr val="FF4B00"/>
+            </a:solidFill>
+          </a:ln>
+        </p:spPr>
+        <p:style>
+          <a:lnRef idx="1">
+            <a:schemeClr val="accent1"/>
+          </a:lnRef>
+          <a:fillRef idx="3">
+            <a:schemeClr val="accent1"/>
+          </a:fillRef>
+          <a:effectRef idx="2">
+            <a:schemeClr val="accent1"/>
+          </a:effectRef>
+          <a:fontRef idx="minor">
+            <a:schemeClr val="lt1"/>
+          </a:fontRef>
+        </p:style>
+        <p:txBody>
+          <a:bodyPr rtlCol="0" anchor="ctr"/>
+          <a:lstStyle/>
+          <a:p>
+            <a:pPr marL="0" marR="0" lvl="0" indent="0" algn="ctr" defTabSz="914400" rtl="0" eaLnBrk="1" fontAlgn="auto" latinLnBrk="0" hangingPunct="1">
+              <a:lnSpc>
+                <a:spcPct val="100000"/>
+              </a:lnSpc>
+              <a:spcBef>
+                <a:spcPts val="0"/>
+              </a:spcBef>
+              <a:spcAft>
+                <a:spcPts val="0"/>
+              </a:spcAft>
+              <a:buClrTx/>
+              <a:buSzTx/>
+              <a:buFontTx/>
+              <a:buNone/>
+              <a:tabLst/>
+              <a:defRPr/>
+            </a:pPr>
+            <a:endParaRPr kumimoji="0" lang="en-US" sz="1800" b="0" i="0" u="none" strike="noStrike" kern="1200" cap="none" spc="0" normalizeH="0" baseline="0" noProof="0">
+              <a:ln>
+                <a:noFill/>
+              </a:ln>
+              <a:solidFill>
+                <a:prstClr val="white"/>
+              </a:solidFill>
+              <a:effectLst/>
+              <a:uLnTx/>
+              <a:uFillTx/>
+              <a:latin typeface="Arial"/>
+              <a:ea typeface="+mn-ea"/>
+              <a:cs typeface="+mn-cs"/>
+            </a:endParaRPr>
+          </a:p>
+        </p:txBody>
+      </p:sp>
+      <p:sp>
+        <p:nvSpPr>
+          <p:cNvPr id="127" name="Pair Label 2"/>
+          <p:cNvSpPr txBox="1">
+            <a:spLocks/>
+          </p:cNvSpPr>
+          <p:nvPr/>
+        </p:nvSpPr>
+        <p:spPr>
+          <a:xfrm>
+            <a:off x="4270248" y="4600000"/>
+            <a:ext cx="3100000" cy="215444"/>
+          </a:xfrm>
+          <a:prstGeom prst="rect">
+            <a:avLst/>
+          </a:prstGeom>
+          <a:noFill/>
+        </p:spPr>
+        <p:txBody>
+          <a:bodyPr wrap="square" lIns="0" tIns="0" rIns="0" bIns="0" anchor="t">
+            <a:spAutoFit/>
+          </a:bodyPr>
+          <a:lstStyle/>
+          <a:p>
+            <a:pPr marL="0" marR="0" lvl="0" indent="0" algn="l" defTabSz="914400" rtl="0" eaLnBrk="1" fontAlgn="auto" latinLnBrk="0" hangingPunct="1">
+              <a:lnSpc>
+                <a:spcPct val="100000"/>
+              </a:lnSpc>
+              <a:spcBef>
+                <a:spcPts val="0"/>
+              </a:spcBef>
+              <a:spcAft>
+                <a:spcPts val="0"/>
+              </a:spcAft>
+              <a:buClrTx/>
+              <a:buSzTx/>
+              <a:buFontTx/>
+              <a:buNone/>
+              <a:tabLst/>
+              <a:defRPr/>
+            </a:pPr>
+            <a:r>
+              <a:rPr kumimoji="0" lang="en-US" sz="1200" b="0" i="0" u="none" strike="noStrike" kern="1200" cap="none" spc="0" normalizeH="0" baseline="0" noProof="0">
+                <a:ln>
+                  <a:noFill/>
+                </a:ln>
+                <a:solidFill>
+                  <a:srgbClr val="121212"/>
+                </a:solidFill>
+                <a:effectLst/>
+                <a:uLnTx/>
+                <a:uFillTx/>
+                <a:latin typeface="Arial"/>
+                <a:ea typeface="+mn-ea"/>
+                <a:cs typeface="+mn-cs"/>
+              </a:rPr>
+              <a:t>Guardrails</a:t>
+            </a:r>
+          </a:p>
+        </p:txBody>
+      </p:sp>
+      <p:sp>
+        <p:nvSpPr>
+          <p:cNvPr id="128" name="Pair Marker 3"/>
+          <p:cNvSpPr/>
+          <p:nvPr/>
+        </p:nvSpPr>
+        <p:spPr>
+          <a:xfrm>
+            <a:off x="4114800" y="4950000"/>
+            <a:ext cx="91440" cy="91440"/>
+          </a:xfrm>
+          <a:prstGeom prst="rect">
+            <a:avLst/>
+          </a:prstGeom>
+          <a:solidFill>
+            <a:srgbClr val="FF4B00"/>
+          </a:solidFill>
+          <a:ln w="12700">
+            <a:solidFill>
+              <a:srgbClr val="FF4B00"/>
+            </a:solidFill>
+          </a:ln>
+        </p:spPr>
+        <p:style>
+          <a:lnRef idx="1">
+            <a:schemeClr val="accent1"/>
+          </a:lnRef>
+          <a:fillRef idx="3">
+            <a:schemeClr val="accent1"/>
+          </a:fillRef>
+          <a:effectRef idx="2">
+            <a:schemeClr val="accent1"/>
+          </a:effectRef>
+          <a:fontRef idx="minor">
+            <a:schemeClr val="lt1"/>
+          </a:fontRef>
+        </p:style>
+        <p:txBody>
+          <a:bodyPr rtlCol="0" anchor="ctr"/>
+          <a:lstStyle/>
+          <a:p>
+            <a:pPr marL="0" marR="0" lvl="0" indent="0" algn="ctr" defTabSz="914400" rtl="0" eaLnBrk="1" fontAlgn="auto" latinLnBrk="0" hangingPunct="1">
+              <a:lnSpc>
+                <a:spcPct val="100000"/>
+              </a:lnSpc>
+              <a:spcBef>
+                <a:spcPts val="0"/>
+              </a:spcBef>
+              <a:spcAft>
+                <a:spcPts val="0"/>
+              </a:spcAft>
+              <a:buClrTx/>
+              <a:buSzTx/>
+              <a:buFontTx/>
+              <a:buNone/>
+              <a:tabLst/>
+              <a:defRPr/>
+            </a:pPr>
+            <a:endParaRPr kumimoji="0" lang="en-US" sz="1800" b="0" i="0" u="none" strike="noStrike" kern="1200" cap="none" spc="0" normalizeH="0" baseline="0" noProof="0">
+              <a:ln>
+                <a:noFill/>
+              </a:ln>
+              <a:solidFill>
+                <a:prstClr val="white"/>
+              </a:solidFill>
+              <a:effectLst/>
+              <a:uLnTx/>
+              <a:uFillTx/>
+              <a:latin typeface="Arial"/>
+              <a:ea typeface="+mn-ea"/>
+              <a:cs typeface="+mn-cs"/>
+            </a:endParaRPr>
+          </a:p>
+        </p:txBody>
+      </p:sp>
+      <p:sp>
+        <p:nvSpPr>
+          <p:cNvPr id="129" name="Pair Label 3"/>
+          <p:cNvSpPr txBox="1">
+            <a:spLocks/>
+          </p:cNvSpPr>
+          <p:nvPr/>
+        </p:nvSpPr>
+        <p:spPr>
+          <a:xfrm>
+            <a:off x="4270248" y="4900000"/>
+            <a:ext cx="3100000" cy="215444"/>
+          </a:xfrm>
+          <a:prstGeom prst="rect">
+            <a:avLst/>
+          </a:prstGeom>
+          <a:noFill/>
+        </p:spPr>
+        <p:txBody>
+          <a:bodyPr wrap="square" lIns="0" tIns="0" rIns="0" bIns="0" anchor="t">
+            <a:spAutoFit/>
+          </a:bodyPr>
+          <a:lstStyle/>
+          <a:p>
+            <a:pPr marL="0" marR="0" lvl="0" indent="0" algn="l" defTabSz="914400" rtl="0" eaLnBrk="1" fontAlgn="auto" latinLnBrk="0" hangingPunct="1">
+              <a:lnSpc>
+                <a:spcPct val="100000"/>
+              </a:lnSpc>
+              <a:spcBef>
+                <a:spcPts val="0"/>
+              </a:spcBef>
+              <a:spcAft>
+                <a:spcPts val="0"/>
+              </a:spcAft>
+              <a:buClrTx/>
+              <a:buSzTx/>
+              <a:buFontTx/>
+              <a:buNone/>
+              <a:tabLst/>
+              <a:defRPr/>
+            </a:pPr>
+            <a:r>
+              <a:rPr kumimoji="0" lang="en-US" sz="1200" b="0" i="0" u="none" strike="noStrike" kern="1200" cap="none" spc="0" normalizeH="0" baseline="0" noProof="0">
+                <a:ln>
+                  <a:noFill/>
+                </a:ln>
+                <a:solidFill>
+                  <a:srgbClr val="121212"/>
+                </a:solidFill>
+                <a:effectLst/>
+                <a:uLnTx/>
+                <a:uFillTx/>
+                <a:latin typeface="Arial"/>
+                <a:ea typeface="+mn-ea"/>
+                <a:cs typeface="+mn-cs"/>
+              </a:rPr>
+              <a:t>Evaluations</a:t>
+            </a:r>
+          </a:p>
+        </p:txBody>
+      </p:sp>
+      <p:sp>
+        <p:nvSpPr>
+          <p:cNvPr id="130" name="Pair Marker 4"/>
+          <p:cNvSpPr/>
+          <p:nvPr/>
+        </p:nvSpPr>
+        <p:spPr>
+          <a:xfrm>
+            <a:off x="4114800" y="5250000"/>
+            <a:ext cx="91440" cy="91440"/>
+          </a:xfrm>
+          <a:prstGeom prst="rect">
+            <a:avLst/>
+          </a:prstGeom>
+          <a:solidFill>
+            <a:srgbClr val="FF4B00"/>
+          </a:solidFill>
+          <a:ln w="12700">
+            <a:solidFill>
+              <a:srgbClr val="FF4B00"/>
+            </a:solidFill>
+          </a:ln>
+        </p:spPr>
+        <p:style>
+          <a:lnRef idx="1">
+            <a:schemeClr val="accent1"/>
+          </a:lnRef>
+          <a:fillRef idx="3">
+            <a:schemeClr val="accent1"/>
+          </a:fillRef>
+          <a:effectRef idx="2">
+            <a:schemeClr val="accent1"/>
+          </a:effectRef>
+          <a:fontRef idx="minor">
+            <a:schemeClr val="lt1"/>
+          </a:fontRef>
+        </p:style>
+        <p:txBody>
+          <a:bodyPr rtlCol="0" anchor="ctr"/>
+          <a:lstStyle/>
+          <a:p>
+            <a:pPr marL="0" marR="0" lvl="0" indent="0" algn="ctr" defTabSz="914400" rtl="0" eaLnBrk="1" fontAlgn="auto" latinLnBrk="0" hangingPunct="1">
+              <a:lnSpc>
+                <a:spcPct val="100000"/>
+              </a:lnSpc>
+              <a:spcBef>
+                <a:spcPts val="0"/>
+              </a:spcBef>
+              <a:spcAft>
+                <a:spcPts val="0"/>
+              </a:spcAft>
+              <a:buClrTx/>
+              <a:buSzTx/>
+              <a:buFontTx/>
+              <a:buNone/>
+              <a:tabLst/>
+              <a:defRPr/>
+            </a:pPr>
+            <a:endParaRPr kumimoji="0" lang="en-US" sz="1800" b="0" i="0" u="none" strike="noStrike" kern="1200" cap="none" spc="0" normalizeH="0" baseline="0" noProof="0">
+              <a:ln>
+                <a:noFill/>
+              </a:ln>
+              <a:solidFill>
+                <a:prstClr val="white"/>
+              </a:solidFill>
+              <a:effectLst/>
+              <a:uLnTx/>
+              <a:uFillTx/>
+              <a:latin typeface="Arial"/>
+              <a:ea typeface="+mn-ea"/>
+              <a:cs typeface="+mn-cs"/>
+            </a:endParaRPr>
+          </a:p>
+        </p:txBody>
+      </p:sp>
+      <p:sp>
+        <p:nvSpPr>
+          <p:cNvPr id="131" name="Pair Label 4"/>
+          <p:cNvSpPr txBox="1">
+            <a:spLocks/>
+          </p:cNvSpPr>
+          <p:nvPr/>
+        </p:nvSpPr>
+        <p:spPr>
+          <a:xfrm>
+            <a:off x="4270248" y="5200000"/>
+            <a:ext cx="3100000" cy="215444"/>
+          </a:xfrm>
+          <a:prstGeom prst="rect">
+            <a:avLst/>
+          </a:prstGeom>
+          <a:noFill/>
+        </p:spPr>
+        <p:txBody>
+          <a:bodyPr wrap="square" lIns="0" tIns="0" rIns="0" bIns="0" anchor="t">
+            <a:spAutoFit/>
+          </a:bodyPr>
+          <a:lstStyle/>
+          <a:p>
+            <a:pPr marL="0" marR="0" lvl="0" indent="0" algn="l" defTabSz="914400" rtl="0" eaLnBrk="1" fontAlgn="auto" latinLnBrk="0" hangingPunct="1">
+              <a:lnSpc>
+                <a:spcPct val="100000"/>
+              </a:lnSpc>
+              <a:spcBef>
+                <a:spcPts val="0"/>
+              </a:spcBef>
+              <a:spcAft>
+                <a:spcPts val="0"/>
+              </a:spcAft>
+              <a:buClrTx/>
+              <a:buSzTx/>
+              <a:buFontTx/>
+              <a:buNone/>
+              <a:tabLst/>
+              <a:defRPr/>
+            </a:pPr>
+            <a:r>
+              <a:rPr kumimoji="0" lang="en-US" sz="1200" b="0" i="0" u="none" strike="noStrike" kern="1200" cap="none" spc="0" normalizeH="0" baseline="0" noProof="0">
+                <a:ln>
+                  <a:noFill/>
+                </a:ln>
+                <a:solidFill>
+                  <a:srgbClr val="121212"/>
+                </a:solidFill>
+                <a:effectLst/>
+                <a:uLnTx/>
+                <a:uFillTx/>
+                <a:latin typeface="Arial"/>
+                <a:ea typeface="+mn-ea"/>
+                <a:cs typeface="+mn-cs"/>
+              </a:rPr>
+              <a:t>Cost-quality routing</a:t>
+            </a:r>
+          </a:p>
+        </p:txBody>
+      </p:sp>
+      <p:sp>
+        <p:nvSpPr>
+          <p:cNvPr id="35" name="TextBox 34"/>
+          <p:cNvSpPr txBox="1">
+            <a:spLocks/>
+          </p:cNvSpPr>
+          <p:nvPr/>
+        </p:nvSpPr>
+        <p:spPr>
+          <a:xfrm>
+            <a:off x="4114800" y="5620000"/>
+            <a:ext cx="3255000" cy="369332"/>
+          </a:xfrm>
+          <a:prstGeom prst="rect">
+            <a:avLst/>
+          </a:prstGeom>
+          <a:noFill/>
+        </p:spPr>
+        <p:txBody>
+          <a:bodyPr wrap="square" lIns="0" tIns="0" rIns="0" bIns="0" anchor="t">
+            <a:spAutoFit/>
+          </a:bodyPr>
+          <a:lstStyle/>
+          <a:p>
+            <a:pPr marL="0" marR="0" lvl="0" indent="0" algn="l" defTabSz="914400" rtl="0" eaLnBrk="1" fontAlgn="auto" latinLnBrk="0" hangingPunct="1">
+              <a:lnSpc>
+                <a:spcPct val="100000"/>
+              </a:lnSpc>
+              <a:spcBef>
+                <a:spcPts val="0"/>
+              </a:spcBef>
+              <a:spcAft>
+                <a:spcPts val="0"/>
+              </a:spcAft>
+              <a:buClrTx/>
+              <a:buSzTx/>
+              <a:buFontTx/>
+              <a:buNone/>
+              <a:tabLst/>
+              <a:defRPr/>
+            </a:pPr>
+            <a:r>
+              <a:rPr kumimoji="0" lang="en-US" sz="1200" b="0" i="0" u="none" strike="noStrike" kern="1200" cap="none" spc="0" normalizeH="0" baseline="0" noProof="0">
+                <a:ln>
+                  <a:noFill/>
+                </a:ln>
+                <a:solidFill>
+                  <a:srgbClr val="55504A"/>
+                </a:solidFill>
+                <a:effectLst/>
+                <a:uLnTx/>
+                <a:uFillTx/>
+                <a:latin typeface="Arial"/>
+                <a:ea typeface="+mn-ea"/>
+                <a:cs typeface="+mn-cs"/>
+              </a:rPr>
+              <a:t>Ship agents without rebuilding the enterprise security and operational layer yourself.</a:t>
+            </a:r>
+          </a:p>
+        </p:txBody>
+      </p:sp>
+      <p:sp>
+        <p:nvSpPr>
+          <p:cNvPr id="203" name="Icon Evidence"/>
+          <p:cNvSpPr/>
+          <p:nvPr/>
+        </p:nvSpPr>
+        <p:spPr>
+          <a:xfrm>
+            <a:off x="8156448" y="3500000"/>
+            <a:ext cx="228600" cy="228600"/>
+          </a:xfrm>
+          <a:prstGeom prst="upArrow">
+            <a:avLst/>
+          </a:prstGeom>
+          <a:solidFill>
+            <a:srgbClr val="FFC400"/>
+          </a:solidFill>
+          <a:ln>
+            <a:noFill/>
+          </a:ln>
+        </p:spPr>
+        <p:txBody>
+          <a:bodyPr/>
+          <a:lstStyle/>
+          <a:p>
+            <a:pPr marL="0" marR="0" lvl="0" indent="0" algn="l" defTabSz="914400" rtl="0" eaLnBrk="1" fontAlgn="auto" latinLnBrk="0" hangingPunct="1">
+              <a:lnSpc>
+                <a:spcPct val="100000"/>
+              </a:lnSpc>
+              <a:spcBef>
+                <a:spcPts val="0"/>
+              </a:spcBef>
+              <a:spcAft>
+                <a:spcPts val="0"/>
+              </a:spcAft>
+              <a:buClrTx/>
+              <a:buSzTx/>
+              <a:buFontTx/>
+              <a:buNone/>
+              <a:tabLst/>
+              <a:defRPr/>
+            </a:pPr>
+            <a:endParaRPr kumimoji="0" lang="en-US" sz="1800" b="0" i="0" u="none" strike="noStrike" kern="1200" cap="none" spc="0" normalizeH="0" baseline="0" noProof="0">
+              <a:ln>
+                <a:noFill/>
+              </a:ln>
+              <a:solidFill>
+                <a:prstClr val="black"/>
+              </a:solidFill>
+              <a:effectLst/>
+              <a:uLnTx/>
+              <a:uFillTx/>
+              <a:latin typeface="Arial"/>
+              <a:ea typeface="+mn-ea"/>
+              <a:cs typeface="+mn-cs"/>
+            </a:endParaRPr>
+          </a:p>
+        </p:txBody>
+      </p:sp>
+      <p:sp>
+        <p:nvSpPr>
+          <p:cNvPr id="36" name="TextBox 35"/>
+          <p:cNvSpPr txBox="1">
+            <a:spLocks/>
+          </p:cNvSpPr>
+          <p:nvPr/>
+        </p:nvSpPr>
+        <p:spPr>
+          <a:xfrm>
+            <a:off x="8156448" y="3790000"/>
+            <a:ext cx="457200" cy="201168"/>
+          </a:xfrm>
+          <a:prstGeom prst="rect">
+            <a:avLst/>
+          </a:prstGeom>
+          <a:noFill/>
+        </p:spPr>
+        <p:txBody>
+          <a:bodyPr wrap="square" lIns="0" tIns="0" rIns="0" bIns="0" anchor="t">
+            <a:normAutofit/>
+          </a:bodyPr>
+          <a:lstStyle/>
+          <a:p>
+            <a:pPr marL="0" marR="0" lvl="0" indent="0" algn="l" defTabSz="914400" rtl="0" eaLnBrk="1" fontAlgn="auto" latinLnBrk="0" hangingPunct="1">
+              <a:lnSpc>
+                <a:spcPct val="100000"/>
+              </a:lnSpc>
+              <a:spcBef>
+                <a:spcPts val="0"/>
+              </a:spcBef>
+              <a:spcAft>
+                <a:spcPts val="0"/>
+              </a:spcAft>
+              <a:buClrTx/>
+              <a:buSzTx/>
+              <a:buFontTx/>
+              <a:buNone/>
+              <a:tabLst/>
+              <a:defRPr/>
+            </a:pPr>
+            <a:r>
+              <a:rPr kumimoji="0" lang="en-US" sz="1200" b="1" i="0" u="none" strike="noStrike" kern="1200" cap="none" spc="0" normalizeH="0" baseline="0" noProof="0">
+                <a:ln>
+                  <a:noFill/>
+                </a:ln>
+                <a:solidFill>
+                  <a:srgbClr val="FF4B00"/>
+                </a:solidFill>
+                <a:effectLst/>
+                <a:uLnTx/>
+                <a:uFillTx/>
+                <a:latin typeface="Arial"/>
+                <a:ea typeface="+mn-ea"/>
+                <a:cs typeface="+mn-cs"/>
+              </a:rPr>
+              <a:t>04</a:t>
+            </a:r>
+          </a:p>
+        </p:txBody>
+      </p:sp>
+      <p:sp>
+        <p:nvSpPr>
+          <p:cNvPr id="37" name="TextBox 36"/>
+          <p:cNvSpPr txBox="1">
+            <a:spLocks/>
+          </p:cNvSpPr>
+          <p:nvPr/>
+        </p:nvSpPr>
+        <p:spPr>
+          <a:xfrm>
+            <a:off x="8156448" y="4010000"/>
+            <a:ext cx="3300000" cy="274320"/>
+          </a:xfrm>
+          <a:prstGeom prst="rect">
+            <a:avLst/>
+          </a:prstGeom>
+          <a:noFill/>
+        </p:spPr>
+        <p:txBody>
+          <a:bodyPr wrap="square" lIns="0" tIns="0" rIns="0" bIns="0" anchor="t">
+            <a:spAutoFit/>
+          </a:bodyPr>
+          <a:lstStyle/>
+          <a:p>
+            <a:pPr marL="0" marR="0" lvl="0" indent="0" algn="l" defTabSz="914400" rtl="0" eaLnBrk="1" fontAlgn="auto" latinLnBrk="0" hangingPunct="1">
+              <a:lnSpc>
+                <a:spcPct val="100000"/>
+              </a:lnSpc>
+              <a:spcBef>
+                <a:spcPts val="0"/>
+              </a:spcBef>
+              <a:spcAft>
+                <a:spcPts val="0"/>
+              </a:spcAft>
+              <a:buClrTx/>
+              <a:buSzTx/>
+              <a:buFontTx/>
+              <a:buNone/>
+              <a:tabLst/>
+              <a:defRPr/>
+            </a:pPr>
+            <a:r>
+              <a:rPr kumimoji="0" lang="en-US" sz="1400" b="1" i="0" u="none" strike="noStrike" kern="1200" cap="none" spc="0" normalizeH="0" baseline="0" noProof="0">
+                <a:ln>
+                  <a:noFill/>
+                </a:ln>
+                <a:solidFill>
+                  <a:srgbClr val="FF4B00"/>
+                </a:solidFill>
+                <a:effectLst/>
+                <a:uLnTx/>
+                <a:uFillTx/>
+                <a:latin typeface="Arial"/>
+                <a:ea typeface="+mn-ea"/>
+                <a:cs typeface="+mn-cs"/>
+              </a:rPr>
+              <a:t>EVIDENCE</a:t>
+            </a:r>
+          </a:p>
+        </p:txBody>
+      </p:sp>
+      <p:sp>
+        <p:nvSpPr>
+          <p:cNvPr id="38" name="TextBox 37"/>
+          <p:cNvSpPr txBox="1">
+            <a:spLocks/>
+          </p:cNvSpPr>
+          <p:nvPr/>
+        </p:nvSpPr>
+        <p:spPr>
+          <a:xfrm>
+            <a:off x="8156448" y="4270000"/>
+            <a:ext cx="3502152" cy="492443"/>
+          </a:xfrm>
+          <a:prstGeom prst="rect">
+            <a:avLst/>
+          </a:prstGeom>
+          <a:noFill/>
+        </p:spPr>
+        <p:txBody>
+          <a:bodyPr wrap="square" lIns="0" tIns="0" rIns="0" bIns="0" anchor="t">
+            <a:spAutoFit/>
+          </a:bodyPr>
+          <a:lstStyle/>
+          <a:p>
+            <a:pPr marL="0" marR="0" lvl="0" indent="0" algn="l" defTabSz="914400" rtl="0" eaLnBrk="1" fontAlgn="auto" latinLnBrk="0" hangingPunct="1">
+              <a:lnSpc>
+                <a:spcPct val="100000"/>
+              </a:lnSpc>
+              <a:spcBef>
+                <a:spcPts val="0"/>
+              </a:spcBef>
+              <a:spcAft>
+                <a:spcPts val="0"/>
+              </a:spcAft>
+              <a:buClrTx/>
+              <a:buSzTx/>
+              <a:buFontTx/>
+              <a:buNone/>
+              <a:tabLst/>
+              <a:defRPr/>
+            </a:pPr>
+            <a:r>
+              <a:rPr kumimoji="0" lang="en-US" sz="3200" b="1" i="0" u="none" strike="noStrike" kern="1200" cap="none" spc="0" normalizeH="0" baseline="0" noProof="0">
+                <a:ln>
+                  <a:noFill/>
+                </a:ln>
+                <a:solidFill>
+                  <a:srgbClr val="FF4B00"/>
+                </a:solidFill>
+                <a:effectLst/>
+                <a:uLnTx/>
+                <a:uFillTx/>
+                <a:latin typeface="Arial"/>
+                <a:ea typeface="+mn-ea"/>
+                <a:cs typeface="+mn-cs"/>
+              </a:rPr>
+              <a:t>2M+</a:t>
+            </a:r>
+          </a:p>
+        </p:txBody>
+      </p:sp>
+      <p:sp>
+        <p:nvSpPr>
+          <p:cNvPr id="39" name="TextBox 38"/>
+          <p:cNvSpPr txBox="1">
+            <a:spLocks/>
+          </p:cNvSpPr>
+          <p:nvPr/>
+        </p:nvSpPr>
+        <p:spPr>
+          <a:xfrm>
+            <a:off x="8156448" y="4830000"/>
+            <a:ext cx="3502152" cy="369332"/>
+          </a:xfrm>
+          <a:prstGeom prst="rect">
+            <a:avLst/>
+          </a:prstGeom>
+          <a:noFill/>
+        </p:spPr>
+        <p:txBody>
+          <a:bodyPr wrap="square" lIns="0" tIns="0" rIns="0" bIns="0" anchor="t">
+            <a:spAutoFit/>
+          </a:bodyPr>
+          <a:lstStyle/>
+          <a:p>
+            <a:pPr marL="0" marR="0" lvl="0" indent="0" algn="l" defTabSz="914400" rtl="0" eaLnBrk="1" fontAlgn="auto" latinLnBrk="0" hangingPunct="1">
+              <a:lnSpc>
+                <a:spcPct val="100000"/>
+              </a:lnSpc>
+              <a:spcBef>
+                <a:spcPts val="0"/>
+              </a:spcBef>
+              <a:spcAft>
+                <a:spcPts val="0"/>
+              </a:spcAft>
+              <a:buClrTx/>
+              <a:buSzTx/>
+              <a:buFontTx/>
+              <a:buNone/>
+              <a:tabLst/>
+              <a:defRPr/>
+            </a:pPr>
+            <a:r>
+              <a:rPr kumimoji="0" lang="en-US" sz="1200" b="1" i="0" u="none" strike="noStrike" kern="1200" cap="none" spc="0" normalizeH="0" baseline="0" noProof="0">
+                <a:ln>
+                  <a:noFill/>
+                </a:ln>
+                <a:solidFill>
+                  <a:srgbClr val="55504A"/>
+                </a:solidFill>
+                <a:effectLst/>
+                <a:uLnTx/>
+                <a:uFillTx/>
+                <a:latin typeface="Arial"/>
+                <a:ea typeface="+mn-ea"/>
+                <a:cs typeface="+mn-cs"/>
+              </a:rPr>
+              <a:t>SDK downloads in 5 months of preview</a:t>
+            </a:r>
+          </a:p>
+        </p:txBody>
+      </p:sp>
+      <p:cxnSp>
+        <p:nvCxnSpPr>
+          <p:cNvPr id="40" name="Connector 39"/>
+          <p:cNvCxnSpPr/>
+          <p:nvPr/>
+        </p:nvCxnSpPr>
+        <p:spPr>
+          <a:xfrm>
+            <a:off x="8156448" y="5300000"/>
+            <a:ext cx="3502152" cy="0"/>
+          </a:xfrm>
+          <a:prstGeom prst="line">
+            <a:avLst/>
+          </a:prstGeom>
+          <a:ln w="25400">
+            <a:solidFill>
+              <a:srgbClr val="FF4B00"/>
+            </a:solidFill>
+          </a:ln>
+        </p:spPr>
+        <p:style>
+          <a:lnRef idx="2">
+            <a:schemeClr val="accent1"/>
+          </a:lnRef>
+          <a:fillRef idx="0">
+            <a:schemeClr val="accent1"/>
+          </a:fillRef>
+          <a:effectRef idx="1">
+            <a:schemeClr val="accent1"/>
+          </a:effectRef>
+          <a:fontRef idx="minor">
+            <a:schemeClr val="tx1"/>
+          </a:fontRef>
+        </p:style>
+      </p:cxnSp>
+      <p:sp>
+        <p:nvSpPr>
+          <p:cNvPr id="41" name="TextBox 40"/>
+          <p:cNvSpPr txBox="1">
+            <a:spLocks/>
+          </p:cNvSpPr>
+          <p:nvPr/>
+        </p:nvSpPr>
+        <p:spPr>
+          <a:xfrm>
+            <a:off x="8156448" y="5420000"/>
+            <a:ext cx="3502152" cy="369332"/>
+          </a:xfrm>
+          <a:prstGeom prst="rect">
+            <a:avLst/>
+          </a:prstGeom>
+          <a:noFill/>
+        </p:spPr>
+        <p:txBody>
+          <a:bodyPr wrap="square" lIns="0" tIns="0" rIns="0" bIns="0" anchor="t">
+            <a:spAutoFit/>
+          </a:bodyPr>
+          <a:lstStyle/>
+          <a:p>
+            <a:pPr marL="0" marR="0" lvl="0" indent="0" algn="l" defTabSz="914400" rtl="0" eaLnBrk="1" fontAlgn="auto" latinLnBrk="0" hangingPunct="1">
+              <a:lnSpc>
+                <a:spcPct val="100000"/>
+              </a:lnSpc>
+              <a:spcBef>
+                <a:spcPts val="0"/>
+              </a:spcBef>
+              <a:spcAft>
+                <a:spcPts val="0"/>
+              </a:spcAft>
+              <a:buClrTx/>
+              <a:buSzTx/>
+              <a:buFontTx/>
+              <a:buNone/>
+              <a:tabLst/>
+              <a:defRPr/>
+            </a:pPr>
+            <a:r>
+              <a:rPr kumimoji="0" lang="en-US" sz="1200" b="0" i="0" u="none" strike="noStrike" kern="1200" cap="none" spc="0" normalizeH="0" baseline="0" noProof="0">
+                <a:ln>
+                  <a:noFill/>
+                </a:ln>
+                <a:solidFill>
+                  <a:srgbClr val="121212"/>
+                </a:solidFill>
+                <a:effectLst/>
+                <a:uLnTx/>
+                <a:uFillTx/>
+                <a:latin typeface="Arial"/>
+                <a:ea typeface="+mn-ea"/>
+                <a:cs typeface="+mn-cs"/>
+              </a:rPr>
+              <a:t>Customer research and product telemetry sharpened positioning, launch and adoption.</a:t>
+            </a:r>
+          </a:p>
+        </p:txBody>
+      </p:sp>
+      <p:sp>
+        <p:nvSpPr>
+          <p:cNvPr id="59" name="TextBox 58"/>
+          <p:cNvSpPr txBox="1">
+            <a:spLocks/>
+          </p:cNvSpPr>
+          <p:nvPr/>
+        </p:nvSpPr>
+        <p:spPr>
+          <a:xfrm>
+            <a:off x="566928" y="6400800"/>
+            <a:ext cx="10469880" cy="153619"/>
+          </a:xfrm>
+          <a:prstGeom prst="rect">
+            <a:avLst/>
+          </a:prstGeom>
+          <a:noFill/>
+        </p:spPr>
+        <p:txBody>
+          <a:bodyPr wrap="square" lIns="0" tIns="0" rIns="0" bIns="0" anchor="ctr">
+            <a:spAutoFit/>
+          </a:bodyPr>
+          <a:lstStyle/>
+          <a:p>
+            <a:pPr marL="0" marR="0" lvl="0" indent="0" algn="l" defTabSz="914400" rtl="0" eaLnBrk="1" fontAlgn="auto" latinLnBrk="0" hangingPunct="1">
+              <a:lnSpc>
+                <a:spcPct val="100000"/>
+              </a:lnSpc>
+              <a:spcBef>
+                <a:spcPts val="0"/>
+              </a:spcBef>
+              <a:spcAft>
+                <a:spcPts val="0"/>
+              </a:spcAft>
+              <a:buClrTx/>
+              <a:buSzTx/>
+              <a:buFontTx/>
+              <a:buNone/>
+              <a:tabLst/>
+              <a:defRPr/>
+            </a:pPr>
+            <a:r>
+              <a:rPr kumimoji="0" lang="en-US" sz="1000" b="0" i="0" u="none" strike="noStrike" kern="1200" cap="none" spc="0" normalizeH="0" baseline="0" noProof="0">
+                <a:ln>
+                  <a:noFill/>
+                </a:ln>
+                <a:solidFill>
+                  <a:srgbClr val="55504A"/>
+                </a:solidFill>
+                <a:effectLst/>
+                <a:uLnTx/>
+                <a:uFillTx/>
+                <a:latin typeface="Arial"/>
+                <a:ea typeface="+mn-ea"/>
+                <a:cs typeface="+mn-cs"/>
+              </a:rPr>
+              <a:t>Amazon Bedrock AgentCore is an AWS managed platform for enterprise agents; SDK figure covers the preview period.</a:t>
+            </a:r>
+          </a:p>
+        </p:txBody>
+      </p:sp>
+      <p:pic>
+        <p:nvPicPr>
+          <p:cNvPr id="83" name="Official Mistral footer symbol" descr="Mistral symbol mark in the slide footer"/>
+          <p:cNvPicPr>
+            <a:picLocks noChangeAspect="1"/>
+          </p:cNvPicPr>
+          <p:nvPr/>
+        </p:nvPicPr>
+        <p:blipFill>
+          <a:blip r:embed="rId3"/>
+          <a:stretch>
+            <a:fillRect/>
+          </a:stretch>
+        </p:blipFill>
+        <p:spPr>
+          <a:xfrm>
+            <a:off x="11594592" y="6400800"/>
+            <a:ext cx="228600" cy="163413"/>
+          </a:xfrm>
+          <a:prstGeom prst="rect">
+            <a:avLst/>
+          </a:prstGeom>
+        </p:spPr>
+      </p:pic>
+      <p:pic>
+        <p:nvPicPr>
+          <p:cNvPr id="84" name="Official Mistral header symbol" descr="Mistral symbol mark in the slide header"/>
+          <p:cNvPicPr>
+            <a:picLocks noChangeAspect="1"/>
+          </p:cNvPicPr>
+          <p:nvPr/>
+        </p:nvPicPr>
+        <p:blipFill>
+          <a:blip r:embed="rId3"/>
+          <a:stretch>
+            <a:fillRect/>
+          </a:stretch>
+        </p:blipFill>
+        <p:spPr>
+          <a:xfrm>
+            <a:off x="182880" y="182880"/>
+            <a:ext cx="228600" cy="163413"/>
+          </a:xfrm>
+          <a:prstGeom prst="rect">
+            <a:avLst/>
+          </a:prstGeom>
+        </p:spPr>
+      </p:pic>
+      <p:sp>
+        <p:nvSpPr>
+          <p:cNvPr id="300" name="Source Footnote"/>
+          <p:cNvSpPr txBox="1"/>
+          <p:nvPr/>
+        </p:nvSpPr>
+        <p:spPr>
+          <a:xfrm>
+            <a:off x="566928" y="6172200"/>
+            <a:ext cx="10469880" cy="123000"/>
+          </a:xfrm>
+          <a:prstGeom prst="rect">
+            <a:avLst/>
+          </a:prstGeom>
+          <a:noFill/>
+        </p:spPr>
+        <p:txBody>
+          <a:bodyPr wrap="square" lIns="0" tIns="0" rIns="0" bIns="0" anchor="ctr">
+            <a:spAutoFit/>
+          </a:bodyPr>
+          <a:lstStyle/>
+          <a:p>
+            <a:pPr marL="0" indent="0" algn="l">
+              <a:buNone/>
+            </a:pPr>
+            <a:r>
+              <a:rPr lang="en-US" sz="800" b="0" i="0" u="none" kern="1200">
+                <a:solidFill>
+                  <a:srgbClr val="8A857E"/>
+                </a:solidFill>
+                <a:latin typeface="Arial"/>
+              </a:rPr>
+              <a:t>Source: https://aws.amazon.com/blogs/aws/introducing-amazon-bedrock-agentcore-securely-deploy-and-operate-ai-agents-at-any-scale/</a:t>
+            </a:r>
+          </a:p>
+        </p:txBody>
+      </p:sp>
+    </p:spTree>
+    <p:extLst>
+      <p:ext uri="{BB962C8B-B14F-4D97-AF65-F5344CB8AC3E}">
+        <p14:creationId xmlns:p14="http://schemas.microsoft.com/office/powerpoint/2010/main" val="1143945509"/>
+      </p:ext>
+    </p:extLst>
   </p:cSld>
   <p:clrMapOvr>
     <a:masterClrMapping/>

--- a/author-profile.pptx
+++ b/author-profile.pptx
@@ -5,7 +5,7 @@
     <p:sldMasterId id="2147483660" r:id="rId1"/>
   </p:sldMasterIdLst>
   <p:notesMasterIdLst>
-    <p:notesMasterId r:id="rId8"/>
+    <p:notesMasterId r:id="rId9"/>
   </p:notesMasterIdLst>
   <p:sldIdLst>
     <p:sldId id="257" r:id="rId2"/>
@@ -13,7 +13,8 @@
     <p:sldId id="259" r:id="rId4"/>
     <p:sldId id="260" r:id="rId5"/>
     <p:sldId id="261" r:id="rId6"/>
-    <p:sldId id="262" r:id="rId7"/>
+    <p:sldId id="263" r:id="rId7"/>
+    <p:sldId id="262" r:id="rId8"/>
   </p:sldIdLst>
   <p:sldSz cx="12192000" cy="6858000"/>
   <p:notesSz cx="6858000" cy="9144000"/>
@@ -142,234 +143,10 @@
           <a:chExt cx="0" cy="0"/>
         </a:xfrm>
       </p:grpSpPr>
-      <p:sp>
-        <p:nvSpPr>
-          <p:cNvPr id="2" name="Header Placeholder 1"/>
-          <p:cNvSpPr>
-            <a:spLocks noGrp="1"/>
-          </p:cNvSpPr>
-          <p:nvPr>
-            <p:ph type="hdr" sz="quarter"/>
-          </p:nvPr>
-        </p:nvSpPr>
-        <p:spPr>
-          <a:xfrm>
-            <a:off x="0" y="0"/>
-            <a:ext cx="2971800" cy="458788"/>
-          </a:xfrm>
-          <a:prstGeom prst="rect">
-            <a:avLst/>
-          </a:prstGeom>
-        </p:spPr>
-        <p:txBody>
-          <a:bodyPr vert="horz" lIns="91440" tIns="45720" rIns="91440" bIns="45720" rtlCol="0"/>
-          <a:lstStyle>
-            <a:lvl1pPr algn="l">
-              <a:defRPr sz="1200"/>
-            </a:lvl1pPr>
-          </a:lstStyle>
-          <a:p>
-            <a:endParaRPr lang="en-US"/>
-          </a:p>
-        </p:txBody>
-      </p:sp>
-      <p:sp>
-        <p:nvSpPr>
-          <p:cNvPr id="3" name="Date Placeholder 2"/>
-          <p:cNvSpPr>
-            <a:spLocks noGrp="1"/>
-          </p:cNvSpPr>
-          <p:nvPr>
-            <p:ph type="dt" idx="1"/>
-          </p:nvPr>
-        </p:nvSpPr>
-        <p:spPr>
-          <a:xfrm>
-            <a:off x="3884613" y="0"/>
-            <a:ext cx="2971800" cy="458788"/>
-          </a:xfrm>
-          <a:prstGeom prst="rect">
-            <a:avLst/>
-          </a:prstGeom>
-        </p:spPr>
-        <p:txBody>
-          <a:bodyPr vert="horz" lIns="91440" tIns="45720" rIns="91440" bIns="45720" rtlCol="0"/>
-          <a:lstStyle>
-            <a:lvl1pPr algn="r">
-              <a:defRPr sz="1200"/>
-            </a:lvl1pPr>
-          </a:lstStyle>
-          <a:p>
-            <a:fld id="{4E07796B-6E7C-4F10-9803-11935AD4BC11}" type="datetimeFigureOut">
-              <a:rPr lang="en-US" smtClean="0"/>
-              <a:t>8/17/2026</a:t>
-            </a:fld>
-            <a:endParaRPr lang="en-US"/>
-          </a:p>
-        </p:txBody>
-      </p:sp>
-      <p:sp>
-        <p:nvSpPr>
-          <p:cNvPr id="4" name="Slide Image Placeholder 3"/>
-          <p:cNvSpPr>
-            <a:spLocks noGrp="1" noRot="1" noChangeAspect="1"/>
-          </p:cNvSpPr>
-          <p:nvPr>
-            <p:ph type="sldImg" idx="2"/>
-          </p:nvPr>
-        </p:nvSpPr>
-        <p:spPr>
-          <a:xfrm>
-            <a:off x="685800" y="1143000"/>
-            <a:ext cx="5486400" cy="3086100"/>
-          </a:xfrm>
-          <a:prstGeom prst="rect">
-            <a:avLst/>
-          </a:prstGeom>
-          <a:noFill/>
-          <a:ln w="12700">
-            <a:solidFill>
-              <a:prstClr val="black"/>
-            </a:solidFill>
-          </a:ln>
-        </p:spPr>
-        <p:txBody>
-          <a:bodyPr vert="horz" lIns="91440" tIns="45720" rIns="91440" bIns="45720" rtlCol="0" anchor="ctr"/>
-          <a:lstStyle/>
-          <a:p>
-            <a:endParaRPr lang="en-US"/>
-          </a:p>
-        </p:txBody>
-      </p:sp>
-      <p:sp>
-        <p:nvSpPr>
-          <p:cNvPr id="5" name="Notes Placeholder 4"/>
-          <p:cNvSpPr>
-            <a:spLocks noGrp="1"/>
-          </p:cNvSpPr>
-          <p:nvPr>
-            <p:ph type="body" sz="quarter" idx="3"/>
-          </p:nvPr>
-        </p:nvSpPr>
-        <p:spPr>
-          <a:xfrm>
-            <a:off x="685800" y="4400550"/>
-            <a:ext cx="5486400" cy="3600450"/>
-          </a:xfrm>
-          <a:prstGeom prst="rect">
-            <a:avLst/>
-          </a:prstGeom>
-        </p:spPr>
-        <p:txBody>
-          <a:bodyPr vert="horz" lIns="91440" tIns="45720" rIns="91440" bIns="45720" rtlCol="0"/>
-          <a:lstStyle/>
-          <a:p>
-            <a:pPr lvl="0"/>
-            <a:r>
-              <a:rPr lang="en-US"/>
-              <a:t>Click to edit Master text styles</a:t>
-            </a:r>
-          </a:p>
-          <a:p>
-            <a:pPr lvl="1"/>
-            <a:r>
-              <a:rPr lang="en-US"/>
-              <a:t>Second level</a:t>
-            </a:r>
-          </a:p>
-          <a:p>
-            <a:pPr lvl="2"/>
-            <a:r>
-              <a:rPr lang="en-US"/>
-              <a:t>Third level</a:t>
-            </a:r>
-          </a:p>
-          <a:p>
-            <a:pPr lvl="3"/>
-            <a:r>
-              <a:rPr lang="en-US"/>
-              <a:t>Fourth level</a:t>
-            </a:r>
-          </a:p>
-          <a:p>
-            <a:pPr lvl="4"/>
-            <a:r>
-              <a:rPr lang="en-US"/>
-              <a:t>Fifth level</a:t>
-            </a:r>
-          </a:p>
-        </p:txBody>
-      </p:sp>
-      <p:sp>
-        <p:nvSpPr>
-          <p:cNvPr id="6" name="Footer Placeholder 5"/>
-          <p:cNvSpPr>
-            <a:spLocks noGrp="1"/>
-          </p:cNvSpPr>
-          <p:nvPr>
-            <p:ph type="ftr" sz="quarter" idx="4"/>
-          </p:nvPr>
-        </p:nvSpPr>
-        <p:spPr>
-          <a:xfrm>
-            <a:off x="0" y="8685213"/>
-            <a:ext cx="2971800" cy="458787"/>
-          </a:xfrm>
-          <a:prstGeom prst="rect">
-            <a:avLst/>
-          </a:prstGeom>
-        </p:spPr>
-        <p:txBody>
-          <a:bodyPr vert="horz" lIns="91440" tIns="45720" rIns="91440" bIns="45720" rtlCol="0" anchor="b"/>
-          <a:lstStyle>
-            <a:lvl1pPr algn="l">
-              <a:defRPr sz="1200"/>
-            </a:lvl1pPr>
-          </a:lstStyle>
-          <a:p>
-            <a:endParaRPr lang="en-US"/>
-          </a:p>
-        </p:txBody>
-      </p:sp>
-      <p:sp>
-        <p:nvSpPr>
-          <p:cNvPr id="7" name="Slide Number Placeholder 6"/>
-          <p:cNvSpPr>
-            <a:spLocks noGrp="1"/>
-          </p:cNvSpPr>
-          <p:nvPr>
-            <p:ph type="sldNum" sz="quarter" idx="5"/>
-          </p:nvPr>
-        </p:nvSpPr>
-        <p:spPr>
-          <a:xfrm>
-            <a:off x="3884613" y="8685213"/>
-            <a:ext cx="2971800" cy="458787"/>
-          </a:xfrm>
-          <a:prstGeom prst="rect">
-            <a:avLst/>
-          </a:prstGeom>
-        </p:spPr>
-        <p:txBody>
-          <a:bodyPr vert="horz" lIns="91440" tIns="45720" rIns="91440" bIns="45720" rtlCol="0" anchor="b"/>
-          <a:lstStyle>
-            <a:lvl1pPr algn="r">
-              <a:defRPr sz="1200"/>
-            </a:lvl1pPr>
-          </a:lstStyle>
-          <a:p>
-            <a:fld id="{4A7E2B38-EC44-4B44-8575-CA30B2FCCCF1}" type="slidenum">
-              <a:rPr lang="en-US" smtClean="0"/>
-              <a:t>‹#›</a:t>
-            </a:fld>
-            <a:endParaRPr lang="en-US"/>
-          </a:p>
-        </p:txBody>
-      </p:sp>
     </p:spTree>
     <p:extLst>
       <p:ext uri="{BB962C8B-B14F-4D97-AF65-F5344CB8AC3E}">
-        <p14:creationId xmlns:p14="http://schemas.microsoft.com/office/powerpoint/2010/main" val="4112016657"/>
+        <p14:creationId xmlns:p14="http://schemas.microsoft.com/office/powerpoint/2010/main" val="2129918926"/>
       </p:ext>
     </p:extLst>
   </p:cSld>
@@ -2180,213 +1957,207 @@
           <a:lstStyle/>
           <a:p>
             <a:r>
-              <a:rPr lang="en-US" b="1" dirty="0"/>
-              <a:t>Sovereignty is my wedge.</a:t>
-            </a:r>
-            <a:r>
-              <a:rPr lang="en-US" dirty="0"/>
-              <a:t> At Microsoft, I worked on regulated-cloud and data-sovereignty patterns for </a:t>
-            </a:r>
-            <a:r>
-              <a:rPr lang="en-US" b="1" dirty="0"/>
-              <a:t>Microsoft Cloud for Financial Services on Azure</a:t>
-            </a:r>
-            <a:r>
-              <a:rPr lang="en-US" dirty="0"/>
-              <a:t>, across </a:t>
-            </a:r>
-            <a:r>
-              <a:rPr lang="en-US" b="1" dirty="0"/>
-              <a:t>10 customer markets</a:t>
-            </a:r>
-            <a:r>
-              <a:rPr lang="en-US" dirty="0"/>
-              <a:t>.</a:t>
-            </a:r>
-          </a:p>
-          <a:p>
-            <a:r>
-              <a:rPr lang="en-US" dirty="0"/>
-              <a:t>The focus was </a:t>
-            </a:r>
-            <a:r>
-              <a:rPr lang="en-US" b="1" dirty="0"/>
-              <a:t>data residency, customer-controlled key management, and compliance-by-design</a:t>
-            </a:r>
-            <a:r>
-              <a:rPr lang="en-US" dirty="0"/>
-              <a:t> — turning regulatory complexity into a credible path to production.</a:t>
-            </a:r>
-          </a:p>
-          <a:p>
-            <a:endParaRPr lang="en-US" b="1" dirty="0"/>
-          </a:p>
-          <a:p>
-            <a:r>
-              <a:rPr lang="en-US" b="1" dirty="0"/>
-              <a:t>Positioning</a:t>
-            </a:r>
-          </a:p>
-          <a:p>
-            <a:r>
-              <a:rPr lang="en-US" b="1" dirty="0"/>
-              <a:t>Objection → requirement → technical pattern → proof → reusable field narrative</a:t>
-            </a:r>
-            <a:endParaRPr lang="en-US" dirty="0"/>
-          </a:p>
-          <a:p>
-            <a:r>
-              <a:rPr lang="en-US" dirty="0"/>
-              <a:t>I translated complex compliance and deployment architecture into a simpler customer proposition: </a:t>
-            </a:r>
-            <a:r>
-              <a:rPr lang="en-US" b="1" dirty="0"/>
-              <a:t>A credible path from regulatory constraint to production.</a:t>
-            </a:r>
-            <a:endParaRPr lang="en-US" dirty="0"/>
-          </a:p>
-          <a:p>
-            <a:endParaRPr lang="en-US" b="1" dirty="0"/>
-          </a:p>
-          <a:p>
-            <a:r>
-              <a:rPr lang="en-US" b="1" dirty="0"/>
-              <a:t>Sales enablement</a:t>
-            </a:r>
-          </a:p>
-          <a:p>
-            <a:r>
-              <a:rPr lang="en-US" dirty="0"/>
-              <a:t>My principle is: </a:t>
-            </a:r>
-            <a:r>
-              <a:rPr lang="en-US" b="1" dirty="0"/>
-              <a:t>If sales and engineering solve the same objection from scratch on every account, it should be productized.</a:t>
-            </a:r>
-            <a:endParaRPr lang="en-US" dirty="0"/>
-          </a:p>
-          <a:p>
-            <a:endParaRPr lang="en-US" dirty="0"/>
-          </a:p>
-          <a:p>
-            <a:r>
-              <a:rPr lang="en-US" dirty="0"/>
-              <a:t>I used three core artifacts:</a:t>
-            </a:r>
-          </a:p>
-          <a:p>
-            <a:pPr lvl="0"/>
-            <a:r>
-              <a:rPr lang="en-US" b="1" dirty="0"/>
-              <a:t>Objection map</a:t>
-            </a:r>
-            <a:r>
-              <a:rPr lang="en-US" dirty="0"/>
-              <a:t> — top blockers, answer, proof</a:t>
-            </a:r>
-          </a:p>
-          <a:p>
-            <a:pPr lvl="0"/>
-            <a:r>
-              <a:rPr lang="en-US" b="1" dirty="0"/>
-              <a:t>Discovery questions</a:t>
-            </a:r>
-            <a:r>
-              <a:rPr lang="en-US" dirty="0"/>
-              <a:t> — qualify sovereignty needs early</a:t>
-            </a:r>
-          </a:p>
-          <a:p>
-            <a:pPr lvl="0"/>
-            <a:r>
-              <a:rPr lang="en-US" b="1" dirty="0"/>
-              <a:t>One deployment narrative</a:t>
-            </a:r>
-            <a:r>
-              <a:rPr lang="en-US" dirty="0"/>
-              <a:t> — a consistent field story</a:t>
-            </a:r>
-          </a:p>
-          <a:p>
-            <a:endParaRPr lang="en-US" dirty="0"/>
-          </a:p>
-          <a:p>
-            <a:r>
-              <a:rPr lang="en-US" dirty="0"/>
-              <a:t>Then I tracked </a:t>
-            </a:r>
-            <a:r>
-              <a:rPr lang="en-US" b="1" dirty="0"/>
-              <a:t>objection frequency over time</a:t>
-            </a:r>
-            <a:r>
-              <a:rPr lang="en-US" dirty="0"/>
-              <a:t> to see whether the enablement was actually working. Internally, this helped </a:t>
-            </a:r>
-            <a:r>
-              <a:rPr lang="en-US" b="1" dirty="0"/>
-              <a:t>rescue a $5M at-risk contract and support a $2M expansion</a:t>
-            </a:r>
-            <a:r>
-              <a:rPr lang="en-US" dirty="0"/>
-              <a:t>.</a:t>
-            </a:r>
-          </a:p>
-          <a:p>
-            <a:endParaRPr lang="en-US" dirty="0"/>
-          </a:p>
-          <a:p>
-            <a:r>
-              <a:rPr lang="en-US" dirty="0"/>
-              <a:t>The same playbook applies to Mistral: </a:t>
-            </a:r>
-            <a:r>
-              <a:rPr lang="en-US" b="1" dirty="0"/>
-              <a:t>Turn sovereignty from a compliance objection into a production and buying advantage.</a:t>
-            </a:r>
-            <a:endParaRPr lang="en-US" dirty="0"/>
-          </a:p>
-          <a:p>
-            <a:endParaRPr lang="en-US" dirty="0"/>
-          </a:p>
-          <a:p>
-            <a:r>
-              <a:rPr lang="en-US" b="1" dirty="0">
-                <a:effectLst/>
-              </a:rPr>
-              <a:t>My role:</a:t>
-            </a:r>
-            <a:r>
-              <a:rPr lang="en-US" dirty="0"/>
-              <a:t> captured recurring enterprise blockers → translated them into product and technical requirements → aligned engineering, product, legal, and field teams → codified reusable deployment patterns and SOPs → scaled the solution across engagements and commercial outcomes. </a:t>
-            </a:r>
-            <a:r>
-              <a:rPr lang="en-US" b="1" dirty="0">
-                <a:effectLst/>
-              </a:rPr>
-              <a:t>The best enterprise field enablement finds the objection that keeps recurring, solves the root problem once with product and engineering, and gives the field a repeatable way to diagnose, explain, and prove the answer.</a:t>
-            </a:r>
-          </a:p>
-          <a:p>
-            <a:endParaRPr lang="en-US" b="1" dirty="0">
-              <a:effectLst/>
-            </a:endParaRPr>
-          </a:p>
-          <a:p>
-            <a:r>
-              <a:rPr lang="en-US" b="1" dirty="0"/>
-              <a:t>Microsoft sovereignty / Financial Services — regulated-cloud positioning</a:t>
-            </a:r>
-            <a:br>
-              <a:rPr lang="en-US" dirty="0"/>
-            </a:br>
-            <a:r>
-              <a:rPr lang="en-US" dirty="0">
-                <a:hlinkClick r:id="rId3"/>
-              </a:rPr>
-              <a:t>https://www.microsoft.com/en-us/microsoft-cloud/blog/financial-services/2021/02/24/announcing-microsoft-cloud-for-financial-services/</a:t>
-            </a:r>
-            <a:endParaRPr lang="en-US" dirty="0"/>
+              <a:rPr lang="en-US"/>
+              <a:t>Microsoft regulated-cloud / AI platform — enterprise GTM</a:t>
+            </a:r>
+          </a:p>
+          <a:p>
+            <a:endParaRPr lang="en-US"/>
+          </a:p>
+          <a:p>
+            <a:r>
+              <a:rPr lang="en-US"/>
+              <a:t>The most relevant lesson from this project is not “I ran a compliance initiative.” It is that I found a recurring constraint preventing regulated financial institutions from adopting the technology, helped solve it once, and turned the solution into a repeatable field motion.</a:t>
+            </a:r>
+          </a:p>
+          <a:p>
+            <a:endParaRPr lang="en-US"/>
+          </a:p>
+          <a:p>
+            <a:r>
+              <a:rPr lang="en-US"/>
+              <a:t>1. Find the invariant</a:t>
+            </a:r>
+          </a:p>
+          <a:p>
+            <a:r>
+              <a:rPr lang="en-US"/>
+              <a:t>Customer requirements varied by market, but four needs repeated: data location, customer-controlled keys, security validation and policy enforcement. My role was to translate those recurring signals across Product, Engineering, Legal and the field into one reusable problem definition.</a:t>
+            </a:r>
+          </a:p>
+          <a:p>
+            <a:endParaRPr lang="en-US"/>
+          </a:p>
+          <a:p>
+            <a:r>
+              <a:rPr lang="en-US"/>
+              <a:t>The principle was: customize where the customer is different; standardize where repetition creates scale.</a:t>
+            </a:r>
+          </a:p>
+          <a:p>
+            <a:endParaRPr lang="en-US"/>
+          </a:p>
+          <a:p>
+            <a:r>
+              <a:rPr lang="en-US"/>
+              <a:t>2. Match the threat model</a:t>
+            </a:r>
+          </a:p>
+          <a:p>
+            <a:r>
+              <a:rPr lang="en-US"/>
+              <a:t>One early design used an FHE-based architecture, but inference latency was about 14 seconds. We went back to the workload’s actual threat model, required controls and production SLA.</a:t>
+            </a:r>
+          </a:p>
+          <a:p>
+            <a:endParaRPr lang="en-US"/>
+          </a:p>
+          <a:p>
+            <a:r>
+              <a:rPr lang="en-US"/>
+              <a:t>For that workload, confidential computing met the required security controls and reduced latency to about 220 milliseconds.</a:t>
+            </a:r>
+          </a:p>
+          <a:p>
+            <a:endParaRPr lang="en-US"/>
+          </a:p>
+          <a:p>
+            <a:r>
+              <a:rPr lang="en-US"/>
+              <a:t>The technical nuance matters: FHE and confidential computing use different security models. Confidential computing was not simply a faster version of FHE. The lesson was to choose architecture against the real security requirement and production constraint—not technical sophistication.</a:t>
+            </a:r>
+          </a:p>
+          <a:p>
+            <a:endParaRPr lang="en-US"/>
+          </a:p>
+          <a:p>
+            <a:r>
+              <a:rPr lang="en-US"/>
+              <a:t>3. Turn one deployment into a scalable market asset</a:t>
+            </a:r>
+          </a:p>
+          <a:p>
+            <a:r>
+              <a:rPr lang="en-US"/>
+              <a:t>The operating loop maps directly to Mistral:</a:t>
+            </a:r>
+          </a:p>
+          <a:p>
+            <a:endParaRPr lang="en-US"/>
+          </a:p>
+          <a:p>
+            <a:r>
+              <a:rPr lang="en-US"/>
+              <a:t>FDE — prove what works in one deployment.</a:t>
+            </a:r>
+          </a:p>
+          <a:p>
+            <a:r>
+              <a:rPr lang="en-US"/>
+              <a:t>PMM — identify the invariant and package the use case, narrative and proof.</a:t>
+            </a:r>
+          </a:p>
+          <a:p>
+            <a:r>
+              <a:rPr lang="en-US"/>
+              <a:t>Product — fix recurring structural gaps.</a:t>
+            </a:r>
+          </a:p>
+          <a:p>
+            <a:r>
+              <a:rPr lang="en-US"/>
+              <a:t>Field — reuse the play and measure whether it changes commercial outcomes.</a:t>
+            </a:r>
+          </a:p>
+          <a:p>
+            <a:endParaRPr lang="en-US"/>
+          </a:p>
+          <a:p>
+            <a:r>
+              <a:rPr lang="en-US"/>
+              <a:t>At Microsoft, the reusable pattern spread across 10+ engagements, reduced time-to-compliance from roughly nine months to three, helped retain about $5M and supported about $2M of expansion.</a:t>
+            </a:r>
+          </a:p>
+          <a:p>
+            <a:endParaRPr lang="en-US"/>
+          </a:p>
+          <a:p>
+            <a:r>
+              <a:rPr lang="en-US"/>
+              <a:t>I would measure the motion through three levels:</a:t>
+            </a:r>
+          </a:p>
+          <a:p>
+            <a:r>
+              <a:rPr lang="en-US"/>
+              <a:t>Reuse — are Sales and FDEs using the play?</a:t>
+            </a:r>
+          </a:p>
+          <a:p>
+            <a:r>
+              <a:rPr lang="en-US"/>
+              <a:t>Velocity — are conversion, win rate and deal cycle improving?</a:t>
+            </a:r>
+          </a:p>
+          <a:p>
+            <a:r>
+              <a:rPr lang="en-US"/>
+              <a:t>Growth — is it influencing pipeline, retained revenue and expansion?</a:t>
+            </a:r>
+          </a:p>
+          <a:p>
+            <a:endParaRPr lang="en-US"/>
+          </a:p>
+          <a:p>
+            <a:r>
+              <a:rPr lang="en-US"/>
+              <a:t>The takeaway is: winning one difficult deal is execution; making the next ten easier is product marketing. That is the value I would bring to Mistral’s Industries PMM role—turn bespoke FDE learning into repeatable Financial Services solutions and commercial proof.</a:t>
+            </a:r>
+          </a:p>
+          <a:p>
+            <a:endParaRPr lang="en-US"/>
+          </a:p>
+          <a:p>
+            <a:r>
+              <a:rPr lang="en-US"/>
+              <a:t>Interview caveat: the project outcome figures are supported by my resume and internal experience; public Microsoft sources corroborate the architecture, not those internal results.</a:t>
+            </a:r>
+          </a:p>
+          <a:p>
+            <a:endParaRPr lang="en-US"/>
+          </a:p>
+          <a:p>
+            <a:r>
+              <a:rPr lang="en-US"/>
+              <a:t>Public architecture:</a:t>
+            </a:r>
+          </a:p>
+          <a:p>
+            <a:r>
+              <a:rPr lang="en-US"/>
+              <a:t>https://learn.microsoft.com/en-us/azure/azure-sovereign-clouds/microsoft-sovereign-cloud</a:t>
+            </a:r>
+          </a:p>
+          <a:p>
+            <a:r>
+              <a:rPr lang="en-US"/>
+              <a:t>https://learn.microsoft.com/en-us/azure/azure-sovereign-clouds/public/confidential-computing</a:t>
+            </a:r>
+          </a:p>
+          <a:p>
+            <a:endParaRPr lang="en-US"/>
+          </a:p>
+          <a:p>
+            <a:r>
+              <a:rPr lang="en-US"/>
+              <a:t>FHE context:</a:t>
+            </a:r>
+          </a:p>
+          <a:p>
+            <a:r>
+              <a:rPr lang="en-US"/>
+              <a:t>https://www.microsoft.com/en-us/research/publication/can-homomorphic-encryption-be-practical-2/</a:t>
+            </a:r>
           </a:p>
         </p:txBody>
       </p:sp>
@@ -2510,6 +2281,192 @@
             <a:spLocks noGrp="1" noRot="1" noChangeAspect="1"/>
           </p:cNvSpPr>
           <p:nvPr>
+            <p:ph type="sldImg" idx="2"/>
+          </p:nvPr>
+        </p:nvSpPr>
+        <p:spPr/>
+      </p:sp>
+      <p:sp>
+        <p:nvSpPr>
+          <p:cNvPr id="3" name="Notes Placeholder 2"/>
+          <p:cNvSpPr>
+            <a:spLocks noGrp="1"/>
+          </p:cNvSpPr>
+          <p:nvPr>
+            <p:ph type="body" sz="quarter" idx="3"/>
+          </p:nvPr>
+        </p:nvSpPr>
+        <p:spPr/>
+        <p:txBody>
+          <a:bodyPr/>
+          <a:lstStyle/>
+          <a:p>
+            <a:r>
+              <a:t>D. E. Shaw — Real-Time Risk &amp; Capital Decisioning Platform</a:t>
+            </a:r>
+          </a:p>
+          <a:p>
+            <a:endParaRPr/>
+          </a:p>
+          <a:p>
+            <a:r>
+              <a:t>At D. E. Shaw, I led a real-time financial-risk and capital decisioning platform supporting front-office, quantitative, risk and technology teams.</a:t>
+            </a:r>
+          </a:p>
+          <a:p>
+            <a:endParaRPr/>
+          </a:p>
+          <a:p>
+            <a:r>
+              <a:t>Problem: the existing environment combined slower batch-style risk processes with fragmented intraday decisioning. That created latency, excessive false positives and inefficient capital usage.</a:t>
+            </a:r>
+          </a:p>
+          <a:p>
+            <a:endParaRPr/>
+          </a:p>
+          <a:p>
+            <a:r>
+              <a:t>Objective: create a shared real-time risk layer that could support high-volume financial decisions while meeting strict requirements around performance, accuracy, controls and production reliability.</a:t>
+            </a:r>
+          </a:p>
+          <a:p>
+            <a:endParaRPr/>
+          </a:p>
+          <a:p>
+            <a:r>
+              <a:t>My role: I led a 15+ person cross-functional program, translating requirements across Trading, Quant, Risk/Compliance, Finance and Engineering into a common roadmap, measurable acceptance criteria and staged production rollout. I translated five definitions of “good” into one measurable product contract.</a:t>
+            </a:r>
+          </a:p>
+          <a:p>
+            <a:endParaRPr/>
+          </a:p>
+          <a:p>
+            <a:r>
+              <a:t>Decision framework:</a:t>
+            </a:r>
+          </a:p>
+          <a:p>
+            <a:r>
+              <a:t>Performance — single-digit millisecond response.</a:t>
+            </a:r>
+          </a:p>
+          <a:p>
+            <a:r>
+              <a:t>Accuracy — materially reduce false positives without weakening controls.</a:t>
+            </a:r>
+          </a:p>
+          <a:p>
+            <a:r>
+              <a:t>Trust — prove equivalence through shadow operation before migration.</a:t>
+            </a:r>
+          </a:p>
+          <a:p>
+            <a:r>
+              <a:t>Economics — demonstrate operating and capital impact.</a:t>
+            </a:r>
+          </a:p>
+          <a:p>
+            <a:endParaRPr/>
+          </a:p>
+          <a:p>
+            <a:r>
+              <a:t>Approach: we modernized the real-time decisioning layer, standardized common risk/data interfaces, and preserved specialized quantitative logic where it created differentiation. Rather than moving directly into production, we ran a 90-day shadow deployment, compared the new and existing systems, brought domain users into the validation loop, and required approximately 98% output agreement before staged cutover.</a:t>
+            </a:r>
+          </a:p>
+          <a:p>
+            <a:endParaRPr/>
+          </a:p>
+          <a:p>
+            <a:r>
+              <a:t>Result: decision latency improved from roughly 90ms to 4.2ms, false positives fell from 15% to 1.8%, the platform supported approximately 5.4M events per second, operating costs fell around $400K per month, and improved risk decisioning released approximately $85M of usable capital capacity.</a:t>
+            </a:r>
+          </a:p>
+          <a:p>
+            <a:endParaRPr/>
+          </a:p>
+          <a:p>
+            <a:r>
+              <a:t>The capital impact came from making risk information faster and more precise. Lower false positives and more timely risk visibility reduced unnecessary conservatism in how capital was allocated.</a:t>
+            </a:r>
+          </a:p>
+          <a:p>
+            <a:endParaRPr/>
+          </a:p>
+          <a:p>
+            <a:r>
+              <a:t>Customer insight changed the product: early on, we treated speed as the primary problem. User conversations made it clear that speed without explainability and confidence would not change behavior. The product definition expanded from “make risk calculations faster” to “make decisions faster without reducing trust.”</a:t>
+            </a:r>
+          </a:p>
+          <a:p>
+            <a:endParaRPr/>
+          </a:p>
+          <a:p>
+            <a:r>
+              <a:t>If asked about architecture: conceptually, the platform separated into an event/data layer, a decisioning layer, and a control layer. This improved shared infrastructure without unnecessarily rewriting specialized quantitative logic.</a:t>
+            </a:r>
+          </a:p>
+          <a:p>
+            <a:endParaRPr/>
+          </a:p>
+          <a:p>
+            <a:r>
+              <a:t>Lesson: in Financial Services, the hard part is not building technically impressive infrastructure. It is creating enough performance, control and measurable economic proof that sophisticated users will trust it in production.</a:t>
+            </a:r>
+          </a:p>
+          <a:p>
+            <a:endParaRPr/>
+          </a:p>
+          <a:p>
+            <a:r>
+              <a:t>Avoid inventing: named regulators, Basel III, exact legal capital requirements, exact desk/user counts, exact historical stack, named third-party vendors, revenue attribution, or an unsupported adoption percentage.</a:t>
+            </a:r>
+          </a:p>
+        </p:txBody>
+      </p:sp>
+      <p:sp>
+        <p:nvSpPr>
+          <p:cNvPr id="4" name="Slide Number Placeholder 3"/>
+          <p:cNvSpPr>
+            <a:spLocks noGrp="1"/>
+          </p:cNvSpPr>
+          <p:nvPr>
+            <p:ph type="sldNum" sz="quarter" idx="5"/>
+          </p:nvPr>
+        </p:nvSpPr>
+        <p:spPr/>
+      </p:sp>
+    </p:spTree>
+  </p:cSld>
+  <p:clrMapOvr>
+    <a:masterClrMapping/>
+  </p:clrMapOvr>
+</p:notes>
+</file>
+
+<file path=ppt/notesSlides/notesSlide7.xml><?xml version="1.0" encoding="utf-8"?>
+<p:notes xmlns:a="http://schemas.openxmlformats.org/drawingml/2006/main" xmlns:r="http://schemas.openxmlformats.org/officeDocument/2006/relationships" xmlns:p="http://schemas.openxmlformats.org/presentationml/2006/main">
+  <p:cSld>
+    <p:spTree>
+      <p:nvGrpSpPr>
+        <p:cNvPr id="1" name=""/>
+        <p:cNvGrpSpPr/>
+        <p:nvPr/>
+      </p:nvGrpSpPr>
+      <p:grpSpPr>
+        <a:xfrm>
+          <a:off x="0" y="0"/>
+          <a:ext cx="0" cy="0"/>
+          <a:chOff x="0" y="0"/>
+          <a:chExt cx="0" cy="0"/>
+        </a:xfrm>
+      </p:grpSpPr>
+      <p:sp>
+        <p:nvSpPr>
+          <p:cNvPr id="2" name="Slide Image Placeholder 1"/>
+          <p:cNvSpPr>
+            <a:spLocks noGrp="1" noRot="1" noChangeAspect="1"/>
+          </p:cNvSpPr>
+          <p:nvPr>
             <p:ph type="sldImg"/>
           </p:nvPr>
         </p:nvSpPr>
@@ -2660,7 +2617,7 @@
           <a:p>
             <a:fld id="{4A7E2B38-EC44-4B44-8575-CA30B2FCCCF1}" type="slidenum">
               <a:rPr lang="en-US" smtClean="0"/>
-              <a:t>6</a:t>
+              <a:t>7</a:t>
             </a:fld>
             <a:endParaRPr lang="en-US"/>
           </a:p>
@@ -12749,12 +12706,59 @@
           <a:chExt cx="0" cy="0"/>
         </a:xfrm>
       </p:grpSpPr>
-      <p:sp>
-        <p:nvSpPr>
-          <p:cNvPr id="11" name="TextBox 10"/>
-          <p:cNvSpPr txBox="1">
-            <a:spLocks/>
-          </p:cNvSpPr>
+      <p:pic>
+        <p:nvPicPr>
+          <p:cNvPr id="83" name="Official Mistral footer symbol" descr="image.png"/>
+          <p:cNvPicPr>
+            <a:picLocks noChangeAspect="1"/>
+          </p:cNvPicPr>
+          <p:nvPr/>
+        </p:nvPicPr>
+        <p:blipFill>
+          <a:blip r:embed="rId3"/>
+          <a:srcRect/>
+          <a:stretch>
+            <a:fillRect/>
+          </a:stretch>
+        </p:blipFill>
+        <p:spPr>
+          <a:xfrm>
+            <a:off x="11594592" y="6400800"/>
+            <a:ext cx="228600" cy="163413"/>
+          </a:xfrm>
+          <a:prstGeom prst="rect">
+            <a:avLst/>
+          </a:prstGeom>
+        </p:spPr>
+      </p:pic>
+      <p:pic>
+        <p:nvPicPr>
+          <p:cNvPr id="84" name="Official Mistral header symbol" descr="image.png"/>
+          <p:cNvPicPr>
+            <a:picLocks noChangeAspect="1"/>
+          </p:cNvPicPr>
+          <p:nvPr/>
+        </p:nvPicPr>
+        <p:blipFill>
+          <a:blip r:embed="rId3"/>
+          <a:stretch>
+            <a:fillRect/>
+          </a:stretch>
+        </p:blipFill>
+        <p:spPr>
+          <a:xfrm>
+            <a:off x="182880" y="182880"/>
+            <a:ext cx="228600" cy="163413"/>
+          </a:xfrm>
+          <a:prstGeom prst="rect">
+            <a:avLst/>
+          </a:prstGeom>
+        </p:spPr>
+      </p:pic>
+      <p:sp>
+        <p:nvSpPr>
+          <p:cNvPr id="85" name="Section Eyebrow"/>
+          <p:cNvSpPr txBox="1"/>
           <p:nvPr/>
         </p:nvSpPr>
         <p:spPr>
@@ -12773,49 +12777,23 @@
           </a:bodyPr>
           <a:lstStyle/>
           <a:p>
-            <a:pPr marL="0" marR="0" lvl="0" indent="0" algn="l" defTabSz="914400" rtl="0" eaLnBrk="1" fontAlgn="auto" latinLnBrk="0" hangingPunct="1">
-              <a:lnSpc>
-                <a:spcPct val="100000"/>
-              </a:lnSpc>
-              <a:spcBef>
-                <a:spcPts val="0"/>
-              </a:spcBef>
-              <a:spcAft>
-                <a:spcPts val="0"/>
-              </a:spcAft>
-              <a:buClrTx/>
-              <a:buSzTx/>
-              <a:buFontTx/>
-              <a:buNone/>
-              <a:tabLst/>
-              <a:defRPr/>
-            </a:pPr>
-            <a:r>
-              <a:rPr kumimoji="0" lang="en-US" sz="1400" b="1" i="0" u="none" strike="noStrike" kern="1200" cap="none" spc="0" normalizeH="0" baseline="0" noProof="0">
-                <a:ln>
-                  <a:noFill/>
-                </a:ln>
+            <a:pPr algn="l"/>
+            <a:r>
+              <a:rPr sz="1400" b="1">
                 <a:solidFill>
                   <a:srgbClr val="FF4B00"/>
                 </a:solidFill>
-                <a:effectLst/>
-                <a:uLnTx/>
-                <a:uFillTx/>
-                <a:latin typeface="Arial"/>
-                <a:ea typeface="+mn-ea"/>
-                <a:cs typeface="+mn-cs"/>
-              </a:rPr>
-              <a:t>MICROSOFT REGULATED CLOUD / AI PLATFORM · FIELD ENABLEMENT &amp; ENTERPRISE GTM</a:t>
-            </a:r>
-          </a:p>
-        </p:txBody>
-      </p:sp>
-      <p:sp>
-        <p:nvSpPr>
-          <p:cNvPr id="15" name="TextBox 14"/>
-          <p:cNvSpPr txBox="1">
-            <a:spLocks/>
-          </p:cNvSpPr>
+                <a:latin typeface="Arial"/>
+              </a:rPr>
+              <a:t>MICROSOFT REGULATED CLOUD / AI PLATFORM · INDUSTRY GTM</a:t>
+            </a:r>
+          </a:p>
+        </p:txBody>
+      </p:sp>
+      <p:sp>
+        <p:nvSpPr>
+          <p:cNvPr id="86" name="Page Number"/>
+          <p:cNvSpPr txBox="1"/>
           <p:nvPr/>
         </p:nvSpPr>
         <p:spPr>
@@ -12834,37 +12812,13 @@
           </a:bodyPr>
           <a:lstStyle/>
           <a:p>
-            <a:pPr marL="0" marR="0" lvl="0" indent="0" algn="r" defTabSz="914400" rtl="0" eaLnBrk="1" fontAlgn="auto" latinLnBrk="0" hangingPunct="1">
-              <a:lnSpc>
-                <a:spcPct val="100000"/>
-              </a:lnSpc>
-              <a:spcBef>
-                <a:spcPts val="0"/>
-              </a:spcBef>
-              <a:spcAft>
-                <a:spcPts val="0"/>
-              </a:spcAft>
-              <a:buClrTx/>
-              <a:buSzTx/>
-              <a:buFontTx/>
-              <a:buNone/>
-              <a:tabLst/>
-              <a:defRPr/>
-            </a:pPr>
-            <a:r>
-              <a:rPr kumimoji="0" lang="en-US" sz="1000" b="0" i="0" u="none" strike="noStrike" kern="1200" cap="none" spc="0" normalizeH="0" baseline="0" noProof="0" dirty="0">
-                <a:ln>
-                  <a:noFill/>
-                </a:ln>
+            <a:pPr algn="r"/>
+            <a:r>
+              <a:rPr sz="1000" b="0">
                 <a:solidFill>
                   <a:srgbClr val="55504A"/>
                 </a:solidFill>
-                <a:effectLst/>
-                <a:uLnTx/>
-                <a:uFillTx/>
-                <a:latin typeface="Arial"/>
-                <a:ea typeface="+mn-ea"/>
-                <a:cs typeface="+mn-cs"/>
+                <a:latin typeface="Arial"/>
               </a:rPr>
               <a:t>5</a:t>
             </a:r>
@@ -12873,68 +12827,42 @@
       </p:sp>
       <p:sp>
         <p:nvSpPr>
-          <p:cNvPr id="16" name="TextBox 15"/>
-          <p:cNvSpPr txBox="1">
-            <a:spLocks/>
-          </p:cNvSpPr>
+          <p:cNvPr id="87" name="Slide Title"/>
+          <p:cNvSpPr txBox="1"/>
           <p:nvPr/>
         </p:nvSpPr>
         <p:spPr>
           <a:xfrm>
             <a:off x="502920" y="576072"/>
-            <a:ext cx="11155680" cy="538609"/>
-          </a:xfrm>
-          <a:prstGeom prst="rect">
-            <a:avLst/>
-          </a:prstGeom>
-          <a:noFill/>
-        </p:spPr>
-        <p:txBody>
-          <a:bodyPr wrap="square" lIns="0" tIns="0" rIns="0" bIns="0" anchor="t">
+            <a:ext cx="11155680" cy="538581"/>
+          </a:xfrm>
+          <a:prstGeom prst="rect">
+            <a:avLst/>
+          </a:prstGeom>
+          <a:noFill/>
+        </p:spPr>
+        <p:txBody>
+          <a:bodyPr wrap="square" lIns="0" tIns="0" rIns="0" bIns="0" anchor="ctr">
             <a:spAutoFit/>
           </a:bodyPr>
           <a:lstStyle/>
           <a:p>
-            <a:pPr marL="0" marR="0" lvl="0" indent="0" algn="l" defTabSz="914400" rtl="0" eaLnBrk="1" fontAlgn="auto" latinLnBrk="0" hangingPunct="1">
-              <a:lnSpc>
-                <a:spcPct val="100000"/>
-              </a:lnSpc>
-              <a:spcBef>
-                <a:spcPts val="0"/>
-              </a:spcBef>
-              <a:spcAft>
-                <a:spcPts val="0"/>
-              </a:spcAft>
-              <a:buClrTx/>
-              <a:buSzTx/>
-              <a:buFontTx/>
-              <a:buNone/>
-              <a:tabLst/>
-              <a:defRPr/>
-            </a:pPr>
-            <a:r>
-              <a:rPr kumimoji="0" lang="en-US" sz="3500" b="1" i="0" u="none" strike="noStrike" kern="1200" cap="none" spc="0" normalizeH="0" baseline="0" noProof="0">
-                <a:ln>
-                  <a:noFill/>
-                </a:ln>
+            <a:pPr algn="l"/>
+            <a:r>
+              <a:rPr sz="3500" b="1">
                 <a:solidFill>
                   <a:srgbClr val="121212"/>
                 </a:solidFill>
-                <a:effectLst/>
-                <a:uLnTx/>
-                <a:uFillTx/>
-                <a:latin typeface="Arial"/>
-                <a:ea typeface="+mn-ea"/>
-                <a:cs typeface="+mn-cs"/>
-              </a:rPr>
-              <a:t>4. Field enablement: turn blockers into field plays</a:t>
-            </a:r>
-          </a:p>
-        </p:txBody>
-      </p:sp>
-      <p:sp>
-        <p:nvSpPr>
-          <p:cNvPr id="17" name="Rectangle 16"/>
+                <a:latin typeface="Arial"/>
+              </a:rPr>
+              <a:t>4. Enterprise GTM: solve once, scale what repeats</a:t>
+            </a:r>
+          </a:p>
+        </p:txBody>
+      </p:sp>
+      <p:sp>
+        <p:nvSpPr>
+          <p:cNvPr id="88" name="Role Accent"/>
           <p:cNvSpPr/>
           <p:nvPr/>
         </p:nvSpPr>
@@ -12949,10 +12877,8 @@
           <a:solidFill>
             <a:srgbClr val="FF4B00"/>
           </a:solidFill>
-          <a:ln w="12700">
-            <a:solidFill>
-              <a:srgbClr val="FF4B00"/>
-            </a:solidFill>
+          <a:ln>
+            <a:noFill/>
           </a:ln>
         </p:spPr>
         <p:style>
@@ -12973,52 +12899,21 @@
           <a:bodyPr rtlCol="0" anchor="ctr"/>
           <a:lstStyle/>
           <a:p>
-            <a:pPr marL="0" marR="0" lvl="0" indent="0" algn="ctr" defTabSz="914400" rtl="0" eaLnBrk="1" fontAlgn="auto" latinLnBrk="0" hangingPunct="1">
-              <a:lnSpc>
-                <a:spcPct val="100000"/>
-              </a:lnSpc>
-              <a:spcBef>
-                <a:spcPts val="0"/>
-              </a:spcBef>
-              <a:spcAft>
-                <a:spcPts val="0"/>
-              </a:spcAft>
-              <a:buClrTx/>
-              <a:buSzTx/>
-              <a:buFontTx/>
-              <a:buNone/>
-              <a:tabLst/>
-              <a:defRPr/>
-            </a:pPr>
-            <a:endParaRPr kumimoji="0" lang="en-US" sz="1800" b="0" i="0" u="none" strike="noStrike" kern="1200" cap="none" spc="0" normalizeH="0" baseline="0" noProof="0">
-              <a:ln>
-                <a:noFill/>
-              </a:ln>
-              <a:solidFill>
-                <a:prstClr val="white"/>
-              </a:solidFill>
-              <a:effectLst/>
-              <a:uLnTx/>
-              <a:uFillTx/>
-              <a:latin typeface="Arial"/>
-              <a:ea typeface="+mn-ea"/>
-              <a:cs typeface="+mn-cs"/>
-            </a:endParaRPr>
-          </a:p>
-        </p:txBody>
-      </p:sp>
-      <p:sp>
-        <p:nvSpPr>
-          <p:cNvPr id="18" name="TextBox 17"/>
-          <p:cNvSpPr txBox="1">
-            <a:spLocks/>
-          </p:cNvSpPr>
-          <p:nvPr/>
-        </p:nvSpPr>
-        <p:spPr>
-          <a:xfrm>
-            <a:off x="658368" y="1225296"/>
-            <a:ext cx="10881360" cy="310896"/>
+            <a:pPr algn="ctr"/>
+            <a:endParaRPr/>
+          </a:p>
+        </p:txBody>
+      </p:sp>
+      <p:sp>
+        <p:nvSpPr>
+          <p:cNvPr id="89" name="Role Line"/>
+          <p:cNvSpPr txBox="1"/>
+          <p:nvPr/>
+        </p:nvSpPr>
+        <p:spPr>
+          <a:xfrm>
+            <a:off x="658368" y="1273022"/>
+            <a:ext cx="10881360" cy="215444"/>
           </a:xfrm>
           <a:prstGeom prst="rect">
             <a:avLst/>
@@ -13031,63 +12926,58 @@
           </a:bodyPr>
           <a:lstStyle/>
           <a:p>
-            <a:pPr marL="0" marR="0" lvl="0" indent="0" algn="l" defTabSz="914400" rtl="0" eaLnBrk="1" fontAlgn="auto" latinLnBrk="0" hangingPunct="1">
-              <a:lnSpc>
-                <a:spcPct val="100000"/>
-              </a:lnSpc>
-              <a:spcBef>
-                <a:spcPts val="0"/>
-              </a:spcBef>
-              <a:spcAft>
-                <a:spcPts val="0"/>
-              </a:spcAft>
-              <a:buClrTx/>
-              <a:buSzTx/>
-              <a:buFontTx/>
-              <a:buNone/>
-              <a:tabLst/>
-              <a:defRPr/>
-            </a:pPr>
-            <a:r>
-              <a:rPr kumimoji="0" lang="en-US" sz="1400" b="1" i="0" u="none" strike="noStrike" kern="1200" cap="none" spc="0" normalizeH="0" baseline="0" noProof="0">
-                <a:ln>
-                  <a:noFill/>
-                </a:ln>
+            <a:pPr algn="l"/>
+            <a:r>
+              <a:rPr sz="1400" b="1">
                 <a:solidFill>
                   <a:srgbClr val="FF4B00"/>
                 </a:solidFill>
-                <a:effectLst/>
-                <a:uLnTx/>
-                <a:uFillTx/>
-                <a:latin typeface="Arial"/>
-                <a:ea typeface="+mn-ea"/>
-                <a:cs typeface="+mn-cs"/>
+                <a:latin typeface="Arial"/>
               </a:rPr>
               <a:t>MY ROLE  </a:t>
             </a:r>
             <a:r>
-              <a:rPr kumimoji="0" lang="en-US" sz="1400" b="0" i="0" u="none" strike="noStrike" kern="1200" cap="none" spc="0" normalizeH="0" baseline="0" noProof="0">
-                <a:ln>
-                  <a:noFill/>
-                </a:ln>
+              <a:rPr lang="en-US" sz="1400" b="0">
                 <a:solidFill>
                   <a:srgbClr val="121212"/>
                 </a:solidFill>
-                <a:effectLst/>
-                <a:uLnTx/>
-                <a:uFillTx/>
-                <a:latin typeface="Arial"/>
-                <a:ea typeface="+mn-ea"/>
-                <a:cs typeface="+mn-cs"/>
-              </a:rPr>
-              <a:t>cross-functional GTM for regulated financial-services deployments</a:t>
+                <a:latin typeface="Arial"/>
+              </a:rPr>
+              <a:t>customer signal </a:t>
+            </a:r>
+            <a:r>
+              <a:rPr sz="1400" b="0">
+                <a:solidFill>
+                  <a:srgbClr val="121212"/>
+                </a:solidFill>
+                <a:latin typeface="Arial"/>
+              </a:rPr>
+              <a:t>→ technical pattern → </a:t>
+            </a:r>
+            <a:r>
+              <a:rPr lang="en-US" sz="1400" b="0">
+                <a:solidFill>
+                  <a:srgbClr val="121212"/>
+                </a:solidFill>
+                <a:latin typeface="Arial"/>
+              </a:rPr>
+              <a:t>repeatable industry</a:t>
+            </a:r>
+            <a:r>
+              <a:rPr sz="1400" b="0">
+                <a:solidFill>
+                  <a:srgbClr val="121212"/>
+                </a:solidFill>
+                <a:latin typeface="Arial"/>
+              </a:rPr>
+              <a:t> solution</a:t>
             </a:r>
           </a:p>
         </p:txBody>
       </p:sp>
       <p:cxnSp>
         <p:nvCxnSpPr>
-          <p:cNvPr id="19" name="Connector 18"/>
+          <p:cNvPr id="90" name="Header Divider"/>
           <p:cNvCxnSpPr/>
           <p:nvPr/>
         </p:nvCxnSpPr>
@@ -13099,9 +12989,9 @@
           <a:prstGeom prst="line">
             <a:avLst/>
           </a:prstGeom>
-          <a:ln w="12700">
+          <a:ln w="10160">
             <a:solidFill>
-              <a:srgbClr val="E5DCCD"/>
+              <a:srgbClr val="D9D5CE"/>
             </a:solidFill>
           </a:ln>
         </p:spPr>
@@ -13122,16 +13012,14 @@
       </p:cxnSp>
       <p:sp>
         <p:nvSpPr>
-          <p:cNvPr id="20" name="TextBox 19"/>
-          <p:cNvSpPr txBox="1">
-            <a:spLocks/>
-          </p:cNvSpPr>
-          <p:nvPr/>
-        </p:nvSpPr>
-        <p:spPr>
-          <a:xfrm>
-            <a:off x="502920" y="1677365"/>
-            <a:ext cx="11155680" cy="430887"/>
+          <p:cNvPr id="91" name="Takeaway"/>
+          <p:cNvSpPr txBox="1"/>
+          <p:nvPr/>
+        </p:nvSpPr>
+        <p:spPr>
+          <a:xfrm>
+            <a:off x="502920" y="1784628"/>
+            <a:ext cx="11155680" cy="215444"/>
           </a:xfrm>
           <a:prstGeom prst="rect">
             <a:avLst/>
@@ -13144,77 +13032,126 @@
           </a:bodyPr>
           <a:lstStyle/>
           <a:p>
-            <a:pPr marL="0" marR="0" lvl="0" indent="0" algn="l" defTabSz="914400" rtl="0" eaLnBrk="1" fontAlgn="auto" latinLnBrk="0" hangingPunct="1">
-              <a:lnSpc>
-                <a:spcPct val="100000"/>
-              </a:lnSpc>
-              <a:spcBef>
-                <a:spcPts val="0"/>
-              </a:spcBef>
-              <a:spcAft>
-                <a:spcPts val="0"/>
-              </a:spcAft>
-              <a:buClrTx/>
-              <a:buSzTx/>
-              <a:buFontTx/>
-              <a:buNone/>
-              <a:tabLst/>
-              <a:defRPr/>
-            </a:pPr>
-            <a:r>
-              <a:rPr kumimoji="0" lang="en-US" sz="1400" b="1" i="0" u="none" strike="noStrike" kern="1200" cap="none" spc="0" normalizeH="0" baseline="0" noProof="0">
-                <a:ln>
-                  <a:noFill/>
-                </a:ln>
+            <a:pPr algn="l"/>
+            <a:r>
+              <a:rPr sz="1400" b="1">
                 <a:solidFill>
                   <a:srgbClr val="FFC400"/>
                 </a:solidFill>
-                <a:effectLst/>
-                <a:uLnTx/>
-                <a:uFillTx/>
-                <a:latin typeface="Arial"/>
-                <a:ea typeface="+mn-ea"/>
-                <a:cs typeface="+mn-cs"/>
+                <a:latin typeface="Arial"/>
               </a:rPr>
               <a:t>TAKEAWAY  </a:t>
             </a:r>
             <a:r>
-              <a:rPr kumimoji="0" lang="en-US" sz="1400" b="1" i="0" u="none" strike="noStrike" kern="1200" cap="none" spc="0" normalizeH="0" baseline="0" noProof="0">
-                <a:ln>
-                  <a:noFill/>
-                </a:ln>
+              <a:rPr lang="en-US" sz="1400" b="1">
                 <a:solidFill>
                   <a:srgbClr val="121212"/>
                 </a:solidFill>
-                <a:effectLst/>
-                <a:uLnTx/>
-                <a:uFillTx/>
-                <a:latin typeface="Arial"/>
-                <a:ea typeface="+mn-ea"/>
-                <a:cs typeface="+mn-cs"/>
-              </a:rPr>
-              <a:t>When one objection blocks many deals, solve it with product and engineering, then give the field a repeatable response.</a:t>
+                <a:latin typeface="Arial"/>
+              </a:rPr>
+              <a:t>Winning </a:t>
+            </a:r>
+            <a:r>
+              <a:rPr sz="1400" b="1">
+                <a:solidFill>
+                  <a:srgbClr val="121212"/>
+                </a:solidFill>
+                <a:latin typeface="Arial"/>
+              </a:rPr>
+              <a:t>one </a:t>
+            </a:r>
+            <a:r>
+              <a:rPr lang="en-US" sz="1400" b="1">
+                <a:solidFill>
+                  <a:srgbClr val="121212"/>
+                </a:solidFill>
+                <a:latin typeface="Arial"/>
+              </a:rPr>
+              <a:t>difficult </a:t>
+            </a:r>
+            <a:r>
+              <a:rPr sz="1400" b="1">
+                <a:solidFill>
+                  <a:srgbClr val="121212"/>
+                </a:solidFill>
+                <a:latin typeface="Arial"/>
+              </a:rPr>
+              <a:t>deal</a:t>
+            </a:r>
+            <a:r>
+              <a:rPr lang="en-US" sz="1400" b="1">
+                <a:solidFill>
+                  <a:srgbClr val="121212"/>
+                </a:solidFill>
+                <a:latin typeface="Arial"/>
+              </a:rPr>
+              <a:t> is execution; </a:t>
+            </a:r>
+            <a:r>
+              <a:rPr sz="1400" b="1">
+                <a:solidFill>
+                  <a:srgbClr val="121212"/>
+                </a:solidFill>
+                <a:latin typeface="Arial"/>
+              </a:rPr>
+              <a:t>making the next </a:t>
+            </a:r>
+            <a:r>
+              <a:rPr lang="en-US" sz="1400" b="1">
+                <a:solidFill>
+                  <a:srgbClr val="121212"/>
+                </a:solidFill>
+                <a:latin typeface="Arial"/>
+              </a:rPr>
+              <a:t>ten </a:t>
+            </a:r>
+            <a:r>
+              <a:rPr sz="1400" b="1">
+                <a:solidFill>
+                  <a:srgbClr val="121212"/>
+                </a:solidFill>
+                <a:latin typeface="Arial"/>
+              </a:rPr>
+              <a:t>easier</a:t>
+            </a:r>
+            <a:r>
+              <a:rPr lang="en-US" sz="1400" b="1">
+                <a:solidFill>
+                  <a:srgbClr val="121212"/>
+                </a:solidFill>
+                <a:latin typeface="Arial"/>
+              </a:rPr>
+              <a:t> is product marketing</a:t>
+            </a:r>
+            <a:r>
+              <a:rPr sz="1400" b="1">
+                <a:solidFill>
+                  <a:srgbClr val="121212"/>
+                </a:solidFill>
+                <a:latin typeface="Arial"/>
+              </a:rPr>
+              <a:t>.</a:t>
             </a:r>
           </a:p>
         </p:txBody>
       </p:sp>
       <p:cxnSp>
         <p:nvCxnSpPr>
-          <p:cNvPr id="21" name="Connector 20"/>
+          <p:cNvPr id="92" name="Column Divider 1"/>
           <p:cNvCxnSpPr/>
           <p:nvPr/>
         </p:nvCxnSpPr>
         <p:spPr>
           <a:xfrm>
-            <a:off x="3767328" y="2194559"/>
-            <a:ext cx="0" cy="3886200"/>
+            <a:off x="3419856" y="2212848"/>
+            <a:ext cx="0" cy="2798064"/>
           </a:xfrm>
           <a:prstGeom prst="line">
             <a:avLst/>
           </a:prstGeom>
-          <a:ln w="12700">
+          <a:ln w="10160">
             <a:solidFill>
-              <a:srgbClr val="E5DCCD"/>
+              <a:srgbClr val="D9D5CE"/>
             </a:solidFill>
           </a:ln>
         </p:spPr>
@@ -13235,21 +13172,21 @@
       </p:cxnSp>
       <p:cxnSp>
         <p:nvCxnSpPr>
-          <p:cNvPr id="22" name="Connector 21"/>
+          <p:cNvPr id="93" name="Column Divider 2"/>
           <p:cNvCxnSpPr/>
           <p:nvPr/>
         </p:nvCxnSpPr>
         <p:spPr>
           <a:xfrm>
-            <a:off x="7818120" y="2194559"/>
-            <a:ext cx="0" cy="3886200"/>
+            <a:off x="7589520" y="2212848"/>
+            <a:ext cx="0" cy="2798064"/>
           </a:xfrm>
           <a:prstGeom prst="line">
             <a:avLst/>
           </a:prstGeom>
-          <a:ln w="12700">
+          <a:ln w="10160">
             <a:solidFill>
-              <a:srgbClr val="E5DCCD"/>
+              <a:srgbClr val="D9D5CE"/>
             </a:solidFill>
           </a:ln>
         </p:spPr>
@@ -13270,59 +13207,33 @@
       </p:cxnSp>
       <p:sp>
         <p:nvSpPr>
-          <p:cNvPr id="23" name="TextBox 22"/>
-          <p:cNvSpPr txBox="1">
-            <a:spLocks/>
-          </p:cNvSpPr>
-          <p:nvPr/>
-        </p:nvSpPr>
-        <p:spPr>
-          <a:xfrm>
-            <a:off x="1225296" y="2221992"/>
-            <a:ext cx="457200" cy="201168"/>
-          </a:xfrm>
-          <a:prstGeom prst="rect">
-            <a:avLst/>
-          </a:prstGeom>
-          <a:noFill/>
-        </p:spPr>
-        <p:txBody>
-          <a:bodyPr wrap="square" lIns="0" tIns="0" rIns="0" bIns="0" anchor="t">
-            <a:normAutofit/>
-          </a:bodyPr>
-          <a:lstStyle/>
-          <a:p>
-            <a:pPr marL="0" marR="0" lvl="0" indent="0" algn="l" defTabSz="914400" rtl="0" eaLnBrk="1" fontAlgn="auto" latinLnBrk="0" hangingPunct="1">
-              <a:lnSpc>
-                <a:spcPct val="100000"/>
-              </a:lnSpc>
-              <a:spcBef>
-                <a:spcPts val="0"/>
-              </a:spcBef>
-              <a:spcAft>
-                <a:spcPts val="0"/>
-              </a:spcAft>
-              <a:buClrTx/>
-              <a:buSzTx/>
-              <a:buFontTx/>
-              <a:buNone/>
-              <a:tabLst/>
-              <a:defRPr/>
-            </a:pPr>
-            <a:r>
-              <a:rPr kumimoji="0" lang="en-US" sz="1200" b="1" i="0" u="none" strike="noStrike" kern="1200" cap="none" spc="0" normalizeH="0" baseline="0" noProof="0">
-                <a:ln>
-                  <a:noFill/>
-                </a:ln>
+          <p:cNvPr id="94" name="Section 01 Number"/>
+          <p:cNvSpPr txBox="1"/>
+          <p:nvPr/>
+        </p:nvSpPr>
+        <p:spPr>
+          <a:xfrm>
+            <a:off x="640080" y="2221992"/>
+            <a:ext cx="384048" cy="201168"/>
+          </a:xfrm>
+          <a:prstGeom prst="rect">
+            <a:avLst/>
+          </a:prstGeom>
+          <a:noFill/>
+        </p:spPr>
+        <p:txBody>
+          <a:bodyPr wrap="square" lIns="0" tIns="0" rIns="0" bIns="0" anchor="ctr">
+            <a:spAutoFit/>
+          </a:bodyPr>
+          <a:lstStyle/>
+          <a:p>
+            <a:pPr algn="l"/>
+            <a:r>
+              <a:rPr sz="1200" b="1">
                 <a:solidFill>
                   <a:srgbClr val="FF4B00"/>
                 </a:solidFill>
-                <a:effectLst/>
-                <a:uLnTx/>
-                <a:uFillTx/>
-                <a:latin typeface="Arial"/>
-                <a:ea typeface="+mn-ea"/>
-                <a:cs typeface="+mn-cs"/>
+                <a:latin typeface="Arial"/>
               </a:rPr>
               <a:t>01</a:t>
             </a:r>
@@ -13331,16 +13242,49 @@
       </p:sp>
       <p:sp>
         <p:nvSpPr>
-          <p:cNvPr id="24" name="TextBox 23"/>
-          <p:cNvSpPr txBox="1">
-            <a:spLocks/>
-          </p:cNvSpPr>
-          <p:nvPr/>
-        </p:nvSpPr>
-        <p:spPr>
-          <a:xfrm>
-            <a:off x="1225296" y="2441448"/>
-            <a:ext cx="2194560" cy="274320"/>
+          <p:cNvPr id="95" name="Section 01 Label"/>
+          <p:cNvSpPr txBox="1"/>
+          <p:nvPr/>
+        </p:nvSpPr>
+        <p:spPr>
+          <a:xfrm>
+            <a:off x="1051560" y="2212848"/>
+            <a:ext cx="2258568" cy="274320"/>
+          </a:xfrm>
+          <a:prstGeom prst="rect">
+            <a:avLst/>
+          </a:prstGeom>
+          <a:noFill/>
+        </p:spPr>
+        <p:txBody>
+          <a:bodyPr wrap="square" lIns="0" tIns="0" rIns="0" bIns="0" anchor="ctr">
+            <a:spAutoFit/>
+          </a:bodyPr>
+          <a:lstStyle/>
+          <a:p>
+            <a:pPr algn="l"/>
+            <a:r>
+              <a:rPr sz="1400" b="1">
+                <a:solidFill>
+                  <a:srgbClr val="FF4B00"/>
+                </a:solidFill>
+                <a:latin typeface="Arial"/>
+              </a:rPr>
+              <a:t>FIND THE INVARIANT</a:t>
+            </a:r>
+          </a:p>
+        </p:txBody>
+      </p:sp>
+      <p:sp>
+        <p:nvSpPr>
+          <p:cNvPr id="96" name="Constraint Thesis"/>
+          <p:cNvSpPr txBox="1"/>
+          <p:nvPr/>
+        </p:nvSpPr>
+        <p:spPr>
+          <a:xfrm>
+            <a:off x="640080" y="2770632"/>
+            <a:ext cx="2487168" cy="738664"/>
           </a:xfrm>
           <a:prstGeom prst="rect">
             <a:avLst/>
@@ -13353,114 +13297,38 @@
           </a:bodyPr>
           <a:lstStyle/>
           <a:p>
-            <a:pPr marL="0" marR="0" lvl="0" indent="0" algn="l" defTabSz="914400" rtl="0" eaLnBrk="1" fontAlgn="auto" latinLnBrk="0" hangingPunct="1">
-              <a:lnSpc>
-                <a:spcPct val="100000"/>
-              </a:lnSpc>
-              <a:spcBef>
-                <a:spcPts val="0"/>
-              </a:spcBef>
-              <a:spcAft>
-                <a:spcPts val="0"/>
-              </a:spcAft>
-              <a:buClrTx/>
-              <a:buSzTx/>
-              <a:buFontTx/>
-              <a:buNone/>
-              <a:tabLst/>
-              <a:defRPr/>
-            </a:pPr>
-            <a:r>
-              <a:rPr kumimoji="0" lang="en-US" sz="1400" b="1" i="0" u="none" strike="noStrike" kern="1200" cap="none" spc="0" normalizeH="0" baseline="0" noProof="0">
-                <a:ln>
-                  <a:noFill/>
-                </a:ln>
-                <a:solidFill>
-                  <a:srgbClr val="FF4B00"/>
-                </a:solidFill>
-                <a:effectLst/>
-                <a:uLnTx/>
-                <a:uFillTx/>
-                <a:latin typeface="Arial"/>
-                <a:ea typeface="+mn-ea"/>
-                <a:cs typeface="+mn-cs"/>
-              </a:rPr>
-              <a:t>CUSTOMER BLOCKERS</a:t>
-            </a:r>
-          </a:p>
-        </p:txBody>
-      </p:sp>
-      <p:sp>
-        <p:nvSpPr>
-          <p:cNvPr id="25" name="TextBox 24"/>
-          <p:cNvSpPr txBox="1">
-            <a:spLocks/>
-          </p:cNvSpPr>
-          <p:nvPr/>
-        </p:nvSpPr>
-        <p:spPr>
-          <a:xfrm>
-            <a:off x="640080" y="3127248"/>
-            <a:ext cx="2788920" cy="630936"/>
-          </a:xfrm>
-          <a:prstGeom prst="rect">
-            <a:avLst/>
-          </a:prstGeom>
-          <a:noFill/>
-        </p:spPr>
-        <p:txBody>
-          <a:bodyPr wrap="square" lIns="0" tIns="0" rIns="0" bIns="0" anchor="t">
-            <a:normAutofit/>
-          </a:bodyPr>
-          <a:lstStyle/>
-          <a:p>
-            <a:pPr marL="0" marR="0" lvl="0" indent="0" algn="l" defTabSz="914400" rtl="0" eaLnBrk="1" fontAlgn="auto" latinLnBrk="0" hangingPunct="1">
-              <a:lnSpc>
-                <a:spcPct val="100000"/>
-              </a:lnSpc>
-              <a:spcBef>
-                <a:spcPts val="0"/>
-              </a:spcBef>
-              <a:spcAft>
-                <a:spcPts val="0"/>
-              </a:spcAft>
-              <a:buClrTx/>
-              <a:buSzTx/>
-              <a:buFontTx/>
-              <a:buNone/>
-              <a:tabLst/>
-              <a:defRPr/>
-            </a:pPr>
-            <a:r>
-              <a:rPr kumimoji="0" lang="en-US" sz="1700" b="1" i="0" u="none" strike="noStrike" kern="1200" cap="none" spc="0" normalizeH="0" baseline="0" noProof="0">
-                <a:ln>
-                  <a:noFill/>
-                </a:ln>
+            <a:pPr algn="l"/>
+            <a:r>
+              <a:rPr lang="en-US" sz="1600" b="1">
                 <a:solidFill>
                   <a:srgbClr val="121212"/>
                 </a:solidFill>
-                <a:effectLst/>
-                <a:uLnTx/>
-                <a:uFillTx/>
-                <a:latin typeface="Arial"/>
-                <a:ea typeface="+mn-ea"/>
-                <a:cs typeface="+mn-cs"/>
-              </a:rPr>
-              <a:t>Sovereignty was the wedge. Buyers asked:</a:t>
-            </a:r>
-          </a:p>
-        </p:txBody>
-      </p:sp>
-      <p:sp>
-        <p:nvSpPr>
-          <p:cNvPr id="26" name="Rectangle 25"/>
+                <a:latin typeface="Arial"/>
+              </a:rPr>
+              <a:t>Find what stays invariant when customer requirements vary</a:t>
+            </a:r>
+            <a:r>
+              <a:rPr sz="1600" b="1">
+                <a:solidFill>
+                  <a:srgbClr val="121212"/>
+                </a:solidFill>
+                <a:latin typeface="Arial"/>
+              </a:rPr>
+              <a:t>.</a:t>
+            </a:r>
+          </a:p>
+        </p:txBody>
+      </p:sp>
+      <p:sp>
+        <p:nvSpPr>
+          <p:cNvPr id="97" name="Constraint Marker 1"/>
           <p:cNvSpPr/>
           <p:nvPr/>
         </p:nvSpPr>
         <p:spPr>
           <a:xfrm>
-            <a:off x="667512" y="3858768"/>
-            <a:ext cx="91440" cy="91440"/>
+            <a:off x="658368" y="3547872"/>
+            <a:ext cx="73152" cy="73152"/>
           </a:xfrm>
           <a:prstGeom prst="rect">
             <a:avLst/>
@@ -13468,10 +13336,8 @@
           <a:solidFill>
             <a:srgbClr val="FF4B00"/>
           </a:solidFill>
-          <a:ln w="12700">
-            <a:solidFill>
-              <a:srgbClr val="FF4B00"/>
-            </a:solidFill>
+          <a:ln>
+            <a:noFill/>
           </a:ln>
         </p:spPr>
         <p:style>
@@ -13492,52 +13358,21 @@
           <a:bodyPr rtlCol="0" anchor="ctr"/>
           <a:lstStyle/>
           <a:p>
-            <a:pPr marL="0" marR="0" lvl="0" indent="0" algn="ctr" defTabSz="914400" rtl="0" eaLnBrk="1" fontAlgn="auto" latinLnBrk="0" hangingPunct="1">
-              <a:lnSpc>
-                <a:spcPct val="100000"/>
-              </a:lnSpc>
-              <a:spcBef>
-                <a:spcPts val="0"/>
-              </a:spcBef>
-              <a:spcAft>
-                <a:spcPts val="0"/>
-              </a:spcAft>
-              <a:buClrTx/>
-              <a:buSzTx/>
-              <a:buFontTx/>
-              <a:buNone/>
-              <a:tabLst/>
-              <a:defRPr/>
-            </a:pPr>
-            <a:endParaRPr kumimoji="0" lang="en-US" sz="1800" b="0" i="0" u="none" strike="noStrike" kern="1200" cap="none" spc="0" normalizeH="0" baseline="0" noProof="0">
-              <a:ln>
-                <a:noFill/>
-              </a:ln>
-              <a:solidFill>
-                <a:prstClr val="white"/>
-              </a:solidFill>
-              <a:effectLst/>
-              <a:uLnTx/>
-              <a:uFillTx/>
-              <a:latin typeface="Arial"/>
-              <a:ea typeface="+mn-ea"/>
-              <a:cs typeface="+mn-cs"/>
-            </a:endParaRPr>
-          </a:p>
-        </p:txBody>
-      </p:sp>
-      <p:sp>
-        <p:nvSpPr>
-          <p:cNvPr id="27" name="TextBox 26"/>
-          <p:cNvSpPr txBox="1">
-            <a:spLocks/>
-          </p:cNvSpPr>
-          <p:nvPr/>
-        </p:nvSpPr>
-        <p:spPr>
-          <a:xfrm>
-            <a:off x="896112" y="3785616"/>
-            <a:ext cx="2606040" cy="215444"/>
+            <a:pPr algn="ctr"/>
+            <a:endParaRPr/>
+          </a:p>
+        </p:txBody>
+      </p:sp>
+      <p:sp>
+        <p:nvSpPr>
+          <p:cNvPr id="98" name="Constraint 1"/>
+          <p:cNvSpPr txBox="1"/>
+          <p:nvPr/>
+        </p:nvSpPr>
+        <p:spPr>
+          <a:xfrm>
+            <a:off x="859536" y="3502152"/>
+            <a:ext cx="2286000" cy="182880"/>
           </a:xfrm>
           <a:prstGeom prst="rect">
             <a:avLst/>
@@ -13550,53 +13385,29 @@
           </a:bodyPr>
           <a:lstStyle/>
           <a:p>
-            <a:pPr marL="0" marR="0" lvl="0" indent="0" algn="l" defTabSz="914400" rtl="0" eaLnBrk="1" fontAlgn="auto" latinLnBrk="0" hangingPunct="1">
-              <a:lnSpc>
-                <a:spcPct val="100000"/>
-              </a:lnSpc>
-              <a:spcBef>
-                <a:spcPts val="0"/>
-              </a:spcBef>
-              <a:spcAft>
-                <a:spcPts val="0"/>
-              </a:spcAft>
-              <a:buClrTx/>
-              <a:buSzTx/>
-              <a:buFontTx/>
-              <a:buNone/>
-              <a:tabLst/>
-              <a:defRPr/>
-            </a:pPr>
-            <a:r>
-              <a:rPr kumimoji="0" lang="en-US" sz="1400" b="0" i="0" u="none" strike="noStrike" kern="1200" cap="none" spc="0" normalizeH="0" baseline="0" noProof="0">
-                <a:ln>
-                  <a:noFill/>
-                </a:ln>
+            <a:pPr algn="l"/>
+            <a:r>
+              <a:rPr sz="1200" b="1">
                 <a:solidFill>
                   <a:srgbClr val="121212"/>
                 </a:solidFill>
-                <a:effectLst/>
-                <a:uLnTx/>
-                <a:uFillTx/>
-                <a:latin typeface="Arial"/>
-                <a:ea typeface="+mn-ea"/>
-                <a:cs typeface="+mn-cs"/>
-              </a:rPr>
-              <a:t>Where does data live?</a:t>
-            </a:r>
-          </a:p>
-        </p:txBody>
-      </p:sp>
-      <p:sp>
-        <p:nvSpPr>
-          <p:cNvPr id="28" name="Rectangle 27"/>
+                <a:latin typeface="Arial"/>
+              </a:rPr>
+              <a:t>DATA LOCATION</a:t>
+            </a:r>
+          </a:p>
+        </p:txBody>
+      </p:sp>
+      <p:sp>
+        <p:nvSpPr>
+          <p:cNvPr id="99" name="Constraint Marker 2"/>
           <p:cNvSpPr/>
           <p:nvPr/>
         </p:nvSpPr>
         <p:spPr>
           <a:xfrm>
-            <a:off x="667512" y="4425696"/>
-            <a:ext cx="91440" cy="91440"/>
+            <a:off x="658368" y="3867911"/>
+            <a:ext cx="73152" cy="73152"/>
           </a:xfrm>
           <a:prstGeom prst="rect">
             <a:avLst/>
@@ -13604,10 +13415,8 @@
           <a:solidFill>
             <a:srgbClr val="FF4B00"/>
           </a:solidFill>
-          <a:ln w="12700">
-            <a:solidFill>
-              <a:srgbClr val="FF4B00"/>
-            </a:solidFill>
+          <a:ln>
+            <a:noFill/>
           </a:ln>
         </p:spPr>
         <p:style>
@@ -13628,52 +13437,21 @@
           <a:bodyPr rtlCol="0" anchor="ctr"/>
           <a:lstStyle/>
           <a:p>
-            <a:pPr marL="0" marR="0" lvl="0" indent="0" algn="ctr" defTabSz="914400" rtl="0" eaLnBrk="1" fontAlgn="auto" latinLnBrk="0" hangingPunct="1">
-              <a:lnSpc>
-                <a:spcPct val="100000"/>
-              </a:lnSpc>
-              <a:spcBef>
-                <a:spcPts val="0"/>
-              </a:spcBef>
-              <a:spcAft>
-                <a:spcPts val="0"/>
-              </a:spcAft>
-              <a:buClrTx/>
-              <a:buSzTx/>
-              <a:buFontTx/>
-              <a:buNone/>
-              <a:tabLst/>
-              <a:defRPr/>
-            </a:pPr>
-            <a:endParaRPr kumimoji="0" lang="en-US" sz="1800" b="0" i="0" u="none" strike="noStrike" kern="1200" cap="none" spc="0" normalizeH="0" baseline="0" noProof="0">
-              <a:ln>
-                <a:noFill/>
-              </a:ln>
-              <a:solidFill>
-                <a:prstClr val="white"/>
-              </a:solidFill>
-              <a:effectLst/>
-              <a:uLnTx/>
-              <a:uFillTx/>
-              <a:latin typeface="Arial"/>
-              <a:ea typeface="+mn-ea"/>
-              <a:cs typeface="+mn-cs"/>
-            </a:endParaRPr>
-          </a:p>
-        </p:txBody>
-      </p:sp>
-      <p:sp>
-        <p:nvSpPr>
-          <p:cNvPr id="29" name="TextBox 28"/>
-          <p:cNvSpPr txBox="1">
-            <a:spLocks/>
-          </p:cNvSpPr>
-          <p:nvPr/>
-        </p:nvSpPr>
-        <p:spPr>
-          <a:xfrm>
-            <a:off x="896112" y="4352544"/>
-            <a:ext cx="2606040" cy="215444"/>
+            <a:pPr algn="ctr"/>
+            <a:endParaRPr/>
+          </a:p>
+        </p:txBody>
+      </p:sp>
+      <p:sp>
+        <p:nvSpPr>
+          <p:cNvPr id="100" name="Constraint 2"/>
+          <p:cNvSpPr txBox="1"/>
+          <p:nvPr/>
+        </p:nvSpPr>
+        <p:spPr>
+          <a:xfrm>
+            <a:off x="859536" y="3822191"/>
+            <a:ext cx="2286000" cy="182880"/>
           </a:xfrm>
           <a:prstGeom prst="rect">
             <a:avLst/>
@@ -13686,53 +13464,29 @@
           </a:bodyPr>
           <a:lstStyle/>
           <a:p>
-            <a:pPr marL="0" marR="0" lvl="0" indent="0" algn="l" defTabSz="914400" rtl="0" eaLnBrk="1" fontAlgn="auto" latinLnBrk="0" hangingPunct="1">
-              <a:lnSpc>
-                <a:spcPct val="100000"/>
-              </a:lnSpc>
-              <a:spcBef>
-                <a:spcPts val="0"/>
-              </a:spcBef>
-              <a:spcAft>
-                <a:spcPts val="0"/>
-              </a:spcAft>
-              <a:buClrTx/>
-              <a:buSzTx/>
-              <a:buFontTx/>
-              <a:buNone/>
-              <a:tabLst/>
-              <a:defRPr/>
-            </a:pPr>
-            <a:r>
-              <a:rPr kumimoji="0" lang="en-US" sz="1400" b="0" i="0" u="none" strike="noStrike" kern="1200" cap="none" spc="0" normalizeH="0" baseline="0" noProof="0">
-                <a:ln>
-                  <a:noFill/>
-                </a:ln>
+            <a:pPr algn="l"/>
+            <a:r>
+              <a:rPr sz="1200" b="1">
                 <a:solidFill>
                   <a:srgbClr val="121212"/>
                 </a:solidFill>
-                <a:effectLst/>
-                <a:uLnTx/>
-                <a:uFillTx/>
-                <a:latin typeface="Arial"/>
-                <a:ea typeface="+mn-ea"/>
-                <a:cs typeface="+mn-cs"/>
-              </a:rPr>
-              <a:t>Who controls access?</a:t>
-            </a:r>
-          </a:p>
-        </p:txBody>
-      </p:sp>
-      <p:sp>
-        <p:nvSpPr>
-          <p:cNvPr id="30" name="Rectangle 29"/>
+                <a:latin typeface="Arial"/>
+              </a:rPr>
+              <a:t>KEY CONTROL</a:t>
+            </a:r>
+          </a:p>
+        </p:txBody>
+      </p:sp>
+      <p:sp>
+        <p:nvSpPr>
+          <p:cNvPr id="101" name="Constraint Marker 3"/>
           <p:cNvSpPr/>
           <p:nvPr/>
         </p:nvSpPr>
         <p:spPr>
           <a:xfrm>
-            <a:off x="667512" y="4992624"/>
-            <a:ext cx="91440" cy="91440"/>
+            <a:off x="658368" y="4187952"/>
+            <a:ext cx="73152" cy="73152"/>
           </a:xfrm>
           <a:prstGeom prst="rect">
             <a:avLst/>
@@ -13740,10 +13494,8 @@
           <a:solidFill>
             <a:srgbClr val="FF4B00"/>
           </a:solidFill>
-          <a:ln w="12700">
-            <a:solidFill>
-              <a:srgbClr val="FF4B00"/>
-            </a:solidFill>
+          <a:ln>
+            <a:noFill/>
           </a:ln>
         </p:spPr>
         <p:style>
@@ -13764,52 +13516,21 @@
           <a:bodyPr rtlCol="0" anchor="ctr"/>
           <a:lstStyle/>
           <a:p>
-            <a:pPr marL="0" marR="0" lvl="0" indent="0" algn="ctr" defTabSz="914400" rtl="0" eaLnBrk="1" fontAlgn="auto" latinLnBrk="0" hangingPunct="1">
-              <a:lnSpc>
-                <a:spcPct val="100000"/>
-              </a:lnSpc>
-              <a:spcBef>
-                <a:spcPts val="0"/>
-              </a:spcBef>
-              <a:spcAft>
-                <a:spcPts val="0"/>
-              </a:spcAft>
-              <a:buClrTx/>
-              <a:buSzTx/>
-              <a:buFontTx/>
-              <a:buNone/>
-              <a:tabLst/>
-              <a:defRPr/>
-            </a:pPr>
-            <a:endParaRPr kumimoji="0" lang="en-US" sz="1800" b="0" i="0" u="none" strike="noStrike" kern="1200" cap="none" spc="0" normalizeH="0" baseline="0" noProof="0">
-              <a:ln>
-                <a:noFill/>
-              </a:ln>
-              <a:solidFill>
-                <a:prstClr val="white"/>
-              </a:solidFill>
-              <a:effectLst/>
-              <a:uLnTx/>
-              <a:uFillTx/>
-              <a:latin typeface="Arial"/>
-              <a:ea typeface="+mn-ea"/>
-              <a:cs typeface="+mn-cs"/>
-            </a:endParaRPr>
-          </a:p>
-        </p:txBody>
-      </p:sp>
-      <p:sp>
-        <p:nvSpPr>
-          <p:cNvPr id="31" name="TextBox 30"/>
-          <p:cNvSpPr txBox="1">
-            <a:spLocks/>
-          </p:cNvSpPr>
-          <p:nvPr/>
-        </p:nvSpPr>
-        <p:spPr>
-          <a:xfrm>
-            <a:off x="896112" y="4919472"/>
-            <a:ext cx="2606040" cy="215444"/>
+            <a:pPr algn="ctr"/>
+            <a:endParaRPr/>
+          </a:p>
+        </p:txBody>
+      </p:sp>
+      <p:sp>
+        <p:nvSpPr>
+          <p:cNvPr id="102" name="Constraint 3"/>
+          <p:cNvSpPr txBox="1"/>
+          <p:nvPr/>
+        </p:nvSpPr>
+        <p:spPr>
+          <a:xfrm>
+            <a:off x="859536" y="4142232"/>
+            <a:ext cx="2286000" cy="182880"/>
           </a:xfrm>
           <a:prstGeom prst="rect">
             <a:avLst/>
@@ -13822,53 +13543,35 @@
           </a:bodyPr>
           <a:lstStyle/>
           <a:p>
-            <a:pPr marL="0" marR="0" lvl="0" indent="0" algn="l" defTabSz="914400" rtl="0" eaLnBrk="1" fontAlgn="auto" latinLnBrk="0" hangingPunct="1">
-              <a:lnSpc>
-                <a:spcPct val="100000"/>
-              </a:lnSpc>
-              <a:spcBef>
-                <a:spcPts val="0"/>
-              </a:spcBef>
-              <a:spcAft>
-                <a:spcPts val="0"/>
-              </a:spcAft>
-              <a:buClrTx/>
-              <a:buSzTx/>
-              <a:buFontTx/>
-              <a:buNone/>
-              <a:tabLst/>
-              <a:defRPr/>
-            </a:pPr>
-            <a:r>
-              <a:rPr kumimoji="0" lang="en-US" sz="1400" b="0" i="0" u="none" strike="noStrike" kern="1200" cap="none" spc="0" normalizeH="0" baseline="0" noProof="0">
-                <a:ln>
-                  <a:noFill/>
-                </a:ln>
+            <a:pPr algn="l"/>
+            <a:r>
+              <a:rPr lang="en-US" sz="1200" b="1">
                 <a:solidFill>
                   <a:srgbClr val="121212"/>
                 </a:solidFill>
-                <a:effectLst/>
-                <a:uLnTx/>
-                <a:uFillTx/>
-                <a:latin typeface="Arial"/>
-                <a:ea typeface="+mn-ea"/>
-                <a:cs typeface="+mn-cs"/>
-              </a:rPr>
-              <a:t>Can this satisfy local rules?</a:t>
-            </a:r>
-          </a:p>
-        </p:txBody>
-      </p:sp>
-      <p:sp>
-        <p:nvSpPr>
-          <p:cNvPr id="32" name="Rectangle 31"/>
+                <a:latin typeface="Arial"/>
+              </a:rPr>
+              <a:t>SECURITY VALIDATION</a:t>
+            </a:r>
+            <a:endParaRPr sz="1200" b="1">
+              <a:solidFill>
+                <a:srgbClr val="121212"/>
+              </a:solidFill>
+              <a:latin typeface="Arial"/>
+            </a:endParaRPr>
+          </a:p>
+        </p:txBody>
+      </p:sp>
+      <p:sp>
+        <p:nvSpPr>
+          <p:cNvPr id="103" name="Constraint Marker 4"/>
           <p:cNvSpPr/>
           <p:nvPr/>
         </p:nvSpPr>
         <p:spPr>
           <a:xfrm>
-            <a:off x="667512" y="5559552"/>
-            <a:ext cx="91440" cy="91440"/>
+            <a:off x="658368" y="4507992"/>
+            <a:ext cx="73152" cy="73152"/>
           </a:xfrm>
           <a:prstGeom prst="rect">
             <a:avLst/>
@@ -13876,10 +13579,8 @@
           <a:solidFill>
             <a:srgbClr val="FF4B00"/>
           </a:solidFill>
-          <a:ln w="12700">
-            <a:solidFill>
-              <a:srgbClr val="FF4B00"/>
-            </a:solidFill>
+          <a:ln>
+            <a:noFill/>
           </a:ln>
         </p:spPr>
         <p:style>
@@ -13900,52 +13601,21 @@
           <a:bodyPr rtlCol="0" anchor="ctr"/>
           <a:lstStyle/>
           <a:p>
-            <a:pPr marL="0" marR="0" lvl="0" indent="0" algn="ctr" defTabSz="914400" rtl="0" eaLnBrk="1" fontAlgn="auto" latinLnBrk="0" hangingPunct="1">
-              <a:lnSpc>
-                <a:spcPct val="100000"/>
-              </a:lnSpc>
-              <a:spcBef>
-                <a:spcPts val="0"/>
-              </a:spcBef>
-              <a:spcAft>
-                <a:spcPts val="0"/>
-              </a:spcAft>
-              <a:buClrTx/>
-              <a:buSzTx/>
-              <a:buFontTx/>
-              <a:buNone/>
-              <a:tabLst/>
-              <a:defRPr/>
-            </a:pPr>
-            <a:endParaRPr kumimoji="0" sz="1800" b="0" i="0" u="none" strike="noStrike" kern="1200" cap="none" spc="0" normalizeH="0" baseline="0" noProof="0">
-              <a:ln>
-                <a:noFill/>
-              </a:ln>
-              <a:solidFill>
-                <a:prstClr val="white"/>
-              </a:solidFill>
-              <a:effectLst/>
-              <a:uLnTx/>
-              <a:uFillTx/>
-              <a:latin typeface="Arial"/>
-              <a:ea typeface="+mn-ea"/>
-              <a:cs typeface="+mn-cs"/>
-            </a:endParaRPr>
-          </a:p>
-        </p:txBody>
-      </p:sp>
-      <p:sp>
-        <p:nvSpPr>
-          <p:cNvPr id="33" name="TextBox 32"/>
-          <p:cNvSpPr txBox="1">
-            <a:spLocks/>
-          </p:cNvSpPr>
-          <p:nvPr/>
-        </p:nvSpPr>
-        <p:spPr>
-          <a:xfrm>
-            <a:off x="896112" y="5486400"/>
-            <a:ext cx="2606040" cy="215444"/>
+            <a:pPr algn="ctr"/>
+            <a:endParaRPr/>
+          </a:p>
+        </p:txBody>
+      </p:sp>
+      <p:sp>
+        <p:nvSpPr>
+          <p:cNvPr id="104" name="Constraint 4"/>
+          <p:cNvSpPr txBox="1"/>
+          <p:nvPr/>
+        </p:nvSpPr>
+        <p:spPr>
+          <a:xfrm>
+            <a:off x="859536" y="4462272"/>
+            <a:ext cx="2286000" cy="182880"/>
           </a:xfrm>
           <a:prstGeom prst="rect">
             <a:avLst/>
@@ -13958,116 +13628,35 @@
           </a:bodyPr>
           <a:lstStyle/>
           <a:p>
-            <a:pPr marL="0" marR="0" lvl="0" indent="0" algn="l" defTabSz="914400" rtl="0" eaLnBrk="1" fontAlgn="auto" latinLnBrk="0" hangingPunct="1">
-              <a:lnSpc>
-                <a:spcPct val="100000"/>
-              </a:lnSpc>
-              <a:spcBef>
-                <a:spcPts val="0"/>
-              </a:spcBef>
-              <a:spcAft>
-                <a:spcPts val="0"/>
-              </a:spcAft>
-              <a:buClrTx/>
-              <a:buSzTx/>
-              <a:buFontTx/>
-              <a:buNone/>
-              <a:tabLst/>
-              <a:defRPr/>
-            </a:pPr>
-            <a:r>
-              <a:rPr kumimoji="0" lang="en-US" sz="1400" b="0" i="0" u="none" strike="noStrike" kern="1200" cap="none" spc="0" normalizeH="0" baseline="0" noProof="0">
-                <a:ln>
-                  <a:noFill/>
-                </a:ln>
+            <a:pPr algn="l"/>
+            <a:r>
+              <a:rPr lang="en-US" sz="1200" b="1">
                 <a:solidFill>
                   <a:srgbClr val="121212"/>
                 </a:solidFill>
-                <a:effectLst/>
-                <a:uLnTx/>
-                <a:uFillTx/>
-                <a:latin typeface="Arial"/>
-                <a:ea typeface="+mn-ea"/>
-                <a:cs typeface="+mn-cs"/>
-              </a:rPr>
-              <a:t>Will latency work in production?</a:t>
-            </a:r>
-          </a:p>
-        </p:txBody>
-      </p:sp>
-      <p:sp>
-        <p:nvSpPr>
-          <p:cNvPr id="34" name="TextBox 33"/>
-          <p:cNvSpPr txBox="1">
-            <a:spLocks/>
-          </p:cNvSpPr>
-          <p:nvPr/>
-        </p:nvSpPr>
-        <p:spPr>
-          <a:xfrm>
-            <a:off x="4700016" y="2221992"/>
-            <a:ext cx="457200" cy="201168"/>
-          </a:xfrm>
-          <a:prstGeom prst="rect">
-            <a:avLst/>
-          </a:prstGeom>
-          <a:noFill/>
-        </p:spPr>
-        <p:txBody>
-          <a:bodyPr wrap="square" lIns="0" tIns="0" rIns="0" bIns="0" anchor="t">
-            <a:normAutofit/>
-          </a:bodyPr>
-          <a:lstStyle/>
-          <a:p>
-            <a:pPr marL="0" marR="0" lvl="0" indent="0" algn="l" defTabSz="914400" rtl="0" eaLnBrk="1" fontAlgn="auto" latinLnBrk="0" hangingPunct="1">
-              <a:lnSpc>
-                <a:spcPct val="100000"/>
-              </a:lnSpc>
-              <a:spcBef>
-                <a:spcPts val="0"/>
-              </a:spcBef>
-              <a:spcAft>
-                <a:spcPts val="0"/>
-              </a:spcAft>
-              <a:buClrTx/>
-              <a:buSzTx/>
-              <a:buFontTx/>
-              <a:buNone/>
-              <a:tabLst/>
-              <a:defRPr/>
-            </a:pPr>
-            <a:r>
-              <a:rPr kumimoji="0" lang="en-US" sz="1200" b="1" i="0" u="none" strike="noStrike" kern="1200" cap="none" spc="0" normalizeH="0" baseline="0" noProof="0">
-                <a:ln>
-                  <a:noFill/>
-                </a:ln>
-                <a:solidFill>
-                  <a:srgbClr val="FF4B00"/>
-                </a:solidFill>
-                <a:effectLst/>
-                <a:uLnTx/>
-                <a:uFillTx/>
-                <a:latin typeface="Arial"/>
-                <a:ea typeface="+mn-ea"/>
-                <a:cs typeface="+mn-cs"/>
-              </a:rPr>
-              <a:t>02</a:t>
-            </a:r>
-          </a:p>
-        </p:txBody>
-      </p:sp>
-      <p:sp>
-        <p:nvSpPr>
-          <p:cNvPr id="35" name="TextBox 34"/>
-          <p:cNvSpPr txBox="1">
-            <a:spLocks/>
-          </p:cNvSpPr>
-          <p:nvPr/>
-        </p:nvSpPr>
-        <p:spPr>
-          <a:xfrm>
-            <a:off x="4700016" y="2441448"/>
-            <a:ext cx="2468880" cy="274320"/>
+                <a:latin typeface="Arial"/>
+              </a:rPr>
+              <a:t>POLICY ENFORCEMENT</a:t>
+            </a:r>
+            <a:endParaRPr sz="1200" b="1">
+              <a:solidFill>
+                <a:srgbClr val="121212"/>
+              </a:solidFill>
+              <a:latin typeface="Arial"/>
+            </a:endParaRPr>
+          </a:p>
+        </p:txBody>
+      </p:sp>
+      <p:sp>
+        <p:nvSpPr>
+          <p:cNvPr id="105" name="Constraint Principle"/>
+          <p:cNvSpPr txBox="1"/>
+          <p:nvPr/>
+        </p:nvSpPr>
+        <p:spPr>
+          <a:xfrm>
+            <a:off x="640080" y="4828032"/>
+            <a:ext cx="2514600" cy="323165"/>
           </a:xfrm>
           <a:prstGeom prst="rect">
             <a:avLst/>
@@ -14080,55 +13669,126 @@
           </a:bodyPr>
           <a:lstStyle/>
           <a:p>
-            <a:pPr marL="0" marR="0" lvl="0" indent="0" algn="l" defTabSz="914400" rtl="0" eaLnBrk="1" fontAlgn="auto" latinLnBrk="0" hangingPunct="1">
-              <a:lnSpc>
-                <a:spcPct val="100000"/>
-              </a:lnSpc>
-              <a:spcBef>
-                <a:spcPts val="0"/>
-              </a:spcBef>
-              <a:spcAft>
-                <a:spcPts val="0"/>
-              </a:spcAft>
-              <a:buClrTx/>
-              <a:buSzTx/>
-              <a:buFontTx/>
-              <a:buNone/>
-              <a:tabLst/>
-              <a:defRPr/>
-            </a:pPr>
-            <a:r>
-              <a:rPr kumimoji="0" lang="en-US" sz="1400" b="1" i="0" u="none" strike="noStrike" kern="1200" cap="none" spc="0" normalizeH="0" baseline="0" noProof="0">
-                <a:ln>
-                  <a:noFill/>
-                </a:ln>
+            <a:pPr algn="l"/>
+            <a:r>
+              <a:rPr lang="en-US" sz="1050" b="1">
+                <a:solidFill>
+                  <a:srgbClr val="55504A"/>
+                </a:solidFill>
+                <a:latin typeface="Arial"/>
+              </a:rPr>
+              <a:t>Customize the edge; standardize </a:t>
+            </a:r>
+            <a:r>
+              <a:rPr sz="1050" b="1">
+                <a:solidFill>
+                  <a:srgbClr val="55504A"/>
+                </a:solidFill>
+                <a:latin typeface="Arial"/>
+              </a:rPr>
+              <a:t>the </a:t>
+            </a:r>
+            <a:r>
+              <a:rPr lang="en-US" sz="1050" b="1">
+                <a:solidFill>
+                  <a:srgbClr val="55504A"/>
+                </a:solidFill>
+                <a:latin typeface="Arial"/>
+              </a:rPr>
+              <a:t>pattern</a:t>
+            </a:r>
+            <a:r>
+              <a:rPr sz="1050" b="1">
+                <a:solidFill>
+                  <a:srgbClr val="55504A"/>
+                </a:solidFill>
+                <a:latin typeface="Arial"/>
+              </a:rPr>
+              <a:t>.</a:t>
+            </a:r>
+          </a:p>
+        </p:txBody>
+      </p:sp>
+      <p:sp>
+        <p:nvSpPr>
+          <p:cNvPr id="106" name="Section 02 Number"/>
+          <p:cNvSpPr txBox="1"/>
+          <p:nvPr/>
+        </p:nvSpPr>
+        <p:spPr>
+          <a:xfrm>
+            <a:off x="3794760" y="2221992"/>
+            <a:ext cx="384048" cy="201168"/>
+          </a:xfrm>
+          <a:prstGeom prst="rect">
+            <a:avLst/>
+          </a:prstGeom>
+          <a:noFill/>
+        </p:spPr>
+        <p:txBody>
+          <a:bodyPr wrap="square" lIns="0" tIns="0" rIns="0" bIns="0" anchor="ctr">
+            <a:spAutoFit/>
+          </a:bodyPr>
+          <a:lstStyle/>
+          <a:p>
+            <a:pPr algn="l"/>
+            <a:r>
+              <a:rPr sz="1200" b="1">
                 <a:solidFill>
                   <a:srgbClr val="FF4B00"/>
                 </a:solidFill>
-                <a:effectLst/>
-                <a:uLnTx/>
-                <a:uFillTx/>
-                <a:latin typeface="Arial"/>
-                <a:ea typeface="+mn-ea"/>
-                <a:cs typeface="+mn-cs"/>
-              </a:rPr>
-              <a:t>PRODUCTIZED ANSWER</a:t>
-            </a:r>
-          </a:p>
-        </p:txBody>
-      </p:sp>
-      <p:sp>
-        <p:nvSpPr>
-          <p:cNvPr id="36" name="TextBox 35"/>
-          <p:cNvSpPr txBox="1">
-            <a:spLocks/>
-          </p:cNvSpPr>
-          <p:nvPr/>
-        </p:nvSpPr>
-        <p:spPr>
-          <a:xfrm>
-            <a:off x="4114800" y="3127248"/>
-            <a:ext cx="3291840" cy="861774"/>
+                <a:latin typeface="Arial"/>
+              </a:rPr>
+              <a:t>02</a:t>
+            </a:r>
+          </a:p>
+        </p:txBody>
+      </p:sp>
+      <p:sp>
+        <p:nvSpPr>
+          <p:cNvPr id="107" name="Section 02 Label"/>
+          <p:cNvSpPr txBox="1"/>
+          <p:nvPr/>
+        </p:nvSpPr>
+        <p:spPr>
+          <a:xfrm>
+            <a:off x="4206240" y="2212848"/>
+            <a:ext cx="3081527" cy="274320"/>
+          </a:xfrm>
+          <a:prstGeom prst="rect">
+            <a:avLst/>
+          </a:prstGeom>
+          <a:noFill/>
+        </p:spPr>
+        <p:txBody>
+          <a:bodyPr wrap="square" lIns="0" tIns="0" rIns="0" bIns="0" anchor="ctr">
+            <a:spAutoFit/>
+          </a:bodyPr>
+          <a:lstStyle/>
+          <a:p>
+            <a:pPr algn="l"/>
+            <a:r>
+              <a:rPr sz="1400" b="1">
+                <a:solidFill>
+                  <a:srgbClr val="FF4B00"/>
+                </a:solidFill>
+                <a:latin typeface="Arial"/>
+              </a:rPr>
+              <a:t>MATCH THE THREAT MODEL</a:t>
+            </a:r>
+          </a:p>
+        </p:txBody>
+      </p:sp>
+      <p:sp>
+        <p:nvSpPr>
+          <p:cNvPr id="108" name="Architecture Thesis"/>
+          <p:cNvSpPr txBox="1"/>
+          <p:nvPr/>
+        </p:nvSpPr>
+        <p:spPr>
+          <a:xfrm>
+            <a:off x="3794760" y="2770632"/>
+            <a:ext cx="3429000" cy="692497"/>
           </a:xfrm>
           <a:prstGeom prst="rect">
             <a:avLst/>
@@ -14141,55 +13801,64 @@
           </a:bodyPr>
           <a:lstStyle/>
           <a:p>
-            <a:pPr marL="0" marR="0" lvl="0" indent="0" algn="l" defTabSz="914400" rtl="0" eaLnBrk="1" fontAlgn="auto" latinLnBrk="0" hangingPunct="1">
-              <a:lnSpc>
-                <a:spcPct val="100000"/>
-              </a:lnSpc>
-              <a:spcBef>
-                <a:spcPts val="0"/>
-              </a:spcBef>
-              <a:spcAft>
-                <a:spcPts val="0"/>
-              </a:spcAft>
-              <a:buClrTx/>
-              <a:buSzTx/>
-              <a:buFontTx/>
-              <a:buNone/>
-              <a:tabLst/>
-              <a:defRPr/>
-            </a:pPr>
-            <a:r>
-              <a:rPr kumimoji="0" lang="en-US" sz="1400" b="0" i="0" u="none" strike="noStrike" kern="1200" cap="none" spc="0" normalizeH="0" baseline="0" noProof="0">
-                <a:ln>
-                  <a:noFill/>
-                </a:ln>
+            <a:pPr algn="l"/>
+            <a:r>
+              <a:rPr lang="en-US" sz="1500" b="1">
                 <a:solidFill>
                   <a:srgbClr val="121212"/>
                 </a:solidFill>
-                <a:effectLst/>
-                <a:uLnTx/>
-                <a:uFillTx/>
-                <a:latin typeface="Arial"/>
-                <a:ea typeface="+mn-ea"/>
-                <a:cs typeface="+mn-cs"/>
-              </a:rPr>
-              <a:t>Cross-functional playbook across product, engineering, legal and field: data residency, customer-controlled keys and compliance by design.</a:t>
-            </a:r>
-          </a:p>
-        </p:txBody>
-      </p:sp>
-      <p:sp>
-        <p:nvSpPr>
-          <p:cNvPr id="37" name="TextBox 36"/>
-          <p:cNvSpPr txBox="1">
-            <a:spLocks/>
-          </p:cNvSpPr>
-          <p:nvPr/>
-        </p:nvSpPr>
-        <p:spPr>
-          <a:xfrm>
-            <a:off x="4114800" y="4151376"/>
-            <a:ext cx="3291840" cy="646331"/>
+                <a:latin typeface="Arial"/>
+              </a:rPr>
+              <a:t>Choose architecture against the actual threat model and production SLA.</a:t>
+            </a:r>
+          </a:p>
+        </p:txBody>
+      </p:sp>
+      <p:sp>
+        <p:nvSpPr>
+          <p:cNvPr id="109" name="FHE Metric"/>
+          <p:cNvSpPr txBox="1"/>
+          <p:nvPr/>
+        </p:nvSpPr>
+        <p:spPr>
+          <a:xfrm>
+            <a:off x="3794760" y="3401568"/>
+            <a:ext cx="1097280" cy="365760"/>
+          </a:xfrm>
+          <a:prstGeom prst="rect">
+            <a:avLst/>
+          </a:prstGeom>
+          <a:noFill/>
+        </p:spPr>
+        <p:txBody>
+          <a:bodyPr wrap="square" lIns="0" tIns="0" rIns="0" bIns="0" anchor="ctr">
+            <a:spAutoFit/>
+          </a:bodyPr>
+          <a:lstStyle/>
+          <a:p>
+            <a:pPr algn="l"/>
+            <a:r>
+              <a:rPr sz="2700" b="1">
+                <a:solidFill>
+                  <a:srgbClr val="FF4B00"/>
+                </a:solidFill>
+                <a:latin typeface="Arial"/>
+              </a:rPr>
+              <a:t>~14s</a:t>
+            </a:r>
+          </a:p>
+        </p:txBody>
+      </p:sp>
+      <p:sp>
+        <p:nvSpPr>
+          <p:cNvPr id="110" name="FHE Label"/>
+          <p:cNvSpPr txBox="1"/>
+          <p:nvPr/>
+        </p:nvSpPr>
+        <p:spPr>
+          <a:xfrm>
+            <a:off x="4800600" y="3438144"/>
+            <a:ext cx="2267712" cy="353943"/>
           </a:xfrm>
           <a:prstGeom prst="rect">
             <a:avLst/>
@@ -14202,60 +13871,204 @@
           </a:bodyPr>
           <a:lstStyle/>
           <a:p>
-            <a:pPr marL="0" marR="0" lvl="0" indent="0" algn="l" defTabSz="914400" rtl="0" eaLnBrk="1" fontAlgn="auto" latinLnBrk="0" hangingPunct="1">
-              <a:lnSpc>
-                <a:spcPct val="100000"/>
-              </a:lnSpc>
-              <a:spcBef>
-                <a:spcPts val="0"/>
-              </a:spcBef>
-              <a:spcAft>
-                <a:spcPts val="0"/>
-              </a:spcAft>
-              <a:buClrTx/>
-              <a:buSzTx/>
-              <a:buFontTx/>
-              <a:buNone/>
-              <a:tabLst/>
-              <a:defRPr/>
-            </a:pPr>
-            <a:r>
-              <a:rPr kumimoji="0" lang="en-US" sz="1400" b="0" i="0" u="none" strike="noStrike" kern="1200" cap="none" spc="0" normalizeH="0" baseline="0" noProof="0">
-                <a:ln>
-                  <a:noFill/>
-                </a:ln>
-                <a:solidFill>
-                  <a:srgbClr val="121212"/>
-                </a:solidFill>
-                <a:effectLst/>
-                <a:uLnTx/>
-                <a:uFillTx/>
-                <a:latin typeface="Arial"/>
-                <a:ea typeface="+mn-ea"/>
-                <a:cs typeface="+mn-cs"/>
-              </a:rPr>
-              <a:t>Technical unlock: replaced FHE with confidential computing to run secure architecture at production latency.</a:t>
-            </a:r>
+            <a:pPr algn="l"/>
+            <a:r>
+              <a:rPr sz="1150" b="1">
+                <a:solidFill>
+                  <a:srgbClr val="55504A"/>
+                </a:solidFill>
+                <a:latin typeface="Arial"/>
+              </a:rPr>
+              <a:t>FHE-based </a:t>
+            </a:r>
+            <a:r>
+              <a:rPr lang="en-US" sz="1150" b="1">
+                <a:solidFill>
+                  <a:srgbClr val="55504A"/>
+                </a:solidFill>
+                <a:latin typeface="Arial"/>
+              </a:rPr>
+              <a:t>architecture · inference latency</a:t>
+            </a:r>
+            <a:endParaRPr sz="1150" b="1">
+              <a:solidFill>
+                <a:srgbClr val="55504A"/>
+              </a:solidFill>
+              <a:latin typeface="Arial"/>
+            </a:endParaRPr>
+          </a:p>
+        </p:txBody>
+      </p:sp>
+      <p:sp>
+        <p:nvSpPr>
+          <p:cNvPr id="111" name="Architecture Reframe"/>
+          <p:cNvSpPr txBox="1"/>
+          <p:nvPr/>
+        </p:nvSpPr>
+        <p:spPr>
+          <a:xfrm>
+            <a:off x="3794760" y="3812155"/>
+            <a:ext cx="3429000" cy="184666"/>
+          </a:xfrm>
+          <a:prstGeom prst="rect">
+            <a:avLst/>
+          </a:prstGeom>
+          <a:noFill/>
+        </p:spPr>
+        <p:txBody>
+          <a:bodyPr wrap="square" lIns="0" tIns="0" rIns="0" bIns="0" anchor="ctr">
+            <a:spAutoFit/>
+          </a:bodyPr>
+          <a:lstStyle/>
+          <a:p>
+            <a:pPr algn="ctr"/>
+            <a:r>
+              <a:rPr sz="1200" b="1">
+                <a:solidFill>
+                  <a:srgbClr val="FF4B00"/>
+                </a:solidFill>
+                <a:latin typeface="Arial"/>
+              </a:rPr>
+              <a:t>↓  </a:t>
+            </a:r>
+            <a:r>
+              <a:rPr lang="en-US" sz="1200" b="1">
+                <a:solidFill>
+                  <a:srgbClr val="FF4B00"/>
+                </a:solidFill>
+                <a:latin typeface="Arial"/>
+              </a:rPr>
+              <a:t>re-check </a:t>
+            </a:r>
+            <a:r>
+              <a:rPr sz="1200" b="1">
+                <a:solidFill>
+                  <a:srgbClr val="FF4B00"/>
+                </a:solidFill>
+                <a:latin typeface="Arial"/>
+              </a:rPr>
+              <a:t>threat model</a:t>
+            </a:r>
+            <a:r>
+              <a:rPr lang="en-US" sz="1200" b="1">
+                <a:solidFill>
+                  <a:srgbClr val="FF4B00"/>
+                </a:solidFill>
+                <a:latin typeface="Arial"/>
+              </a:rPr>
+              <a:t> + required controls</a:t>
+            </a:r>
+            <a:endParaRPr sz="1200" b="1">
+              <a:solidFill>
+                <a:srgbClr val="FF4B00"/>
+              </a:solidFill>
+              <a:latin typeface="Arial"/>
+            </a:endParaRPr>
+          </a:p>
+        </p:txBody>
+      </p:sp>
+      <p:sp>
+        <p:nvSpPr>
+          <p:cNvPr id="112" name="CC Metric"/>
+          <p:cNvSpPr txBox="1"/>
+          <p:nvPr/>
+        </p:nvSpPr>
+        <p:spPr>
+          <a:xfrm>
+            <a:off x="3794760" y="4078224"/>
+            <a:ext cx="1481328" cy="365760"/>
+          </a:xfrm>
+          <a:prstGeom prst="rect">
+            <a:avLst/>
+          </a:prstGeom>
+          <a:noFill/>
+        </p:spPr>
+        <p:txBody>
+          <a:bodyPr wrap="square" lIns="0" tIns="0" rIns="0" bIns="0" anchor="ctr">
+            <a:spAutoFit/>
+          </a:bodyPr>
+          <a:lstStyle/>
+          <a:p>
+            <a:pPr algn="l"/>
+            <a:r>
+              <a:rPr sz="2400" b="1">
+                <a:solidFill>
+                  <a:srgbClr val="FF4B00"/>
+                </a:solidFill>
+                <a:latin typeface="Arial"/>
+              </a:rPr>
+              <a:t>~220ms</a:t>
+            </a:r>
+          </a:p>
+        </p:txBody>
+      </p:sp>
+      <p:sp>
+        <p:nvSpPr>
+          <p:cNvPr id="113" name="CC Label"/>
+          <p:cNvSpPr txBox="1"/>
+          <p:nvPr/>
+        </p:nvSpPr>
+        <p:spPr>
+          <a:xfrm>
+            <a:off x="5230368" y="4114800"/>
+            <a:ext cx="1883664" cy="353943"/>
+          </a:xfrm>
+          <a:prstGeom prst="rect">
+            <a:avLst/>
+          </a:prstGeom>
+          <a:noFill/>
+        </p:spPr>
+        <p:txBody>
+          <a:bodyPr wrap="square" lIns="0" tIns="0" rIns="0" bIns="0" anchor="t">
+            <a:spAutoFit/>
+          </a:bodyPr>
+          <a:lstStyle/>
+          <a:p>
+            <a:pPr algn="l"/>
+            <a:r>
+              <a:rPr sz="1150" b="1">
+                <a:solidFill>
+                  <a:srgbClr val="55504A"/>
+                </a:solidFill>
+                <a:latin typeface="Arial"/>
+              </a:rPr>
+              <a:t>confidential computing </a:t>
+            </a:r>
+            <a:r>
+              <a:rPr lang="en-US" sz="1150" b="1">
+                <a:solidFill>
+                  <a:srgbClr val="55504A"/>
+                </a:solidFill>
+                <a:latin typeface="Arial"/>
+              </a:rPr>
+              <a:t>· controls met</a:t>
+            </a:r>
+            <a:endParaRPr sz="1150" b="1">
+              <a:solidFill>
+                <a:srgbClr val="55504A"/>
+              </a:solidFill>
+              <a:latin typeface="Arial"/>
+            </a:endParaRPr>
           </a:p>
         </p:txBody>
       </p:sp>
       <p:cxnSp>
         <p:nvCxnSpPr>
-          <p:cNvPr id="38" name="Connector 37"/>
+          <p:cNvPr id="114" name="Architecture Divider"/>
           <p:cNvCxnSpPr/>
           <p:nvPr/>
         </p:nvCxnSpPr>
         <p:spPr>
           <a:xfrm>
-            <a:off x="4114800" y="4956048"/>
-            <a:ext cx="3337560" cy="0"/>
+            <a:off x="3794760" y="4572000"/>
+            <a:ext cx="3429000" cy="0"/>
           </a:xfrm>
           <a:prstGeom prst="line">
             <a:avLst/>
           </a:prstGeom>
-          <a:ln w="25400">
+          <a:ln w="10160">
             <a:solidFill>
-              <a:srgbClr val="FF4B00"/>
+              <a:srgbClr val="D9D5CE"/>
             </a:solidFill>
           </a:ln>
         </p:spPr>
@@ -14276,16 +14089,14 @@
       </p:cxnSp>
       <p:sp>
         <p:nvSpPr>
-          <p:cNvPr id="39" name="TextBox 38"/>
-          <p:cNvSpPr txBox="1">
-            <a:spLocks/>
-          </p:cNvSpPr>
-          <p:nvPr/>
-        </p:nvSpPr>
-        <p:spPr>
-          <a:xfrm>
-            <a:off x="4114800" y="5157216"/>
-            <a:ext cx="3337560" cy="492443"/>
+          <p:cNvPr id="115" name="Technical Nuance"/>
+          <p:cNvSpPr txBox="1"/>
+          <p:nvPr/>
+        </p:nvSpPr>
+        <p:spPr>
+          <a:xfrm>
+            <a:off x="3794760" y="4663440"/>
+            <a:ext cx="3429000" cy="323165"/>
           </a:xfrm>
           <a:prstGeom prst="rect">
             <a:avLst/>
@@ -14298,55 +14109,141 @@
           </a:bodyPr>
           <a:lstStyle/>
           <a:p>
-            <a:pPr marL="0" marR="0" lvl="0" indent="0" algn="ctr" defTabSz="914400" rtl="0" eaLnBrk="1" fontAlgn="auto" latinLnBrk="0" hangingPunct="1">
-              <a:lnSpc>
-                <a:spcPct val="100000"/>
-              </a:lnSpc>
-              <a:spcBef>
-                <a:spcPts val="0"/>
-              </a:spcBef>
-              <a:spcAft>
-                <a:spcPts val="0"/>
-              </a:spcAft>
-              <a:buClrTx/>
-              <a:buSzTx/>
-              <a:buFontTx/>
-              <a:buNone/>
-              <a:tabLst/>
-              <a:defRPr/>
-            </a:pPr>
-            <a:r>
-              <a:rPr kumimoji="0" lang="en-US" sz="3200" b="1" i="0" u="none" strike="noStrike" kern="1200" cap="none" spc="0" normalizeH="0" baseline="0" noProof="0">
-                <a:ln>
-                  <a:noFill/>
-                </a:ln>
+            <a:pPr algn="l"/>
+            <a:r>
+              <a:rPr sz="1050" b="0">
+                <a:solidFill>
+                  <a:srgbClr val="55504A"/>
+                </a:solidFill>
+                <a:latin typeface="Arial"/>
+              </a:rPr>
+              <a:t>Different </a:t>
+            </a:r>
+            <a:r>
+              <a:rPr lang="en-US" sz="1050" b="0">
+                <a:solidFill>
+                  <a:srgbClr val="55504A"/>
+                </a:solidFill>
+                <a:latin typeface="Arial"/>
+              </a:rPr>
+              <a:t>security </a:t>
+            </a:r>
+            <a:r>
+              <a:rPr sz="1050" b="0">
+                <a:solidFill>
+                  <a:srgbClr val="55504A"/>
+                </a:solidFill>
+                <a:latin typeface="Arial"/>
+              </a:rPr>
+              <a:t>models—not </a:t>
+            </a:r>
+            <a:r>
+              <a:rPr lang="en-US" sz="1050" b="0">
+                <a:solidFill>
+                  <a:srgbClr val="55504A"/>
+                </a:solidFill>
+                <a:latin typeface="Arial"/>
+              </a:rPr>
+              <a:t>slow vs. fast versions of the same design</a:t>
+            </a:r>
+            <a:r>
+              <a:rPr sz="1050" b="0">
+                <a:solidFill>
+                  <a:srgbClr val="55504A"/>
+                </a:solidFill>
+                <a:latin typeface="Arial"/>
+              </a:rPr>
+              <a:t>.</a:t>
+            </a:r>
+          </a:p>
+        </p:txBody>
+      </p:sp>
+      <p:sp>
+        <p:nvSpPr>
+          <p:cNvPr id="116" name="Section 03 Number"/>
+          <p:cNvSpPr txBox="1"/>
+          <p:nvPr/>
+        </p:nvSpPr>
+        <p:spPr>
+          <a:xfrm>
+            <a:off x="7973568" y="2221992"/>
+            <a:ext cx="384048" cy="201168"/>
+          </a:xfrm>
+          <a:prstGeom prst="rect">
+            <a:avLst/>
+          </a:prstGeom>
+          <a:noFill/>
+        </p:spPr>
+        <p:txBody>
+          <a:bodyPr wrap="square" lIns="0" tIns="0" rIns="0" bIns="0" anchor="ctr">
+            <a:spAutoFit/>
+          </a:bodyPr>
+          <a:lstStyle/>
+          <a:p>
+            <a:pPr algn="l"/>
+            <a:r>
+              <a:rPr sz="1200" b="1">
                 <a:solidFill>
                   <a:srgbClr val="FF4B00"/>
                 </a:solidFill>
-                <a:effectLst/>
-                <a:uLnTx/>
-                <a:uFillTx/>
-                <a:latin typeface="Arial"/>
-                <a:ea typeface="+mn-ea"/>
-                <a:cs typeface="+mn-cs"/>
-              </a:rPr>
-              <a:t>14s → 220ms</a:t>
-            </a:r>
-          </a:p>
-        </p:txBody>
-      </p:sp>
-      <p:sp>
-        <p:nvSpPr>
-          <p:cNvPr id="40" name="TextBox 39"/>
-          <p:cNvSpPr txBox="1">
-            <a:spLocks/>
-          </p:cNvSpPr>
-          <p:nvPr/>
-        </p:nvSpPr>
-        <p:spPr>
-          <a:xfrm>
-            <a:off x="4114800" y="5742432"/>
-            <a:ext cx="3337560" cy="184666"/>
+                <a:latin typeface="Arial"/>
+              </a:rPr>
+              <a:t>03</a:t>
+            </a:r>
+          </a:p>
+        </p:txBody>
+      </p:sp>
+      <p:sp>
+        <p:nvSpPr>
+          <p:cNvPr id="117" name="Section 03 Label"/>
+          <p:cNvSpPr txBox="1"/>
+          <p:nvPr/>
+        </p:nvSpPr>
+        <p:spPr>
+          <a:xfrm>
+            <a:off x="8385048" y="2242286"/>
+            <a:ext cx="2971800" cy="215444"/>
+          </a:xfrm>
+          <a:prstGeom prst="rect">
+            <a:avLst/>
+          </a:prstGeom>
+          <a:noFill/>
+        </p:spPr>
+        <p:txBody>
+          <a:bodyPr wrap="square" lIns="0" tIns="0" rIns="0" bIns="0" anchor="ctr">
+            <a:spAutoFit/>
+          </a:bodyPr>
+          <a:lstStyle/>
+          <a:p>
+            <a:pPr algn="l"/>
+            <a:r>
+              <a:rPr lang="en-US" sz="1400" b="1">
+                <a:solidFill>
+                  <a:srgbClr val="FF4B00"/>
+                </a:solidFill>
+                <a:latin typeface="Arial"/>
+              </a:rPr>
+              <a:t>FDE → PMM → SCALE</a:t>
+            </a:r>
+            <a:endParaRPr sz="1400" b="1">
+              <a:solidFill>
+                <a:srgbClr val="FF4B00"/>
+              </a:solidFill>
+              <a:latin typeface="Arial"/>
+            </a:endParaRPr>
+          </a:p>
+        </p:txBody>
+      </p:sp>
+      <p:sp>
+        <p:nvSpPr>
+          <p:cNvPr id="118" name="Scale Thesis"/>
+          <p:cNvSpPr txBox="1"/>
+          <p:nvPr/>
+        </p:nvSpPr>
+        <p:spPr>
+          <a:xfrm>
+            <a:off x="7973568" y="2761488"/>
+            <a:ext cx="3246120" cy="492443"/>
           </a:xfrm>
           <a:prstGeom prst="rect">
             <a:avLst/>
@@ -14359,116 +14256,56 @@
           </a:bodyPr>
           <a:lstStyle/>
           <a:p>
-            <a:pPr marL="0" marR="0" lvl="0" indent="0" algn="ctr" defTabSz="914400" rtl="0" eaLnBrk="1" fontAlgn="auto" latinLnBrk="0" hangingPunct="1">
-              <a:lnSpc>
-                <a:spcPct val="100000"/>
-              </a:lnSpc>
-              <a:spcBef>
-                <a:spcPts val="0"/>
-              </a:spcBef>
-              <a:spcAft>
-                <a:spcPts val="0"/>
-              </a:spcAft>
-              <a:buClrTx/>
-              <a:buSzTx/>
-              <a:buFontTx/>
-              <a:buNone/>
-              <a:tabLst/>
-              <a:defRPr/>
-            </a:pPr>
-            <a:r>
-              <a:rPr kumimoji="0" lang="en-US" sz="1200" b="1" i="0" u="none" strike="noStrike" kern="1200" cap="none" spc="0" normalizeH="0" baseline="0" noProof="0">
-                <a:ln>
-                  <a:noFill/>
-                </a:ln>
-                <a:solidFill>
-                  <a:srgbClr val="55504A"/>
-                </a:solidFill>
-                <a:effectLst/>
-                <a:uLnTx/>
-                <a:uFillTx/>
-                <a:latin typeface="Arial"/>
-                <a:ea typeface="+mn-ea"/>
-                <a:cs typeface="+mn-cs"/>
-              </a:rPr>
-              <a:t>secure production latency</a:t>
-            </a:r>
-          </a:p>
-        </p:txBody>
-      </p:sp>
-      <p:sp>
-        <p:nvSpPr>
-          <p:cNvPr id="41" name="TextBox 40"/>
-          <p:cNvSpPr txBox="1">
-            <a:spLocks/>
-          </p:cNvSpPr>
-          <p:nvPr/>
-        </p:nvSpPr>
-        <p:spPr>
-          <a:xfrm>
-            <a:off x="8759952" y="2221992"/>
-            <a:ext cx="457200" cy="201168"/>
-          </a:xfrm>
-          <a:prstGeom prst="rect">
-            <a:avLst/>
-          </a:prstGeom>
-          <a:noFill/>
-        </p:spPr>
-        <p:txBody>
-          <a:bodyPr wrap="square" lIns="0" tIns="0" rIns="0" bIns="0" anchor="t">
-            <a:normAutofit/>
-          </a:bodyPr>
-          <a:lstStyle/>
-          <a:p>
-            <a:pPr marL="0" marR="0" lvl="0" indent="0" algn="l" defTabSz="914400" rtl="0" eaLnBrk="1" fontAlgn="auto" latinLnBrk="0" hangingPunct="1">
-              <a:lnSpc>
-                <a:spcPct val="100000"/>
-              </a:lnSpc>
-              <a:spcBef>
-                <a:spcPts val="0"/>
-              </a:spcBef>
-              <a:spcAft>
-                <a:spcPts val="0"/>
-              </a:spcAft>
-              <a:buClrTx/>
-              <a:buSzTx/>
-              <a:buFontTx/>
-              <a:buNone/>
-              <a:tabLst/>
-              <a:defRPr/>
-            </a:pPr>
-            <a:r>
-              <a:rPr kumimoji="0" lang="en-US" sz="1200" b="1" i="0" u="none" strike="noStrike" kern="1200" cap="none" spc="0" normalizeH="0" baseline="0" noProof="0">
-                <a:ln>
-                  <a:noFill/>
-                </a:ln>
-                <a:solidFill>
-                  <a:srgbClr val="FF4B00"/>
-                </a:solidFill>
-                <a:effectLst/>
-                <a:uLnTx/>
-                <a:uFillTx/>
-                <a:latin typeface="Arial"/>
-                <a:ea typeface="+mn-ea"/>
-                <a:cs typeface="+mn-cs"/>
-              </a:rPr>
-              <a:t>03</a:t>
-            </a:r>
-          </a:p>
-        </p:txBody>
-      </p:sp>
-      <p:sp>
-        <p:nvSpPr>
-          <p:cNvPr id="42" name="TextBox 41"/>
-          <p:cNvSpPr txBox="1">
-            <a:spLocks/>
-          </p:cNvSpPr>
-          <p:nvPr/>
-        </p:nvSpPr>
-        <p:spPr>
-          <a:xfrm>
-            <a:off x="8759952" y="2441448"/>
-            <a:ext cx="2286000" cy="274320"/>
+            <a:pPr algn="l"/>
+            <a:r>
+              <a:rPr lang="en-US" sz="1600" b="1">
+                <a:solidFill>
+                  <a:srgbClr val="121212"/>
+                </a:solidFill>
+                <a:latin typeface="Arial"/>
+              </a:rPr>
+              <a:t>Turn one working deployment </a:t>
+            </a:r>
+            <a:r>
+              <a:rPr sz="1600" b="1">
+                <a:solidFill>
+                  <a:srgbClr val="121212"/>
+                </a:solidFill>
+                <a:latin typeface="Arial"/>
+              </a:rPr>
+              <a:t>into a </a:t>
+            </a:r>
+            <a:r>
+              <a:rPr lang="en-US" sz="1600" b="1">
+                <a:solidFill>
+                  <a:srgbClr val="121212"/>
+                </a:solidFill>
+                <a:latin typeface="Arial"/>
+              </a:rPr>
+              <a:t>reusable market asset</a:t>
+            </a:r>
+            <a:r>
+              <a:rPr sz="1600" b="1">
+                <a:solidFill>
+                  <a:srgbClr val="121212"/>
+                </a:solidFill>
+                <a:latin typeface="Arial"/>
+              </a:rPr>
+              <a:t>.</a:t>
+            </a:r>
+          </a:p>
+        </p:txBody>
+      </p:sp>
+      <p:sp>
+        <p:nvSpPr>
+          <p:cNvPr id="119" name="Step Number 1"/>
+          <p:cNvSpPr txBox="1"/>
+          <p:nvPr/>
+        </p:nvSpPr>
+        <p:spPr>
+          <a:xfrm>
+            <a:off x="7973568" y="3291840"/>
+            <a:ext cx="256032" cy="201168"/>
           </a:xfrm>
           <a:prstGeom prst="rect">
             <a:avLst/>
@@ -14481,55 +14318,29 @@
           </a:bodyPr>
           <a:lstStyle/>
           <a:p>
-            <a:pPr marL="0" marR="0" lvl="0" indent="0" algn="l" defTabSz="914400" rtl="0" eaLnBrk="1" fontAlgn="auto" latinLnBrk="0" hangingPunct="1">
-              <a:lnSpc>
-                <a:spcPct val="100000"/>
-              </a:lnSpc>
-              <a:spcBef>
-                <a:spcPts val="0"/>
-              </a:spcBef>
-              <a:spcAft>
-                <a:spcPts val="0"/>
-              </a:spcAft>
-              <a:buClrTx/>
-              <a:buSzTx/>
-              <a:buFontTx/>
-              <a:buNone/>
-              <a:tabLst/>
-              <a:defRPr/>
-            </a:pPr>
-            <a:r>
-              <a:rPr kumimoji="0" lang="en-US" sz="1400" b="1" i="0" u="none" strike="noStrike" kern="1200" cap="none" spc="0" normalizeH="0" baseline="0" noProof="0">
-                <a:ln>
-                  <a:noFill/>
-                </a:ln>
+            <a:pPr algn="l"/>
+            <a:r>
+              <a:rPr sz="1200" b="1">
                 <a:solidFill>
                   <a:srgbClr val="FF4B00"/>
                 </a:solidFill>
-                <a:effectLst/>
-                <a:uLnTx/>
-                <a:uFillTx/>
-                <a:latin typeface="Arial"/>
-                <a:ea typeface="+mn-ea"/>
-                <a:cs typeface="+mn-cs"/>
-              </a:rPr>
-              <a:t>FIELD PROOF</a:t>
-            </a:r>
-          </a:p>
-        </p:txBody>
-      </p:sp>
-      <p:sp>
-        <p:nvSpPr>
-          <p:cNvPr id="43" name="TextBox 42"/>
-          <p:cNvSpPr txBox="1">
-            <a:spLocks/>
-          </p:cNvSpPr>
-          <p:nvPr/>
-        </p:nvSpPr>
-        <p:spPr>
-          <a:xfrm>
-            <a:off x="8156448" y="3163824"/>
-            <a:ext cx="1627632" cy="369332"/>
+                <a:latin typeface="Arial"/>
+              </a:rPr>
+              <a:t>1</a:t>
+            </a:r>
+          </a:p>
+        </p:txBody>
+      </p:sp>
+      <p:sp>
+        <p:nvSpPr>
+          <p:cNvPr id="120" name="Step Label 1"/>
+          <p:cNvSpPr txBox="1"/>
+          <p:nvPr/>
+        </p:nvSpPr>
+        <p:spPr>
+          <a:xfrm>
+            <a:off x="8275320" y="3291840"/>
+            <a:ext cx="1005840" cy="182880"/>
           </a:xfrm>
           <a:prstGeom prst="rect">
             <a:avLst/>
@@ -14542,55 +14353,35 @@
           </a:bodyPr>
           <a:lstStyle/>
           <a:p>
-            <a:pPr marL="0" marR="0" lvl="0" indent="0" algn="l" defTabSz="914400" rtl="0" eaLnBrk="1" fontAlgn="auto" latinLnBrk="0" hangingPunct="1">
-              <a:lnSpc>
-                <a:spcPct val="100000"/>
-              </a:lnSpc>
-              <a:spcBef>
-                <a:spcPts val="0"/>
-              </a:spcBef>
-              <a:spcAft>
-                <a:spcPts val="0"/>
-              </a:spcAft>
-              <a:buClrTx/>
-              <a:buSzTx/>
-              <a:buFontTx/>
-              <a:buNone/>
-              <a:tabLst/>
-              <a:defRPr/>
-            </a:pPr>
-            <a:r>
-              <a:rPr kumimoji="0" lang="en-US" sz="2400" b="1" i="0" u="none" strike="noStrike" kern="1200" cap="none" spc="0" normalizeH="0" baseline="0" noProof="0">
-                <a:ln>
-                  <a:noFill/>
-                </a:ln>
-                <a:solidFill>
-                  <a:srgbClr val="FF4B00"/>
-                </a:solidFill>
-                <a:effectLst/>
-                <a:uLnTx/>
-                <a:uFillTx/>
-                <a:latin typeface="Arial"/>
-                <a:ea typeface="+mn-ea"/>
-                <a:cs typeface="+mn-cs"/>
-              </a:rPr>
-              <a:t>10+</a:t>
-            </a:r>
-          </a:p>
-        </p:txBody>
-      </p:sp>
-      <p:sp>
-        <p:nvSpPr>
-          <p:cNvPr id="44" name="TextBox 43"/>
-          <p:cNvSpPr txBox="1">
-            <a:spLocks/>
-          </p:cNvSpPr>
-          <p:nvPr/>
-        </p:nvSpPr>
-        <p:spPr>
-          <a:xfrm>
-            <a:off x="8156448" y="3566160"/>
-            <a:ext cx="1572768" cy="184666"/>
+            <a:pPr algn="l"/>
+            <a:r>
+              <a:rPr lang="en-US" sz="1150" b="1">
+                <a:solidFill>
+                  <a:srgbClr val="121212"/>
+                </a:solidFill>
+                <a:latin typeface="Arial"/>
+              </a:rPr>
+              <a:t>FDE</a:t>
+            </a:r>
+            <a:endParaRPr sz="1150" b="1">
+              <a:solidFill>
+                <a:srgbClr val="121212"/>
+              </a:solidFill>
+              <a:latin typeface="Arial"/>
+            </a:endParaRPr>
+          </a:p>
+        </p:txBody>
+      </p:sp>
+      <p:sp>
+        <p:nvSpPr>
+          <p:cNvPr id="121" name="Step Description 1"/>
+          <p:cNvSpPr txBox="1"/>
+          <p:nvPr/>
+        </p:nvSpPr>
+        <p:spPr>
+          <a:xfrm>
+            <a:off x="9299448" y="3291840"/>
+            <a:ext cx="2039112" cy="161583"/>
           </a:xfrm>
           <a:prstGeom prst="rect">
             <a:avLst/>
@@ -14603,90 +14394,35 @@
           </a:bodyPr>
           <a:lstStyle/>
           <a:p>
-            <a:pPr marL="0" marR="0" lvl="0" indent="0" algn="l" defTabSz="914400" rtl="0" eaLnBrk="1" fontAlgn="auto" latinLnBrk="0" hangingPunct="1">
-              <a:lnSpc>
-                <a:spcPct val="100000"/>
-              </a:lnSpc>
-              <a:spcBef>
-                <a:spcPts val="0"/>
-              </a:spcBef>
-              <a:spcAft>
-                <a:spcPts val="0"/>
-              </a:spcAft>
-              <a:buClrTx/>
-              <a:buSzTx/>
-              <a:buFontTx/>
-              <a:buNone/>
-              <a:tabLst/>
-              <a:defRPr/>
-            </a:pPr>
-            <a:r>
-              <a:rPr kumimoji="0" lang="en-US" sz="1200" b="1" i="0" u="none" strike="noStrike" kern="1200" cap="none" spc="0" normalizeH="0" baseline="0" noProof="0">
-                <a:ln>
-                  <a:noFill/>
-                </a:ln>
+            <a:pPr algn="l"/>
+            <a:r>
+              <a:rPr lang="en-US" sz="1050" b="0">
                 <a:solidFill>
                   <a:srgbClr val="55504A"/>
                 </a:solidFill>
-                <a:effectLst/>
-                <a:uLnTx/>
-                <a:uFillTx/>
-                <a:latin typeface="Arial"/>
-                <a:ea typeface="+mn-ea"/>
-                <a:cs typeface="+mn-cs"/>
-              </a:rPr>
-              <a:t>engagements</a:t>
-            </a:r>
-          </a:p>
-        </p:txBody>
-      </p:sp>
-      <p:cxnSp>
-        <p:nvCxnSpPr>
-          <p:cNvPr id="45" name="Connector 44"/>
-          <p:cNvCxnSpPr/>
-          <p:nvPr/>
-        </p:nvCxnSpPr>
-        <p:spPr>
-          <a:xfrm>
-            <a:off x="8156448" y="3913632"/>
-            <a:ext cx="1554480" cy="0"/>
-          </a:xfrm>
-          <a:prstGeom prst="line">
-            <a:avLst/>
-          </a:prstGeom>
-          <a:ln w="12700">
-            <a:solidFill>
-              <a:srgbClr val="E5DCCD"/>
-            </a:solidFill>
-          </a:ln>
-        </p:spPr>
-        <p:style>
-          <a:lnRef idx="2">
-            <a:schemeClr val="accent1"/>
-          </a:lnRef>
-          <a:fillRef idx="0">
-            <a:schemeClr val="accent1"/>
-          </a:fillRef>
-          <a:effectRef idx="1">
-            <a:schemeClr val="accent1"/>
-          </a:effectRef>
-          <a:fontRef idx="minor">
-            <a:schemeClr val="tx1"/>
-          </a:fontRef>
-        </p:style>
-      </p:cxnSp>
-      <p:sp>
-        <p:nvSpPr>
-          <p:cNvPr id="46" name="TextBox 45"/>
-          <p:cNvSpPr txBox="1">
-            <a:spLocks/>
-          </p:cNvSpPr>
-          <p:nvPr/>
-        </p:nvSpPr>
-        <p:spPr>
-          <a:xfrm>
-            <a:off x="9966960" y="3163824"/>
-            <a:ext cx="1627632" cy="369332"/>
+                <a:latin typeface="Arial"/>
+              </a:rPr>
+              <a:t>prove one deployment</a:t>
+            </a:r>
+            <a:endParaRPr sz="1050" b="0">
+              <a:solidFill>
+                <a:srgbClr val="55504A"/>
+              </a:solidFill>
+              <a:latin typeface="Arial"/>
+            </a:endParaRPr>
+          </a:p>
+        </p:txBody>
+      </p:sp>
+      <p:sp>
+        <p:nvSpPr>
+          <p:cNvPr id="122" name="Step Number 2"/>
+          <p:cNvSpPr txBox="1"/>
+          <p:nvPr/>
+        </p:nvSpPr>
+        <p:spPr>
+          <a:xfrm>
+            <a:off x="7973568" y="3712464"/>
+            <a:ext cx="256032" cy="201168"/>
           </a:xfrm>
           <a:prstGeom prst="rect">
             <a:avLst/>
@@ -14699,55 +14435,29 @@
           </a:bodyPr>
           <a:lstStyle/>
           <a:p>
-            <a:pPr marL="0" marR="0" lvl="0" indent="0" algn="l" defTabSz="914400" rtl="0" eaLnBrk="1" fontAlgn="auto" latinLnBrk="0" hangingPunct="1">
-              <a:lnSpc>
-                <a:spcPct val="100000"/>
-              </a:lnSpc>
-              <a:spcBef>
-                <a:spcPts val="0"/>
-              </a:spcBef>
-              <a:spcAft>
-                <a:spcPts val="0"/>
-              </a:spcAft>
-              <a:buClrTx/>
-              <a:buSzTx/>
-              <a:buFontTx/>
-              <a:buNone/>
-              <a:tabLst/>
-              <a:defRPr/>
-            </a:pPr>
-            <a:r>
-              <a:rPr kumimoji="0" lang="en-US" sz="2400" b="1" i="0" u="none" strike="noStrike" kern="1200" cap="none" spc="0" normalizeH="0" baseline="0" noProof="0">
-                <a:ln>
-                  <a:noFill/>
-                </a:ln>
+            <a:pPr algn="l"/>
+            <a:r>
+              <a:rPr sz="1200" b="1">
                 <a:solidFill>
                   <a:srgbClr val="FF4B00"/>
                 </a:solidFill>
-                <a:effectLst/>
-                <a:uLnTx/>
-                <a:uFillTx/>
-                <a:latin typeface="Arial"/>
-                <a:ea typeface="+mn-ea"/>
-                <a:cs typeface="+mn-cs"/>
-              </a:rPr>
-              <a:t>9→3 mo</a:t>
-            </a:r>
-          </a:p>
-        </p:txBody>
-      </p:sp>
-      <p:sp>
-        <p:nvSpPr>
-          <p:cNvPr id="47" name="TextBox 46"/>
-          <p:cNvSpPr txBox="1">
-            <a:spLocks/>
-          </p:cNvSpPr>
-          <p:nvPr/>
-        </p:nvSpPr>
-        <p:spPr>
-          <a:xfrm>
-            <a:off x="9966960" y="3566160"/>
-            <a:ext cx="1572768" cy="184666"/>
+                <a:latin typeface="Arial"/>
+              </a:rPr>
+              <a:t>2</a:t>
+            </a:r>
+          </a:p>
+        </p:txBody>
+      </p:sp>
+      <p:sp>
+        <p:nvSpPr>
+          <p:cNvPr id="123" name="Step Label 2"/>
+          <p:cNvSpPr txBox="1"/>
+          <p:nvPr/>
+        </p:nvSpPr>
+        <p:spPr>
+          <a:xfrm>
+            <a:off x="8275320" y="3712463"/>
+            <a:ext cx="1005840" cy="182880"/>
           </a:xfrm>
           <a:prstGeom prst="rect">
             <a:avLst/>
@@ -14760,90 +14470,35 @@
           </a:bodyPr>
           <a:lstStyle/>
           <a:p>
-            <a:pPr marL="0" marR="0" lvl="0" indent="0" algn="l" defTabSz="914400" rtl="0" eaLnBrk="1" fontAlgn="auto" latinLnBrk="0" hangingPunct="1">
-              <a:lnSpc>
-                <a:spcPct val="100000"/>
-              </a:lnSpc>
-              <a:spcBef>
-                <a:spcPts val="0"/>
-              </a:spcBef>
-              <a:spcAft>
-                <a:spcPts val="0"/>
-              </a:spcAft>
-              <a:buClrTx/>
-              <a:buSzTx/>
-              <a:buFontTx/>
-              <a:buNone/>
-              <a:tabLst/>
-              <a:defRPr/>
-            </a:pPr>
-            <a:r>
-              <a:rPr kumimoji="0" lang="en-US" sz="1200" b="1" i="0" u="none" strike="noStrike" kern="1200" cap="none" spc="0" normalizeH="0" baseline="0" noProof="0">
-                <a:ln>
-                  <a:noFill/>
-                </a:ln>
-                <a:solidFill>
-                  <a:srgbClr val="55504A"/>
-                </a:solidFill>
-                <a:effectLst/>
-                <a:uLnTx/>
-                <a:uFillTx/>
-                <a:latin typeface="Arial"/>
-                <a:ea typeface="+mn-ea"/>
-                <a:cs typeface="+mn-cs"/>
-              </a:rPr>
-              <a:t>time-to-compliance</a:t>
-            </a:r>
-          </a:p>
-        </p:txBody>
-      </p:sp>
-      <p:cxnSp>
-        <p:nvCxnSpPr>
-          <p:cNvPr id="48" name="Connector 47"/>
-          <p:cNvCxnSpPr/>
-          <p:nvPr/>
-        </p:nvCxnSpPr>
-        <p:spPr>
-          <a:xfrm>
-            <a:off x="9966960" y="3913632"/>
-            <a:ext cx="1554480" cy="0"/>
-          </a:xfrm>
-          <a:prstGeom prst="line">
-            <a:avLst/>
-          </a:prstGeom>
-          <a:ln w="12700">
-            <a:solidFill>
-              <a:srgbClr val="E5DCCD"/>
-            </a:solidFill>
-          </a:ln>
-        </p:spPr>
-        <p:style>
-          <a:lnRef idx="2">
-            <a:schemeClr val="accent1"/>
-          </a:lnRef>
-          <a:fillRef idx="0">
-            <a:schemeClr val="accent1"/>
-          </a:fillRef>
-          <a:effectRef idx="1">
-            <a:schemeClr val="accent1"/>
-          </a:effectRef>
-          <a:fontRef idx="minor">
-            <a:schemeClr val="tx1"/>
-          </a:fontRef>
-        </p:style>
-      </p:cxnSp>
-      <p:sp>
-        <p:nvSpPr>
-          <p:cNvPr id="49" name="TextBox 48"/>
-          <p:cNvSpPr txBox="1">
-            <a:spLocks/>
-          </p:cNvSpPr>
-          <p:nvPr/>
-        </p:nvSpPr>
-        <p:spPr>
-          <a:xfrm>
-            <a:off x="8156448" y="4169664"/>
-            <a:ext cx="1627632" cy="369332"/>
+            <a:pPr algn="l"/>
+            <a:r>
+              <a:rPr lang="en-US" sz="1150" b="1">
+                <a:solidFill>
+                  <a:srgbClr val="121212"/>
+                </a:solidFill>
+                <a:latin typeface="Arial"/>
+              </a:rPr>
+              <a:t>PMM</a:t>
+            </a:r>
+            <a:endParaRPr sz="1150" b="1">
+              <a:solidFill>
+                <a:srgbClr val="121212"/>
+              </a:solidFill>
+              <a:latin typeface="Arial"/>
+            </a:endParaRPr>
+          </a:p>
+        </p:txBody>
+      </p:sp>
+      <p:sp>
+        <p:nvSpPr>
+          <p:cNvPr id="124" name="Step Description 2"/>
+          <p:cNvSpPr txBox="1"/>
+          <p:nvPr/>
+        </p:nvSpPr>
+        <p:spPr>
+          <a:xfrm>
+            <a:off x="9299448" y="3712463"/>
+            <a:ext cx="2039112" cy="323165"/>
           </a:xfrm>
           <a:prstGeom prst="rect">
             <a:avLst/>
@@ -14856,55 +14511,35 @@
           </a:bodyPr>
           <a:lstStyle/>
           <a:p>
-            <a:pPr marL="0" marR="0" lvl="0" indent="0" algn="l" defTabSz="914400" rtl="0" eaLnBrk="1" fontAlgn="auto" latinLnBrk="0" hangingPunct="1">
-              <a:lnSpc>
-                <a:spcPct val="100000"/>
-              </a:lnSpc>
-              <a:spcBef>
-                <a:spcPts val="0"/>
-              </a:spcBef>
-              <a:spcAft>
-                <a:spcPts val="0"/>
-              </a:spcAft>
-              <a:buClrTx/>
-              <a:buSzTx/>
-              <a:buFontTx/>
-              <a:buNone/>
-              <a:tabLst/>
-              <a:defRPr/>
-            </a:pPr>
-            <a:r>
-              <a:rPr kumimoji="0" lang="en-US" sz="2400" b="1" i="0" u="none" strike="noStrike" kern="1200" cap="none" spc="0" normalizeH="0" baseline="0" noProof="0">
-                <a:ln>
-                  <a:noFill/>
-                </a:ln>
-                <a:solidFill>
-                  <a:srgbClr val="FF4B00"/>
-                </a:solidFill>
-                <a:effectLst/>
-                <a:uLnTx/>
-                <a:uFillTx/>
-                <a:latin typeface="Arial"/>
-                <a:ea typeface="+mn-ea"/>
-                <a:cs typeface="+mn-cs"/>
-              </a:rPr>
-              <a:t>$5M</a:t>
-            </a:r>
-          </a:p>
-        </p:txBody>
-      </p:sp>
-      <p:sp>
-        <p:nvSpPr>
-          <p:cNvPr id="50" name="TextBox 49"/>
-          <p:cNvSpPr txBox="1">
-            <a:spLocks/>
-          </p:cNvSpPr>
-          <p:nvPr/>
-        </p:nvSpPr>
-        <p:spPr>
-          <a:xfrm>
-            <a:off x="8156448" y="4572000"/>
-            <a:ext cx="1572768" cy="184666"/>
+            <a:pPr algn="l"/>
+            <a:r>
+              <a:rPr lang="en-US" sz="1050" b="0">
+                <a:solidFill>
+                  <a:srgbClr val="55504A"/>
+                </a:solidFill>
+                <a:latin typeface="Arial"/>
+              </a:rPr>
+              <a:t>identify the invariant + package proof</a:t>
+            </a:r>
+            <a:endParaRPr sz="1050" b="0">
+              <a:solidFill>
+                <a:srgbClr val="55504A"/>
+              </a:solidFill>
+              <a:latin typeface="Arial"/>
+            </a:endParaRPr>
+          </a:p>
+        </p:txBody>
+      </p:sp>
+      <p:sp>
+        <p:nvSpPr>
+          <p:cNvPr id="125" name="Step Number 3"/>
+          <p:cNvSpPr txBox="1"/>
+          <p:nvPr/>
+        </p:nvSpPr>
+        <p:spPr>
+          <a:xfrm>
+            <a:off x="7973568" y="4133088"/>
+            <a:ext cx="256032" cy="201168"/>
           </a:xfrm>
           <a:prstGeom prst="rect">
             <a:avLst/>
@@ -14917,90 +14552,29 @@
           </a:bodyPr>
           <a:lstStyle/>
           <a:p>
-            <a:pPr marL="0" marR="0" lvl="0" indent="0" algn="l" defTabSz="914400" rtl="0" eaLnBrk="1" fontAlgn="auto" latinLnBrk="0" hangingPunct="1">
-              <a:lnSpc>
-                <a:spcPct val="100000"/>
-              </a:lnSpc>
-              <a:spcBef>
-                <a:spcPts val="0"/>
-              </a:spcBef>
-              <a:spcAft>
-                <a:spcPts val="0"/>
-              </a:spcAft>
-              <a:buClrTx/>
-              <a:buSzTx/>
-              <a:buFontTx/>
-              <a:buNone/>
-              <a:tabLst/>
-              <a:defRPr/>
-            </a:pPr>
-            <a:r>
-              <a:rPr kumimoji="0" lang="en-US" sz="1200" b="1" i="0" u="none" strike="noStrike" kern="1200" cap="none" spc="0" normalizeH="0" baseline="0" noProof="0">
-                <a:ln>
-                  <a:noFill/>
-                </a:ln>
-                <a:solidFill>
-                  <a:srgbClr val="55504A"/>
-                </a:solidFill>
-                <a:effectLst/>
-                <a:uLnTx/>
-                <a:uFillTx/>
-                <a:latin typeface="Arial"/>
-                <a:ea typeface="+mn-ea"/>
-                <a:cs typeface="+mn-cs"/>
-              </a:rPr>
-              <a:t>account rescued</a:t>
-            </a:r>
-          </a:p>
-        </p:txBody>
-      </p:sp>
-      <p:cxnSp>
-        <p:nvCxnSpPr>
-          <p:cNvPr id="51" name="Connector 50"/>
-          <p:cNvCxnSpPr/>
-          <p:nvPr/>
-        </p:nvCxnSpPr>
-        <p:spPr>
-          <a:xfrm>
-            <a:off x="8156448" y="4919472"/>
-            <a:ext cx="1554480" cy="0"/>
-          </a:xfrm>
-          <a:prstGeom prst="line">
-            <a:avLst/>
-          </a:prstGeom>
-          <a:ln w="12700">
-            <a:solidFill>
-              <a:srgbClr val="E5DCCD"/>
-            </a:solidFill>
-          </a:ln>
-        </p:spPr>
-        <p:style>
-          <a:lnRef idx="2">
-            <a:schemeClr val="accent1"/>
-          </a:lnRef>
-          <a:fillRef idx="0">
-            <a:schemeClr val="accent1"/>
-          </a:fillRef>
-          <a:effectRef idx="1">
-            <a:schemeClr val="accent1"/>
-          </a:effectRef>
-          <a:fontRef idx="minor">
-            <a:schemeClr val="tx1"/>
-          </a:fontRef>
-        </p:style>
-      </p:cxnSp>
-      <p:sp>
-        <p:nvSpPr>
-          <p:cNvPr id="52" name="TextBox 51"/>
-          <p:cNvSpPr txBox="1">
-            <a:spLocks/>
-          </p:cNvSpPr>
-          <p:nvPr/>
-        </p:nvSpPr>
-        <p:spPr>
-          <a:xfrm>
-            <a:off x="9966960" y="4169664"/>
-            <a:ext cx="1627632" cy="369332"/>
+            <a:pPr algn="l"/>
+            <a:r>
+              <a:rPr sz="1200" b="1">
+                <a:solidFill>
+                  <a:srgbClr val="FF4B00"/>
+                </a:solidFill>
+                <a:latin typeface="Arial"/>
+              </a:rPr>
+              <a:t>3</a:t>
+            </a:r>
+          </a:p>
+        </p:txBody>
+      </p:sp>
+      <p:sp>
+        <p:nvSpPr>
+          <p:cNvPr id="126" name="Step Label 3"/>
+          <p:cNvSpPr txBox="1"/>
+          <p:nvPr/>
+        </p:nvSpPr>
+        <p:spPr>
+          <a:xfrm>
+            <a:off x="8275320" y="4133087"/>
+            <a:ext cx="1005840" cy="182880"/>
           </a:xfrm>
           <a:prstGeom prst="rect">
             <a:avLst/>
@@ -15013,55 +14587,35 @@
           </a:bodyPr>
           <a:lstStyle/>
           <a:p>
-            <a:pPr marL="0" marR="0" lvl="0" indent="0" algn="l" defTabSz="914400" rtl="0" eaLnBrk="1" fontAlgn="auto" latinLnBrk="0" hangingPunct="1">
-              <a:lnSpc>
-                <a:spcPct val="100000"/>
-              </a:lnSpc>
-              <a:spcBef>
-                <a:spcPts val="0"/>
-              </a:spcBef>
-              <a:spcAft>
-                <a:spcPts val="0"/>
-              </a:spcAft>
-              <a:buClrTx/>
-              <a:buSzTx/>
-              <a:buFontTx/>
-              <a:buNone/>
-              <a:tabLst/>
-              <a:defRPr/>
-            </a:pPr>
-            <a:r>
-              <a:rPr kumimoji="0" lang="en-US" sz="2400" b="1" i="0" u="none" strike="noStrike" kern="1200" cap="none" spc="0" normalizeH="0" baseline="0" noProof="0">
-                <a:ln>
-                  <a:noFill/>
-                </a:ln>
-                <a:solidFill>
-                  <a:srgbClr val="FF4B00"/>
-                </a:solidFill>
-                <a:effectLst/>
-                <a:uLnTx/>
-                <a:uFillTx/>
-                <a:latin typeface="Arial"/>
-                <a:ea typeface="+mn-ea"/>
-                <a:cs typeface="+mn-cs"/>
-              </a:rPr>
-              <a:t>$2M</a:t>
-            </a:r>
-          </a:p>
-        </p:txBody>
-      </p:sp>
-      <p:sp>
-        <p:nvSpPr>
-          <p:cNvPr id="53" name="TextBox 52"/>
-          <p:cNvSpPr txBox="1">
-            <a:spLocks/>
-          </p:cNvSpPr>
-          <p:nvPr/>
-        </p:nvSpPr>
-        <p:spPr>
-          <a:xfrm>
-            <a:off x="9966960" y="4572000"/>
-            <a:ext cx="1572768" cy="184666"/>
+            <a:pPr algn="l"/>
+            <a:r>
+              <a:rPr lang="en-US" sz="1150" b="1">
+                <a:solidFill>
+                  <a:srgbClr val="121212"/>
+                </a:solidFill>
+                <a:latin typeface="Arial"/>
+              </a:rPr>
+              <a:t>PRODUCT</a:t>
+            </a:r>
+            <a:endParaRPr sz="1150" b="1">
+              <a:solidFill>
+                <a:srgbClr val="121212"/>
+              </a:solidFill>
+              <a:latin typeface="Arial"/>
+            </a:endParaRPr>
+          </a:p>
+        </p:txBody>
+      </p:sp>
+      <p:sp>
+        <p:nvSpPr>
+          <p:cNvPr id="127" name="Step Description 3"/>
+          <p:cNvSpPr txBox="1"/>
+          <p:nvPr/>
+        </p:nvSpPr>
+        <p:spPr>
+          <a:xfrm>
+            <a:off x="9299448" y="4133087"/>
+            <a:ext cx="2039112" cy="161583"/>
           </a:xfrm>
           <a:prstGeom prst="rect">
             <a:avLst/>
@@ -15074,90 +14628,35 @@
           </a:bodyPr>
           <a:lstStyle/>
           <a:p>
-            <a:pPr marL="0" marR="0" lvl="0" indent="0" algn="l" defTabSz="914400" rtl="0" eaLnBrk="1" fontAlgn="auto" latinLnBrk="0" hangingPunct="1">
-              <a:lnSpc>
-                <a:spcPct val="100000"/>
-              </a:lnSpc>
-              <a:spcBef>
-                <a:spcPts val="0"/>
-              </a:spcBef>
-              <a:spcAft>
-                <a:spcPts val="0"/>
-              </a:spcAft>
-              <a:buClrTx/>
-              <a:buSzTx/>
-              <a:buFontTx/>
-              <a:buNone/>
-              <a:tabLst/>
-              <a:defRPr/>
-            </a:pPr>
-            <a:r>
-              <a:rPr kumimoji="0" lang="en-US" sz="1200" b="1" i="0" u="none" strike="noStrike" kern="1200" cap="none" spc="0" normalizeH="0" baseline="0" noProof="0">
-                <a:ln>
-                  <a:noFill/>
-                </a:ln>
+            <a:pPr algn="l"/>
+            <a:r>
+              <a:rPr lang="en-US" sz="1050" b="0">
                 <a:solidFill>
                   <a:srgbClr val="55504A"/>
                 </a:solidFill>
-                <a:effectLst/>
-                <a:uLnTx/>
-                <a:uFillTx/>
-                <a:latin typeface="Arial"/>
-                <a:ea typeface="+mn-ea"/>
-                <a:cs typeface="+mn-cs"/>
-              </a:rPr>
-              <a:t>expansion won</a:t>
-            </a:r>
-          </a:p>
-        </p:txBody>
-      </p:sp>
-      <p:cxnSp>
-        <p:nvCxnSpPr>
-          <p:cNvPr id="54" name="Connector 53"/>
-          <p:cNvCxnSpPr/>
-          <p:nvPr/>
-        </p:nvCxnSpPr>
-        <p:spPr>
-          <a:xfrm>
-            <a:off x="9966960" y="4919472"/>
-            <a:ext cx="1554480" cy="0"/>
-          </a:xfrm>
-          <a:prstGeom prst="line">
-            <a:avLst/>
-          </a:prstGeom>
-          <a:ln w="12700">
-            <a:solidFill>
-              <a:srgbClr val="E5DCCD"/>
-            </a:solidFill>
-          </a:ln>
-        </p:spPr>
-        <p:style>
-          <a:lnRef idx="2">
-            <a:schemeClr val="accent1"/>
-          </a:lnRef>
-          <a:fillRef idx="0">
-            <a:schemeClr val="accent1"/>
-          </a:fillRef>
-          <a:effectRef idx="1">
-            <a:schemeClr val="accent1"/>
-          </a:effectRef>
-          <a:fontRef idx="minor">
-            <a:schemeClr val="tx1"/>
-          </a:fontRef>
-        </p:style>
-      </p:cxnSp>
-      <p:sp>
-        <p:nvSpPr>
-          <p:cNvPr id="55" name="TextBox 54"/>
-          <p:cNvSpPr txBox="1">
-            <a:spLocks/>
-          </p:cNvSpPr>
-          <p:nvPr/>
-        </p:nvSpPr>
-        <p:spPr>
-          <a:xfrm>
-            <a:off x="8156448" y="5175504"/>
-            <a:ext cx="1627632" cy="369332"/>
+                <a:latin typeface="Arial"/>
+              </a:rPr>
+              <a:t>fix recurring structural gaps</a:t>
+            </a:r>
+            <a:endParaRPr sz="1050" b="0">
+              <a:solidFill>
+                <a:srgbClr val="55504A"/>
+              </a:solidFill>
+              <a:latin typeface="Arial"/>
+            </a:endParaRPr>
+          </a:p>
+        </p:txBody>
+      </p:sp>
+      <p:sp>
+        <p:nvSpPr>
+          <p:cNvPr id="128" name="Step Number 4"/>
+          <p:cNvSpPr txBox="1"/>
+          <p:nvPr/>
+        </p:nvSpPr>
+        <p:spPr>
+          <a:xfrm>
+            <a:off x="7973568" y="4553712"/>
+            <a:ext cx="256032" cy="201168"/>
           </a:xfrm>
           <a:prstGeom prst="rect">
             <a:avLst/>
@@ -15170,55 +14669,29 @@
           </a:bodyPr>
           <a:lstStyle/>
           <a:p>
-            <a:pPr marL="0" marR="0" lvl="0" indent="0" algn="l" defTabSz="914400" rtl="0" eaLnBrk="1" fontAlgn="auto" latinLnBrk="0" hangingPunct="1">
-              <a:lnSpc>
-                <a:spcPct val="100000"/>
-              </a:lnSpc>
-              <a:spcBef>
-                <a:spcPts val="0"/>
-              </a:spcBef>
-              <a:spcAft>
-                <a:spcPts val="0"/>
-              </a:spcAft>
-              <a:buClrTx/>
-              <a:buSzTx/>
-              <a:buFontTx/>
-              <a:buNone/>
-              <a:tabLst/>
-              <a:defRPr/>
-            </a:pPr>
-            <a:r>
-              <a:rPr kumimoji="0" lang="en-US" sz="2400" b="1" i="0" u="none" strike="noStrike" kern="1200" cap="none" spc="0" normalizeH="0" baseline="0" noProof="0">
-                <a:ln>
-                  <a:noFill/>
-                </a:ln>
-                <a:solidFill>
-                  <a:srgbClr val="121212"/>
-                </a:solidFill>
-                <a:effectLst/>
-                <a:uLnTx/>
-                <a:uFillTx/>
-                <a:latin typeface="Arial"/>
-                <a:ea typeface="+mn-ea"/>
-                <a:cs typeface="+mn-cs"/>
-              </a:rPr>
-              <a:t>0</a:t>
-            </a:r>
-          </a:p>
-        </p:txBody>
-      </p:sp>
-      <p:sp>
-        <p:nvSpPr>
-          <p:cNvPr id="56" name="TextBox 55"/>
-          <p:cNvSpPr txBox="1">
-            <a:spLocks/>
-          </p:cNvSpPr>
-          <p:nvPr/>
-        </p:nvSpPr>
-        <p:spPr>
-          <a:xfrm>
-            <a:off x="8156448" y="5577840"/>
-            <a:ext cx="1572768" cy="184666"/>
+            <a:pPr algn="l"/>
+            <a:r>
+              <a:rPr sz="1200" b="1">
+                <a:solidFill>
+                  <a:srgbClr val="FF4B00"/>
+                </a:solidFill>
+                <a:latin typeface="Arial"/>
+              </a:rPr>
+              <a:t>4</a:t>
+            </a:r>
+          </a:p>
+        </p:txBody>
+      </p:sp>
+      <p:sp>
+        <p:nvSpPr>
+          <p:cNvPr id="129" name="Step Label 4"/>
+          <p:cNvSpPr txBox="1"/>
+          <p:nvPr/>
+        </p:nvSpPr>
+        <p:spPr>
+          <a:xfrm>
+            <a:off x="8275320" y="4553712"/>
+            <a:ext cx="1005840" cy="182880"/>
           </a:xfrm>
           <a:prstGeom prst="rect">
             <a:avLst/>
@@ -15231,55 +14704,35 @@
           </a:bodyPr>
           <a:lstStyle/>
           <a:p>
-            <a:pPr marL="0" marR="0" lvl="0" indent="0" algn="l" defTabSz="914400" rtl="0" eaLnBrk="1" fontAlgn="auto" latinLnBrk="0" hangingPunct="1">
-              <a:lnSpc>
-                <a:spcPct val="100000"/>
-              </a:lnSpc>
-              <a:spcBef>
-                <a:spcPts val="0"/>
-              </a:spcBef>
-              <a:spcAft>
-                <a:spcPts val="0"/>
-              </a:spcAft>
-              <a:buClrTx/>
-              <a:buSzTx/>
-              <a:buFontTx/>
-              <a:buNone/>
-              <a:tabLst/>
-              <a:defRPr/>
-            </a:pPr>
-            <a:r>
-              <a:rPr kumimoji="0" lang="en-US" sz="1200" b="1" i="0" u="none" strike="noStrike" kern="1200" cap="none" spc="0" normalizeH="0" baseline="0" noProof="0">
-                <a:ln>
-                  <a:noFill/>
-                </a:ln>
-                <a:solidFill>
-                  <a:srgbClr val="55504A"/>
-                </a:solidFill>
-                <a:effectLst/>
-                <a:uLnTx/>
-                <a:uFillTx/>
-                <a:latin typeface="Arial"/>
-                <a:ea typeface="+mn-ea"/>
-                <a:cs typeface="+mn-cs"/>
-              </a:rPr>
-              <a:t>breaches</a:t>
-            </a:r>
-          </a:p>
-        </p:txBody>
-      </p:sp>
-      <p:sp>
-        <p:nvSpPr>
-          <p:cNvPr id="57" name="TextBox 56"/>
-          <p:cNvSpPr txBox="1">
-            <a:spLocks/>
-          </p:cNvSpPr>
-          <p:nvPr/>
-        </p:nvSpPr>
-        <p:spPr>
-          <a:xfrm>
-            <a:off x="9966960" y="5175504"/>
-            <a:ext cx="1627632" cy="369332"/>
+            <a:pPr algn="l"/>
+            <a:r>
+              <a:rPr lang="en-US" sz="1150" b="1">
+                <a:solidFill>
+                  <a:srgbClr val="121212"/>
+                </a:solidFill>
+                <a:latin typeface="Arial"/>
+              </a:rPr>
+              <a:t>FIELD</a:t>
+            </a:r>
+            <a:endParaRPr sz="1150" b="1">
+              <a:solidFill>
+                <a:srgbClr val="121212"/>
+              </a:solidFill>
+              <a:latin typeface="Arial"/>
+            </a:endParaRPr>
+          </a:p>
+        </p:txBody>
+      </p:sp>
+      <p:sp>
+        <p:nvSpPr>
+          <p:cNvPr id="130" name="Step Description 4"/>
+          <p:cNvSpPr txBox="1"/>
+          <p:nvPr/>
+        </p:nvSpPr>
+        <p:spPr>
+          <a:xfrm>
+            <a:off x="9299448" y="4553712"/>
+            <a:ext cx="2039112" cy="323165"/>
           </a:xfrm>
           <a:prstGeom prst="rect">
             <a:avLst/>
@@ -15292,401 +14745,141 @@
           </a:bodyPr>
           <a:lstStyle/>
           <a:p>
-            <a:pPr marL="0" marR="0" lvl="0" indent="0" algn="l" defTabSz="914400" rtl="0" eaLnBrk="1" fontAlgn="auto" latinLnBrk="0" hangingPunct="1">
-              <a:lnSpc>
-                <a:spcPct val="100000"/>
-              </a:lnSpc>
-              <a:spcBef>
-                <a:spcPts val="0"/>
-              </a:spcBef>
-              <a:spcAft>
-                <a:spcPts val="0"/>
-              </a:spcAft>
-              <a:buClrTx/>
-              <a:buSzTx/>
-              <a:buFontTx/>
-              <a:buNone/>
-              <a:tabLst/>
-              <a:defRPr/>
-            </a:pPr>
-            <a:r>
-              <a:rPr kumimoji="0" lang="en-US" sz="2400" b="1" i="0" u="none" strike="noStrike" kern="1200" cap="none" spc="0" normalizeH="0" baseline="0" noProof="0">
-                <a:ln>
-                  <a:noFill/>
-                </a:ln>
-                <a:solidFill>
-                  <a:srgbClr val="FF4B00"/>
-                </a:solidFill>
-                <a:effectLst/>
-                <a:uLnTx/>
-                <a:uFillTx/>
-                <a:latin typeface="Arial"/>
-                <a:ea typeface="+mn-ea"/>
-                <a:cs typeface="+mn-cs"/>
-              </a:rPr>
-              <a:t>+61%</a:t>
-            </a:r>
-          </a:p>
-        </p:txBody>
-      </p:sp>
-      <p:sp>
-        <p:nvSpPr>
-          <p:cNvPr id="58" name="TextBox 57"/>
-          <p:cNvSpPr txBox="1">
-            <a:spLocks/>
-          </p:cNvSpPr>
-          <p:nvPr/>
-        </p:nvSpPr>
-        <p:spPr>
-          <a:xfrm>
-            <a:off x="9966960" y="5577840"/>
-            <a:ext cx="1572768" cy="184666"/>
-          </a:xfrm>
-          <a:prstGeom prst="rect">
-            <a:avLst/>
-          </a:prstGeom>
-          <a:noFill/>
-        </p:spPr>
-        <p:txBody>
-          <a:bodyPr wrap="square" lIns="0" tIns="0" rIns="0" bIns="0" anchor="t">
-            <a:spAutoFit/>
-          </a:bodyPr>
-          <a:lstStyle/>
-          <a:p>
-            <a:pPr marL="0" marR="0" lvl="0" indent="0" algn="l" defTabSz="914400" rtl="0" eaLnBrk="1" fontAlgn="auto" latinLnBrk="0" hangingPunct="1">
-              <a:lnSpc>
-                <a:spcPct val="100000"/>
-              </a:lnSpc>
-              <a:spcBef>
-                <a:spcPts val="0"/>
-              </a:spcBef>
-              <a:spcAft>
-                <a:spcPts val="0"/>
-              </a:spcAft>
-              <a:buClrTx/>
-              <a:buSzTx/>
-              <a:buFontTx/>
-              <a:buNone/>
-              <a:tabLst/>
-              <a:defRPr/>
-            </a:pPr>
-            <a:r>
-              <a:rPr kumimoji="0" lang="en-US" sz="1200" b="1" i="0" u="none" strike="noStrike" kern="1200" cap="none" spc="0" normalizeH="0" baseline="0" noProof="0">
-                <a:ln>
-                  <a:noFill/>
-                </a:ln>
+            <a:pPr algn="l"/>
+            <a:r>
+              <a:rPr sz="1050" b="0">
                 <a:solidFill>
                   <a:srgbClr val="55504A"/>
                 </a:solidFill>
-                <a:effectLst/>
-                <a:uLnTx/>
-                <a:uFillTx/>
-                <a:latin typeface="Arial"/>
-                <a:ea typeface="+mn-ea"/>
-                <a:cs typeface="+mn-cs"/>
-              </a:rPr>
-              <a:t>AI ROI</a:t>
-            </a:r>
-          </a:p>
-        </p:txBody>
-      </p:sp>
-      <p:sp>
-        <p:nvSpPr>
-          <p:cNvPr id="59" name="TextBox 58"/>
-          <p:cNvSpPr txBox="1">
-            <a:spLocks/>
-          </p:cNvSpPr>
-          <p:nvPr/>
-        </p:nvSpPr>
-        <p:spPr>
-          <a:xfrm>
-            <a:off x="566928" y="6400800"/>
-            <a:ext cx="10469880" cy="153619"/>
-          </a:xfrm>
-          <a:prstGeom prst="rect">
-            <a:avLst/>
-          </a:prstGeom>
-          <a:noFill/>
-        </p:spPr>
-        <p:txBody>
-          <a:bodyPr wrap="square" lIns="0" tIns="0" rIns="0" bIns="0" anchor="ctr">
-            <a:spAutoFit/>
-          </a:bodyPr>
-          <a:lstStyle/>
-          <a:p>
-            <a:pPr marL="0" marR="0" lvl="0" indent="0" algn="l" defTabSz="914400" rtl="0" eaLnBrk="1" fontAlgn="auto" latinLnBrk="0" hangingPunct="1">
-              <a:lnSpc>
-                <a:spcPct val="100000"/>
-              </a:lnSpc>
-              <a:spcBef>
-                <a:spcPts val="0"/>
-              </a:spcBef>
-              <a:spcAft>
-                <a:spcPts val="0"/>
-              </a:spcAft>
-              <a:buClrTx/>
-              <a:buSzTx/>
-              <a:buFontTx/>
-              <a:buNone/>
-              <a:tabLst/>
-              <a:defRPr/>
-            </a:pPr>
-            <a:r>
-              <a:rPr kumimoji="0" lang="en-US" sz="1000" b="0" i="0" u="none" strike="noStrike" kern="1200" cap="none" spc="0" normalizeH="0" baseline="0" noProof="0">
-                <a:ln>
-                  <a:noFill/>
-                </a:ln>
+                <a:latin typeface="Arial"/>
+              </a:rPr>
+              <a:t>reuse</a:t>
+            </a:r>
+            <a:r>
+              <a:rPr lang="en-US" sz="1050" b="0">
                 <a:solidFill>
                   <a:srgbClr val="55504A"/>
                 </a:solidFill>
-                <a:effectLst/>
-                <a:uLnTx/>
-                <a:uFillTx/>
-                <a:latin typeface="Arial"/>
-                <a:ea typeface="+mn-ea"/>
-                <a:cs typeface="+mn-cs"/>
-              </a:rPr>
-              <a:t>Definitions: FHE = fully homomorphic encryption; AI ROI = benefit-to-cost improvement.</a:t>
-            </a:r>
-          </a:p>
-        </p:txBody>
-      </p:sp>
-      <p:sp>
-        <p:nvSpPr>
-          <p:cNvPr id="80" name="Icon Blockers"/>
+                <a:latin typeface="Arial"/>
+              </a:rPr>
+              <a:t> the play; measure </a:t>
+            </a:r>
+            <a:r>
+              <a:rPr sz="1050" b="0">
+                <a:solidFill>
+                  <a:srgbClr val="55504A"/>
+                </a:solidFill>
+                <a:latin typeface="Arial"/>
+              </a:rPr>
+              <a:t>velocity + </a:t>
+            </a:r>
+            <a:r>
+              <a:rPr lang="en-US" sz="1050" b="0">
+                <a:solidFill>
+                  <a:srgbClr val="55504A"/>
+                </a:solidFill>
+                <a:latin typeface="Arial"/>
+              </a:rPr>
+              <a:t>growth</a:t>
+            </a:r>
+            <a:endParaRPr sz="1050" b="0">
+              <a:solidFill>
+                <a:srgbClr val="55504A"/>
+              </a:solidFill>
+              <a:latin typeface="Arial"/>
+            </a:endParaRPr>
+          </a:p>
+        </p:txBody>
+      </p:sp>
+      <p:sp>
+        <p:nvSpPr>
+          <p:cNvPr id="131" name="Commercial Proof Band"/>
           <p:cNvSpPr/>
           <p:nvPr/>
         </p:nvSpPr>
         <p:spPr>
           <a:xfrm>
-            <a:off x="621792" y="2212848"/>
-            <a:ext cx="457200" cy="457200"/>
-          </a:xfrm>
-          <a:prstGeom prst="noSmoking">
+            <a:off x="594360" y="5193792"/>
+            <a:ext cx="10972800" cy="713232"/>
+          </a:xfrm>
+          <a:prstGeom prst="rect">
             <a:avLst/>
           </a:prstGeom>
           <a:solidFill>
-            <a:srgbClr val="FF4B00"/>
+            <a:srgbClr val="121212"/>
           </a:solidFill>
           <a:ln>
             <a:noFill/>
           </a:ln>
         </p:spPr>
-        <p:txBody>
-          <a:bodyPr/>
-          <a:lstStyle/>
-          <a:p>
-            <a:pPr marL="0" marR="0" lvl="0" indent="0" algn="l" defTabSz="914400" rtl="0" eaLnBrk="1" fontAlgn="auto" latinLnBrk="0" hangingPunct="1">
-              <a:lnSpc>
-                <a:spcPct val="100000"/>
-              </a:lnSpc>
-              <a:spcBef>
-                <a:spcPts val="0"/>
-              </a:spcBef>
-              <a:spcAft>
-                <a:spcPts val="0"/>
-              </a:spcAft>
-              <a:buClrTx/>
-              <a:buSzTx/>
-              <a:buFontTx/>
-              <a:buNone/>
-              <a:tabLst/>
-              <a:defRPr/>
-            </a:pPr>
-            <a:endParaRPr kumimoji="0" lang="en-US" sz="1800" b="0" i="0" u="none" strike="noStrike" kern="1200" cap="none" spc="0" normalizeH="0" baseline="0" noProof="0">
-              <a:ln>
-                <a:noFill/>
-              </a:ln>
-              <a:solidFill>
-                <a:prstClr val="black"/>
-              </a:solidFill>
-              <a:effectLst/>
-              <a:uLnTx/>
-              <a:uFillTx/>
-              <a:latin typeface="Arial"/>
-              <a:ea typeface="+mn-ea"/>
-              <a:cs typeface="+mn-cs"/>
-            </a:endParaRPr>
-          </a:p>
-        </p:txBody>
-      </p:sp>
-      <p:sp>
-        <p:nvSpPr>
-          <p:cNvPr id="81" name="Icon Answer"/>
-          <p:cNvSpPr/>
-          <p:nvPr/>
-        </p:nvSpPr>
-        <p:spPr>
-          <a:xfrm>
-            <a:off x="4078224" y="2194559"/>
-            <a:ext cx="493776" cy="493776"/>
-          </a:xfrm>
-          <a:prstGeom prst="gear6">
-            <a:avLst/>
-          </a:prstGeom>
-          <a:solidFill>
-            <a:srgbClr val="FF4B00"/>
-          </a:solidFill>
-          <a:ln>
-            <a:noFill/>
-          </a:ln>
-        </p:spPr>
-        <p:txBody>
-          <a:bodyPr/>
-          <a:lstStyle/>
-          <a:p>
-            <a:pPr marL="0" marR="0" lvl="0" indent="0" algn="l" defTabSz="914400" rtl="0" eaLnBrk="1" fontAlgn="auto" latinLnBrk="0" hangingPunct="1">
-              <a:lnSpc>
-                <a:spcPct val="100000"/>
-              </a:lnSpc>
-              <a:spcBef>
-                <a:spcPts val="0"/>
-              </a:spcBef>
-              <a:spcAft>
-                <a:spcPts val="0"/>
-              </a:spcAft>
-              <a:buClrTx/>
-              <a:buSzTx/>
-              <a:buFontTx/>
-              <a:buNone/>
-              <a:tabLst/>
-              <a:defRPr/>
-            </a:pPr>
-            <a:endParaRPr kumimoji="0" lang="en-US" sz="1800" b="0" i="0" u="none" strike="noStrike" kern="1200" cap="none" spc="0" normalizeH="0" baseline="0" noProof="0">
-              <a:ln>
-                <a:noFill/>
-              </a:ln>
-              <a:solidFill>
-                <a:prstClr val="black"/>
-              </a:solidFill>
-              <a:effectLst/>
-              <a:uLnTx/>
-              <a:uFillTx/>
-              <a:latin typeface="Arial"/>
-              <a:ea typeface="+mn-ea"/>
-              <a:cs typeface="+mn-cs"/>
-            </a:endParaRPr>
-          </a:p>
-        </p:txBody>
-      </p:sp>
-      <p:sp>
-        <p:nvSpPr>
-          <p:cNvPr id="82" name="Icon Proof"/>
-          <p:cNvSpPr/>
-          <p:nvPr/>
-        </p:nvSpPr>
-        <p:spPr>
-          <a:xfrm>
-            <a:off x="8174736" y="2212848"/>
-            <a:ext cx="457200" cy="457200"/>
-          </a:xfrm>
-          <a:prstGeom prst="upArrow">
-            <a:avLst/>
-          </a:prstGeom>
-          <a:solidFill>
-            <a:srgbClr val="FFC400"/>
-          </a:solidFill>
-          <a:ln>
-            <a:noFill/>
-          </a:ln>
-        </p:spPr>
-        <p:txBody>
-          <a:bodyPr/>
-          <a:lstStyle/>
-          <a:p>
-            <a:pPr marL="0" marR="0" lvl="0" indent="0" algn="l" defTabSz="914400" rtl="0" eaLnBrk="1" fontAlgn="auto" latinLnBrk="0" hangingPunct="1">
-              <a:lnSpc>
-                <a:spcPct val="100000"/>
-              </a:lnSpc>
-              <a:spcBef>
-                <a:spcPts val="0"/>
-              </a:spcBef>
-              <a:spcAft>
-                <a:spcPts val="0"/>
-              </a:spcAft>
-              <a:buClrTx/>
-              <a:buSzTx/>
-              <a:buFontTx/>
-              <a:buNone/>
-              <a:tabLst/>
-              <a:defRPr/>
-            </a:pPr>
-            <a:endParaRPr kumimoji="0" lang="en-US" sz="1800" b="0" i="0" u="none" strike="noStrike" kern="1200" cap="none" spc="0" normalizeH="0" baseline="0" noProof="0">
-              <a:ln>
-                <a:noFill/>
-              </a:ln>
-              <a:solidFill>
-                <a:prstClr val="black"/>
-              </a:solidFill>
-              <a:effectLst/>
-              <a:uLnTx/>
-              <a:uFillTx/>
-              <a:latin typeface="Arial"/>
-              <a:ea typeface="+mn-ea"/>
-              <a:cs typeface="+mn-cs"/>
-            </a:endParaRPr>
-          </a:p>
-        </p:txBody>
-      </p:sp>
-      <p:pic>
-        <p:nvPicPr>
-          <p:cNvPr id="83" name="Official Mistral footer symbol" descr="image.png"/>
-          <p:cNvPicPr>
-            <a:picLocks noChangeAspect="1"/>
-          </p:cNvPicPr>
-          <p:nvPr/>
-        </p:nvPicPr>
-        <p:blipFill>
-          <a:blip r:embed="rId3"/>
-          <a:srcRect/>
-          <a:stretch>
-            <a:fillRect/>
-          </a:stretch>
-        </p:blipFill>
-        <p:spPr>
-          <a:xfrm>
-            <a:off x="11594592" y="6400800"/>
-            <a:ext cx="228600" cy="163413"/>
-          </a:xfrm>
-          <a:prstGeom prst="rect">
-            <a:avLst/>
-          </a:prstGeom>
-        </p:spPr>
-      </p:pic>
-      <p:pic>
-        <p:nvPicPr>
-          <p:cNvPr id="84" name="Official Mistral header symbol" descr="image.png"/>
-          <p:cNvPicPr>
-            <a:picLocks noChangeAspect="1"/>
-          </p:cNvPicPr>
-          <p:nvPr/>
-        </p:nvPicPr>
-        <p:blipFill>
-          <a:blip r:embed="rId3"/>
-          <a:stretch>
-            <a:fillRect/>
-          </a:stretch>
-        </p:blipFill>
-        <p:spPr>
-          <a:xfrm>
-            <a:off x="182880" y="182880"/>
-            <a:ext cx="228600" cy="163413"/>
-          </a:xfrm>
-          <a:prstGeom prst="rect">
-            <a:avLst/>
-          </a:prstGeom>
-        </p:spPr>
-      </p:pic>
-      <p:sp>
-        <p:nvSpPr>
-          <p:cNvPr id="300" name="Source Footnote"/>
+        <p:style>
+          <a:lnRef idx="1">
+            <a:schemeClr val="accent1"/>
+          </a:lnRef>
+          <a:fillRef idx="3">
+            <a:schemeClr val="accent1"/>
+          </a:fillRef>
+          <a:effectRef idx="2">
+            <a:schemeClr val="accent1"/>
+          </a:effectRef>
+          <a:fontRef idx="minor">
+            <a:schemeClr val="lt1"/>
+          </a:fontRef>
+        </p:style>
+        <p:txBody>
+          <a:bodyPr rtlCol="0" anchor="ctr"/>
+          <a:lstStyle/>
+          <a:p>
+            <a:pPr algn="ctr"/>
+            <a:endParaRPr/>
+          </a:p>
+        </p:txBody>
+      </p:sp>
+      <p:sp>
+        <p:nvSpPr>
+          <p:cNvPr id="132" name="Proof Band Label"/>
           <p:cNvSpPr txBox="1"/>
           <p:nvPr/>
         </p:nvSpPr>
         <p:spPr>
           <a:xfrm>
-            <a:off x="566928" y="6172200"/>
-            <a:ext cx="10469880" cy="123000"/>
+            <a:off x="804672" y="5276088"/>
+            <a:ext cx="1645920" cy="292388"/>
+          </a:xfrm>
+          <a:prstGeom prst="rect">
+            <a:avLst/>
+          </a:prstGeom>
+          <a:noFill/>
+        </p:spPr>
+        <p:txBody>
+          <a:bodyPr wrap="square" lIns="0" tIns="0" rIns="0" bIns="0" anchor="t">
+            <a:spAutoFit/>
+          </a:bodyPr>
+          <a:lstStyle/>
+          <a:p>
+            <a:pPr algn="l"/>
+            <a:r>
+              <a:rPr lang="en-US" sz="950" b="1">
+                <a:solidFill>
+                  <a:srgbClr val="FFC400"/>
+                </a:solidFill>
+                <a:latin typeface="Arial"/>
+              </a:rPr>
+              <a:t>REUSE → VELOCITY → GROWTH</a:t>
+            </a:r>
+          </a:p>
+        </p:txBody>
+      </p:sp>
+      <p:sp>
+        <p:nvSpPr>
+          <p:cNvPr id="133" name="Proof Metric 1"/>
+          <p:cNvSpPr txBox="1"/>
+          <p:nvPr/>
+        </p:nvSpPr>
+        <p:spPr>
+          <a:xfrm>
+            <a:off x="2423160" y="5257800"/>
+            <a:ext cx="1600200" cy="301752"/>
           </a:xfrm>
           <a:prstGeom prst="rect">
             <a:avLst/>
@@ -15699,17 +14892,374 @@
           </a:bodyPr>
           <a:lstStyle/>
           <a:p>
-            <a:pPr marL="0" indent="0" algn="l">
-              <a:buNone/>
-            </a:pPr>
-            <a:r>
-              <a:rPr lang="en-US" sz="800" b="0" i="0" u="none" kern="1200">
+            <a:pPr algn="l"/>
+            <a:r>
+              <a:rPr sz="2300" b="1">
+                <a:solidFill>
+                  <a:srgbClr val="FF4B00"/>
+                </a:solidFill>
+                <a:latin typeface="Arial"/>
+              </a:rPr>
+              <a:t>10+</a:t>
+            </a:r>
+          </a:p>
+        </p:txBody>
+      </p:sp>
+      <p:sp>
+        <p:nvSpPr>
+          <p:cNvPr id="134" name="Proof Metric Label 1"/>
+          <p:cNvSpPr txBox="1"/>
+          <p:nvPr/>
+        </p:nvSpPr>
+        <p:spPr>
+          <a:xfrm>
+            <a:off x="2423160" y="5577840"/>
+            <a:ext cx="1600200" cy="146194"/>
+          </a:xfrm>
+          <a:prstGeom prst="rect">
+            <a:avLst/>
+          </a:prstGeom>
+          <a:noFill/>
+        </p:spPr>
+        <p:txBody>
+          <a:bodyPr wrap="square" lIns="0" tIns="0" rIns="0" bIns="0" anchor="t">
+            <a:spAutoFit/>
+          </a:bodyPr>
+          <a:lstStyle/>
+          <a:p>
+            <a:pPr algn="l"/>
+            <a:r>
+              <a:rPr lang="en-US" sz="950" b="1">
+                <a:solidFill>
+                  <a:srgbClr val="FFFFFF"/>
+                </a:solidFill>
+                <a:latin typeface="Arial"/>
+              </a:rPr>
+              <a:t>REUSE · ENGAGEMENTS</a:t>
+            </a:r>
+          </a:p>
+        </p:txBody>
+      </p:sp>
+      <p:sp>
+        <p:nvSpPr>
+          <p:cNvPr id="135" name="Proof Metric 2"/>
+          <p:cNvSpPr txBox="1"/>
+          <p:nvPr/>
+        </p:nvSpPr>
+        <p:spPr>
+          <a:xfrm>
+            <a:off x="4709160" y="5257800"/>
+            <a:ext cx="1691640" cy="301752"/>
+          </a:xfrm>
+          <a:prstGeom prst="rect">
+            <a:avLst/>
+          </a:prstGeom>
+          <a:noFill/>
+        </p:spPr>
+        <p:txBody>
+          <a:bodyPr wrap="square" lIns="0" tIns="0" rIns="0" bIns="0" anchor="ctr">
+            <a:spAutoFit/>
+          </a:bodyPr>
+          <a:lstStyle/>
+          <a:p>
+            <a:pPr algn="l"/>
+            <a:r>
+              <a:rPr sz="2300" b="1">
+                <a:solidFill>
+                  <a:srgbClr val="FF4B00"/>
+                </a:solidFill>
+                <a:latin typeface="Arial"/>
+              </a:rPr>
+              <a:t>9→3 mo</a:t>
+            </a:r>
+          </a:p>
+        </p:txBody>
+      </p:sp>
+      <p:sp>
+        <p:nvSpPr>
+          <p:cNvPr id="136" name="Proof Metric Label 2"/>
+          <p:cNvSpPr txBox="1"/>
+          <p:nvPr/>
+        </p:nvSpPr>
+        <p:spPr>
+          <a:xfrm>
+            <a:off x="4709160" y="5577840"/>
+            <a:ext cx="1691640" cy="146194"/>
+          </a:xfrm>
+          <a:prstGeom prst="rect">
+            <a:avLst/>
+          </a:prstGeom>
+          <a:noFill/>
+        </p:spPr>
+        <p:txBody>
+          <a:bodyPr wrap="square" lIns="0" tIns="0" rIns="0" bIns="0" anchor="t">
+            <a:spAutoFit/>
+          </a:bodyPr>
+          <a:lstStyle/>
+          <a:p>
+            <a:pPr algn="l"/>
+            <a:r>
+              <a:rPr lang="en-US" sz="950" b="1">
+                <a:solidFill>
+                  <a:srgbClr val="FFFFFF"/>
+                </a:solidFill>
+                <a:latin typeface="Arial"/>
+              </a:rPr>
+              <a:t>VELOCITY · COMPLIANCE</a:t>
+            </a:r>
+          </a:p>
+        </p:txBody>
+      </p:sp>
+      <p:sp>
+        <p:nvSpPr>
+          <p:cNvPr id="137" name="Proof Metric 3"/>
+          <p:cNvSpPr txBox="1"/>
+          <p:nvPr/>
+        </p:nvSpPr>
+        <p:spPr>
+          <a:xfrm>
+            <a:off x="7086600" y="5257800"/>
+            <a:ext cx="1600200" cy="301752"/>
+          </a:xfrm>
+          <a:prstGeom prst="rect">
+            <a:avLst/>
+          </a:prstGeom>
+          <a:noFill/>
+        </p:spPr>
+        <p:txBody>
+          <a:bodyPr wrap="square" lIns="0" tIns="0" rIns="0" bIns="0" anchor="ctr">
+            <a:spAutoFit/>
+          </a:bodyPr>
+          <a:lstStyle/>
+          <a:p>
+            <a:pPr algn="l"/>
+            <a:r>
+              <a:rPr sz="2300" b="1">
+                <a:solidFill>
+                  <a:srgbClr val="FF4B00"/>
+                </a:solidFill>
+                <a:latin typeface="Arial"/>
+              </a:rPr>
+              <a:t>$5M</a:t>
+            </a:r>
+          </a:p>
+        </p:txBody>
+      </p:sp>
+      <p:sp>
+        <p:nvSpPr>
+          <p:cNvPr id="138" name="Proof Metric Label 3"/>
+          <p:cNvSpPr txBox="1"/>
+          <p:nvPr/>
+        </p:nvSpPr>
+        <p:spPr>
+          <a:xfrm>
+            <a:off x="7086600" y="5577840"/>
+            <a:ext cx="1600200" cy="146194"/>
+          </a:xfrm>
+          <a:prstGeom prst="rect">
+            <a:avLst/>
+          </a:prstGeom>
+          <a:noFill/>
+        </p:spPr>
+        <p:txBody>
+          <a:bodyPr wrap="square" lIns="0" tIns="0" rIns="0" bIns="0" anchor="t">
+            <a:spAutoFit/>
+          </a:bodyPr>
+          <a:lstStyle/>
+          <a:p>
+            <a:pPr algn="l"/>
+            <a:r>
+              <a:rPr lang="en-US" sz="950" b="1">
+                <a:solidFill>
+                  <a:srgbClr val="FFFFFF"/>
+                </a:solidFill>
+                <a:latin typeface="Arial"/>
+              </a:rPr>
+              <a:t>GROWTH · RETAINED</a:t>
+            </a:r>
+          </a:p>
+        </p:txBody>
+      </p:sp>
+      <p:sp>
+        <p:nvSpPr>
+          <p:cNvPr id="139" name="Proof Metric 4"/>
+          <p:cNvSpPr txBox="1"/>
+          <p:nvPr/>
+        </p:nvSpPr>
+        <p:spPr>
+          <a:xfrm>
+            <a:off x="9418320" y="5257800"/>
+            <a:ext cx="1508760" cy="301752"/>
+          </a:xfrm>
+          <a:prstGeom prst="rect">
+            <a:avLst/>
+          </a:prstGeom>
+          <a:noFill/>
+        </p:spPr>
+        <p:txBody>
+          <a:bodyPr wrap="square" lIns="0" tIns="0" rIns="0" bIns="0" anchor="ctr">
+            <a:spAutoFit/>
+          </a:bodyPr>
+          <a:lstStyle/>
+          <a:p>
+            <a:pPr algn="l"/>
+            <a:r>
+              <a:rPr sz="2300" b="1">
+                <a:solidFill>
+                  <a:srgbClr val="FF4B00"/>
+                </a:solidFill>
+                <a:latin typeface="Arial"/>
+              </a:rPr>
+              <a:t>$2M</a:t>
+            </a:r>
+          </a:p>
+        </p:txBody>
+      </p:sp>
+      <p:sp>
+        <p:nvSpPr>
+          <p:cNvPr id="140" name="Proof Metric Label 4"/>
+          <p:cNvSpPr txBox="1"/>
+          <p:nvPr/>
+        </p:nvSpPr>
+        <p:spPr>
+          <a:xfrm>
+            <a:off x="9418320" y="5577840"/>
+            <a:ext cx="1508760" cy="146194"/>
+          </a:xfrm>
+          <a:prstGeom prst="rect">
+            <a:avLst/>
+          </a:prstGeom>
+          <a:noFill/>
+        </p:spPr>
+        <p:txBody>
+          <a:bodyPr wrap="square" lIns="0" tIns="0" rIns="0" bIns="0" anchor="t">
+            <a:spAutoFit/>
+          </a:bodyPr>
+          <a:lstStyle/>
+          <a:p>
+            <a:pPr algn="l"/>
+            <a:r>
+              <a:rPr lang="en-US" sz="950" b="1">
+                <a:solidFill>
+                  <a:srgbClr val="FFFFFF"/>
+                </a:solidFill>
+                <a:latin typeface="Arial"/>
+              </a:rPr>
+              <a:t>GROWTH · EXPANSION</a:t>
+            </a:r>
+          </a:p>
+        </p:txBody>
+      </p:sp>
+      <p:sp>
+        <p:nvSpPr>
+          <p:cNvPr id="141" name="Source Footnote 1"/>
+          <p:cNvSpPr txBox="1"/>
+          <p:nvPr/>
+        </p:nvSpPr>
+        <p:spPr>
+          <a:xfrm>
+            <a:off x="566928" y="6071616"/>
+            <a:ext cx="10469880" cy="104644"/>
+          </a:xfrm>
+          <a:prstGeom prst="rect">
+            <a:avLst/>
+          </a:prstGeom>
+          <a:noFill/>
+        </p:spPr>
+        <p:txBody>
+          <a:bodyPr wrap="square" lIns="0" tIns="0" rIns="0" bIns="0" anchor="t">
+            <a:spAutoFit/>
+          </a:bodyPr>
+          <a:lstStyle/>
+          <a:p>
+            <a:pPr algn="l"/>
+            <a:r>
+              <a:rPr lang="en-US" sz="680" b="0">
                 <a:solidFill>
                   <a:srgbClr val="8A857E"/>
                 </a:solidFill>
                 <a:latin typeface="Arial"/>
               </a:rPr>
-              <a:t>Source: https://www.microsoft.com/en-us/microsoft-cloud/blog/financial-services/2021/02/24/announcing-microsoft-cloud-for-financial-services/</a:t>
+              <a:t>Public architecture: https://learn.microsoft.com/en-us/azure/azure-sovereign-clouds/microsoft-sovereign-cloud | https://learn.microsoft.com/en-us/azure/azure-sovereign-clouds/public/confidential-computing</a:t>
+            </a:r>
+          </a:p>
+        </p:txBody>
+      </p:sp>
+      <p:sp>
+        <p:nvSpPr>
+          <p:cNvPr id="142" name="Source Footnote 2"/>
+          <p:cNvSpPr txBox="1"/>
+          <p:nvPr/>
+        </p:nvSpPr>
+        <p:spPr>
+          <a:xfrm>
+            <a:off x="566928" y="6227064"/>
+            <a:ext cx="10469880" cy="109728"/>
+          </a:xfrm>
+          <a:prstGeom prst="rect">
+            <a:avLst/>
+          </a:prstGeom>
+          <a:noFill/>
+        </p:spPr>
+        <p:txBody>
+          <a:bodyPr wrap="square" lIns="0" tIns="0" rIns="0" bIns="0" anchor="t">
+            <a:spAutoFit/>
+          </a:bodyPr>
+          <a:lstStyle/>
+          <a:p>
+            <a:pPr algn="l"/>
+            <a:r>
+              <a:rPr lang="en-US" sz="720" b="0">
+                <a:solidFill>
+                  <a:srgbClr val="8A857E"/>
+                </a:solidFill>
+                <a:latin typeface="Arial"/>
+              </a:rPr>
+              <a:t>FHE context: https://www.microsoft.com/en-us/research/publication/can-homomorphic-encryption-be-practical-2/</a:t>
+            </a:r>
+          </a:p>
+        </p:txBody>
+      </p:sp>
+      <p:sp>
+        <p:nvSpPr>
+          <p:cNvPr id="143" name="Source Footnote 3"/>
+          <p:cNvSpPr txBox="1"/>
+          <p:nvPr/>
+        </p:nvSpPr>
+        <p:spPr>
+          <a:xfrm>
+            <a:off x="566928" y="6382512"/>
+            <a:ext cx="10469880" cy="115416"/>
+          </a:xfrm>
+          <a:prstGeom prst="rect">
+            <a:avLst/>
+          </a:prstGeom>
+          <a:noFill/>
+        </p:spPr>
+        <p:txBody>
+          <a:bodyPr wrap="square" lIns="0" tIns="0" rIns="0" bIns="0" anchor="t">
+            <a:spAutoFit/>
+          </a:bodyPr>
+          <a:lstStyle/>
+          <a:p>
+            <a:pPr algn="l"/>
+            <a:r>
+              <a:rPr lang="en-US" sz="750" b="0">
+                <a:solidFill>
+                  <a:srgbClr val="8A857E"/>
+                </a:solidFill>
+                <a:latin typeface="Arial"/>
+              </a:rPr>
+              <a:t>Outcome metrics are candidate-resume figures; public sources corroborate the architecture, not the internal results</a:t>
+            </a:r>
+            <a:r>
+              <a:rPr sz="750" b="0">
+                <a:solidFill>
+                  <a:srgbClr val="8A857E"/>
+                </a:solidFill>
+                <a:latin typeface="Arial"/>
+              </a:rPr>
+              <a:t>.</a:t>
             </a:r>
           </a:p>
         </p:txBody>
@@ -15723,6 +15273,2166 @@
 </file>
 
 <file path=ppt/slides/slide6.xml><?xml version="1.0" encoding="utf-8"?>
+<p:sld xmlns:a="http://schemas.openxmlformats.org/drawingml/2006/main" xmlns:r="http://schemas.openxmlformats.org/officeDocument/2006/relationships" xmlns:p="http://schemas.openxmlformats.org/presentationml/2006/main">
+  <p:cSld>
+    <p:spTree>
+      <p:nvGrpSpPr>
+        <p:cNvPr id="1" name=""/>
+        <p:cNvGrpSpPr/>
+        <p:nvPr/>
+      </p:nvGrpSpPr>
+      <p:grpSpPr>
+        <a:xfrm>
+          <a:off x="0" y="0"/>
+          <a:ext cx="0" cy="0"/>
+          <a:chOff x="0" y="0"/>
+          <a:chExt cx="0" cy="0"/>
+        </a:xfrm>
+      </p:grpSpPr>
+      <p:pic>
+        <p:nvPicPr>
+          <p:cNvPr id="2" name="Official Mistral footer symbol" descr="image.png"/>
+          <p:cNvPicPr>
+            <a:picLocks noChangeAspect="1"/>
+          </p:cNvPicPr>
+          <p:nvPr/>
+        </p:nvPicPr>
+        <p:blipFill>
+          <a:blip r:embed="rId3"/>
+          <a:srcRect/>
+          <a:stretch>
+            <a:fillRect/>
+          </a:stretch>
+        </p:blipFill>
+        <p:spPr>
+          <a:xfrm>
+            <a:off x="11594592" y="6400800"/>
+            <a:ext cx="228600" cy="163413"/>
+          </a:xfrm>
+          <a:prstGeom prst="rect">
+            <a:avLst/>
+          </a:prstGeom>
+        </p:spPr>
+      </p:pic>
+      <p:pic>
+        <p:nvPicPr>
+          <p:cNvPr id="3" name="Official Mistral header symbol" descr="image.png"/>
+          <p:cNvPicPr>
+            <a:picLocks noChangeAspect="1"/>
+          </p:cNvPicPr>
+          <p:nvPr/>
+        </p:nvPicPr>
+        <p:blipFill>
+          <a:blip r:embed="rId3"/>
+          <a:srcRect/>
+          <a:stretch>
+            <a:fillRect/>
+          </a:stretch>
+        </p:blipFill>
+        <p:spPr>
+          <a:xfrm>
+            <a:off x="182880" y="182880"/>
+            <a:ext cx="228600" cy="163413"/>
+          </a:xfrm>
+          <a:prstGeom prst="rect">
+            <a:avLst/>
+          </a:prstGeom>
+        </p:spPr>
+      </p:pic>
+      <p:sp>
+        <p:nvSpPr>
+          <p:cNvPr id="4" name="Section Eyebrow"/>
+          <p:cNvSpPr txBox="1"/>
+          <p:nvPr/>
+        </p:nvSpPr>
+        <p:spPr>
+          <a:xfrm>
+            <a:off x="621792" y="201168"/>
+            <a:ext cx="9326880" cy="256032"/>
+          </a:xfrm>
+          <a:prstGeom prst="rect">
+            <a:avLst/>
+          </a:prstGeom>
+          <a:noFill/>
+        </p:spPr>
+        <p:txBody>
+          <a:bodyPr wrap="square" lIns="0" tIns="0" rIns="0" bIns="0" anchor="ctr">
+            <a:spAutoFit/>
+          </a:bodyPr>
+          <a:lstStyle/>
+          <a:p>
+            <a:pPr algn="l"/>
+            <a:r>
+              <a:rPr sz="1400" b="1">
+                <a:solidFill>
+                  <a:srgbClr val="FF4B00"/>
+                </a:solidFill>
+                <a:latin typeface="Arial"/>
+              </a:rPr>
+              <a:t>D. E. SHAW · REAL-TIME RISK &amp; CAPITAL DECISIONING</a:t>
+            </a:r>
+          </a:p>
+        </p:txBody>
+      </p:sp>
+      <p:sp>
+        <p:nvSpPr>
+          <p:cNvPr id="5" name="Page Number"/>
+          <p:cNvSpPr txBox="1"/>
+          <p:nvPr/>
+        </p:nvSpPr>
+        <p:spPr>
+          <a:xfrm>
+            <a:off x="11137392" y="6400800"/>
+            <a:ext cx="292608" cy="153619"/>
+          </a:xfrm>
+          <a:prstGeom prst="rect">
+            <a:avLst/>
+          </a:prstGeom>
+          <a:noFill/>
+        </p:spPr>
+        <p:txBody>
+          <a:bodyPr wrap="square" lIns="0" tIns="0" rIns="0" bIns="0" anchor="ctr">
+            <a:spAutoFit/>
+          </a:bodyPr>
+          <a:lstStyle/>
+          <a:p>
+            <a:pPr algn="r"/>
+            <a:r>
+              <a:rPr sz="1000" b="0">
+                <a:solidFill>
+                  <a:srgbClr val="55504A"/>
+                </a:solidFill>
+                <a:latin typeface="Arial"/>
+              </a:rPr>
+              <a:t>6</a:t>
+            </a:r>
+          </a:p>
+        </p:txBody>
+      </p:sp>
+      <p:sp>
+        <p:nvSpPr>
+          <p:cNvPr id="6" name="Slide Title"/>
+          <p:cNvSpPr txBox="1"/>
+          <p:nvPr/>
+        </p:nvSpPr>
+        <p:spPr>
+          <a:xfrm>
+            <a:off x="502920" y="576072"/>
+            <a:ext cx="11155680" cy="538581"/>
+          </a:xfrm>
+          <a:prstGeom prst="rect">
+            <a:avLst/>
+          </a:prstGeom>
+          <a:noFill/>
+        </p:spPr>
+        <p:txBody>
+          <a:bodyPr wrap="square" lIns="0" tIns="0" rIns="0" bIns="0" anchor="ctr">
+            <a:spAutoFit/>
+          </a:bodyPr>
+          <a:lstStyle/>
+          <a:p>
+            <a:pPr algn="l"/>
+            <a:r>
+              <a:rPr sz="3500" b="1">
+                <a:solidFill>
+                  <a:srgbClr val="121212"/>
+                </a:solidFill>
+                <a:latin typeface="Arial"/>
+              </a:rPr>
+              <a:t>5. Production </a:t>
+            </a:r>
+            <a:r>
+              <a:rPr lang="en-US" sz="3500" b="1">
+                <a:solidFill>
+                  <a:srgbClr val="121212"/>
+                </a:solidFill>
+                <a:latin typeface="Arial"/>
+              </a:rPr>
+              <a:t>adoption</a:t>
+            </a:r>
+            <a:r>
+              <a:rPr sz="3500" b="1">
+                <a:solidFill>
+                  <a:srgbClr val="121212"/>
+                </a:solidFill>
+                <a:latin typeface="Arial"/>
+              </a:rPr>
+              <a:t>: prove</a:t>
+            </a:r>
+            <a:r>
+              <a:rPr lang="en-US" sz="3500" b="1">
+                <a:solidFill>
+                  <a:srgbClr val="121212"/>
+                </a:solidFill>
+                <a:latin typeface="Arial"/>
+              </a:rPr>
+              <a:t> trust</a:t>
+            </a:r>
+            <a:r>
+              <a:rPr sz="3500" b="1">
+                <a:solidFill>
+                  <a:srgbClr val="121212"/>
+                </a:solidFill>
+                <a:latin typeface="Arial"/>
+              </a:rPr>
+              <a:t> before cutover</a:t>
+            </a:r>
+          </a:p>
+        </p:txBody>
+      </p:sp>
+      <p:sp>
+        <p:nvSpPr>
+          <p:cNvPr id="7" name="Role Accent"/>
+          <p:cNvSpPr/>
+          <p:nvPr/>
+        </p:nvSpPr>
+        <p:spPr>
+          <a:xfrm>
+            <a:off x="502920" y="1207008"/>
+            <a:ext cx="68580" cy="347472"/>
+          </a:xfrm>
+          <a:prstGeom prst="rect">
+            <a:avLst/>
+          </a:prstGeom>
+          <a:solidFill>
+            <a:srgbClr val="FF4B00"/>
+          </a:solidFill>
+          <a:ln>
+            <a:noFill/>
+          </a:ln>
+        </p:spPr>
+        <p:style>
+          <a:lnRef idx="1">
+            <a:schemeClr val="accent1"/>
+          </a:lnRef>
+          <a:fillRef idx="3">
+            <a:schemeClr val="accent1"/>
+          </a:fillRef>
+          <a:effectRef idx="2">
+            <a:schemeClr val="accent1"/>
+          </a:effectRef>
+          <a:fontRef idx="minor">
+            <a:schemeClr val="lt1"/>
+          </a:fontRef>
+        </p:style>
+        <p:txBody>
+          <a:bodyPr rtlCol="0" anchor="ctr"/>
+          <a:lstStyle/>
+          <a:p>
+            <a:pPr algn="ctr"/>
+            <a:endParaRPr/>
+          </a:p>
+        </p:txBody>
+      </p:sp>
+      <p:sp>
+        <p:nvSpPr>
+          <p:cNvPr id="8" name="Role Line"/>
+          <p:cNvSpPr txBox="1"/>
+          <p:nvPr/>
+        </p:nvSpPr>
+        <p:spPr>
+          <a:xfrm>
+            <a:off x="658368" y="1273022"/>
+            <a:ext cx="10881360" cy="215444"/>
+          </a:xfrm>
+          <a:prstGeom prst="rect">
+            <a:avLst/>
+          </a:prstGeom>
+          <a:noFill/>
+        </p:spPr>
+        <p:txBody>
+          <a:bodyPr wrap="square" lIns="0" tIns="0" rIns="0" bIns="0" anchor="ctr">
+            <a:spAutoFit/>
+          </a:bodyPr>
+          <a:lstStyle/>
+          <a:p>
+            <a:pPr algn="l"/>
+            <a:r>
+              <a:rPr sz="1400" b="1">
+                <a:solidFill>
+                  <a:srgbClr val="FF4B00"/>
+                </a:solidFill>
+                <a:latin typeface="Arial"/>
+              </a:rPr>
+              <a:t>MY ROLE  </a:t>
+            </a:r>
+            <a:r>
+              <a:rPr lang="en-US" sz="1400" b="0">
+                <a:solidFill>
+                  <a:srgbClr val="121212"/>
+                </a:solidFill>
+                <a:latin typeface="Arial"/>
+              </a:rPr>
+              <a:t>aligned </a:t>
+            </a:r>
+            <a:r>
+              <a:rPr sz="1400" b="0">
+                <a:solidFill>
+                  <a:srgbClr val="121212"/>
+                </a:solidFill>
+                <a:latin typeface="Arial"/>
+              </a:rPr>
+              <a:t>a 15+ person program </a:t>
+            </a:r>
+            <a:r>
+              <a:rPr lang="en-US" sz="1400" b="0">
+                <a:solidFill>
+                  <a:srgbClr val="121212"/>
+                </a:solidFill>
+                <a:latin typeface="Arial"/>
+              </a:rPr>
+              <a:t>around one measurable product contract</a:t>
+            </a:r>
+            <a:endParaRPr sz="1400" b="0">
+              <a:solidFill>
+                <a:srgbClr val="121212"/>
+              </a:solidFill>
+              <a:latin typeface="Arial"/>
+            </a:endParaRPr>
+          </a:p>
+        </p:txBody>
+      </p:sp>
+      <p:cxnSp>
+        <p:nvCxnSpPr>
+          <p:cNvPr id="9" name="Header Divider"/>
+          <p:cNvCxnSpPr/>
+          <p:nvPr/>
+        </p:nvCxnSpPr>
+        <p:spPr>
+          <a:xfrm>
+            <a:off x="502920" y="1627632"/>
+            <a:ext cx="11155680" cy="0"/>
+          </a:xfrm>
+          <a:prstGeom prst="line">
+            <a:avLst/>
+          </a:prstGeom>
+          <a:ln w="10160">
+            <a:solidFill>
+              <a:srgbClr val="D9D5CE"/>
+            </a:solidFill>
+          </a:ln>
+        </p:spPr>
+        <p:style>
+          <a:lnRef idx="2">
+            <a:schemeClr val="accent1"/>
+          </a:lnRef>
+          <a:fillRef idx="0">
+            <a:schemeClr val="accent1"/>
+          </a:fillRef>
+          <a:effectRef idx="1">
+            <a:schemeClr val="accent1"/>
+          </a:effectRef>
+          <a:fontRef idx="minor">
+            <a:schemeClr val="tx1"/>
+          </a:fontRef>
+        </p:style>
+      </p:cxnSp>
+      <p:sp>
+        <p:nvSpPr>
+          <p:cNvPr id="10" name="Takeaway"/>
+          <p:cNvSpPr txBox="1"/>
+          <p:nvPr/>
+        </p:nvSpPr>
+        <p:spPr>
+          <a:xfrm>
+            <a:off x="502920" y="1784628"/>
+            <a:ext cx="11155680" cy="215444"/>
+          </a:xfrm>
+          <a:prstGeom prst="rect">
+            <a:avLst/>
+          </a:prstGeom>
+          <a:noFill/>
+        </p:spPr>
+        <p:txBody>
+          <a:bodyPr wrap="square" lIns="0" tIns="0" rIns="0" bIns="0" anchor="ctr">
+            <a:spAutoFit/>
+          </a:bodyPr>
+          <a:lstStyle/>
+          <a:p>
+            <a:pPr algn="l"/>
+            <a:r>
+              <a:rPr sz="1400" b="1">
+                <a:solidFill>
+                  <a:srgbClr val="FFC400"/>
+                </a:solidFill>
+                <a:latin typeface="Arial"/>
+              </a:rPr>
+              <a:t>TAKEAWAY  </a:t>
+            </a:r>
+            <a:r>
+              <a:rPr lang="en-US" sz="1400" b="1">
+                <a:solidFill>
+                  <a:srgbClr val="121212"/>
+                </a:solidFill>
+                <a:latin typeface="Arial"/>
+              </a:rPr>
+              <a:t>Performance earned attention. Shadow </a:t>
+            </a:r>
+            <a:r>
+              <a:rPr sz="1400" b="1">
+                <a:solidFill>
+                  <a:srgbClr val="121212"/>
+                </a:solidFill>
+                <a:latin typeface="Arial"/>
+              </a:rPr>
+              <a:t>proof </a:t>
+            </a:r>
+            <a:r>
+              <a:rPr lang="en-US" sz="1400" b="1">
+                <a:solidFill>
+                  <a:srgbClr val="121212"/>
+                </a:solidFill>
+                <a:latin typeface="Arial"/>
+              </a:rPr>
+              <a:t>earned production trust</a:t>
+            </a:r>
+            <a:r>
+              <a:rPr sz="1400" b="1">
+                <a:solidFill>
+                  <a:srgbClr val="121212"/>
+                </a:solidFill>
+                <a:latin typeface="Arial"/>
+              </a:rPr>
+              <a:t>.</a:t>
+            </a:r>
+          </a:p>
+        </p:txBody>
+      </p:sp>
+      <p:cxnSp>
+        <p:nvCxnSpPr>
+          <p:cNvPr id="11" name="Body Divider"/>
+          <p:cNvCxnSpPr/>
+          <p:nvPr/>
+        </p:nvCxnSpPr>
+        <p:spPr>
+          <a:xfrm>
+            <a:off x="3584448" y="2221992"/>
+            <a:ext cx="0" cy="3721608"/>
+          </a:xfrm>
+          <a:prstGeom prst="line">
+            <a:avLst/>
+          </a:prstGeom>
+          <a:ln w="10160">
+            <a:solidFill>
+              <a:srgbClr val="D9D5CE"/>
+            </a:solidFill>
+          </a:ln>
+        </p:spPr>
+        <p:style>
+          <a:lnRef idx="2">
+            <a:schemeClr val="accent1"/>
+          </a:lnRef>
+          <a:fillRef idx="0">
+            <a:schemeClr val="accent1"/>
+          </a:fillRef>
+          <a:effectRef idx="1">
+            <a:schemeClr val="accent1"/>
+          </a:effectRef>
+          <a:fontRef idx="minor">
+            <a:schemeClr val="tx1"/>
+          </a:fontRef>
+        </p:style>
+      </p:cxnSp>
+      <p:sp>
+        <p:nvSpPr>
+          <p:cNvPr id="12" name="Insight Number"/>
+          <p:cNvSpPr txBox="1"/>
+          <p:nvPr/>
+        </p:nvSpPr>
+        <p:spPr>
+          <a:xfrm>
+            <a:off x="640080" y="2221992"/>
+            <a:ext cx="384048" cy="201168"/>
+          </a:xfrm>
+          <a:prstGeom prst="rect">
+            <a:avLst/>
+          </a:prstGeom>
+          <a:noFill/>
+        </p:spPr>
+        <p:txBody>
+          <a:bodyPr wrap="square" lIns="0" tIns="0" rIns="0" bIns="0" anchor="ctr">
+            <a:spAutoFit/>
+          </a:bodyPr>
+          <a:lstStyle/>
+          <a:p>
+            <a:pPr algn="l"/>
+            <a:r>
+              <a:rPr sz="1200" b="1">
+                <a:solidFill>
+                  <a:srgbClr val="FF4B00"/>
+                </a:solidFill>
+                <a:latin typeface="Arial"/>
+              </a:rPr>
+              <a:t>01</a:t>
+            </a:r>
+          </a:p>
+        </p:txBody>
+      </p:sp>
+      <p:sp>
+        <p:nvSpPr>
+          <p:cNvPr id="13" name="Insight Label"/>
+          <p:cNvSpPr txBox="1"/>
+          <p:nvPr/>
+        </p:nvSpPr>
+        <p:spPr>
+          <a:xfrm>
+            <a:off x="1051560" y="2242286"/>
+            <a:ext cx="2194560" cy="215444"/>
+          </a:xfrm>
+          <a:prstGeom prst="rect">
+            <a:avLst/>
+          </a:prstGeom>
+          <a:noFill/>
+        </p:spPr>
+        <p:txBody>
+          <a:bodyPr wrap="square" lIns="0" tIns="0" rIns="0" bIns="0" anchor="ctr">
+            <a:spAutoFit/>
+          </a:bodyPr>
+          <a:lstStyle/>
+          <a:p>
+            <a:pPr algn="l"/>
+            <a:r>
+              <a:rPr lang="en-US" sz="1400" b="1">
+                <a:solidFill>
+                  <a:srgbClr val="FF4B00"/>
+                </a:solidFill>
+                <a:latin typeface="Arial"/>
+              </a:rPr>
+              <a:t>USER INSIGHT</a:t>
+            </a:r>
+          </a:p>
+        </p:txBody>
+      </p:sp>
+      <p:sp>
+        <p:nvSpPr>
+          <p:cNvPr id="14" name="Insight Quote"/>
+          <p:cNvSpPr txBox="1"/>
+          <p:nvPr/>
+        </p:nvSpPr>
+        <p:spPr>
+          <a:xfrm>
+            <a:off x="640080" y="2770632"/>
+            <a:ext cx="2670048" cy="969496"/>
+          </a:xfrm>
+          <a:prstGeom prst="rect">
+            <a:avLst/>
+          </a:prstGeom>
+          <a:noFill/>
+        </p:spPr>
+        <p:txBody>
+          <a:bodyPr wrap="square" lIns="0" tIns="0" rIns="0" bIns="0" anchor="t">
+            <a:spAutoFit/>
+          </a:bodyPr>
+          <a:lstStyle/>
+          <a:p>
+            <a:pPr algn="l"/>
+            <a:r>
+              <a:rPr lang="en-US" sz="2100" b="1">
+                <a:solidFill>
+                  <a:srgbClr val="121212"/>
+                </a:solidFill>
+                <a:latin typeface="Arial"/>
+              </a:rPr>
+              <a:t>“Speed alone would not change behavior.”</a:t>
+            </a:r>
+          </a:p>
+        </p:txBody>
+      </p:sp>
+      <p:sp>
+        <p:nvSpPr>
+          <p:cNvPr id="15" name="Product Pivot Label"/>
+          <p:cNvSpPr txBox="1">
+            <a:spLocks/>
+          </p:cNvSpPr>
+          <p:nvPr/>
+        </p:nvSpPr>
+        <p:spPr>
+          <a:xfrm>
+            <a:off x="640080" y="3749039"/>
+            <a:ext cx="2670048" cy="210312"/>
+          </a:xfrm>
+          <a:prstGeom prst="rect">
+            <a:avLst/>
+          </a:prstGeom>
+          <a:noFill/>
+        </p:spPr>
+        <p:txBody>
+          <a:bodyPr wrap="square" lIns="0" tIns="0" rIns="0" bIns="0" anchor="t">
+            <a:spAutoFit/>
+          </a:bodyPr>
+          <a:lstStyle/>
+          <a:p>
+            <a:pPr algn="l"/>
+            <a:r>
+              <a:rPr lang="en-US" sz="1150" b="1">
+                <a:solidFill>
+                  <a:srgbClr val="55504A"/>
+                </a:solidFill>
+                <a:latin typeface="Arial"/>
+              </a:rPr>
+              <a:t>THE PRODUCT BECAME</a:t>
+            </a:r>
+          </a:p>
+        </p:txBody>
+      </p:sp>
+      <p:sp>
+        <p:nvSpPr>
+          <p:cNvPr id="16" name="Product Pivot"/>
+          <p:cNvSpPr txBox="1"/>
+          <p:nvPr/>
+        </p:nvSpPr>
+        <p:spPr>
+          <a:xfrm>
+            <a:off x="640080" y="4023360"/>
+            <a:ext cx="2688336" cy="553998"/>
+          </a:xfrm>
+          <a:prstGeom prst="rect">
+            <a:avLst/>
+          </a:prstGeom>
+          <a:noFill/>
+        </p:spPr>
+        <p:txBody>
+          <a:bodyPr wrap="square" lIns="0" tIns="0" rIns="0" bIns="0" anchor="t">
+            <a:spAutoFit/>
+          </a:bodyPr>
+          <a:lstStyle/>
+          <a:p>
+            <a:pPr algn="l"/>
+            <a:r>
+              <a:rPr lang="en-US" sz="1800" b="1">
+                <a:solidFill>
+                  <a:srgbClr val="FF4B00"/>
+                </a:solidFill>
+                <a:latin typeface="Arial"/>
+              </a:rPr>
+              <a:t>Make decisions faster—without reducing trust.</a:t>
+            </a:r>
+          </a:p>
+        </p:txBody>
+      </p:sp>
+      <p:cxnSp>
+        <p:nvCxnSpPr>
+          <p:cNvPr id="17" name="Contract Divider"/>
+          <p:cNvCxnSpPr/>
+          <p:nvPr/>
+        </p:nvCxnSpPr>
+        <p:spPr>
+          <a:xfrm>
+            <a:off x="640080" y="4937760"/>
+            <a:ext cx="2670048" cy="0"/>
+          </a:xfrm>
+          <a:prstGeom prst="line">
+            <a:avLst/>
+          </a:prstGeom>
+          <a:ln w="10160">
+            <a:solidFill>
+              <a:srgbClr val="D9D5CE"/>
+            </a:solidFill>
+          </a:ln>
+        </p:spPr>
+        <p:style>
+          <a:lnRef idx="2">
+            <a:schemeClr val="accent1"/>
+          </a:lnRef>
+          <a:fillRef idx="0">
+            <a:schemeClr val="accent1"/>
+          </a:fillRef>
+          <a:effectRef idx="1">
+            <a:schemeClr val="accent1"/>
+          </a:effectRef>
+          <a:fontRef idx="minor">
+            <a:schemeClr val="tx1"/>
+          </a:fontRef>
+        </p:style>
+      </p:cxnSp>
+      <p:sp>
+        <p:nvSpPr>
+          <p:cNvPr id="18" name="Contract Label"/>
+          <p:cNvSpPr txBox="1">
+            <a:spLocks/>
+          </p:cNvSpPr>
+          <p:nvPr/>
+        </p:nvSpPr>
+        <p:spPr>
+          <a:xfrm>
+            <a:off x="640080" y="5102352"/>
+            <a:ext cx="2670048" cy="201168"/>
+          </a:xfrm>
+          <a:prstGeom prst="rect">
+            <a:avLst/>
+          </a:prstGeom>
+          <a:noFill/>
+        </p:spPr>
+        <p:txBody>
+          <a:bodyPr wrap="square" lIns="0" tIns="0" rIns="0" bIns="0" anchor="t">
+            <a:spAutoFit/>
+          </a:bodyPr>
+          <a:lstStyle/>
+          <a:p>
+            <a:pPr algn="l"/>
+            <a:r>
+              <a:rPr lang="en-US" sz="1150" b="1">
+                <a:solidFill>
+                  <a:srgbClr val="55504A"/>
+                </a:solidFill>
+                <a:latin typeface="Arial"/>
+              </a:rPr>
+              <a:t>ONE PRODUCT CONTRACT</a:t>
+            </a:r>
+          </a:p>
+        </p:txBody>
+      </p:sp>
+      <p:sp>
+        <p:nvSpPr>
+          <p:cNvPr id="19" name="Contract Marker 1"/>
+          <p:cNvSpPr>
+            <a:spLocks/>
+          </p:cNvSpPr>
+          <p:nvPr/>
+        </p:nvSpPr>
+        <p:spPr>
+          <a:xfrm>
+            <a:off x="640080" y="5522976"/>
+            <a:ext cx="73152" cy="73152"/>
+          </a:xfrm>
+          <a:prstGeom prst="rect">
+            <a:avLst/>
+          </a:prstGeom>
+          <a:solidFill>
+            <a:srgbClr val="FF4B00"/>
+          </a:solidFill>
+          <a:ln>
+            <a:noFill/>
+          </a:ln>
+        </p:spPr>
+        <p:style>
+          <a:lnRef idx="1">
+            <a:schemeClr val="accent1"/>
+          </a:lnRef>
+          <a:fillRef idx="3">
+            <a:schemeClr val="accent1"/>
+          </a:fillRef>
+          <a:effectRef idx="2">
+            <a:schemeClr val="accent1"/>
+          </a:effectRef>
+          <a:fontRef idx="minor">
+            <a:schemeClr val="lt1"/>
+          </a:fontRef>
+        </p:style>
+        <p:txBody>
+          <a:bodyPr rtlCol="0" anchor="ctr"/>
+          <a:lstStyle/>
+          <a:p>
+            <a:pPr algn="ctr"/>
+            <a:endParaRPr lang="en-US"/>
+          </a:p>
+        </p:txBody>
+      </p:sp>
+      <p:sp>
+        <p:nvSpPr>
+          <p:cNvPr id="20" name="Contract 1"/>
+          <p:cNvSpPr txBox="1"/>
+          <p:nvPr/>
+        </p:nvSpPr>
+        <p:spPr>
+          <a:xfrm>
+            <a:off x="786384" y="5486400"/>
+            <a:ext cx="1161288" cy="164592"/>
+          </a:xfrm>
+          <a:prstGeom prst="rect">
+            <a:avLst/>
+          </a:prstGeom>
+          <a:noFill/>
+        </p:spPr>
+        <p:txBody>
+          <a:bodyPr wrap="square" lIns="0" tIns="0" rIns="0" bIns="0" anchor="t">
+            <a:spAutoFit/>
+          </a:bodyPr>
+          <a:lstStyle/>
+          <a:p>
+            <a:pPr algn="l"/>
+            <a:r>
+              <a:rPr lang="en-US" sz="1050" b="1">
+                <a:solidFill>
+                  <a:srgbClr val="121212"/>
+                </a:solidFill>
+                <a:latin typeface="Arial"/>
+              </a:rPr>
+              <a:t>PERFORMANCE</a:t>
+            </a:r>
+          </a:p>
+        </p:txBody>
+      </p:sp>
+      <p:sp>
+        <p:nvSpPr>
+          <p:cNvPr id="21" name="Contract Marker 2"/>
+          <p:cNvSpPr/>
+          <p:nvPr/>
+        </p:nvSpPr>
+        <p:spPr>
+          <a:xfrm>
+            <a:off x="1965960" y="5522976"/>
+            <a:ext cx="73152" cy="73152"/>
+          </a:xfrm>
+          <a:prstGeom prst="rect">
+            <a:avLst/>
+          </a:prstGeom>
+          <a:solidFill>
+            <a:srgbClr val="FF4B00"/>
+          </a:solidFill>
+          <a:ln>
+            <a:noFill/>
+          </a:ln>
+        </p:spPr>
+        <p:style>
+          <a:lnRef idx="1">
+            <a:schemeClr val="accent1"/>
+          </a:lnRef>
+          <a:fillRef idx="3">
+            <a:schemeClr val="accent1"/>
+          </a:fillRef>
+          <a:effectRef idx="2">
+            <a:schemeClr val="accent1"/>
+          </a:effectRef>
+          <a:fontRef idx="minor">
+            <a:schemeClr val="lt1"/>
+          </a:fontRef>
+        </p:style>
+        <p:txBody>
+          <a:bodyPr rtlCol="0" anchor="ctr"/>
+          <a:lstStyle/>
+          <a:p>
+            <a:pPr algn="ctr"/>
+            <a:endParaRPr/>
+          </a:p>
+        </p:txBody>
+      </p:sp>
+      <p:sp>
+        <p:nvSpPr>
+          <p:cNvPr id="22" name="Contract 2"/>
+          <p:cNvSpPr txBox="1"/>
+          <p:nvPr/>
+        </p:nvSpPr>
+        <p:spPr>
+          <a:xfrm>
+            <a:off x="2112264" y="5486400"/>
+            <a:ext cx="1161288" cy="164592"/>
+          </a:xfrm>
+          <a:prstGeom prst="rect">
+            <a:avLst/>
+          </a:prstGeom>
+          <a:noFill/>
+        </p:spPr>
+        <p:txBody>
+          <a:bodyPr wrap="square" lIns="0" tIns="0" rIns="0" bIns="0" anchor="t">
+            <a:spAutoFit/>
+          </a:bodyPr>
+          <a:lstStyle/>
+          <a:p>
+            <a:pPr algn="l"/>
+            <a:r>
+              <a:rPr lang="en-US" sz="1050" b="1">
+                <a:solidFill>
+                  <a:srgbClr val="121212"/>
+                </a:solidFill>
+                <a:latin typeface="Arial"/>
+              </a:rPr>
+              <a:t>ACCURACY</a:t>
+            </a:r>
+          </a:p>
+        </p:txBody>
+      </p:sp>
+      <p:sp>
+        <p:nvSpPr>
+          <p:cNvPr id="23" name="Contract Marker 3"/>
+          <p:cNvSpPr>
+            <a:spLocks/>
+          </p:cNvSpPr>
+          <p:nvPr/>
+        </p:nvSpPr>
+        <p:spPr>
+          <a:xfrm>
+            <a:off x="640080" y="5788152"/>
+            <a:ext cx="73152" cy="73152"/>
+          </a:xfrm>
+          <a:prstGeom prst="rect">
+            <a:avLst/>
+          </a:prstGeom>
+          <a:solidFill>
+            <a:srgbClr val="FF4B00"/>
+          </a:solidFill>
+          <a:ln>
+            <a:noFill/>
+          </a:ln>
+        </p:spPr>
+        <p:style>
+          <a:lnRef idx="1">
+            <a:schemeClr val="accent1"/>
+          </a:lnRef>
+          <a:fillRef idx="3">
+            <a:schemeClr val="accent1"/>
+          </a:fillRef>
+          <a:effectRef idx="2">
+            <a:schemeClr val="accent1"/>
+          </a:effectRef>
+          <a:fontRef idx="minor">
+            <a:schemeClr val="lt1"/>
+          </a:fontRef>
+        </p:style>
+        <p:txBody>
+          <a:bodyPr rtlCol="0" anchor="ctr"/>
+          <a:lstStyle/>
+          <a:p>
+            <a:pPr algn="ctr"/>
+            <a:endParaRPr lang="en-US"/>
+          </a:p>
+        </p:txBody>
+      </p:sp>
+      <p:sp>
+        <p:nvSpPr>
+          <p:cNvPr id="24" name="Contract 3"/>
+          <p:cNvSpPr txBox="1">
+            <a:spLocks/>
+          </p:cNvSpPr>
+          <p:nvPr/>
+        </p:nvSpPr>
+        <p:spPr>
+          <a:xfrm>
+            <a:off x="786384" y="5751576"/>
+            <a:ext cx="1161288" cy="164592"/>
+          </a:xfrm>
+          <a:prstGeom prst="rect">
+            <a:avLst/>
+          </a:prstGeom>
+          <a:noFill/>
+        </p:spPr>
+        <p:txBody>
+          <a:bodyPr wrap="square" lIns="0" tIns="0" rIns="0" bIns="0" anchor="t">
+            <a:spAutoFit/>
+          </a:bodyPr>
+          <a:lstStyle/>
+          <a:p>
+            <a:pPr algn="l"/>
+            <a:r>
+              <a:rPr lang="en-US" sz="1050" b="1">
+                <a:solidFill>
+                  <a:srgbClr val="121212"/>
+                </a:solidFill>
+                <a:latin typeface="Arial"/>
+              </a:rPr>
+              <a:t>CONTROLS</a:t>
+            </a:r>
+          </a:p>
+        </p:txBody>
+      </p:sp>
+      <p:sp>
+        <p:nvSpPr>
+          <p:cNvPr id="25" name="Contract Marker 4"/>
+          <p:cNvSpPr>
+            <a:spLocks/>
+          </p:cNvSpPr>
+          <p:nvPr/>
+        </p:nvSpPr>
+        <p:spPr>
+          <a:xfrm>
+            <a:off x="1965960" y="5788152"/>
+            <a:ext cx="73152" cy="73152"/>
+          </a:xfrm>
+          <a:prstGeom prst="rect">
+            <a:avLst/>
+          </a:prstGeom>
+          <a:solidFill>
+            <a:srgbClr val="FF4B00"/>
+          </a:solidFill>
+          <a:ln>
+            <a:noFill/>
+          </a:ln>
+        </p:spPr>
+        <p:style>
+          <a:lnRef idx="1">
+            <a:schemeClr val="accent1"/>
+          </a:lnRef>
+          <a:fillRef idx="3">
+            <a:schemeClr val="accent1"/>
+          </a:fillRef>
+          <a:effectRef idx="2">
+            <a:schemeClr val="accent1"/>
+          </a:effectRef>
+          <a:fontRef idx="minor">
+            <a:schemeClr val="lt1"/>
+          </a:fontRef>
+        </p:style>
+        <p:txBody>
+          <a:bodyPr rtlCol="0" anchor="ctr"/>
+          <a:lstStyle/>
+          <a:p>
+            <a:pPr algn="ctr"/>
+            <a:endParaRPr lang="en-US"/>
+          </a:p>
+        </p:txBody>
+      </p:sp>
+      <p:sp>
+        <p:nvSpPr>
+          <p:cNvPr id="26" name="Contract 4"/>
+          <p:cNvSpPr txBox="1"/>
+          <p:nvPr/>
+        </p:nvSpPr>
+        <p:spPr>
+          <a:xfrm>
+            <a:off x="2112264" y="5751576"/>
+            <a:ext cx="1161288" cy="164592"/>
+          </a:xfrm>
+          <a:prstGeom prst="rect">
+            <a:avLst/>
+          </a:prstGeom>
+          <a:noFill/>
+        </p:spPr>
+        <p:txBody>
+          <a:bodyPr wrap="square" lIns="0" tIns="0" rIns="0" bIns="0" anchor="t">
+            <a:spAutoFit/>
+          </a:bodyPr>
+          <a:lstStyle/>
+          <a:p>
+            <a:pPr algn="l"/>
+            <a:r>
+              <a:rPr lang="en-US" sz="1050" b="1">
+                <a:solidFill>
+                  <a:srgbClr val="121212"/>
+                </a:solidFill>
+                <a:latin typeface="Arial"/>
+              </a:rPr>
+              <a:t>ECONOMICS</a:t>
+            </a:r>
+          </a:p>
+        </p:txBody>
+      </p:sp>
+      <p:sp>
+        <p:nvSpPr>
+          <p:cNvPr id="27" name="Gate Number"/>
+          <p:cNvSpPr txBox="1"/>
+          <p:nvPr/>
+        </p:nvSpPr>
+        <p:spPr>
+          <a:xfrm>
+            <a:off x="3968496" y="2221992"/>
+            <a:ext cx="384048" cy="201168"/>
+          </a:xfrm>
+          <a:prstGeom prst="rect">
+            <a:avLst/>
+          </a:prstGeom>
+          <a:noFill/>
+        </p:spPr>
+        <p:txBody>
+          <a:bodyPr wrap="square" lIns="0" tIns="0" rIns="0" bIns="0" anchor="ctr">
+            <a:spAutoFit/>
+          </a:bodyPr>
+          <a:lstStyle/>
+          <a:p>
+            <a:pPr algn="l"/>
+            <a:r>
+              <a:rPr sz="1200" b="1">
+                <a:solidFill>
+                  <a:srgbClr val="FF4B00"/>
+                </a:solidFill>
+                <a:latin typeface="Arial"/>
+              </a:rPr>
+              <a:t>02</a:t>
+            </a:r>
+          </a:p>
+        </p:txBody>
+      </p:sp>
+      <p:sp>
+        <p:nvSpPr>
+          <p:cNvPr id="28" name="Gate Label"/>
+          <p:cNvSpPr txBox="1"/>
+          <p:nvPr/>
+        </p:nvSpPr>
+        <p:spPr>
+          <a:xfrm>
+            <a:off x="4379976" y="2242286"/>
+            <a:ext cx="2743200" cy="215444"/>
+          </a:xfrm>
+          <a:prstGeom prst="rect">
+            <a:avLst/>
+          </a:prstGeom>
+          <a:noFill/>
+        </p:spPr>
+        <p:txBody>
+          <a:bodyPr wrap="square" lIns="0" tIns="0" rIns="0" bIns="0" anchor="ctr">
+            <a:spAutoFit/>
+          </a:bodyPr>
+          <a:lstStyle/>
+          <a:p>
+            <a:pPr algn="l"/>
+            <a:r>
+              <a:rPr lang="en-US" sz="1400" b="1">
+                <a:solidFill>
+                  <a:srgbClr val="FF4B00"/>
+                </a:solidFill>
+                <a:latin typeface="Arial"/>
+              </a:rPr>
+              <a:t>THE </a:t>
+            </a:r>
+            <a:r>
+              <a:rPr sz="1400" b="1">
+                <a:solidFill>
+                  <a:srgbClr val="FF4B00"/>
+                </a:solidFill>
+                <a:latin typeface="Arial"/>
+              </a:rPr>
+              <a:t>ADOPTION </a:t>
+            </a:r>
+            <a:r>
+              <a:rPr lang="en-US" sz="1400" b="1">
+                <a:solidFill>
+                  <a:srgbClr val="FF4B00"/>
+                </a:solidFill>
+                <a:latin typeface="Arial"/>
+              </a:rPr>
+              <a:t>GATE</a:t>
+            </a:r>
+            <a:endParaRPr sz="1400" b="1">
+              <a:solidFill>
+                <a:srgbClr val="FF4B00"/>
+              </a:solidFill>
+              <a:latin typeface="Arial"/>
+            </a:endParaRPr>
+          </a:p>
+        </p:txBody>
+      </p:sp>
+      <p:sp>
+        <p:nvSpPr>
+          <p:cNvPr id="29" name="Shadow Hero"/>
+          <p:cNvSpPr txBox="1"/>
+          <p:nvPr/>
+        </p:nvSpPr>
+        <p:spPr>
+          <a:xfrm>
+            <a:off x="3968496" y="2651760"/>
+            <a:ext cx="3063240" cy="530352"/>
+          </a:xfrm>
+          <a:prstGeom prst="rect">
+            <a:avLst/>
+          </a:prstGeom>
+          <a:noFill/>
+        </p:spPr>
+        <p:txBody>
+          <a:bodyPr wrap="square" lIns="0" tIns="0" rIns="0" bIns="0" anchor="ctr">
+            <a:spAutoFit/>
+          </a:bodyPr>
+          <a:lstStyle/>
+          <a:p>
+            <a:pPr algn="l"/>
+            <a:r>
+              <a:rPr lang="en-US" sz="3400" b="1">
+                <a:solidFill>
+                  <a:srgbClr val="FF4B00"/>
+                </a:solidFill>
+                <a:latin typeface="Arial"/>
+              </a:rPr>
+              <a:t>90 DAYS</a:t>
+            </a:r>
+          </a:p>
+        </p:txBody>
+      </p:sp>
+      <p:sp>
+        <p:nvSpPr>
+          <p:cNvPr id="30" name="Shadow Caption"/>
+          <p:cNvSpPr txBox="1"/>
+          <p:nvPr/>
+        </p:nvSpPr>
+        <p:spPr>
+          <a:xfrm>
+            <a:off x="3968496" y="3154680"/>
+            <a:ext cx="3063240" cy="201168"/>
+          </a:xfrm>
+          <a:prstGeom prst="rect">
+            <a:avLst/>
+          </a:prstGeom>
+          <a:noFill/>
+        </p:spPr>
+        <p:txBody>
+          <a:bodyPr wrap="square" lIns="0" tIns="0" rIns="0" bIns="0" anchor="t">
+            <a:spAutoFit/>
+          </a:bodyPr>
+          <a:lstStyle/>
+          <a:p>
+            <a:pPr algn="l"/>
+            <a:r>
+              <a:rPr sz="1200" b="1">
+                <a:solidFill>
+                  <a:srgbClr val="55504A"/>
+                </a:solidFill>
+                <a:latin typeface="Arial"/>
+              </a:rPr>
+              <a:t>parallel shadow operation</a:t>
+            </a:r>
+          </a:p>
+        </p:txBody>
+      </p:sp>
+      <p:sp>
+        <p:nvSpPr>
+          <p:cNvPr id="31" name="Agreement Hero"/>
+          <p:cNvSpPr txBox="1"/>
+          <p:nvPr/>
+        </p:nvSpPr>
+        <p:spPr>
+          <a:xfrm>
+            <a:off x="7991856" y="2651760"/>
+            <a:ext cx="3063240" cy="530352"/>
+          </a:xfrm>
+          <a:prstGeom prst="rect">
+            <a:avLst/>
+          </a:prstGeom>
+          <a:noFill/>
+        </p:spPr>
+        <p:txBody>
+          <a:bodyPr wrap="square" lIns="0" tIns="0" rIns="0" bIns="0" anchor="ctr">
+            <a:spAutoFit/>
+          </a:bodyPr>
+          <a:lstStyle/>
+          <a:p>
+            <a:pPr algn="l"/>
+            <a:r>
+              <a:rPr lang="en-US" sz="3400" b="1">
+                <a:solidFill>
+                  <a:srgbClr val="FF4B00"/>
+                </a:solidFill>
+                <a:latin typeface="Arial"/>
+              </a:rPr>
+              <a:t>~98%</a:t>
+            </a:r>
+          </a:p>
+        </p:txBody>
+      </p:sp>
+      <p:sp>
+        <p:nvSpPr>
+          <p:cNvPr id="32" name="Agreement Caption"/>
+          <p:cNvSpPr txBox="1"/>
+          <p:nvPr/>
+        </p:nvSpPr>
+        <p:spPr>
+          <a:xfrm>
+            <a:off x="7991856" y="3154680"/>
+            <a:ext cx="3063240" cy="184666"/>
+          </a:xfrm>
+          <a:prstGeom prst="rect">
+            <a:avLst/>
+          </a:prstGeom>
+          <a:noFill/>
+        </p:spPr>
+        <p:txBody>
+          <a:bodyPr wrap="square" lIns="0" tIns="0" rIns="0" bIns="0" anchor="t">
+            <a:spAutoFit/>
+          </a:bodyPr>
+          <a:lstStyle/>
+          <a:p>
+            <a:pPr algn="l"/>
+            <a:r>
+              <a:rPr lang="en-US" sz="1200" b="1">
+                <a:solidFill>
+                  <a:srgbClr val="55504A"/>
+                </a:solidFill>
+                <a:latin typeface="Arial"/>
+              </a:rPr>
+              <a:t>output agreement before cutover</a:t>
+            </a:r>
+          </a:p>
+        </p:txBody>
+      </p:sp>
+      <p:cxnSp>
+        <p:nvCxnSpPr>
+          <p:cNvPr id="33" name="Validation Timeline"/>
+          <p:cNvCxnSpPr/>
+          <p:nvPr/>
+        </p:nvCxnSpPr>
+        <p:spPr>
+          <a:xfrm>
+            <a:off x="4169663" y="3822191"/>
+            <a:ext cx="6967729" cy="0"/>
+          </a:xfrm>
+          <a:prstGeom prst="line">
+            <a:avLst/>
+          </a:prstGeom>
+          <a:ln w="19050">
+            <a:solidFill>
+              <a:srgbClr val="FF4B00"/>
+            </a:solidFill>
+          </a:ln>
+        </p:spPr>
+        <p:style>
+          <a:lnRef idx="2">
+            <a:schemeClr val="accent1"/>
+          </a:lnRef>
+          <a:fillRef idx="0">
+            <a:schemeClr val="accent1"/>
+          </a:fillRef>
+          <a:effectRef idx="1">
+            <a:schemeClr val="accent1"/>
+          </a:effectRef>
+          <a:fontRef idx="minor">
+            <a:schemeClr val="tx1"/>
+          </a:fontRef>
+        </p:style>
+      </p:cxnSp>
+      <p:sp>
+        <p:nvSpPr>
+          <p:cNvPr id="34" name="Timeline Node 1"/>
+          <p:cNvSpPr>
+            <a:spLocks/>
+          </p:cNvSpPr>
+          <p:nvPr/>
+        </p:nvSpPr>
+        <p:spPr>
+          <a:xfrm>
+            <a:off x="4187952" y="3712463"/>
+            <a:ext cx="219456" cy="219456"/>
+          </a:xfrm>
+          <a:prstGeom prst="ellipse">
+            <a:avLst/>
+          </a:prstGeom>
+          <a:solidFill>
+            <a:srgbClr val="FF4B00"/>
+          </a:solidFill>
+          <a:ln>
+            <a:noFill/>
+          </a:ln>
+        </p:spPr>
+        <p:style>
+          <a:lnRef idx="1">
+            <a:schemeClr val="accent1"/>
+          </a:lnRef>
+          <a:fillRef idx="3">
+            <a:schemeClr val="accent1"/>
+          </a:fillRef>
+          <a:effectRef idx="2">
+            <a:schemeClr val="accent1"/>
+          </a:effectRef>
+          <a:fontRef idx="minor">
+            <a:schemeClr val="lt1"/>
+          </a:fontRef>
+        </p:style>
+        <p:txBody>
+          <a:bodyPr rtlCol="0" anchor="ctr"/>
+          <a:lstStyle/>
+          <a:p>
+            <a:pPr algn="ctr"/>
+            <a:endParaRPr lang="en-US"/>
+          </a:p>
+        </p:txBody>
+      </p:sp>
+      <p:sp>
+        <p:nvSpPr>
+          <p:cNvPr id="35" name="Timeline Label 1"/>
+          <p:cNvSpPr txBox="1"/>
+          <p:nvPr/>
+        </p:nvSpPr>
+        <p:spPr>
+          <a:xfrm>
+            <a:off x="3694176" y="4041648"/>
+            <a:ext cx="1207008" cy="184666"/>
+          </a:xfrm>
+          <a:prstGeom prst="rect">
+            <a:avLst/>
+          </a:prstGeom>
+          <a:noFill/>
+        </p:spPr>
+        <p:txBody>
+          <a:bodyPr wrap="square" lIns="0" tIns="0" rIns="0" bIns="0" anchor="t">
+            <a:spAutoFit/>
+          </a:bodyPr>
+          <a:lstStyle/>
+          <a:p>
+            <a:pPr algn="ctr"/>
+            <a:r>
+              <a:rPr lang="en-US" sz="1200" b="1">
+                <a:solidFill>
+                  <a:srgbClr val="121212"/>
+                </a:solidFill>
+                <a:latin typeface="Arial"/>
+              </a:rPr>
+              <a:t>SHADOW</a:t>
+            </a:r>
+          </a:p>
+        </p:txBody>
+      </p:sp>
+      <p:sp>
+        <p:nvSpPr>
+          <p:cNvPr id="36" name="Timeline Node 2"/>
+          <p:cNvSpPr>
+            <a:spLocks/>
+          </p:cNvSpPr>
+          <p:nvPr/>
+        </p:nvSpPr>
+        <p:spPr>
+          <a:xfrm>
+            <a:off x="6446520" y="3712463"/>
+            <a:ext cx="219456" cy="219456"/>
+          </a:xfrm>
+          <a:prstGeom prst="ellipse">
+            <a:avLst/>
+          </a:prstGeom>
+          <a:solidFill>
+            <a:srgbClr val="FF4B00"/>
+          </a:solidFill>
+          <a:ln>
+            <a:noFill/>
+          </a:ln>
+        </p:spPr>
+        <p:style>
+          <a:lnRef idx="1">
+            <a:schemeClr val="accent1"/>
+          </a:lnRef>
+          <a:fillRef idx="3">
+            <a:schemeClr val="accent1"/>
+          </a:fillRef>
+          <a:effectRef idx="2">
+            <a:schemeClr val="accent1"/>
+          </a:effectRef>
+          <a:fontRef idx="minor">
+            <a:schemeClr val="lt1"/>
+          </a:fontRef>
+        </p:style>
+        <p:txBody>
+          <a:bodyPr rtlCol="0" anchor="ctr"/>
+          <a:lstStyle/>
+          <a:p>
+            <a:pPr algn="ctr"/>
+            <a:endParaRPr lang="en-US"/>
+          </a:p>
+        </p:txBody>
+      </p:sp>
+      <p:sp>
+        <p:nvSpPr>
+          <p:cNvPr id="37" name="Timeline Label 2"/>
+          <p:cNvSpPr txBox="1"/>
+          <p:nvPr/>
+        </p:nvSpPr>
+        <p:spPr>
+          <a:xfrm>
+            <a:off x="5952744" y="4041648"/>
+            <a:ext cx="1207008" cy="184666"/>
+          </a:xfrm>
+          <a:prstGeom prst="rect">
+            <a:avLst/>
+          </a:prstGeom>
+          <a:noFill/>
+        </p:spPr>
+        <p:txBody>
+          <a:bodyPr wrap="square" lIns="0" tIns="0" rIns="0" bIns="0" anchor="t">
+            <a:spAutoFit/>
+          </a:bodyPr>
+          <a:lstStyle/>
+          <a:p>
+            <a:pPr algn="ctr"/>
+            <a:r>
+              <a:rPr lang="en-US" sz="1200" b="1">
+                <a:solidFill>
+                  <a:srgbClr val="121212"/>
+                </a:solidFill>
+                <a:latin typeface="Arial"/>
+              </a:rPr>
+              <a:t>COMPARE</a:t>
+            </a:r>
+          </a:p>
+        </p:txBody>
+      </p:sp>
+      <p:sp>
+        <p:nvSpPr>
+          <p:cNvPr id="38" name="Timeline Node 3"/>
+          <p:cNvSpPr>
+            <a:spLocks/>
+          </p:cNvSpPr>
+          <p:nvPr/>
+        </p:nvSpPr>
+        <p:spPr>
+          <a:xfrm>
+            <a:off x="8732520" y="3712463"/>
+            <a:ext cx="219456" cy="219456"/>
+          </a:xfrm>
+          <a:prstGeom prst="ellipse">
+            <a:avLst/>
+          </a:prstGeom>
+          <a:solidFill>
+            <a:srgbClr val="FF4B00"/>
+          </a:solidFill>
+          <a:ln>
+            <a:noFill/>
+          </a:ln>
+        </p:spPr>
+        <p:style>
+          <a:lnRef idx="1">
+            <a:schemeClr val="accent1"/>
+          </a:lnRef>
+          <a:fillRef idx="3">
+            <a:schemeClr val="accent1"/>
+          </a:fillRef>
+          <a:effectRef idx="2">
+            <a:schemeClr val="accent1"/>
+          </a:effectRef>
+          <a:fontRef idx="minor">
+            <a:schemeClr val="lt1"/>
+          </a:fontRef>
+        </p:style>
+        <p:txBody>
+          <a:bodyPr rtlCol="0" anchor="ctr"/>
+          <a:lstStyle/>
+          <a:p>
+            <a:pPr algn="ctr"/>
+            <a:endParaRPr lang="en-US"/>
+          </a:p>
+        </p:txBody>
+      </p:sp>
+      <p:sp>
+        <p:nvSpPr>
+          <p:cNvPr id="39" name="Timeline Label 3"/>
+          <p:cNvSpPr txBox="1"/>
+          <p:nvPr/>
+        </p:nvSpPr>
+        <p:spPr>
+          <a:xfrm>
+            <a:off x="8238744" y="4041648"/>
+            <a:ext cx="1207008" cy="184666"/>
+          </a:xfrm>
+          <a:prstGeom prst="rect">
+            <a:avLst/>
+          </a:prstGeom>
+          <a:noFill/>
+        </p:spPr>
+        <p:txBody>
+          <a:bodyPr wrap="square" lIns="0" tIns="0" rIns="0" bIns="0" anchor="t">
+            <a:spAutoFit/>
+          </a:bodyPr>
+          <a:lstStyle/>
+          <a:p>
+            <a:pPr algn="ctr"/>
+            <a:r>
+              <a:rPr lang="en-US" sz="1200" b="1">
+                <a:solidFill>
+                  <a:srgbClr val="121212"/>
+                </a:solidFill>
+                <a:latin typeface="Arial"/>
+              </a:rPr>
+              <a:t>SIGN-OFF</a:t>
+            </a:r>
+          </a:p>
+        </p:txBody>
+      </p:sp>
+      <p:sp>
+        <p:nvSpPr>
+          <p:cNvPr id="40" name="Timeline Node 4"/>
+          <p:cNvSpPr>
+            <a:spLocks/>
+          </p:cNvSpPr>
+          <p:nvPr/>
+        </p:nvSpPr>
+        <p:spPr>
+          <a:xfrm>
+            <a:off x="10863072" y="3712463"/>
+            <a:ext cx="219456" cy="219456"/>
+          </a:xfrm>
+          <a:prstGeom prst="ellipse">
+            <a:avLst/>
+          </a:prstGeom>
+          <a:solidFill>
+            <a:srgbClr val="FFC400"/>
+          </a:solidFill>
+          <a:ln>
+            <a:noFill/>
+          </a:ln>
+        </p:spPr>
+        <p:style>
+          <a:lnRef idx="1">
+            <a:schemeClr val="accent1"/>
+          </a:lnRef>
+          <a:fillRef idx="3">
+            <a:schemeClr val="accent1"/>
+          </a:fillRef>
+          <a:effectRef idx="2">
+            <a:schemeClr val="accent1"/>
+          </a:effectRef>
+          <a:fontRef idx="minor">
+            <a:schemeClr val="lt1"/>
+          </a:fontRef>
+        </p:style>
+        <p:txBody>
+          <a:bodyPr rtlCol="0" anchor="ctr"/>
+          <a:lstStyle/>
+          <a:p>
+            <a:pPr algn="ctr"/>
+            <a:endParaRPr lang="en-US"/>
+          </a:p>
+        </p:txBody>
+      </p:sp>
+      <p:sp>
+        <p:nvSpPr>
+          <p:cNvPr id="41" name="Timeline Label 4"/>
+          <p:cNvSpPr txBox="1"/>
+          <p:nvPr/>
+        </p:nvSpPr>
+        <p:spPr>
+          <a:xfrm>
+            <a:off x="10369296" y="4041648"/>
+            <a:ext cx="1207008" cy="184666"/>
+          </a:xfrm>
+          <a:prstGeom prst="rect">
+            <a:avLst/>
+          </a:prstGeom>
+          <a:noFill/>
+        </p:spPr>
+        <p:txBody>
+          <a:bodyPr wrap="square" lIns="0" tIns="0" rIns="0" bIns="0" anchor="t">
+            <a:spAutoFit/>
+          </a:bodyPr>
+          <a:lstStyle/>
+          <a:p>
+            <a:pPr algn="ctr"/>
+            <a:r>
+              <a:rPr lang="en-US" sz="1200" b="1">
+                <a:solidFill>
+                  <a:srgbClr val="121212"/>
+                </a:solidFill>
+                <a:latin typeface="Arial"/>
+              </a:rPr>
+              <a:t>CUTOVER</a:t>
+            </a:r>
+          </a:p>
+        </p:txBody>
+      </p:sp>
+      <p:sp>
+        <p:nvSpPr>
+          <p:cNvPr id="42" name="Trust Mechanism"/>
+          <p:cNvSpPr txBox="1"/>
+          <p:nvPr/>
+        </p:nvSpPr>
+        <p:spPr>
+          <a:xfrm>
+            <a:off x="3968496" y="4370832"/>
+            <a:ext cx="7269480" cy="237744"/>
+          </a:xfrm>
+          <a:prstGeom prst="rect">
+            <a:avLst/>
+          </a:prstGeom>
+          <a:noFill/>
+        </p:spPr>
+        <p:txBody>
+          <a:bodyPr wrap="square" lIns="0" tIns="0" rIns="0" bIns="0" anchor="ctr">
+            <a:spAutoFit/>
+          </a:bodyPr>
+          <a:lstStyle/>
+          <a:p>
+            <a:pPr algn="ctr"/>
+            <a:r>
+              <a:rPr sz="1400" b="0">
+                <a:solidFill>
+                  <a:srgbClr val="121212"/>
+                </a:solidFill>
+                <a:latin typeface="Arial"/>
+              </a:rPr>
+              <a:t>Discrepancies stayed visible; domain users owned the go / no-go threshold.</a:t>
+            </a:r>
+          </a:p>
+        </p:txBody>
+      </p:sp>
+      <p:cxnSp>
+        <p:nvCxnSpPr>
+          <p:cNvPr id="43" name="Proof Divider"/>
+          <p:cNvCxnSpPr/>
+          <p:nvPr/>
+        </p:nvCxnSpPr>
+        <p:spPr>
+          <a:xfrm>
+            <a:off x="3968496" y="4791456"/>
+            <a:ext cx="7388352" cy="0"/>
+          </a:xfrm>
+          <a:prstGeom prst="line">
+            <a:avLst/>
+          </a:prstGeom>
+          <a:ln w="10160">
+            <a:solidFill>
+              <a:srgbClr val="D9D5CE"/>
+            </a:solidFill>
+          </a:ln>
+        </p:spPr>
+        <p:style>
+          <a:lnRef idx="2">
+            <a:schemeClr val="accent1"/>
+          </a:lnRef>
+          <a:fillRef idx="0">
+            <a:schemeClr val="accent1"/>
+          </a:fillRef>
+          <a:effectRef idx="1">
+            <a:schemeClr val="accent1"/>
+          </a:effectRef>
+          <a:fontRef idx="minor">
+            <a:schemeClr val="tx1"/>
+          </a:fontRef>
+        </p:style>
+      </p:cxnSp>
+      <p:sp>
+        <p:nvSpPr>
+          <p:cNvPr id="44" name="Proof Number"/>
+          <p:cNvSpPr txBox="1"/>
+          <p:nvPr/>
+        </p:nvSpPr>
+        <p:spPr>
+          <a:xfrm>
+            <a:off x="3968496" y="4973443"/>
+            <a:ext cx="384048" cy="184666"/>
+          </a:xfrm>
+          <a:prstGeom prst="rect">
+            <a:avLst/>
+          </a:prstGeom>
+          <a:noFill/>
+        </p:spPr>
+        <p:txBody>
+          <a:bodyPr wrap="square" lIns="0" tIns="0" rIns="0" bIns="0" anchor="ctr">
+            <a:spAutoFit/>
+          </a:bodyPr>
+          <a:lstStyle/>
+          <a:p>
+            <a:pPr algn="l"/>
+            <a:r>
+              <a:rPr lang="en-US" sz="1200" b="1">
+                <a:solidFill>
+                  <a:srgbClr val="FF4B00"/>
+                </a:solidFill>
+                <a:latin typeface="Arial"/>
+              </a:rPr>
+              <a:t>03</a:t>
+            </a:r>
+          </a:p>
+        </p:txBody>
+      </p:sp>
+      <p:sp>
+        <p:nvSpPr>
+          <p:cNvPr id="45" name="Proof Label"/>
+          <p:cNvSpPr txBox="1"/>
+          <p:nvPr/>
+        </p:nvSpPr>
+        <p:spPr>
+          <a:xfrm>
+            <a:off x="4379976" y="4985486"/>
+            <a:ext cx="2743200" cy="215444"/>
+          </a:xfrm>
+          <a:prstGeom prst="rect">
+            <a:avLst/>
+          </a:prstGeom>
+          <a:noFill/>
+        </p:spPr>
+        <p:txBody>
+          <a:bodyPr wrap="square" lIns="0" tIns="0" rIns="0" bIns="0" anchor="ctr">
+            <a:spAutoFit/>
+          </a:bodyPr>
+          <a:lstStyle/>
+          <a:p>
+            <a:pPr algn="l"/>
+            <a:r>
+              <a:rPr lang="en-US" sz="1400" b="1">
+                <a:solidFill>
+                  <a:srgbClr val="FF4B00"/>
+                </a:solidFill>
+                <a:latin typeface="Arial"/>
+              </a:rPr>
+              <a:t>PROOF → ECONOMIC VALUE</a:t>
+            </a:r>
+          </a:p>
+        </p:txBody>
+      </p:sp>
+      <p:sp>
+        <p:nvSpPr>
+          <p:cNvPr id="46" name="Metric 1"/>
+          <p:cNvSpPr txBox="1"/>
+          <p:nvPr/>
+        </p:nvSpPr>
+        <p:spPr>
+          <a:xfrm>
+            <a:off x="3968496" y="5352249"/>
+            <a:ext cx="1627632" cy="323165"/>
+          </a:xfrm>
+          <a:prstGeom prst="rect">
+            <a:avLst/>
+          </a:prstGeom>
+          <a:noFill/>
+        </p:spPr>
+        <p:txBody>
+          <a:bodyPr wrap="square" lIns="0" tIns="0" rIns="0" bIns="0" anchor="ctr">
+            <a:spAutoFit/>
+          </a:bodyPr>
+          <a:lstStyle/>
+          <a:p>
+            <a:pPr algn="l"/>
+            <a:r>
+              <a:rPr lang="en-US" sz="2100" b="1">
+                <a:solidFill>
+                  <a:srgbClr val="FF4B00"/>
+                </a:solidFill>
+                <a:latin typeface="Arial"/>
+              </a:rPr>
+              <a:t>90→4.2ms</a:t>
+            </a:r>
+          </a:p>
+        </p:txBody>
+      </p:sp>
+      <p:sp>
+        <p:nvSpPr>
+          <p:cNvPr id="47" name="Metric Label 1"/>
+          <p:cNvSpPr txBox="1"/>
+          <p:nvPr/>
+        </p:nvSpPr>
+        <p:spPr>
+          <a:xfrm>
+            <a:off x="3968496" y="5715000"/>
+            <a:ext cx="1627632" cy="164592"/>
+          </a:xfrm>
+          <a:prstGeom prst="rect">
+            <a:avLst/>
+          </a:prstGeom>
+          <a:noFill/>
+        </p:spPr>
+        <p:txBody>
+          <a:bodyPr wrap="square" lIns="0" tIns="0" rIns="0" bIns="0" anchor="t">
+            <a:spAutoFit/>
+          </a:bodyPr>
+          <a:lstStyle/>
+          <a:p>
+            <a:pPr algn="l"/>
+            <a:r>
+              <a:rPr lang="en-US" sz="1050" b="1">
+                <a:solidFill>
+                  <a:srgbClr val="55504A"/>
+                </a:solidFill>
+                <a:latin typeface="Arial"/>
+              </a:rPr>
+              <a:t>LATENCY</a:t>
+            </a:r>
+          </a:p>
+        </p:txBody>
+      </p:sp>
+      <p:sp>
+        <p:nvSpPr>
+          <p:cNvPr id="48" name="Metric 2"/>
+          <p:cNvSpPr txBox="1"/>
+          <p:nvPr/>
+        </p:nvSpPr>
+        <p:spPr>
+          <a:xfrm>
+            <a:off x="5870448" y="5330952"/>
+            <a:ext cx="1673352" cy="365760"/>
+          </a:xfrm>
+          <a:prstGeom prst="rect">
+            <a:avLst/>
+          </a:prstGeom>
+          <a:noFill/>
+        </p:spPr>
+        <p:txBody>
+          <a:bodyPr wrap="square" lIns="0" tIns="0" rIns="0" bIns="0" anchor="ctr">
+            <a:spAutoFit/>
+          </a:bodyPr>
+          <a:lstStyle/>
+          <a:p>
+            <a:pPr algn="l"/>
+            <a:r>
+              <a:rPr sz="2100" b="1">
+                <a:solidFill>
+                  <a:srgbClr val="FF4B00"/>
+                </a:solidFill>
+                <a:latin typeface="Arial"/>
+              </a:rPr>
+              <a:t>15→1.8%</a:t>
+            </a:r>
+          </a:p>
+        </p:txBody>
+      </p:sp>
+      <p:sp>
+        <p:nvSpPr>
+          <p:cNvPr id="49" name="Metric Label 2"/>
+          <p:cNvSpPr txBox="1"/>
+          <p:nvPr/>
+        </p:nvSpPr>
+        <p:spPr>
+          <a:xfrm>
+            <a:off x="5870448" y="5715000"/>
+            <a:ext cx="1673352" cy="164592"/>
+          </a:xfrm>
+          <a:prstGeom prst="rect">
+            <a:avLst/>
+          </a:prstGeom>
+          <a:noFill/>
+        </p:spPr>
+        <p:txBody>
+          <a:bodyPr wrap="square" lIns="0" tIns="0" rIns="0" bIns="0" anchor="t">
+            <a:spAutoFit/>
+          </a:bodyPr>
+          <a:lstStyle/>
+          <a:p>
+            <a:pPr algn="l"/>
+            <a:r>
+              <a:rPr sz="1050" b="1">
+                <a:solidFill>
+                  <a:srgbClr val="55504A"/>
+                </a:solidFill>
+                <a:latin typeface="Arial"/>
+              </a:rPr>
+              <a:t>FALSE POSITIVES</a:t>
+            </a:r>
+          </a:p>
+        </p:txBody>
+      </p:sp>
+      <p:sp>
+        <p:nvSpPr>
+          <p:cNvPr id="50" name="Metric 3"/>
+          <p:cNvSpPr txBox="1"/>
+          <p:nvPr/>
+        </p:nvSpPr>
+        <p:spPr>
+          <a:xfrm>
+            <a:off x="7808975" y="5352249"/>
+            <a:ext cx="1709928" cy="323165"/>
+          </a:xfrm>
+          <a:prstGeom prst="rect">
+            <a:avLst/>
+          </a:prstGeom>
+          <a:noFill/>
+        </p:spPr>
+        <p:txBody>
+          <a:bodyPr wrap="square" lIns="0" tIns="0" rIns="0" bIns="0" anchor="ctr">
+            <a:spAutoFit/>
+          </a:bodyPr>
+          <a:lstStyle/>
+          <a:p>
+            <a:pPr algn="l"/>
+            <a:r>
+              <a:rPr lang="en-US" sz="2100" b="1">
+                <a:solidFill>
+                  <a:srgbClr val="FF4B00"/>
+                </a:solidFill>
+                <a:latin typeface="Arial"/>
+              </a:rPr>
+              <a:t>~$400K/mo</a:t>
+            </a:r>
+          </a:p>
+        </p:txBody>
+      </p:sp>
+      <p:sp>
+        <p:nvSpPr>
+          <p:cNvPr id="51" name="Metric Label 3"/>
+          <p:cNvSpPr txBox="1"/>
+          <p:nvPr/>
+        </p:nvSpPr>
+        <p:spPr>
+          <a:xfrm>
+            <a:off x="7808975" y="5715000"/>
+            <a:ext cx="1709928" cy="164592"/>
+          </a:xfrm>
+          <a:prstGeom prst="rect">
+            <a:avLst/>
+          </a:prstGeom>
+          <a:noFill/>
+        </p:spPr>
+        <p:txBody>
+          <a:bodyPr wrap="square" lIns="0" tIns="0" rIns="0" bIns="0" anchor="t">
+            <a:spAutoFit/>
+          </a:bodyPr>
+          <a:lstStyle/>
+          <a:p>
+            <a:pPr algn="l"/>
+            <a:r>
+              <a:rPr lang="en-US" sz="1050" b="1">
+                <a:solidFill>
+                  <a:srgbClr val="55504A"/>
+                </a:solidFill>
+                <a:latin typeface="Arial"/>
+              </a:rPr>
+              <a:t>OPERATING SAVINGS</a:t>
+            </a:r>
+          </a:p>
+        </p:txBody>
+      </p:sp>
+      <p:sp>
+        <p:nvSpPr>
+          <p:cNvPr id="52" name="Metric 4"/>
+          <p:cNvSpPr txBox="1"/>
+          <p:nvPr/>
+        </p:nvSpPr>
+        <p:spPr>
+          <a:xfrm>
+            <a:off x="9756648" y="5352249"/>
+            <a:ext cx="1554480" cy="323165"/>
+          </a:xfrm>
+          <a:prstGeom prst="rect">
+            <a:avLst/>
+          </a:prstGeom>
+          <a:noFill/>
+        </p:spPr>
+        <p:txBody>
+          <a:bodyPr wrap="square" lIns="0" tIns="0" rIns="0" bIns="0" anchor="ctr">
+            <a:spAutoFit/>
+          </a:bodyPr>
+          <a:lstStyle/>
+          <a:p>
+            <a:pPr algn="l"/>
+            <a:r>
+              <a:rPr lang="en-US" sz="2100" b="1">
+                <a:solidFill>
+                  <a:srgbClr val="FF4B00"/>
+                </a:solidFill>
+                <a:latin typeface="Arial"/>
+              </a:rPr>
+              <a:t>~$85M</a:t>
+            </a:r>
+          </a:p>
+        </p:txBody>
+      </p:sp>
+      <p:sp>
+        <p:nvSpPr>
+          <p:cNvPr id="53" name="Metric Label 4"/>
+          <p:cNvSpPr txBox="1"/>
+          <p:nvPr/>
+        </p:nvSpPr>
+        <p:spPr>
+          <a:xfrm>
+            <a:off x="9756648" y="5715000"/>
+            <a:ext cx="1554480" cy="164592"/>
+          </a:xfrm>
+          <a:prstGeom prst="rect">
+            <a:avLst/>
+          </a:prstGeom>
+          <a:noFill/>
+        </p:spPr>
+        <p:txBody>
+          <a:bodyPr wrap="square" lIns="0" tIns="0" rIns="0" bIns="0" anchor="t">
+            <a:spAutoFit/>
+          </a:bodyPr>
+          <a:lstStyle/>
+          <a:p>
+            <a:pPr algn="l"/>
+            <a:r>
+              <a:rPr lang="en-US" sz="1050" b="1">
+                <a:solidFill>
+                  <a:srgbClr val="55504A"/>
+                </a:solidFill>
+                <a:latin typeface="Arial"/>
+              </a:rPr>
+              <a:t>CAPITAL CAPACITY</a:t>
+            </a:r>
+          </a:p>
+        </p:txBody>
+      </p:sp>
+      <p:sp>
+        <p:nvSpPr>
+          <p:cNvPr id="54" name="Scale Note"/>
+          <p:cNvSpPr txBox="1"/>
+          <p:nvPr/>
+        </p:nvSpPr>
+        <p:spPr>
+          <a:xfrm>
+            <a:off x="3968496" y="5925312"/>
+            <a:ext cx="7388352" cy="137160"/>
+          </a:xfrm>
+          <a:prstGeom prst="rect">
+            <a:avLst/>
+          </a:prstGeom>
+          <a:noFill/>
+        </p:spPr>
+        <p:txBody>
+          <a:bodyPr wrap="square" lIns="0" tIns="0" rIns="0" bIns="0" anchor="t">
+            <a:spAutoFit/>
+          </a:bodyPr>
+          <a:lstStyle/>
+          <a:p>
+            <a:pPr algn="l"/>
+            <a:r>
+              <a:rPr sz="850" b="0">
+                <a:solidFill>
+                  <a:srgbClr val="8A857E"/>
+                </a:solidFill>
+                <a:latin typeface="Arial"/>
+              </a:rPr>
+              <a:t>Scale: ~5.4M events/sec · Capital capacity came from faster, more precise risk visibility.</a:t>
+            </a:r>
+          </a:p>
+        </p:txBody>
+      </p:sp>
+      <p:sp>
+        <p:nvSpPr>
+          <p:cNvPr id="55" name="Source Footnote"/>
+          <p:cNvSpPr txBox="1"/>
+          <p:nvPr/>
+        </p:nvSpPr>
+        <p:spPr>
+          <a:xfrm>
+            <a:off x="566928" y="6172200"/>
+            <a:ext cx="10469880" cy="123444"/>
+          </a:xfrm>
+          <a:prstGeom prst="rect">
+            <a:avLst/>
+          </a:prstGeom>
+          <a:noFill/>
+        </p:spPr>
+        <p:txBody>
+          <a:bodyPr wrap="square" lIns="0" tIns="0" rIns="0" bIns="0" anchor="ctr">
+            <a:spAutoFit/>
+          </a:bodyPr>
+          <a:lstStyle/>
+          <a:p>
+            <a:pPr algn="l"/>
+            <a:r>
+              <a:rPr sz="800" b="0">
+                <a:solidFill>
+                  <a:srgbClr val="8A857E"/>
+                </a:solidFill>
+                <a:latin typeface="Arial"/>
+              </a:rPr>
+              <a:t>Source: Candidate-provided D. E. Shaw project metrics and defensible assumptions; validate exact figures before interview.</a:t>
+            </a:r>
+          </a:p>
+        </p:txBody>
+      </p:sp>
+      <p:sp>
+        <p:nvSpPr>
+          <p:cNvPr id="56" name="Narrative Footnote"/>
+          <p:cNvSpPr txBox="1"/>
+          <p:nvPr/>
+        </p:nvSpPr>
+        <p:spPr>
+          <a:xfrm>
+            <a:off x="566928" y="6400800"/>
+            <a:ext cx="10469880" cy="153619"/>
+          </a:xfrm>
+          <a:prstGeom prst="rect">
+            <a:avLst/>
+          </a:prstGeom>
+          <a:noFill/>
+        </p:spPr>
+        <p:txBody>
+          <a:bodyPr wrap="square" lIns="0" tIns="0" rIns="0" bIns="0" anchor="ctr">
+            <a:spAutoFit/>
+          </a:bodyPr>
+          <a:lstStyle/>
+          <a:p>
+            <a:pPr algn="l"/>
+            <a:r>
+              <a:rPr sz="1000" b="0">
+                <a:solidFill>
+                  <a:srgbClr val="55504A"/>
+                </a:solidFill>
+                <a:latin typeface="Arial"/>
+              </a:rPr>
+              <a:t>D. E. Shaw: internal Financial Services product — workflow → technology → production trust → economic value.</a:t>
+            </a:r>
+          </a:p>
+        </p:txBody>
+      </p:sp>
+    </p:spTree>
+  </p:cSld>
+  <p:clrMapOvr>
+    <a:masterClrMapping/>
+  </p:clrMapOvr>
+</p:sld>
+</file>
+
+<file path=ppt/slides/slide7.xml><?xml version="1.0" encoding="utf-8"?>
 <p:sld xmlns:a="http://schemas.openxmlformats.org/drawingml/2006/main" xmlns:r="http://schemas.openxmlformats.org/officeDocument/2006/relationships" xmlns:p="http://schemas.openxmlformats.org/presentationml/2006/main">
   <p:cSld>
     <p:bg>
@@ -15864,7 +17574,7 @@
                 <a:ea typeface="+mn-ea"/>
                 <a:cs typeface="+mn-cs"/>
               </a:rPr>
-              <a:t>6</a:t>
+              <a:t>7</a:t>
             </a:r>
           </a:p>
         </p:txBody>
@@ -15925,7 +17635,7 @@
                 <a:ea typeface="+mn-ea"/>
                 <a:cs typeface="+mn-cs"/>
               </a:rPr>
-              <a:t>5. AgentCore: prototype to secure production</a:t>
+              <a:t>6. AgentCore: prototype to secure production</a:t>
             </a:r>
           </a:p>
         </p:txBody>
